--- a/a7/packages/A7 Unit 3 - Exponents and Scientific Notation/Lessons/3.08/A7 3.08 Writing Large Numbers in Scientific Notation - Slides.pptx
+++ b/a7/packages/A7 Unit 3 - Exponents and Scientific Notation/Lessons/3.08/A7 3.08 Writing Large Numbers in Scientific Notation - Slides.pptx
@@ -3129,7 +3129,7 @@
         </p:nvSpPr>
         <p:spPr>
           <a:xfrm>
-            <a:off x="777240" y="1691640"/>
+            <a:off x="777240" y="2148840"/>
             <a:ext cx="10607040" cy="347472"/>
           </a:xfrm>
           <a:prstGeom prst="rect">
@@ -3164,7 +3164,7 @@
         </p:nvSpPr>
         <p:spPr>
           <a:xfrm>
-            <a:off x="777240" y="2048256"/>
+            <a:off x="777240" y="2505456"/>
             <a:ext cx="10607040" cy="1005840"/>
           </a:xfrm>
           <a:prstGeom prst="rect">
@@ -3199,7 +3199,7 @@
         </p:nvCxnSpPr>
         <p:spPr>
           <a:xfrm>
-            <a:off x="3291840" y="3255264"/>
+            <a:off x="3291840" y="3712464"/>
             <a:ext cx="5577840" cy="0"/>
           </a:xfrm>
           <a:prstGeom prst="line">
@@ -3234,7 +3234,7 @@
         </p:nvCxnSpPr>
         <p:spPr>
           <a:xfrm>
-            <a:off x="3291840" y="3337560"/>
+            <a:off x="3291840" y="3794760"/>
             <a:ext cx="5577840" cy="0"/>
           </a:xfrm>
           <a:prstGeom prst="line">
@@ -3269,7 +3269,7 @@
         </p:nvSpPr>
         <p:spPr>
           <a:xfrm>
-            <a:off x="777240" y="3502152"/>
+            <a:off x="777240" y="3959352"/>
             <a:ext cx="10607040" cy="310896"/>
           </a:xfrm>
           <a:prstGeom prst="rect">
@@ -3304,7 +3304,7 @@
         </p:nvSpPr>
         <p:spPr>
           <a:xfrm>
-            <a:off x="777240" y="3840480"/>
+            <a:off x="777240" y="4297680"/>
             <a:ext cx="10607040" cy="731520"/>
           </a:xfrm>
           <a:prstGeom prst="rect">
@@ -3327,129 +3327,13 @@
                 <a:latin typeface="Century Schoolbook"/>
               </a:rPr>
               <a:t>I can write a large number in scientific notation, read one back into standard form, and find how many times larger one number is than another.</a:t>
-            </a:r>
-          </a:p>
-        </p:txBody>
-      </p:sp>
-      <p:sp>
-        <p:nvSpPr>
-          <p:cNvPr id="8" name="Rectangle 7"/>
-          <p:cNvSpPr/>
-          <p:nvPr/>
-        </p:nvSpPr>
-        <p:spPr>
-          <a:xfrm>
-            <a:off x="2377440" y="4736592"/>
-            <a:ext cx="7406640" cy="1051560"/>
-          </a:xfrm>
-          <a:prstGeom prst="rect">
-            <a:avLst/>
-          </a:prstGeom>
-          <a:solidFill>
-            <a:srgbClr val="F2F2F0"/>
-          </a:solidFill>
-          <a:ln w="9525">
-            <a:solidFill>
-              <a:srgbClr val="BFBFBF"/>
-            </a:solidFill>
-          </a:ln>
-          <a:effectLst/>
-        </p:spPr>
-        <p:style>
-          <a:lnRef idx="1">
-            <a:schemeClr val="accent1"/>
-          </a:lnRef>
-          <a:fillRef idx="3">
-            <a:schemeClr val="accent1"/>
-          </a:fillRef>
-          <a:effectRef idx="2">
-            <a:schemeClr val="accent1"/>
-          </a:effectRef>
-          <a:fontRef idx="minor">
-            <a:schemeClr val="lt1"/>
-          </a:fontRef>
-        </p:style>
-        <p:txBody>
-          <a:bodyPr rtlCol="0" anchor="ctr"/>
-          <a:lstStyle/>
-          <a:p>
-            <a:pPr algn="ctr"/>
-          </a:p>
-        </p:txBody>
-      </p:sp>
-      <p:sp>
-        <p:nvSpPr>
-          <p:cNvPr id="9" name="TextBox 8"/>
-          <p:cNvSpPr txBox="1"/>
-          <p:nvPr/>
-        </p:nvSpPr>
-        <p:spPr>
-          <a:xfrm>
-            <a:off x="2606040" y="4892040"/>
-            <a:ext cx="6949440" cy="365760"/>
-          </a:xfrm>
-          <a:prstGeom prst="rect">
-            <a:avLst/>
-          </a:prstGeom>
-          <a:noFill/>
-        </p:spPr>
-        <p:txBody>
-          <a:bodyPr wrap="square" lIns="45720" rIns="45720" tIns="18288" bIns="18288" anchor="t">
-            <a:spAutoFit/>
-          </a:bodyPr>
-          <a:lstStyle/>
-          <a:p>
-            <a:pPr algn="ctr"/>
-            <a:r>
-              <a:rPr sz="1700" b="0" i="1">
-                <a:solidFill>
-                  <a:srgbClr val="6B6B6B"/>
-                </a:solidFill>
-                <a:latin typeface="Century Schoolbook"/>
-              </a:rPr>
-              <a:t>Yesterday the exponent laws finished — numbers and letters.</a:t>
-            </a:r>
-          </a:p>
-        </p:txBody>
-      </p:sp>
-      <p:sp>
-        <p:nvSpPr>
-          <p:cNvPr id="10" name="TextBox 9"/>
-          <p:cNvSpPr txBox="1"/>
-          <p:nvPr/>
-        </p:nvSpPr>
-        <p:spPr>
-          <a:xfrm>
-            <a:off x="2606040" y="5276088"/>
-            <a:ext cx="6949440" cy="365760"/>
-          </a:xfrm>
-          <a:prstGeom prst="rect">
-            <a:avLst/>
-          </a:prstGeom>
-          <a:noFill/>
-        </p:spPr>
-        <p:txBody>
-          <a:bodyPr wrap="square" lIns="45720" rIns="45720" tIns="18288" bIns="18288" anchor="t">
-            <a:spAutoFit/>
-          </a:bodyPr>
-          <a:lstStyle/>
-          <a:p>
-            <a:pPr algn="ctr"/>
-            <a:r>
-              <a:rPr sz="1700" b="1" i="0">
-                <a:solidFill>
-                  <a:srgbClr val="1A1A1A"/>
-                </a:solidFill>
-                <a:latin typeface="Century Schoolbook"/>
-              </a:rPr>
-              <a:t>Today they go to work on twenty-digit numbers.</a:t>
             </a:r>
           </a:p>
         </p:txBody>
       </p:sp>
       <p:cxnSp>
         <p:nvCxnSpPr>
-          <p:cNvPr id="11" name="Connector 10"/>
+          <p:cNvPr id="8" name="Connector 7"/>
           <p:cNvCxnSpPr/>
           <p:nvPr/>
         </p:nvCxnSpPr>
@@ -3484,7 +3368,7 @@
       </p:cxnSp>
       <p:sp>
         <p:nvSpPr>
-          <p:cNvPr id="12" name="TextBox 11"/>
+          <p:cNvPr id="9" name="TextBox 8"/>
           <p:cNvSpPr txBox="1"/>
           <p:nvPr/>
         </p:nvSpPr>
@@ -3519,7 +3403,7 @@
       </p:sp>
       <p:sp>
         <p:nvSpPr>
-          <p:cNvPr id="13" name="TextBox 12"/>
+          <p:cNvPr id="10" name="TextBox 9"/>
           <p:cNvSpPr txBox="1"/>
           <p:nvPr/>
         </p:nvSpPr>
@@ -3675,44 +3559,9 @@
           </a:fontRef>
         </p:style>
       </p:cxnSp>
-      <p:sp>
-        <p:nvSpPr>
-          <p:cNvPr id="5" name="TextBox 4"/>
-          <p:cNvSpPr txBox="1"/>
-          <p:nvPr/>
-        </p:nvSpPr>
-        <p:spPr>
-          <a:xfrm>
-            <a:off x="777240" y="1261872"/>
-            <a:ext cx="10607040" cy="310896"/>
-          </a:xfrm>
-          <a:prstGeom prst="rect">
-            <a:avLst/>
-          </a:prstGeom>
-          <a:noFill/>
-        </p:spPr>
-        <p:txBody>
-          <a:bodyPr wrap="square" lIns="45720" rIns="45720" tIns="18288" bIns="18288" anchor="t">
-            <a:spAutoFit/>
-          </a:bodyPr>
-          <a:lstStyle/>
-          <a:p>
-            <a:pPr algn="l"/>
-            <a:r>
-              <a:rPr sz="1700" b="0" i="1">
-                <a:solidFill>
-                  <a:srgbClr val="6B6B6B"/>
-                </a:solidFill>
-                <a:latin typeface="Century Schoolbook"/>
-              </a:rPr>
-              <a:t>Answer.</a:t>
-            </a:r>
-          </a:p>
-        </p:txBody>
-      </p:sp>
       <p:cxnSp>
         <p:nvCxnSpPr>
-          <p:cNvPr id="6" name="Connector 5"/>
+          <p:cNvPr id="5" name="Connector 4"/>
           <p:cNvCxnSpPr/>
           <p:nvPr/>
         </p:nvCxnSpPr>
@@ -3747,7 +3596,7 @@
       </p:cxnSp>
       <p:sp>
         <p:nvSpPr>
-          <p:cNvPr id="7" name="TextBox 6"/>
+          <p:cNvPr id="6" name="TextBox 5"/>
           <p:cNvSpPr txBox="1"/>
           <p:nvPr/>
         </p:nvSpPr>
@@ -3782,7 +3631,7 @@
       </p:sp>
       <p:sp>
         <p:nvSpPr>
-          <p:cNvPr id="8" name="TextBox 7"/>
+          <p:cNvPr id="7" name="TextBox 6"/>
           <p:cNvSpPr txBox="1"/>
           <p:nvPr/>
         </p:nvSpPr>
@@ -3817,7 +3666,7 @@
       </p:sp>
       <p:sp>
         <p:nvSpPr>
-          <p:cNvPr id="9" name="TextBox 8"/>
+          <p:cNvPr id="8" name="TextBox 7"/>
           <p:cNvSpPr txBox="1"/>
           <p:nvPr/>
         </p:nvSpPr>
@@ -3852,42 +3701,7 @@
       </p:sp>
       <p:sp>
         <p:nvSpPr>
-          <p:cNvPr id="10" name="TextBox 9"/>
-          <p:cNvSpPr txBox="1"/>
-          <p:nvPr/>
-        </p:nvSpPr>
-        <p:spPr>
-          <a:xfrm>
-            <a:off x="777240" y="3163028"/>
-            <a:ext cx="10607040" cy="429370"/>
-          </a:xfrm>
-          <a:prstGeom prst="rect">
-            <a:avLst/>
-          </a:prstGeom>
-          <a:noFill/>
-        </p:spPr>
-        <p:txBody>
-          <a:bodyPr wrap="square" lIns="45720" rIns="45720" tIns="18288" bIns="18288" anchor="t">
-            <a:spAutoFit/>
-          </a:bodyPr>
-          <a:lstStyle/>
-          <a:p>
-            <a:pPr algn="ctr"/>
-            <a:r>
-              <a:rPr sz="2400" b="0" i="0">
-                <a:solidFill>
-                  <a:srgbClr val="6B6B6B"/>
-                </a:solidFill>
-                <a:latin typeface="Century Schoolbook"/>
-              </a:rPr>
-              <a:t>the 1 is in the hundred-millions place</a:t>
-            </a:r>
-          </a:p>
-        </p:txBody>
-      </p:sp>
-      <p:sp>
-        <p:nvSpPr>
-          <p:cNvPr id="11" name="TextBox 10"/>
+          <p:cNvPr id="9" name="TextBox 8"/>
           <p:cNvSpPr txBox="1"/>
           <p:nvPr/>
         </p:nvSpPr>
@@ -4052,44 +3866,9 @@
           </a:fontRef>
         </p:style>
       </p:cxnSp>
-      <p:sp>
-        <p:nvSpPr>
-          <p:cNvPr id="5" name="TextBox 4"/>
-          <p:cNvSpPr txBox="1"/>
-          <p:nvPr/>
-        </p:nvSpPr>
-        <p:spPr>
-          <a:xfrm>
-            <a:off x="777240" y="1261872"/>
-            <a:ext cx="10607040" cy="310896"/>
-          </a:xfrm>
-          <a:prstGeom prst="rect">
-            <a:avLst/>
-          </a:prstGeom>
-          <a:noFill/>
-        </p:spPr>
-        <p:txBody>
-          <a:bodyPr wrap="square" lIns="45720" rIns="45720" tIns="18288" bIns="18288" anchor="t">
-            <a:spAutoFit/>
-          </a:bodyPr>
-          <a:lstStyle/>
-          <a:p>
-            <a:pPr algn="l"/>
-            <a:r>
-              <a:rPr sz="1700" b="0" i="1">
-                <a:solidFill>
-                  <a:srgbClr val="6B6B6B"/>
-                </a:solidFill>
-                <a:latin typeface="Century Schoolbook"/>
-              </a:rPr>
-              <a:t>How many times larger?</a:t>
-            </a:r>
-          </a:p>
-        </p:txBody>
-      </p:sp>
       <p:cxnSp>
         <p:nvCxnSpPr>
-          <p:cNvPr id="6" name="Connector 5"/>
+          <p:cNvPr id="5" name="Connector 4"/>
           <p:cNvCxnSpPr/>
           <p:nvPr/>
         </p:nvCxnSpPr>
@@ -4124,7 +3903,7 @@
       </p:cxnSp>
       <p:sp>
         <p:nvSpPr>
-          <p:cNvPr id="7" name="TextBox 6"/>
+          <p:cNvPr id="6" name="TextBox 5"/>
           <p:cNvSpPr txBox="1"/>
           <p:nvPr/>
         </p:nvSpPr>
@@ -4159,7 +3938,7 @@
       </p:sp>
       <p:sp>
         <p:nvSpPr>
-          <p:cNvPr id="8" name="TextBox 7"/>
+          <p:cNvPr id="7" name="TextBox 6"/>
           <p:cNvSpPr txBox="1"/>
           <p:nvPr/>
         </p:nvSpPr>
@@ -4194,7 +3973,7 @@
       </p:sp>
       <p:sp>
         <p:nvSpPr>
-          <p:cNvPr id="9" name="TextBox 8"/>
+          <p:cNvPr id="8" name="TextBox 7"/>
           <p:cNvSpPr txBox="1"/>
           <p:nvPr/>
         </p:nvSpPr>
@@ -4229,7 +4008,7 @@
       </p:sp>
       <p:pic>
         <p:nvPicPr>
-          <p:cNvPr id="10" name="Picture 9" descr="4dc6640317f68a2b.png"/>
+          <p:cNvPr id="9" name="Picture 8" descr="4dc6640317f68a2b.png"/>
           <p:cNvPicPr>
             <a:picLocks noChangeAspect="1"/>
           </p:cNvPicPr>
@@ -4253,7 +4032,7 @@
       </p:pic>
       <p:sp>
         <p:nvSpPr>
-          <p:cNvPr id="11" name="TextBox 10"/>
+          <p:cNvPr id="10" name="TextBox 9"/>
           <p:cNvSpPr txBox="1"/>
           <p:nvPr/>
         </p:nvSpPr>
@@ -4288,7 +4067,7 @@
       </p:sp>
       <p:pic>
         <p:nvPicPr>
-          <p:cNvPr id="12" name="Picture 11" descr="a7f651d263392d9b.png"/>
+          <p:cNvPr id="11" name="Picture 10" descr="a7f651d263392d9b.png"/>
           <p:cNvPicPr>
             <a:picLocks noChangeAspect="1"/>
           </p:cNvPicPr>
@@ -4312,7 +4091,7 @@
       </p:pic>
       <p:sp>
         <p:nvSpPr>
-          <p:cNvPr id="13" name="TextBox 12"/>
+          <p:cNvPr id="12" name="TextBox 11"/>
           <p:cNvSpPr txBox="1"/>
           <p:nvPr/>
         </p:nvSpPr>
@@ -4468,44 +4247,9 @@
           </a:fontRef>
         </p:style>
       </p:cxnSp>
-      <p:sp>
-        <p:nvSpPr>
-          <p:cNvPr id="5" name="TextBox 4"/>
-          <p:cNvSpPr txBox="1"/>
-          <p:nvPr/>
-        </p:nvSpPr>
-        <p:spPr>
-          <a:xfrm>
-            <a:off x="777240" y="1261872"/>
-            <a:ext cx="10607040" cy="310896"/>
-          </a:xfrm>
-          <a:prstGeom prst="rect">
-            <a:avLst/>
-          </a:prstGeom>
-          <a:noFill/>
-        </p:spPr>
-        <p:txBody>
-          <a:bodyPr wrap="square" lIns="45720" rIns="45720" tIns="18288" bIns="18288" anchor="t">
-            <a:spAutoFit/>
-          </a:bodyPr>
-          <a:lstStyle/>
-          <a:p>
-            <a:pPr algn="l"/>
-            <a:r>
-              <a:rPr sz="1700" b="0" i="1">
-                <a:solidFill>
-                  <a:srgbClr val="6B6B6B"/>
-                </a:solidFill>
-                <a:latin typeface="Century Schoolbook"/>
-              </a:rPr>
-              <a:t>Worked.</a:t>
-            </a:r>
-          </a:p>
-        </p:txBody>
-      </p:sp>
       <p:cxnSp>
         <p:nvCxnSpPr>
-          <p:cNvPr id="6" name="Connector 5"/>
+          <p:cNvPr id="5" name="Connector 4"/>
           <p:cNvCxnSpPr/>
           <p:nvPr/>
         </p:nvCxnSpPr>
@@ -4540,7 +4284,7 @@
       </p:cxnSp>
       <p:sp>
         <p:nvSpPr>
-          <p:cNvPr id="7" name="TextBox 6"/>
+          <p:cNvPr id="6" name="TextBox 5"/>
           <p:cNvSpPr txBox="1"/>
           <p:nvPr/>
         </p:nvSpPr>
@@ -4575,7 +4319,7 @@
       </p:sp>
       <p:sp>
         <p:nvSpPr>
-          <p:cNvPr id="8" name="TextBox 7"/>
+          <p:cNvPr id="7" name="TextBox 6"/>
           <p:cNvSpPr txBox="1"/>
           <p:nvPr/>
         </p:nvSpPr>
@@ -4610,7 +4354,7 @@
       </p:sp>
       <p:pic>
         <p:nvPicPr>
-          <p:cNvPr id="9" name="Picture 8" descr="ea7fbd33ef479ef5.png"/>
+          <p:cNvPr id="8" name="Picture 7" descr="ea7fbd33ef479ef5.png"/>
           <p:cNvPicPr>
             <a:picLocks noChangeAspect="1"/>
           </p:cNvPicPr>
@@ -4632,44 +4376,9 @@
           </a:prstGeom>
         </p:spPr>
       </p:pic>
-      <p:sp>
-        <p:nvSpPr>
-          <p:cNvPr id="10" name="TextBox 9"/>
-          <p:cNvSpPr txBox="1"/>
-          <p:nvPr/>
-        </p:nvSpPr>
-        <p:spPr>
-          <a:xfrm>
-            <a:off x="3724656" y="2037588"/>
-            <a:ext cx="6400800" cy="502920"/>
-          </a:xfrm>
-          <a:prstGeom prst="rect">
-            <a:avLst/>
-          </a:prstGeom>
-          <a:noFill/>
-        </p:spPr>
-        <p:txBody>
-          <a:bodyPr wrap="square" lIns="45720" rIns="45720" tIns="18288" bIns="18288" anchor="ctr">
-            <a:spAutoFit/>
-          </a:bodyPr>
-          <a:lstStyle/>
-          <a:p>
-            <a:pPr algn="l"/>
-            <a:r>
-              <a:rPr sz="2100" b="0" i="1">
-                <a:solidFill>
-                  <a:srgbClr val="6B6B6B"/>
-                </a:solidFill>
-                <a:latin typeface="Century Schoolbook"/>
-              </a:rPr>
-              <a:t>coefficients</a:t>
-            </a:r>
-          </a:p>
-        </p:txBody>
-      </p:sp>
       <p:pic>
         <p:nvPicPr>
-          <p:cNvPr id="11" name="Picture 10" descr="ecf3b7ddda2003c9.png"/>
+          <p:cNvPr id="9" name="Picture 8" descr="ecf3b7ddda2003c9.png"/>
           <p:cNvPicPr>
             <a:picLocks noChangeAspect="1"/>
           </p:cNvPicPr>
@@ -4691,44 +4400,9 @@
           </a:prstGeom>
         </p:spPr>
       </p:pic>
-      <p:sp>
-        <p:nvSpPr>
-          <p:cNvPr id="12" name="TextBox 11"/>
-          <p:cNvSpPr txBox="1"/>
-          <p:nvPr/>
-        </p:nvSpPr>
-        <p:spPr>
-          <a:xfrm>
-            <a:off x="4672583" y="3061716"/>
-            <a:ext cx="6400800" cy="502920"/>
-          </a:xfrm>
-          <a:prstGeom prst="rect">
-            <a:avLst/>
-          </a:prstGeom>
-          <a:noFill/>
-        </p:spPr>
-        <p:txBody>
-          <a:bodyPr wrap="square" lIns="45720" rIns="45720" tIns="18288" bIns="18288" anchor="ctr">
-            <a:spAutoFit/>
-          </a:bodyPr>
-          <a:lstStyle/>
-          <a:p>
-            <a:pPr algn="l"/>
-            <a:r>
-              <a:rPr sz="2100" b="0" i="1">
-                <a:solidFill>
-                  <a:srgbClr val="6B6B6B"/>
-                </a:solidFill>
-                <a:latin typeface="Century Schoolbook"/>
-              </a:rPr>
-              <a:t>powers of 10: subtract the exponents</a:t>
-            </a:r>
-          </a:p>
-        </p:txBody>
-      </p:sp>
       <p:pic>
         <p:nvPicPr>
-          <p:cNvPr id="13" name="Picture 12" descr="8a1e664f4b411659.png"/>
+          <p:cNvPr id="10" name="Picture 9" descr="8a1e664f4b411659.png"/>
           <p:cNvPicPr>
             <a:picLocks noChangeAspect="1"/>
           </p:cNvPicPr>
@@ -4752,42 +4426,7 @@
       </p:pic>
       <p:sp>
         <p:nvSpPr>
-          <p:cNvPr id="14" name="TextBox 13"/>
-          <p:cNvSpPr txBox="1"/>
-          <p:nvPr/>
-        </p:nvSpPr>
-        <p:spPr>
-          <a:xfrm>
-            <a:off x="4312920" y="3884675"/>
-            <a:ext cx="6400800" cy="502920"/>
-          </a:xfrm>
-          <a:prstGeom prst="rect">
-            <a:avLst/>
-          </a:prstGeom>
-          <a:noFill/>
-        </p:spPr>
-        <p:txBody>
-          <a:bodyPr wrap="square" lIns="45720" rIns="45720" tIns="18288" bIns="18288" anchor="ctr">
-            <a:spAutoFit/>
-          </a:bodyPr>
-          <a:lstStyle/>
-          <a:p>
-            <a:pPr algn="l"/>
-            <a:r>
-              <a:rPr sz="2100" b="0" i="1">
-                <a:solidFill>
-                  <a:srgbClr val="6B6B6B"/>
-                </a:solidFill>
-                <a:latin typeface="Century Schoolbook"/>
-              </a:rPr>
-              <a:t>multiply the two results</a:t>
-            </a:r>
-          </a:p>
-        </p:txBody>
-      </p:sp>
-      <p:sp>
-        <p:nvSpPr>
-          <p:cNvPr id="15" name="TextBox 14"/>
+          <p:cNvPr id="11" name="TextBox 10"/>
           <p:cNvSpPr txBox="1"/>
           <p:nvPr/>
         </p:nvSpPr>
@@ -4943,44 +4582,9 @@
           </a:fontRef>
         </p:style>
       </p:cxnSp>
-      <p:sp>
-        <p:nvSpPr>
-          <p:cNvPr id="5" name="TextBox 4"/>
-          <p:cNvSpPr txBox="1"/>
-          <p:nvPr/>
-        </p:nvSpPr>
-        <p:spPr>
-          <a:xfrm>
-            <a:off x="777240" y="1261872"/>
-            <a:ext cx="10607040" cy="310896"/>
-          </a:xfrm>
-          <a:prstGeom prst="rect">
-            <a:avLst/>
-          </a:prstGeom>
-          <a:noFill/>
-        </p:spPr>
-        <p:txBody>
-          <a:bodyPr wrap="square" lIns="45720" rIns="45720" tIns="18288" bIns="18288" anchor="t">
-            <a:spAutoFit/>
-          </a:bodyPr>
-          <a:lstStyle/>
-          <a:p>
-            <a:pPr algn="l"/>
-            <a:r>
-              <a:rPr sz="1700" b="0" i="1">
-                <a:solidFill>
-                  <a:srgbClr val="6B6B6B"/>
-                </a:solidFill>
-                <a:latin typeface="Century Schoolbook"/>
-              </a:rPr>
-              <a:t>Same steps, your numbers. Boards up when done.</a:t>
-            </a:r>
-          </a:p>
-        </p:txBody>
-      </p:sp>
       <p:cxnSp>
         <p:nvCxnSpPr>
-          <p:cNvPr id="6" name="Connector 5"/>
+          <p:cNvPr id="5" name="Connector 4"/>
           <p:cNvCxnSpPr/>
           <p:nvPr/>
         </p:nvCxnSpPr>
@@ -5015,7 +4619,7 @@
       </p:cxnSp>
       <p:sp>
         <p:nvSpPr>
-          <p:cNvPr id="7" name="TextBox 6"/>
+          <p:cNvPr id="6" name="TextBox 5"/>
           <p:cNvSpPr txBox="1"/>
           <p:nvPr/>
         </p:nvSpPr>
@@ -5050,7 +4654,7 @@
       </p:sp>
       <p:sp>
         <p:nvSpPr>
-          <p:cNvPr id="8" name="TextBox 7"/>
+          <p:cNvPr id="7" name="TextBox 6"/>
           <p:cNvSpPr txBox="1"/>
           <p:nvPr/>
         </p:nvSpPr>
@@ -5085,7 +4689,7 @@
       </p:sp>
       <p:sp>
         <p:nvSpPr>
-          <p:cNvPr id="9" name="TextBox 8"/>
+          <p:cNvPr id="8" name="TextBox 7"/>
           <p:cNvSpPr txBox="1"/>
           <p:nvPr/>
         </p:nvSpPr>
@@ -5120,7 +4724,7 @@
       </p:sp>
       <p:pic>
         <p:nvPicPr>
-          <p:cNvPr id="10" name="Picture 9" descr="b3b23388699e71f0.png"/>
+          <p:cNvPr id="9" name="Picture 8" descr="b3b23388699e71f0.png"/>
           <p:cNvPicPr>
             <a:picLocks noChangeAspect="1"/>
           </p:cNvPicPr>
@@ -5144,7 +4748,7 @@
       </p:pic>
       <p:sp>
         <p:nvSpPr>
-          <p:cNvPr id="11" name="TextBox 10"/>
+          <p:cNvPr id="10" name="TextBox 9"/>
           <p:cNvSpPr txBox="1"/>
           <p:nvPr/>
         </p:nvSpPr>
@@ -5179,7 +4783,7 @@
       </p:sp>
       <p:pic>
         <p:nvPicPr>
-          <p:cNvPr id="12" name="Picture 11" descr="33ace73c84f9ae31.png"/>
+          <p:cNvPr id="11" name="Picture 10" descr="33ace73c84f9ae31.png"/>
           <p:cNvPicPr>
             <a:picLocks noChangeAspect="1"/>
           </p:cNvPicPr>
@@ -5203,7 +4807,7 @@
       </p:pic>
       <p:sp>
         <p:nvSpPr>
-          <p:cNvPr id="13" name="TextBox 12"/>
+          <p:cNvPr id="12" name="TextBox 11"/>
           <p:cNvSpPr txBox="1"/>
           <p:nvPr/>
         </p:nvSpPr>
@@ -5359,44 +4963,9 @@
           </a:fontRef>
         </p:style>
       </p:cxnSp>
-      <p:sp>
-        <p:nvSpPr>
-          <p:cNvPr id="5" name="TextBox 4"/>
-          <p:cNvSpPr txBox="1"/>
-          <p:nvPr/>
-        </p:nvSpPr>
-        <p:spPr>
-          <a:xfrm>
-            <a:off x="777240" y="1261872"/>
-            <a:ext cx="10607040" cy="310896"/>
-          </a:xfrm>
-          <a:prstGeom prst="rect">
-            <a:avLst/>
-          </a:prstGeom>
-          <a:noFill/>
-        </p:spPr>
-        <p:txBody>
-          <a:bodyPr wrap="square" lIns="45720" rIns="45720" tIns="18288" bIns="18288" anchor="t">
-            <a:spAutoFit/>
-          </a:bodyPr>
-          <a:lstStyle/>
-          <a:p>
-            <a:pPr algn="l"/>
-            <a:r>
-              <a:rPr sz="1700" b="0" i="1">
-                <a:solidFill>
-                  <a:srgbClr val="6B6B6B"/>
-                </a:solidFill>
-                <a:latin typeface="Century Schoolbook"/>
-              </a:rPr>
-              <a:t>Answer.</a:t>
-            </a:r>
-          </a:p>
-        </p:txBody>
-      </p:sp>
       <p:cxnSp>
         <p:nvCxnSpPr>
-          <p:cNvPr id="6" name="Connector 5"/>
+          <p:cNvPr id="5" name="Connector 4"/>
           <p:cNvCxnSpPr/>
           <p:nvPr/>
         </p:nvCxnSpPr>
@@ -5431,7 +5000,7 @@
       </p:cxnSp>
       <p:sp>
         <p:nvSpPr>
-          <p:cNvPr id="7" name="TextBox 6"/>
+          <p:cNvPr id="6" name="TextBox 5"/>
           <p:cNvSpPr txBox="1"/>
           <p:nvPr/>
         </p:nvSpPr>
@@ -5466,7 +5035,7 @@
       </p:sp>
       <p:sp>
         <p:nvSpPr>
-          <p:cNvPr id="8" name="TextBox 7"/>
+          <p:cNvPr id="7" name="TextBox 6"/>
           <p:cNvSpPr txBox="1"/>
           <p:nvPr/>
         </p:nvSpPr>
@@ -5501,7 +5070,7 @@
       </p:sp>
       <p:sp>
         <p:nvSpPr>
-          <p:cNvPr id="9" name="TextBox 8"/>
+          <p:cNvPr id="8" name="TextBox 7"/>
           <p:cNvSpPr txBox="1"/>
           <p:nvPr/>
         </p:nvSpPr>
@@ -5536,7 +5105,7 @@
       </p:sp>
       <p:pic>
         <p:nvPicPr>
-          <p:cNvPr id="10" name="Picture 9" descr="9213e17c268194f6.png"/>
+          <p:cNvPr id="9" name="Picture 8" descr="9213e17c268194f6.png"/>
           <p:cNvPicPr>
             <a:picLocks noChangeAspect="1"/>
           </p:cNvPicPr>
@@ -5560,7 +5129,7 @@
       </p:pic>
       <p:sp>
         <p:nvSpPr>
-          <p:cNvPr id="11" name="TextBox 10"/>
+          <p:cNvPr id="10" name="TextBox 9"/>
           <p:cNvSpPr txBox="1"/>
           <p:nvPr/>
         </p:nvSpPr>
@@ -5595,7 +5164,7 @@
       </p:sp>
       <p:pic>
         <p:nvPicPr>
-          <p:cNvPr id="12" name="Picture 11" descr="c0aa154a2b895b46.png"/>
+          <p:cNvPr id="11" name="Picture 10" descr="c0aa154a2b895b46.png"/>
           <p:cNvPicPr>
             <a:picLocks noChangeAspect="1"/>
           </p:cNvPicPr>
@@ -5619,7 +5188,7 @@
       </p:pic>
       <p:sp>
         <p:nvSpPr>
-          <p:cNvPr id="13" name="TextBox 12"/>
+          <p:cNvPr id="12" name="TextBox 11"/>
           <p:cNvSpPr txBox="1"/>
           <p:nvPr/>
         </p:nvSpPr>
@@ -5654,48 +5223,13 @@
       </p:sp>
       <p:sp>
         <p:nvSpPr>
-          <p:cNvPr id="14" name="TextBox 13"/>
-          <p:cNvSpPr txBox="1"/>
-          <p:nvPr/>
-        </p:nvSpPr>
-        <p:spPr>
-          <a:xfrm>
-            <a:off x="777240" y="4257658"/>
-            <a:ext cx="10607040" cy="429370"/>
-          </a:xfrm>
-          <a:prstGeom prst="rect">
-            <a:avLst/>
-          </a:prstGeom>
-          <a:noFill/>
-        </p:spPr>
-        <p:txBody>
-          <a:bodyPr wrap="square" lIns="45720" rIns="45720" tIns="18288" bIns="18288" anchor="t">
-            <a:spAutoFit/>
-          </a:bodyPr>
-          <a:lstStyle/>
-          <a:p>
-            <a:pPr algn="ctr"/>
-            <a:r>
-              <a:rPr sz="2400" b="0" i="0">
-                <a:solidFill>
-                  <a:srgbClr val="6B6B6B"/>
-                </a:solidFill>
-                <a:latin typeface="Century Schoolbook"/>
-              </a:rPr>
-              <a:t>0.75 × 10 = 7.5</a:t>
-            </a:r>
-          </a:p>
-        </p:txBody>
-      </p:sp>
-      <p:sp>
-        <p:nvSpPr>
-          <p:cNvPr id="15" name="TextBox 14"/>
-          <p:cNvSpPr txBox="1"/>
-          <p:nvPr/>
-        </p:nvSpPr>
-        <p:spPr>
-          <a:xfrm>
-            <a:off x="777240" y="4979636"/>
+          <p:cNvPr id="13" name="TextBox 12"/>
+          <p:cNvSpPr txBox="1"/>
+          <p:nvPr/>
+        </p:nvSpPr>
+        <p:spPr>
+          <a:xfrm>
+            <a:off x="777240" y="4572000"/>
             <a:ext cx="10607040" cy="548640"/>
           </a:xfrm>
           <a:prstGeom prst="rect">
@@ -5845,44 +5379,9 @@
           </a:fontRef>
         </p:style>
       </p:cxnSp>
-      <p:sp>
-        <p:nvSpPr>
-          <p:cNvPr id="5" name="TextBox 4"/>
-          <p:cNvSpPr txBox="1"/>
-          <p:nvPr/>
-        </p:nvSpPr>
-        <p:spPr>
-          <a:xfrm>
-            <a:off x="777240" y="1261872"/>
-            <a:ext cx="10607040" cy="310896"/>
-          </a:xfrm>
-          <a:prstGeom prst="rect">
-            <a:avLst/>
-          </a:prstGeom>
-          <a:noFill/>
-        </p:spPr>
-        <p:txBody>
-          <a:bodyPr wrap="square" lIns="45720" rIns="45720" tIns="18288" bIns="18288" anchor="t">
-            <a:spAutoFit/>
-          </a:bodyPr>
-          <a:lstStyle/>
-          <a:p>
-            <a:pPr algn="l"/>
-            <a:r>
-              <a:rPr sz="1700" b="0" i="1">
-                <a:solidFill>
-                  <a:srgbClr val="6B6B6B"/>
-                </a:solidFill>
-                <a:latin typeface="Century Schoolbook"/>
-              </a:rPr>
-              <a:t>Boards up on three.</a:t>
-            </a:r>
-          </a:p>
-        </p:txBody>
-      </p:sp>
       <p:cxnSp>
         <p:nvCxnSpPr>
-          <p:cNvPr id="6" name="Connector 5"/>
+          <p:cNvPr id="5" name="Connector 4"/>
           <p:cNvCxnSpPr/>
           <p:nvPr/>
         </p:nvCxnSpPr>
@@ -5917,7 +5416,7 @@
       </p:cxnSp>
       <p:sp>
         <p:nvSpPr>
-          <p:cNvPr id="7" name="TextBox 6"/>
+          <p:cNvPr id="6" name="TextBox 5"/>
           <p:cNvSpPr txBox="1"/>
           <p:nvPr/>
         </p:nvSpPr>
@@ -5952,7 +5451,7 @@
       </p:sp>
       <p:sp>
         <p:nvSpPr>
-          <p:cNvPr id="8" name="TextBox 7"/>
+          <p:cNvPr id="7" name="TextBox 6"/>
           <p:cNvSpPr txBox="1"/>
           <p:nvPr/>
         </p:nvSpPr>
@@ -5987,7 +5486,7 @@
       </p:sp>
       <p:sp>
         <p:nvSpPr>
-          <p:cNvPr id="9" name="TextBox 8"/>
+          <p:cNvPr id="8" name="TextBox 7"/>
           <p:cNvSpPr txBox="1"/>
           <p:nvPr/>
         </p:nvSpPr>
@@ -6022,7 +5521,7 @@
       </p:sp>
       <p:sp>
         <p:nvSpPr>
-          <p:cNvPr id="10" name="TextBox 9"/>
+          <p:cNvPr id="9" name="TextBox 8"/>
           <p:cNvSpPr txBox="1"/>
           <p:nvPr/>
         </p:nvSpPr>
@@ -6051,41 +5550,6 @@
                 <a:latin typeface="Century Schoolbook"/>
               </a:rPr>
               <a:t>Answer it.</a:t>
-            </a:r>
-          </a:p>
-        </p:txBody>
-      </p:sp>
-      <p:sp>
-        <p:nvSpPr>
-          <p:cNvPr id="11" name="TextBox 10"/>
-          <p:cNvSpPr txBox="1"/>
-          <p:nvPr/>
-        </p:nvSpPr>
-        <p:spPr>
-          <a:xfrm>
-            <a:off x="777240" y="4828032"/>
-            <a:ext cx="10607040" cy="365760"/>
-          </a:xfrm>
-          <a:prstGeom prst="rect">
-            <a:avLst/>
-          </a:prstGeom>
-          <a:noFill/>
-        </p:spPr>
-        <p:txBody>
-          <a:bodyPr wrap="square" lIns="45720" rIns="45720" tIns="18288" bIns="18288" anchor="t">
-            <a:spAutoFit/>
-          </a:bodyPr>
-          <a:lstStyle/>
-          <a:p>
-            <a:pPr algn="ctr"/>
-            <a:r>
-              <a:rPr sz="1900" b="0" i="1">
-                <a:solidFill>
-                  <a:srgbClr val="6B6B6B"/>
-                </a:solidFill>
-                <a:latin typeface="Century Schoolbook"/>
-              </a:rPr>
-              <a:t>Which place is the 4 in?</a:t>
             </a:r>
           </a:p>
         </p:txBody>
@@ -6213,44 +5677,9 @@
           </a:fontRef>
         </p:style>
       </p:cxnSp>
-      <p:sp>
-        <p:nvSpPr>
-          <p:cNvPr id="5" name="TextBox 4"/>
-          <p:cNvSpPr txBox="1"/>
-          <p:nvPr/>
-        </p:nvSpPr>
-        <p:spPr>
-          <a:xfrm>
-            <a:off x="777240" y="1261872"/>
-            <a:ext cx="10607040" cy="310896"/>
-          </a:xfrm>
-          <a:prstGeom prst="rect">
-            <a:avLst/>
-          </a:prstGeom>
-          <a:noFill/>
-        </p:spPr>
-        <p:txBody>
-          <a:bodyPr wrap="square" lIns="45720" rIns="45720" tIns="18288" bIns="18288" anchor="t">
-            <a:spAutoFit/>
-          </a:bodyPr>
-          <a:lstStyle/>
-          <a:p>
-            <a:pPr algn="l"/>
-            <a:r>
-              <a:rPr sz="1700" b="0" i="1">
-                <a:solidFill>
-                  <a:srgbClr val="6B6B6B"/>
-                </a:solidFill>
-                <a:latin typeface="Century Schoolbook"/>
-              </a:rPr>
-              <a:t>Answer.</a:t>
-            </a:r>
-          </a:p>
-        </p:txBody>
-      </p:sp>
       <p:cxnSp>
         <p:nvCxnSpPr>
-          <p:cNvPr id="6" name="Connector 5"/>
+          <p:cNvPr id="5" name="Connector 4"/>
           <p:cNvCxnSpPr/>
           <p:nvPr/>
         </p:nvCxnSpPr>
@@ -6285,7 +5714,7 @@
       </p:cxnSp>
       <p:sp>
         <p:nvSpPr>
-          <p:cNvPr id="7" name="TextBox 6"/>
+          <p:cNvPr id="6" name="TextBox 5"/>
           <p:cNvSpPr txBox="1"/>
           <p:nvPr/>
         </p:nvSpPr>
@@ -6320,7 +5749,7 @@
       </p:sp>
       <p:sp>
         <p:nvSpPr>
-          <p:cNvPr id="8" name="TextBox 7"/>
+          <p:cNvPr id="7" name="TextBox 6"/>
           <p:cNvSpPr txBox="1"/>
           <p:nvPr/>
         </p:nvSpPr>
@@ -6355,7 +5784,7 @@
       </p:sp>
       <p:sp>
         <p:nvSpPr>
-          <p:cNvPr id="9" name="TextBox 8"/>
+          <p:cNvPr id="8" name="TextBox 7"/>
           <p:cNvSpPr txBox="1"/>
           <p:nvPr/>
         </p:nvSpPr>
@@ -6390,42 +5819,7 @@
       </p:sp>
       <p:sp>
         <p:nvSpPr>
-          <p:cNvPr id="10" name="TextBox 9"/>
-          <p:cNvSpPr txBox="1"/>
-          <p:nvPr/>
-        </p:nvSpPr>
-        <p:spPr>
-          <a:xfrm>
-            <a:off x="1828800" y="2723719"/>
-            <a:ext cx="8503920" cy="548640"/>
-          </a:xfrm>
-          <a:prstGeom prst="rect">
-            <a:avLst/>
-          </a:prstGeom>
-          <a:noFill/>
-        </p:spPr>
-        <p:txBody>
-          <a:bodyPr wrap="square" lIns="45720" rIns="45720" tIns="18288" bIns="18288" anchor="t">
-            <a:spAutoFit/>
-          </a:bodyPr>
-          <a:lstStyle/>
-          <a:p>
-            <a:pPr algn="ctr"/>
-            <a:r>
-              <a:rPr sz="2400" b="0" i="0">
-                <a:solidFill>
-                  <a:srgbClr val="6B6B6B"/>
-                </a:solidFill>
-                <a:latin typeface="Century Schoolbook"/>
-              </a:rPr>
-              <a:t>4 millions</a:t>
-            </a:r>
-          </a:p>
-        </p:txBody>
-      </p:sp>
-      <p:sp>
-        <p:nvSpPr>
-          <p:cNvPr id="11" name="TextBox 10"/>
+          <p:cNvPr id="9" name="TextBox 8"/>
           <p:cNvSpPr txBox="1"/>
           <p:nvPr/>
         </p:nvSpPr>
@@ -6590,44 +5984,9 @@
           </a:fontRef>
         </p:style>
       </p:cxnSp>
-      <p:sp>
-        <p:nvSpPr>
-          <p:cNvPr id="5" name="TextBox 4"/>
-          <p:cNvSpPr txBox="1"/>
-          <p:nvPr/>
-        </p:nvSpPr>
-        <p:spPr>
-          <a:xfrm>
-            <a:off x="777240" y="1261872"/>
-            <a:ext cx="10607040" cy="310896"/>
-          </a:xfrm>
-          <a:prstGeom prst="rect">
-            <a:avLst/>
-          </a:prstGeom>
-          <a:noFill/>
-        </p:spPr>
-        <p:txBody>
-          <a:bodyPr wrap="square" lIns="45720" rIns="45720" tIns="18288" bIns="18288" anchor="t">
-            <a:spAutoFit/>
-          </a:bodyPr>
-          <a:lstStyle/>
-          <a:p>
-            <a:pPr algn="l"/>
-            <a:r>
-              <a:rPr sz="1700" b="0" i="1">
-                <a:solidFill>
-                  <a:srgbClr val="6B6B6B"/>
-                </a:solidFill>
-                <a:latin typeface="Century Schoolbook"/>
-              </a:rPr>
-              <a:t>Boards up on three.</a:t>
-            </a:r>
-          </a:p>
-        </p:txBody>
-      </p:sp>
       <p:cxnSp>
         <p:nvCxnSpPr>
-          <p:cNvPr id="6" name="Connector 5"/>
+          <p:cNvPr id="5" name="Connector 4"/>
           <p:cNvCxnSpPr/>
           <p:nvPr/>
         </p:nvCxnSpPr>
@@ -6662,7 +6021,7 @@
       </p:cxnSp>
       <p:sp>
         <p:nvSpPr>
-          <p:cNvPr id="7" name="TextBox 6"/>
+          <p:cNvPr id="6" name="TextBox 5"/>
           <p:cNvSpPr txBox="1"/>
           <p:nvPr/>
         </p:nvSpPr>
@@ -6697,7 +6056,7 @@
       </p:sp>
       <p:sp>
         <p:nvSpPr>
-          <p:cNvPr id="8" name="TextBox 7"/>
+          <p:cNvPr id="7" name="TextBox 6"/>
           <p:cNvSpPr txBox="1"/>
           <p:nvPr/>
         </p:nvSpPr>
@@ -6732,7 +6091,7 @@
       </p:sp>
       <p:sp>
         <p:nvSpPr>
-          <p:cNvPr id="9" name="TextBox 8"/>
+          <p:cNvPr id="8" name="TextBox 7"/>
           <p:cNvSpPr txBox="1"/>
           <p:nvPr/>
         </p:nvSpPr>
@@ -6767,7 +6126,7 @@
       </p:sp>
       <p:pic>
         <p:nvPicPr>
-          <p:cNvPr id="10" name="Picture 9" descr="5f1494d210188d7e.png"/>
+          <p:cNvPr id="9" name="Picture 8" descr="5f1494d210188d7e.png"/>
           <p:cNvPicPr>
             <a:picLocks noChangeAspect="1"/>
           </p:cNvPicPr>
@@ -6791,7 +6150,7 @@
       </p:pic>
       <p:sp>
         <p:nvSpPr>
-          <p:cNvPr id="11" name="TextBox 10"/>
+          <p:cNvPr id="10" name="TextBox 9"/>
           <p:cNvSpPr txBox="1"/>
           <p:nvPr/>
         </p:nvSpPr>
@@ -6826,7 +6185,7 @@
       </p:sp>
       <p:sp>
         <p:nvSpPr>
-          <p:cNvPr id="12" name="TextBox 11"/>
+          <p:cNvPr id="11" name="TextBox 10"/>
           <p:cNvSpPr txBox="1"/>
           <p:nvPr/>
         </p:nvSpPr>
@@ -6855,41 +6214,6 @@
                 <a:latin typeface="Century Schoolbook"/>
               </a:rPr>
               <a:t>Answer it.</a:t>
-            </a:r>
-          </a:p>
-        </p:txBody>
-      </p:sp>
-      <p:sp>
-        <p:nvSpPr>
-          <p:cNvPr id="13" name="TextBox 12"/>
-          <p:cNvSpPr txBox="1"/>
-          <p:nvPr/>
-        </p:nvSpPr>
-        <p:spPr>
-          <a:xfrm>
-            <a:off x="777240" y="4828032"/>
-            <a:ext cx="10607040" cy="365760"/>
-          </a:xfrm>
-          <a:prstGeom prst="rect">
-            <a:avLst/>
-          </a:prstGeom>
-          <a:noFill/>
-        </p:spPr>
-        <p:txBody>
-          <a:bodyPr wrap="square" lIns="45720" rIns="45720" tIns="18288" bIns="18288" anchor="t">
-            <a:spAutoFit/>
-          </a:bodyPr>
-          <a:lstStyle/>
-          <a:p>
-            <a:pPr algn="ctr"/>
-            <a:r>
-              <a:rPr sz="1900" b="0" i="1">
-                <a:solidFill>
-                  <a:srgbClr val="6B6B6B"/>
-                </a:solidFill>
-                <a:latin typeface="Century Schoolbook"/>
-              </a:rPr>
-              <a:t>Move the point four places.</a:t>
             </a:r>
           </a:p>
         </p:txBody>
@@ -7017,44 +6341,9 @@
           </a:fontRef>
         </p:style>
       </p:cxnSp>
-      <p:sp>
-        <p:nvSpPr>
-          <p:cNvPr id="5" name="TextBox 4"/>
-          <p:cNvSpPr txBox="1"/>
-          <p:nvPr/>
-        </p:nvSpPr>
-        <p:spPr>
-          <a:xfrm>
-            <a:off x="777240" y="1261872"/>
-            <a:ext cx="10607040" cy="310896"/>
-          </a:xfrm>
-          <a:prstGeom prst="rect">
-            <a:avLst/>
-          </a:prstGeom>
-          <a:noFill/>
-        </p:spPr>
-        <p:txBody>
-          <a:bodyPr wrap="square" lIns="45720" rIns="45720" tIns="18288" bIns="18288" anchor="t">
-            <a:spAutoFit/>
-          </a:bodyPr>
-          <a:lstStyle/>
-          <a:p>
-            <a:pPr algn="l"/>
-            <a:r>
-              <a:rPr sz="1700" b="0" i="1">
-                <a:solidFill>
-                  <a:srgbClr val="6B6B6B"/>
-                </a:solidFill>
-                <a:latin typeface="Century Schoolbook"/>
-              </a:rPr>
-              <a:t>Answer.</a:t>
-            </a:r>
-          </a:p>
-        </p:txBody>
-      </p:sp>
       <p:cxnSp>
         <p:nvCxnSpPr>
-          <p:cNvPr id="6" name="Connector 5"/>
+          <p:cNvPr id="5" name="Connector 4"/>
           <p:cNvCxnSpPr/>
           <p:nvPr/>
         </p:nvCxnSpPr>
@@ -7089,7 +6378,7 @@
       </p:cxnSp>
       <p:sp>
         <p:nvSpPr>
-          <p:cNvPr id="7" name="TextBox 6"/>
+          <p:cNvPr id="6" name="TextBox 5"/>
           <p:cNvSpPr txBox="1"/>
           <p:nvPr/>
         </p:nvSpPr>
@@ -7124,7 +6413,7 @@
       </p:sp>
       <p:sp>
         <p:nvSpPr>
-          <p:cNvPr id="8" name="TextBox 7"/>
+          <p:cNvPr id="7" name="TextBox 6"/>
           <p:cNvSpPr txBox="1"/>
           <p:nvPr/>
         </p:nvSpPr>
@@ -7159,7 +6448,7 @@
       </p:sp>
       <p:sp>
         <p:nvSpPr>
-          <p:cNvPr id="9" name="TextBox 8"/>
+          <p:cNvPr id="8" name="TextBox 7"/>
           <p:cNvSpPr txBox="1"/>
           <p:nvPr/>
         </p:nvSpPr>
@@ -7194,7 +6483,7 @@
       </p:sp>
       <p:pic>
         <p:nvPicPr>
-          <p:cNvPr id="10" name="Picture 9" descr="52d884c0ec37c95a.png"/>
+          <p:cNvPr id="9" name="Picture 8" descr="52d884c0ec37c95a.png"/>
           <p:cNvPicPr>
             <a:picLocks noChangeAspect="1"/>
           </p:cNvPicPr>
@@ -7218,7 +6507,7 @@
       </p:pic>
       <p:sp>
         <p:nvSpPr>
-          <p:cNvPr id="11" name="TextBox 10"/>
+          <p:cNvPr id="10" name="TextBox 9"/>
           <p:cNvSpPr txBox="1"/>
           <p:nvPr/>
         </p:nvSpPr>
@@ -7253,42 +6542,7 @@
       </p:sp>
       <p:sp>
         <p:nvSpPr>
-          <p:cNvPr id="12" name="TextBox 11"/>
-          <p:cNvSpPr txBox="1"/>
-          <p:nvPr/>
-        </p:nvSpPr>
-        <p:spPr>
-          <a:xfrm>
-            <a:off x="1828800" y="2834639"/>
-            <a:ext cx="8503920" cy="548640"/>
-          </a:xfrm>
-          <a:prstGeom prst="rect">
-            <a:avLst/>
-          </a:prstGeom>
-          <a:noFill/>
-        </p:spPr>
-        <p:txBody>
-          <a:bodyPr wrap="square" lIns="45720" rIns="45720" tIns="18288" bIns="18288" anchor="t">
-            <a:spAutoFit/>
-          </a:bodyPr>
-          <a:lstStyle/>
-          <a:p>
-            <a:pPr algn="ctr"/>
-            <a:r>
-              <a:rPr sz="2400" b="0" i="0">
-                <a:solidFill>
-                  <a:srgbClr val="6B6B6B"/>
-                </a:solidFill>
-                <a:latin typeface="Century Schoolbook"/>
-              </a:rPr>
-              <a:t>7.2 × 10,000</a:t>
-            </a:r>
-          </a:p>
-        </p:txBody>
-      </p:sp>
-      <p:sp>
-        <p:nvSpPr>
-          <p:cNvPr id="13" name="TextBox 12"/>
+          <p:cNvPr id="11" name="TextBox 10"/>
           <p:cNvSpPr txBox="1"/>
           <p:nvPr/>
         </p:nvSpPr>
@@ -7444,44 +6698,9 @@
           </a:fontRef>
         </p:style>
       </p:cxnSp>
-      <p:sp>
-        <p:nvSpPr>
-          <p:cNvPr id="5" name="TextBox 4"/>
-          <p:cNvSpPr txBox="1"/>
-          <p:nvPr/>
-        </p:nvSpPr>
-        <p:spPr>
-          <a:xfrm>
-            <a:off x="777240" y="1261872"/>
-            <a:ext cx="10607040" cy="310896"/>
-          </a:xfrm>
-          <a:prstGeom prst="rect">
-            <a:avLst/>
-          </a:prstGeom>
-          <a:noFill/>
-        </p:spPr>
-        <p:txBody>
-          <a:bodyPr wrap="square" lIns="45720" rIns="45720" tIns="18288" bIns="18288" anchor="t">
-            <a:spAutoFit/>
-          </a:bodyPr>
-          <a:lstStyle/>
-          <a:p>
-            <a:pPr algn="l"/>
-            <a:r>
-              <a:rPr sz="1700" b="0" i="1">
-                <a:solidFill>
-                  <a:srgbClr val="6B6B6B"/>
-                </a:solidFill>
-                <a:latin typeface="Century Schoolbook"/>
-              </a:rPr>
-              <a:t>Boards up on three.</a:t>
-            </a:r>
-          </a:p>
-        </p:txBody>
-      </p:sp>
       <p:cxnSp>
         <p:nvCxnSpPr>
-          <p:cNvPr id="6" name="Connector 5"/>
+          <p:cNvPr id="5" name="Connector 4"/>
           <p:cNvCxnSpPr/>
           <p:nvPr/>
         </p:nvCxnSpPr>
@@ -7516,7 +6735,7 @@
       </p:cxnSp>
       <p:sp>
         <p:nvSpPr>
-          <p:cNvPr id="7" name="TextBox 6"/>
+          <p:cNvPr id="6" name="TextBox 5"/>
           <p:cNvSpPr txBox="1"/>
           <p:nvPr/>
         </p:nvSpPr>
@@ -7551,7 +6770,7 @@
       </p:sp>
       <p:sp>
         <p:nvSpPr>
-          <p:cNvPr id="8" name="TextBox 7"/>
+          <p:cNvPr id="7" name="TextBox 6"/>
           <p:cNvSpPr txBox="1"/>
           <p:nvPr/>
         </p:nvSpPr>
@@ -7586,7 +6805,7 @@
       </p:sp>
       <p:sp>
         <p:nvSpPr>
-          <p:cNvPr id="9" name="TextBox 8"/>
+          <p:cNvPr id="8" name="TextBox 7"/>
           <p:cNvSpPr txBox="1"/>
           <p:nvPr/>
         </p:nvSpPr>
@@ -7621,7 +6840,7 @@
       </p:sp>
       <p:sp>
         <p:nvSpPr>
-          <p:cNvPr id="10" name="TextBox 9"/>
+          <p:cNvPr id="9" name="TextBox 8"/>
           <p:cNvSpPr txBox="1"/>
           <p:nvPr/>
         </p:nvSpPr>
@@ -7656,7 +6875,7 @@
       </p:sp>
       <p:sp>
         <p:nvSpPr>
-          <p:cNvPr id="11" name="TextBox 10"/>
+          <p:cNvPr id="10" name="TextBox 9"/>
           <p:cNvSpPr txBox="1"/>
           <p:nvPr/>
         </p:nvSpPr>
@@ -7691,7 +6910,7 @@
       </p:sp>
       <p:sp>
         <p:nvSpPr>
-          <p:cNvPr id="12" name="TextBox 11"/>
+          <p:cNvPr id="11" name="TextBox 10"/>
           <p:cNvSpPr txBox="1"/>
           <p:nvPr/>
         </p:nvSpPr>
@@ -7847,44 +7066,9 @@
           </a:fontRef>
         </p:style>
       </p:cxnSp>
-      <p:sp>
-        <p:nvSpPr>
-          <p:cNvPr id="5" name="TextBox 4"/>
-          <p:cNvSpPr txBox="1"/>
-          <p:nvPr/>
-        </p:nvSpPr>
-        <p:spPr>
-          <a:xfrm>
-            <a:off x="777240" y="1261872"/>
-            <a:ext cx="10607040" cy="310896"/>
-          </a:xfrm>
-          <a:prstGeom prst="rect">
-            <a:avLst/>
-          </a:prstGeom>
-          <a:noFill/>
-        </p:spPr>
-        <p:txBody>
-          <a:bodyPr wrap="square" lIns="45720" rIns="45720" tIns="18288" bIns="18288" anchor="t">
-            <a:spAutoFit/>
-          </a:bodyPr>
-          <a:lstStyle/>
-          <a:p>
-            <a:pPr algn="l"/>
-            <a:r>
-              <a:rPr sz="1700" b="0" i="1">
-                <a:solidFill>
-                  <a:srgbClr val="6B6B6B"/>
-                </a:solidFill>
-                <a:latin typeface="Century Schoolbook"/>
-              </a:rPr>
-              <a:t>On your own. Four minutes. No notes.</a:t>
-            </a:r>
-          </a:p>
-        </p:txBody>
-      </p:sp>
       <p:cxnSp>
         <p:nvCxnSpPr>
-          <p:cNvPr id="6" name="Connector 5"/>
+          <p:cNvPr id="5" name="Connector 4"/>
           <p:cNvCxnSpPr/>
           <p:nvPr/>
         </p:nvCxnSpPr>
@@ -7919,7 +7103,7 @@
       </p:cxnSp>
       <p:sp>
         <p:nvSpPr>
-          <p:cNvPr id="7" name="TextBox 6"/>
+          <p:cNvPr id="6" name="TextBox 5"/>
           <p:cNvSpPr txBox="1"/>
           <p:nvPr/>
         </p:nvSpPr>
@@ -7954,7 +7138,7 @@
       </p:sp>
       <p:sp>
         <p:nvSpPr>
-          <p:cNvPr id="8" name="TextBox 7"/>
+          <p:cNvPr id="7" name="TextBox 6"/>
           <p:cNvSpPr txBox="1"/>
           <p:nvPr/>
         </p:nvSpPr>
@@ -7989,13 +7173,13 @@
       </p:sp>
       <p:sp>
         <p:nvSpPr>
-          <p:cNvPr id="9" name="TextBox 8"/>
-          <p:cNvSpPr txBox="1"/>
-          <p:nvPr/>
-        </p:nvSpPr>
-        <p:spPr>
-          <a:xfrm>
-            <a:off x="1874519" y="1760220"/>
+          <p:cNvPr id="8" name="TextBox 7"/>
+          <p:cNvSpPr txBox="1"/>
+          <p:nvPr/>
+        </p:nvSpPr>
+        <p:spPr>
+          <a:xfrm>
+            <a:off x="1874519" y="1440180"/>
             <a:ext cx="5670993" cy="457200"/>
           </a:xfrm>
           <a:prstGeom prst="rect">
@@ -8024,7 +7208,7 @@
       </p:sp>
       <p:pic>
         <p:nvPicPr>
-          <p:cNvPr id="10" name="Picture 9" descr="1f7555b99367de55.png"/>
+          <p:cNvPr id="9" name="Picture 8" descr="1f7555b99367de55.png"/>
           <p:cNvPicPr>
             <a:picLocks noChangeAspect="1"/>
           </p:cNvPicPr>
@@ -8038,7 +7222,7 @@
         </p:blipFill>
         <p:spPr>
           <a:xfrm>
-            <a:off x="7408353" y="1850136"/>
+            <a:off x="7408353" y="1530096"/>
             <a:ext cx="585216" cy="277368"/>
           </a:xfrm>
           <a:prstGeom prst="rect">
@@ -8048,13 +7232,13 @@
       </p:pic>
       <p:sp>
         <p:nvSpPr>
-          <p:cNvPr id="11" name="TextBox 10"/>
-          <p:cNvSpPr txBox="1"/>
-          <p:nvPr/>
-        </p:nvSpPr>
-        <p:spPr>
-          <a:xfrm>
-            <a:off x="1874519" y="2372868"/>
+          <p:cNvPr id="10" name="TextBox 9"/>
+          <p:cNvSpPr txBox="1"/>
+          <p:nvPr/>
+        </p:nvSpPr>
+        <p:spPr>
+          <a:xfrm>
+            <a:off x="1874519" y="2052828"/>
             <a:ext cx="3064939" cy="457200"/>
           </a:xfrm>
           <a:prstGeom prst="rect">
@@ -8083,7 +7267,7 @@
       </p:sp>
       <p:pic>
         <p:nvPicPr>
-          <p:cNvPr id="12" name="Picture 11" descr="1a29715e97268546.png"/>
+          <p:cNvPr id="11" name="Picture 10" descr="1a29715e97268546.png"/>
           <p:cNvPicPr>
             <a:picLocks noChangeAspect="1"/>
           </p:cNvPicPr>
@@ -8097,7 +7281,7 @@
         </p:blipFill>
         <p:spPr>
           <a:xfrm>
-            <a:off x="4802299" y="2433828"/>
+            <a:off x="4802299" y="2113788"/>
             <a:ext cx="774192" cy="335280"/>
           </a:xfrm>
           <a:prstGeom prst="rect">
@@ -8107,13 +7291,13 @@
       </p:pic>
       <p:sp>
         <p:nvSpPr>
-          <p:cNvPr id="13" name="TextBox 12"/>
-          <p:cNvSpPr txBox="1"/>
-          <p:nvPr/>
-        </p:nvSpPr>
-        <p:spPr>
-          <a:xfrm>
-            <a:off x="1874519" y="2985516"/>
+          <p:cNvPr id="12" name="TextBox 11"/>
+          <p:cNvSpPr txBox="1"/>
+          <p:nvPr/>
+        </p:nvSpPr>
+        <p:spPr>
+          <a:xfrm>
+            <a:off x="1874519" y="2665476"/>
             <a:ext cx="3064939" cy="457200"/>
           </a:xfrm>
           <a:prstGeom prst="rect">
@@ -8142,7 +7326,7 @@
       </p:sp>
       <p:pic>
         <p:nvPicPr>
-          <p:cNvPr id="14" name="Picture 13" descr="dcb33f053a4bb301.png"/>
+          <p:cNvPr id="13" name="Picture 12" descr="dcb33f053a4bb301.png"/>
           <p:cNvPicPr>
             <a:picLocks noChangeAspect="1"/>
           </p:cNvPicPr>
@@ -8156,7 +7340,7 @@
         </p:blipFill>
         <p:spPr>
           <a:xfrm>
-            <a:off x="4802299" y="3009900"/>
+            <a:off x="4802299" y="2689860"/>
             <a:ext cx="853440" cy="408432"/>
           </a:xfrm>
           <a:prstGeom prst="rect">
@@ -8166,13 +7350,13 @@
       </p:pic>
       <p:sp>
         <p:nvSpPr>
-          <p:cNvPr id="15" name="TextBox 14"/>
-          <p:cNvSpPr txBox="1"/>
-          <p:nvPr/>
-        </p:nvSpPr>
-        <p:spPr>
-          <a:xfrm>
-            <a:off x="1874519" y="3598164"/>
+          <p:cNvPr id="14" name="TextBox 13"/>
+          <p:cNvSpPr txBox="1"/>
+          <p:nvPr/>
+        </p:nvSpPr>
+        <p:spPr>
+          <a:xfrm>
+            <a:off x="1874519" y="3278124"/>
             <a:ext cx="5997604" cy="457200"/>
           </a:xfrm>
           <a:prstGeom prst="rect">
@@ -8322,44 +7506,9 @@
           </a:fontRef>
         </p:style>
       </p:cxnSp>
-      <p:sp>
-        <p:nvSpPr>
-          <p:cNvPr id="5" name="TextBox 4"/>
-          <p:cNvSpPr txBox="1"/>
-          <p:nvPr/>
-        </p:nvSpPr>
-        <p:spPr>
-          <a:xfrm>
-            <a:off x="777240" y="1261872"/>
-            <a:ext cx="10607040" cy="310896"/>
-          </a:xfrm>
-          <a:prstGeom prst="rect">
-            <a:avLst/>
-          </a:prstGeom>
-          <a:noFill/>
-        </p:spPr>
-        <p:txBody>
-          <a:bodyPr wrap="square" lIns="45720" rIns="45720" tIns="18288" bIns="18288" anchor="t">
-            <a:spAutoFit/>
-          </a:bodyPr>
-          <a:lstStyle/>
-          <a:p>
-            <a:pPr algn="l"/>
-            <a:r>
-              <a:rPr sz="1700" b="0" i="1">
-                <a:solidFill>
-                  <a:srgbClr val="6B6B6B"/>
-                </a:solidFill>
-                <a:latin typeface="Century Schoolbook"/>
-              </a:rPr>
-              <a:t>Answer.</a:t>
-            </a:r>
-          </a:p>
-        </p:txBody>
-      </p:sp>
       <p:cxnSp>
         <p:nvCxnSpPr>
-          <p:cNvPr id="6" name="Connector 5"/>
+          <p:cNvPr id="5" name="Connector 4"/>
           <p:cNvCxnSpPr/>
           <p:nvPr/>
         </p:nvCxnSpPr>
@@ -8394,7 +7543,7 @@
       </p:cxnSp>
       <p:sp>
         <p:nvSpPr>
-          <p:cNvPr id="7" name="TextBox 6"/>
+          <p:cNvPr id="6" name="TextBox 5"/>
           <p:cNvSpPr txBox="1"/>
           <p:nvPr/>
         </p:nvSpPr>
@@ -8429,7 +7578,7 @@
       </p:sp>
       <p:sp>
         <p:nvSpPr>
-          <p:cNvPr id="8" name="TextBox 7"/>
+          <p:cNvPr id="7" name="TextBox 6"/>
           <p:cNvSpPr txBox="1"/>
           <p:nvPr/>
         </p:nvSpPr>
@@ -8464,7 +7613,7 @@
       </p:sp>
       <p:sp>
         <p:nvSpPr>
-          <p:cNvPr id="9" name="TextBox 8"/>
+          <p:cNvPr id="8" name="TextBox 7"/>
           <p:cNvSpPr txBox="1"/>
           <p:nvPr/>
         </p:nvSpPr>
@@ -8499,7 +7648,7 @@
       </p:sp>
       <p:sp>
         <p:nvSpPr>
-          <p:cNvPr id="10" name="TextBox 9"/>
+          <p:cNvPr id="9" name="TextBox 8"/>
           <p:cNvSpPr txBox="1"/>
           <p:nvPr/>
         </p:nvSpPr>
@@ -8534,7 +7683,7 @@
       </p:sp>
       <p:sp>
         <p:nvSpPr>
-          <p:cNvPr id="11" name="TextBox 10"/>
+          <p:cNvPr id="10" name="TextBox 9"/>
           <p:cNvSpPr txBox="1"/>
           <p:nvPr/>
         </p:nvSpPr>
@@ -8569,42 +7718,7 @@
       </p:sp>
       <p:sp>
         <p:nvSpPr>
-          <p:cNvPr id="12" name="TextBox 11"/>
-          <p:cNvSpPr txBox="1"/>
-          <p:nvPr/>
-        </p:nvSpPr>
-        <p:spPr>
-          <a:xfrm>
-            <a:off x="1828800" y="3583255"/>
-            <a:ext cx="8503920" cy="548640"/>
-          </a:xfrm>
-          <a:prstGeom prst="rect">
-            <a:avLst/>
-          </a:prstGeom>
-          <a:noFill/>
-        </p:spPr>
-        <p:txBody>
-          <a:bodyPr wrap="square" lIns="45720" rIns="45720" tIns="18288" bIns="18288" anchor="t">
-            <a:spAutoFit/>
-          </a:bodyPr>
-          <a:lstStyle/>
-          <a:p>
-            <a:pPr algn="ctr"/>
-            <a:r>
-              <a:rPr sz="2400" b="0" i="0">
-                <a:solidFill>
-                  <a:srgbClr val="6B6B6B"/>
-                </a:solidFill>
-                <a:latin typeface="Century Schoolbook"/>
-              </a:rPr>
-              <a:t>3.56 hundred-thousands</a:t>
-            </a:r>
-          </a:p>
-        </p:txBody>
-      </p:sp>
-      <p:sp>
-        <p:nvSpPr>
-          <p:cNvPr id="13" name="TextBox 12"/>
+          <p:cNvPr id="11" name="TextBox 10"/>
           <p:cNvSpPr txBox="1"/>
           <p:nvPr/>
         </p:nvSpPr>
@@ -8769,44 +7883,9 @@
           </a:fontRef>
         </p:style>
       </p:cxnSp>
-      <p:sp>
-        <p:nvSpPr>
-          <p:cNvPr id="5" name="TextBox 4"/>
-          <p:cNvSpPr txBox="1"/>
-          <p:nvPr/>
-        </p:nvSpPr>
-        <p:spPr>
-          <a:xfrm>
-            <a:off x="777240" y="1261872"/>
-            <a:ext cx="10607040" cy="310896"/>
-          </a:xfrm>
-          <a:prstGeom prst="rect">
-            <a:avLst/>
-          </a:prstGeom>
-          <a:noFill/>
-        </p:spPr>
-        <p:txBody>
-          <a:bodyPr wrap="square" lIns="45720" rIns="45720" tIns="18288" bIns="18288" anchor="t">
-            <a:spAutoFit/>
-          </a:bodyPr>
-          <a:lstStyle/>
-          <a:p>
-            <a:pPr algn="l"/>
-            <a:r>
-              <a:rPr sz="1700" b="0" i="1">
-                <a:solidFill>
-                  <a:srgbClr val="6B6B6B"/>
-                </a:solidFill>
-                <a:latin typeface="Century Schoolbook"/>
-              </a:rPr>
-              <a:t>Boards up on three.</a:t>
-            </a:r>
-          </a:p>
-        </p:txBody>
-      </p:sp>
       <p:cxnSp>
         <p:nvCxnSpPr>
-          <p:cNvPr id="6" name="Connector 5"/>
+          <p:cNvPr id="5" name="Connector 4"/>
           <p:cNvCxnSpPr/>
           <p:nvPr/>
         </p:nvCxnSpPr>
@@ -8841,7 +7920,7 @@
       </p:cxnSp>
       <p:sp>
         <p:nvSpPr>
-          <p:cNvPr id="7" name="TextBox 6"/>
+          <p:cNvPr id="6" name="TextBox 5"/>
           <p:cNvSpPr txBox="1"/>
           <p:nvPr/>
         </p:nvSpPr>
@@ -8876,7 +7955,7 @@
       </p:sp>
       <p:sp>
         <p:nvSpPr>
-          <p:cNvPr id="8" name="TextBox 7"/>
+          <p:cNvPr id="7" name="TextBox 6"/>
           <p:cNvSpPr txBox="1"/>
           <p:nvPr/>
         </p:nvSpPr>
@@ -8911,7 +7990,7 @@
       </p:sp>
       <p:sp>
         <p:nvSpPr>
-          <p:cNvPr id="9" name="TextBox 8"/>
+          <p:cNvPr id="8" name="TextBox 7"/>
           <p:cNvSpPr txBox="1"/>
           <p:nvPr/>
         </p:nvSpPr>
@@ -8946,7 +8025,7 @@
       </p:sp>
       <p:pic>
         <p:nvPicPr>
-          <p:cNvPr id="10" name="Picture 9" descr="1ab45d017fce8a10.png"/>
+          <p:cNvPr id="9" name="Picture 8" descr="1ab45d017fce8a10.png"/>
           <p:cNvPicPr>
             <a:picLocks noChangeAspect="1"/>
           </p:cNvPicPr>
@@ -8970,7 +8049,7 @@
       </p:pic>
       <p:sp>
         <p:nvSpPr>
-          <p:cNvPr id="11" name="TextBox 10"/>
+          <p:cNvPr id="10" name="TextBox 9"/>
           <p:cNvSpPr txBox="1"/>
           <p:nvPr/>
         </p:nvSpPr>
@@ -9005,7 +8084,7 @@
       </p:sp>
       <p:pic>
         <p:nvPicPr>
-          <p:cNvPr id="12" name="Picture 11" descr="d99a9851995ad560.png"/>
+          <p:cNvPr id="11" name="Picture 10" descr="d99a9851995ad560.png"/>
           <p:cNvPicPr>
             <a:picLocks noChangeAspect="1"/>
           </p:cNvPicPr>
@@ -9029,7 +8108,7 @@
       </p:pic>
       <p:sp>
         <p:nvSpPr>
-          <p:cNvPr id="13" name="TextBox 12"/>
+          <p:cNvPr id="12" name="TextBox 11"/>
           <p:cNvSpPr txBox="1"/>
           <p:nvPr/>
         </p:nvSpPr>
@@ -9064,7 +8143,7 @@
       </p:sp>
       <p:sp>
         <p:nvSpPr>
-          <p:cNvPr id="14" name="TextBox 13"/>
+          <p:cNvPr id="13" name="TextBox 12"/>
           <p:cNvSpPr txBox="1"/>
           <p:nvPr/>
         </p:nvSpPr>
@@ -9093,41 +8172,6 @@
                 <a:latin typeface="Century Schoolbook"/>
               </a:rPr>
               <a:t>Answer it.</a:t>
-            </a:r>
-          </a:p>
-        </p:txBody>
-      </p:sp>
-      <p:sp>
-        <p:nvSpPr>
-          <p:cNvPr id="15" name="TextBox 14"/>
-          <p:cNvSpPr txBox="1"/>
-          <p:nvPr/>
-        </p:nvSpPr>
-        <p:spPr>
-          <a:xfrm>
-            <a:off x="777240" y="4828032"/>
-            <a:ext cx="10607040" cy="365760"/>
-          </a:xfrm>
-          <a:prstGeom prst="rect">
-            <a:avLst/>
-          </a:prstGeom>
-          <a:noFill/>
-        </p:spPr>
-        <p:txBody>
-          <a:bodyPr wrap="square" lIns="45720" rIns="45720" tIns="18288" bIns="18288" anchor="t">
-            <a:spAutoFit/>
-          </a:bodyPr>
-          <a:lstStyle/>
-          <a:p>
-            <a:pPr algn="ctr"/>
-            <a:r>
-              <a:rPr sz="1900" b="0" i="1">
-                <a:solidFill>
-                  <a:srgbClr val="6B6B6B"/>
-                </a:solidFill>
-                <a:latin typeface="Century Schoolbook"/>
-              </a:rPr>
-              <a:t>Look at the powers first.</a:t>
             </a:r>
           </a:p>
         </p:txBody>
@@ -9255,44 +8299,9 @@
           </a:fontRef>
         </p:style>
       </p:cxnSp>
-      <p:sp>
-        <p:nvSpPr>
-          <p:cNvPr id="5" name="TextBox 4"/>
-          <p:cNvSpPr txBox="1"/>
-          <p:nvPr/>
-        </p:nvSpPr>
-        <p:spPr>
-          <a:xfrm>
-            <a:off x="777240" y="1261872"/>
-            <a:ext cx="10607040" cy="310896"/>
-          </a:xfrm>
-          <a:prstGeom prst="rect">
-            <a:avLst/>
-          </a:prstGeom>
-          <a:noFill/>
-        </p:spPr>
-        <p:txBody>
-          <a:bodyPr wrap="square" lIns="45720" rIns="45720" tIns="18288" bIns="18288" anchor="t">
-            <a:spAutoFit/>
-          </a:bodyPr>
-          <a:lstStyle/>
-          <a:p>
-            <a:pPr algn="l"/>
-            <a:r>
-              <a:rPr sz="1700" b="0" i="1">
-                <a:solidFill>
-                  <a:srgbClr val="6B6B6B"/>
-                </a:solidFill>
-                <a:latin typeface="Century Schoolbook"/>
-              </a:rPr>
-              <a:t>Answer.</a:t>
-            </a:r>
-          </a:p>
-        </p:txBody>
-      </p:sp>
       <p:cxnSp>
         <p:nvCxnSpPr>
-          <p:cNvPr id="6" name="Connector 5"/>
+          <p:cNvPr id="5" name="Connector 4"/>
           <p:cNvCxnSpPr/>
           <p:nvPr/>
         </p:nvCxnSpPr>
@@ -9327,7 +8336,7 @@
       </p:cxnSp>
       <p:sp>
         <p:nvSpPr>
-          <p:cNvPr id="7" name="TextBox 6"/>
+          <p:cNvPr id="6" name="TextBox 5"/>
           <p:cNvSpPr txBox="1"/>
           <p:nvPr/>
         </p:nvSpPr>
@@ -9362,7 +8371,7 @@
       </p:sp>
       <p:sp>
         <p:nvSpPr>
-          <p:cNvPr id="8" name="TextBox 7"/>
+          <p:cNvPr id="7" name="TextBox 6"/>
           <p:cNvSpPr txBox="1"/>
           <p:nvPr/>
         </p:nvSpPr>
@@ -9397,7 +8406,7 @@
       </p:sp>
       <p:sp>
         <p:nvSpPr>
-          <p:cNvPr id="9" name="TextBox 8"/>
+          <p:cNvPr id="8" name="TextBox 7"/>
           <p:cNvSpPr txBox="1"/>
           <p:nvPr/>
         </p:nvSpPr>
@@ -9432,7 +8441,7 @@
       </p:sp>
       <p:pic>
         <p:nvPicPr>
-          <p:cNvPr id="10" name="Picture 9" descr="78380355eb5e9104.png"/>
+          <p:cNvPr id="9" name="Picture 8" descr="78380355eb5e9104.png"/>
           <p:cNvPicPr>
             <a:picLocks noChangeAspect="1"/>
           </p:cNvPicPr>
@@ -9456,7 +8465,7 @@
       </p:pic>
       <p:sp>
         <p:nvSpPr>
-          <p:cNvPr id="11" name="TextBox 10"/>
+          <p:cNvPr id="10" name="TextBox 9"/>
           <p:cNvSpPr txBox="1"/>
           <p:nvPr/>
         </p:nvSpPr>
@@ -9491,7 +8500,7 @@
       </p:sp>
       <p:pic>
         <p:nvPicPr>
-          <p:cNvPr id="12" name="Picture 11" descr="7abd88142838d7cb.png"/>
+          <p:cNvPr id="11" name="Picture 10" descr="7abd88142838d7cb.png"/>
           <p:cNvPicPr>
             <a:picLocks noChangeAspect="1"/>
           </p:cNvPicPr>
@@ -9515,7 +8524,7 @@
       </p:pic>
       <p:sp>
         <p:nvSpPr>
-          <p:cNvPr id="13" name="TextBox 12"/>
+          <p:cNvPr id="12" name="TextBox 11"/>
           <p:cNvSpPr txBox="1"/>
           <p:nvPr/>
         </p:nvSpPr>
@@ -9550,42 +8559,7 @@
       </p:sp>
       <p:sp>
         <p:nvSpPr>
-          <p:cNvPr id="14" name="TextBox 13"/>
-          <p:cNvSpPr txBox="1"/>
-          <p:nvPr/>
-        </p:nvSpPr>
-        <p:spPr>
-          <a:xfrm>
-            <a:off x="1828800" y="2834639"/>
-            <a:ext cx="8503920" cy="548640"/>
-          </a:xfrm>
-          <a:prstGeom prst="rect">
-            <a:avLst/>
-          </a:prstGeom>
-          <a:noFill/>
-        </p:spPr>
-        <p:txBody>
-          <a:bodyPr wrap="square" lIns="45720" rIns="45720" tIns="18288" bIns="18288" anchor="t">
-            <a:spAutoFit/>
-          </a:bodyPr>
-          <a:lstStyle/>
-          <a:p>
-            <a:pPr algn="ctr"/>
-            <a:r>
-              <a:rPr sz="2400" b="0" i="0">
-                <a:solidFill>
-                  <a:srgbClr val="6B6B6B"/>
-                </a:solidFill>
-                <a:latin typeface="Century Schoolbook"/>
-              </a:rPr>
-              <a:t>950,000 versus 1,200,000</a:t>
-            </a:r>
-          </a:p>
-        </p:txBody>
-      </p:sp>
-      <p:sp>
-        <p:nvSpPr>
-          <p:cNvPr id="15" name="TextBox 14"/>
+          <p:cNvPr id="13" name="TextBox 12"/>
           <p:cNvSpPr txBox="1"/>
           <p:nvPr/>
         </p:nvSpPr>
@@ -9750,44 +8724,9 @@
           </a:fontRef>
         </p:style>
       </p:cxnSp>
-      <p:sp>
-        <p:nvSpPr>
-          <p:cNvPr id="5" name="TextBox 4"/>
-          <p:cNvSpPr txBox="1"/>
-          <p:nvPr/>
-        </p:nvSpPr>
-        <p:spPr>
-          <a:xfrm>
-            <a:off x="777240" y="1261872"/>
-            <a:ext cx="10607040" cy="310896"/>
-          </a:xfrm>
-          <a:prstGeom prst="rect">
-            <a:avLst/>
-          </a:prstGeom>
-          <a:noFill/>
-        </p:spPr>
-        <p:txBody>
-          <a:bodyPr wrap="square" lIns="45720" rIns="45720" tIns="18288" bIns="18288" anchor="t">
-            <a:spAutoFit/>
-          </a:bodyPr>
-          <a:lstStyle/>
-          <a:p>
-            <a:pPr algn="l"/>
-            <a:r>
-              <a:rPr sz="1700" b="0" i="1">
-                <a:solidFill>
-                  <a:srgbClr val="6B6B6B"/>
-                </a:solidFill>
-                <a:latin typeface="Century Schoolbook"/>
-              </a:rPr>
-              <a:t>Boards up on three.</a:t>
-            </a:r>
-          </a:p>
-        </p:txBody>
-      </p:sp>
       <p:cxnSp>
         <p:nvCxnSpPr>
-          <p:cNvPr id="6" name="Connector 5"/>
+          <p:cNvPr id="5" name="Connector 4"/>
           <p:cNvCxnSpPr/>
           <p:nvPr/>
         </p:nvCxnSpPr>
@@ -9822,7 +8761,7 @@
       </p:cxnSp>
       <p:sp>
         <p:nvSpPr>
-          <p:cNvPr id="7" name="TextBox 6"/>
+          <p:cNvPr id="6" name="TextBox 5"/>
           <p:cNvSpPr txBox="1"/>
           <p:nvPr/>
         </p:nvSpPr>
@@ -9857,7 +8796,7 @@
       </p:sp>
       <p:sp>
         <p:nvSpPr>
-          <p:cNvPr id="8" name="TextBox 7"/>
+          <p:cNvPr id="7" name="TextBox 6"/>
           <p:cNvSpPr txBox="1"/>
           <p:nvPr/>
         </p:nvSpPr>
@@ -9892,7 +8831,7 @@
       </p:sp>
       <p:sp>
         <p:nvSpPr>
-          <p:cNvPr id="9" name="TextBox 8"/>
+          <p:cNvPr id="8" name="TextBox 7"/>
           <p:cNvSpPr txBox="1"/>
           <p:nvPr/>
         </p:nvSpPr>
@@ -9927,7 +8866,7 @@
       </p:sp>
       <p:sp>
         <p:nvSpPr>
-          <p:cNvPr id="10" name="TextBox 9"/>
+          <p:cNvPr id="9" name="TextBox 8"/>
           <p:cNvSpPr txBox="1"/>
           <p:nvPr/>
         </p:nvSpPr>
@@ -9980,7 +8919,7 @@
       </p:sp>
       <p:sp>
         <p:nvSpPr>
-          <p:cNvPr id="11" name="TextBox 10"/>
+          <p:cNvPr id="10" name="TextBox 9"/>
           <p:cNvSpPr txBox="1"/>
           <p:nvPr/>
         </p:nvSpPr>
@@ -10033,7 +8972,7 @@
       </p:sp>
       <p:sp>
         <p:nvSpPr>
-          <p:cNvPr id="12" name="TextBox 11"/>
+          <p:cNvPr id="11" name="TextBox 10"/>
           <p:cNvSpPr txBox="1"/>
           <p:nvPr/>
         </p:nvSpPr>
@@ -10086,7 +9025,7 @@
       </p:sp>
       <p:sp>
         <p:nvSpPr>
-          <p:cNvPr id="13" name="TextBox 12"/>
+          <p:cNvPr id="12" name="TextBox 11"/>
           <p:cNvSpPr txBox="1"/>
           <p:nvPr/>
         </p:nvSpPr>
@@ -10139,7 +9078,7 @@
       </p:sp>
       <p:sp>
         <p:nvSpPr>
-          <p:cNvPr id="14" name="TextBox 13"/>
+          <p:cNvPr id="13" name="TextBox 12"/>
           <p:cNvSpPr txBox="1"/>
           <p:nvPr/>
         </p:nvSpPr>
@@ -10295,44 +9234,9 @@
           </a:fontRef>
         </p:style>
       </p:cxnSp>
-      <p:sp>
-        <p:nvSpPr>
-          <p:cNvPr id="5" name="TextBox 4"/>
-          <p:cNvSpPr txBox="1"/>
-          <p:nvPr/>
-        </p:nvSpPr>
-        <p:spPr>
-          <a:xfrm>
-            <a:off x="777240" y="1261872"/>
-            <a:ext cx="10607040" cy="310896"/>
-          </a:xfrm>
-          <a:prstGeom prst="rect">
-            <a:avLst/>
-          </a:prstGeom>
-          <a:noFill/>
-        </p:spPr>
-        <p:txBody>
-          <a:bodyPr wrap="square" lIns="45720" rIns="45720" tIns="18288" bIns="18288" anchor="t">
-            <a:spAutoFit/>
-          </a:bodyPr>
-          <a:lstStyle/>
-          <a:p>
-            <a:pPr algn="l"/>
-            <a:r>
-              <a:rPr sz="1700" b="0" i="1">
-                <a:solidFill>
-                  <a:srgbClr val="6B6B6B"/>
-                </a:solidFill>
-                <a:latin typeface="Century Schoolbook"/>
-              </a:rPr>
-              <a:t>Answer.</a:t>
-            </a:r>
-          </a:p>
-        </p:txBody>
-      </p:sp>
       <p:cxnSp>
         <p:nvCxnSpPr>
-          <p:cNvPr id="6" name="Connector 5"/>
+          <p:cNvPr id="5" name="Connector 4"/>
           <p:cNvCxnSpPr/>
           <p:nvPr/>
         </p:nvCxnSpPr>
@@ -10367,7 +9271,7 @@
       </p:cxnSp>
       <p:sp>
         <p:nvSpPr>
-          <p:cNvPr id="7" name="TextBox 6"/>
+          <p:cNvPr id="6" name="TextBox 5"/>
           <p:cNvSpPr txBox="1"/>
           <p:nvPr/>
         </p:nvSpPr>
@@ -10402,7 +9306,7 @@
       </p:sp>
       <p:sp>
         <p:nvSpPr>
-          <p:cNvPr id="8" name="TextBox 7"/>
+          <p:cNvPr id="7" name="TextBox 6"/>
           <p:cNvSpPr txBox="1"/>
           <p:nvPr/>
         </p:nvSpPr>
@@ -10437,7 +9341,7 @@
       </p:sp>
       <p:sp>
         <p:nvSpPr>
-          <p:cNvPr id="9" name="TextBox 8"/>
+          <p:cNvPr id="8" name="TextBox 7"/>
           <p:cNvSpPr txBox="1"/>
           <p:nvPr/>
         </p:nvSpPr>
@@ -10472,7 +9376,7 @@
       </p:sp>
       <p:sp>
         <p:nvSpPr>
-          <p:cNvPr id="10" name="TextBox 9"/>
+          <p:cNvPr id="9" name="TextBox 8"/>
           <p:cNvSpPr txBox="1"/>
           <p:nvPr/>
         </p:nvSpPr>
@@ -10525,7 +9429,7 @@
       </p:sp>
       <p:sp>
         <p:nvSpPr>
-          <p:cNvPr id="11" name="TextBox 10"/>
+          <p:cNvPr id="10" name="TextBox 9"/>
           <p:cNvSpPr txBox="1"/>
           <p:nvPr/>
         </p:nvSpPr>
@@ -10578,7 +9482,7 @@
       </p:sp>
       <p:sp>
         <p:nvSpPr>
-          <p:cNvPr id="12" name="TextBox 11"/>
+          <p:cNvPr id="11" name="TextBox 10"/>
           <p:cNvSpPr txBox="1"/>
           <p:nvPr/>
         </p:nvSpPr>
@@ -10631,7 +9535,7 @@
       </p:sp>
       <p:sp>
         <p:nvSpPr>
-          <p:cNvPr id="13" name="TextBox 12"/>
+          <p:cNvPr id="12" name="TextBox 11"/>
           <p:cNvSpPr txBox="1"/>
           <p:nvPr/>
         </p:nvSpPr>
@@ -10684,7 +9588,7 @@
       </p:sp>
       <p:sp>
         <p:nvSpPr>
-          <p:cNvPr id="14" name="TextBox 13"/>
+          <p:cNvPr id="13" name="TextBox 12"/>
           <p:cNvSpPr txBox="1"/>
           <p:nvPr/>
         </p:nvSpPr>
@@ -10849,44 +9753,9 @@
           </a:fontRef>
         </p:style>
       </p:cxnSp>
-      <p:sp>
-        <p:nvSpPr>
-          <p:cNvPr id="5" name="TextBox 4"/>
-          <p:cNvSpPr txBox="1"/>
-          <p:nvPr/>
-        </p:nvSpPr>
-        <p:spPr>
-          <a:xfrm>
-            <a:off x="777240" y="1261872"/>
-            <a:ext cx="10607040" cy="310896"/>
-          </a:xfrm>
-          <a:prstGeom prst="rect">
-            <a:avLst/>
-          </a:prstGeom>
-          <a:noFill/>
-        </p:spPr>
-        <p:txBody>
-          <a:bodyPr wrap="square" lIns="45720" rIns="45720" tIns="18288" bIns="18288" anchor="t">
-            <a:spAutoFit/>
-          </a:bodyPr>
-          <a:lstStyle/>
-          <a:p>
-            <a:pPr algn="l"/>
-            <a:r>
-              <a:rPr sz="1700" b="0" i="1">
-                <a:solidFill>
-                  <a:srgbClr val="6B6B6B"/>
-                </a:solidFill>
-                <a:latin typeface="Century Schoolbook"/>
-              </a:rPr>
-              <a:t>Boards up on three.</a:t>
-            </a:r>
-          </a:p>
-        </p:txBody>
-      </p:sp>
       <p:cxnSp>
         <p:nvCxnSpPr>
-          <p:cNvPr id="6" name="Connector 5"/>
+          <p:cNvPr id="5" name="Connector 4"/>
           <p:cNvCxnSpPr/>
           <p:nvPr/>
         </p:nvCxnSpPr>
@@ -10921,7 +9790,7 @@
       </p:cxnSp>
       <p:sp>
         <p:nvSpPr>
-          <p:cNvPr id="7" name="TextBox 6"/>
+          <p:cNvPr id="6" name="TextBox 5"/>
           <p:cNvSpPr txBox="1"/>
           <p:nvPr/>
         </p:nvSpPr>
@@ -10956,7 +9825,7 @@
       </p:sp>
       <p:sp>
         <p:nvSpPr>
-          <p:cNvPr id="8" name="TextBox 7"/>
+          <p:cNvPr id="7" name="TextBox 6"/>
           <p:cNvSpPr txBox="1"/>
           <p:nvPr/>
         </p:nvSpPr>
@@ -10991,7 +9860,7 @@
       </p:sp>
       <p:sp>
         <p:nvSpPr>
-          <p:cNvPr id="9" name="TextBox 8"/>
+          <p:cNvPr id="8" name="TextBox 7"/>
           <p:cNvSpPr txBox="1"/>
           <p:nvPr/>
         </p:nvSpPr>
@@ -11026,7 +9895,7 @@
       </p:sp>
       <p:pic>
         <p:nvPicPr>
-          <p:cNvPr id="10" name="Picture 9" descr="cb3383a0ac48947d.png"/>
+          <p:cNvPr id="9" name="Picture 8" descr="cb3383a0ac48947d.png"/>
           <p:cNvPicPr>
             <a:picLocks noChangeAspect="1"/>
           </p:cNvPicPr>
@@ -11050,7 +9919,7 @@
       </p:pic>
       <p:sp>
         <p:nvSpPr>
-          <p:cNvPr id="11" name="TextBox 10"/>
+          <p:cNvPr id="10" name="TextBox 9"/>
           <p:cNvSpPr txBox="1"/>
           <p:nvPr/>
         </p:nvSpPr>
@@ -11085,7 +9954,7 @@
       </p:sp>
       <p:pic>
         <p:nvPicPr>
-          <p:cNvPr id="12" name="Picture 11" descr="136c380adf2acf38.png"/>
+          <p:cNvPr id="11" name="Picture 10" descr="136c380adf2acf38.png"/>
           <p:cNvPicPr>
             <a:picLocks noChangeAspect="1"/>
           </p:cNvPicPr>
@@ -11109,7 +9978,7 @@
       </p:pic>
       <p:sp>
         <p:nvSpPr>
-          <p:cNvPr id="13" name="TextBox 12"/>
+          <p:cNvPr id="12" name="TextBox 11"/>
           <p:cNvSpPr txBox="1"/>
           <p:nvPr/>
         </p:nvSpPr>
@@ -11144,7 +10013,7 @@
       </p:sp>
       <p:sp>
         <p:nvSpPr>
-          <p:cNvPr id="14" name="TextBox 13"/>
+          <p:cNvPr id="13" name="TextBox 12"/>
           <p:cNvSpPr txBox="1"/>
           <p:nvPr/>
         </p:nvSpPr>
@@ -11188,7 +10057,7 @@
       </p:sp>
       <p:sp>
         <p:nvSpPr>
-          <p:cNvPr id="15" name="TextBox 14"/>
+          <p:cNvPr id="14" name="TextBox 13"/>
           <p:cNvSpPr txBox="1"/>
           <p:nvPr/>
         </p:nvSpPr>
@@ -11232,7 +10101,7 @@
       </p:sp>
       <p:sp>
         <p:nvSpPr>
-          <p:cNvPr id="16" name="TextBox 15"/>
+          <p:cNvPr id="15" name="TextBox 14"/>
           <p:cNvSpPr txBox="1"/>
           <p:nvPr/>
         </p:nvSpPr>
@@ -11276,7 +10145,7 @@
       </p:sp>
       <p:sp>
         <p:nvSpPr>
-          <p:cNvPr id="17" name="TextBox 16"/>
+          <p:cNvPr id="16" name="TextBox 15"/>
           <p:cNvSpPr txBox="1"/>
           <p:nvPr/>
         </p:nvSpPr>
@@ -11320,7 +10189,7 @@
       </p:sp>
       <p:sp>
         <p:nvSpPr>
-          <p:cNvPr id="18" name="TextBox 17"/>
+          <p:cNvPr id="17" name="TextBox 16"/>
           <p:cNvSpPr txBox="1"/>
           <p:nvPr/>
         </p:nvSpPr>
@@ -11476,44 +10345,9 @@
           </a:fontRef>
         </p:style>
       </p:cxnSp>
-      <p:sp>
-        <p:nvSpPr>
-          <p:cNvPr id="5" name="TextBox 4"/>
-          <p:cNvSpPr txBox="1"/>
-          <p:nvPr/>
-        </p:nvSpPr>
-        <p:spPr>
-          <a:xfrm>
-            <a:off x="777240" y="1261872"/>
-            <a:ext cx="10607040" cy="310896"/>
-          </a:xfrm>
-          <a:prstGeom prst="rect">
-            <a:avLst/>
-          </a:prstGeom>
-          <a:noFill/>
-        </p:spPr>
-        <p:txBody>
-          <a:bodyPr wrap="square" lIns="45720" rIns="45720" tIns="18288" bIns="18288" anchor="t">
-            <a:spAutoFit/>
-          </a:bodyPr>
-          <a:lstStyle/>
-          <a:p>
-            <a:pPr algn="l"/>
-            <a:r>
-              <a:rPr sz="1700" b="0" i="1">
-                <a:solidFill>
-                  <a:srgbClr val="6B6B6B"/>
-                </a:solidFill>
-                <a:latin typeface="Century Schoolbook"/>
-              </a:rPr>
-              <a:t>Answer.</a:t>
-            </a:r>
-          </a:p>
-        </p:txBody>
-      </p:sp>
       <p:cxnSp>
         <p:nvCxnSpPr>
-          <p:cNvPr id="6" name="Connector 5"/>
+          <p:cNvPr id="5" name="Connector 4"/>
           <p:cNvCxnSpPr/>
           <p:nvPr/>
         </p:nvCxnSpPr>
@@ -11548,7 +10382,7 @@
       </p:cxnSp>
       <p:sp>
         <p:nvSpPr>
-          <p:cNvPr id="7" name="TextBox 6"/>
+          <p:cNvPr id="6" name="TextBox 5"/>
           <p:cNvSpPr txBox="1"/>
           <p:nvPr/>
         </p:nvSpPr>
@@ -11583,7 +10417,7 @@
       </p:sp>
       <p:sp>
         <p:nvSpPr>
-          <p:cNvPr id="8" name="TextBox 7"/>
+          <p:cNvPr id="7" name="TextBox 6"/>
           <p:cNvSpPr txBox="1"/>
           <p:nvPr/>
         </p:nvSpPr>
@@ -11618,7 +10452,7 @@
       </p:sp>
       <p:sp>
         <p:nvSpPr>
-          <p:cNvPr id="9" name="TextBox 8"/>
+          <p:cNvPr id="8" name="TextBox 7"/>
           <p:cNvSpPr txBox="1"/>
           <p:nvPr/>
         </p:nvSpPr>
@@ -11653,7 +10487,7 @@
       </p:sp>
       <p:pic>
         <p:nvPicPr>
-          <p:cNvPr id="10" name="Picture 9" descr="f5c1556a2a400797.png"/>
+          <p:cNvPr id="9" name="Picture 8" descr="f5c1556a2a400797.png"/>
           <p:cNvPicPr>
             <a:picLocks noChangeAspect="1"/>
           </p:cNvPicPr>
@@ -11677,7 +10511,7 @@
       </p:pic>
       <p:sp>
         <p:nvSpPr>
-          <p:cNvPr id="11" name="TextBox 10"/>
+          <p:cNvPr id="10" name="TextBox 9"/>
           <p:cNvSpPr txBox="1"/>
           <p:nvPr/>
         </p:nvSpPr>
@@ -11712,7 +10546,7 @@
       </p:sp>
       <p:pic>
         <p:nvPicPr>
-          <p:cNvPr id="12" name="Picture 11" descr="e6a3bddbc4c7da8d.png"/>
+          <p:cNvPr id="11" name="Picture 10" descr="e6a3bddbc4c7da8d.png"/>
           <p:cNvPicPr>
             <a:picLocks noChangeAspect="1"/>
           </p:cNvPicPr>
@@ -11736,7 +10570,7 @@
       </p:pic>
       <p:sp>
         <p:nvSpPr>
-          <p:cNvPr id="13" name="TextBox 12"/>
+          <p:cNvPr id="12" name="TextBox 11"/>
           <p:cNvSpPr txBox="1"/>
           <p:nvPr/>
         </p:nvSpPr>
@@ -11771,7 +10605,7 @@
       </p:sp>
       <p:sp>
         <p:nvSpPr>
-          <p:cNvPr id="14" name="TextBox 13"/>
+          <p:cNvPr id="13" name="TextBox 12"/>
           <p:cNvSpPr txBox="1"/>
           <p:nvPr/>
         </p:nvSpPr>
@@ -11815,7 +10649,7 @@
       </p:sp>
       <p:sp>
         <p:nvSpPr>
-          <p:cNvPr id="15" name="TextBox 14"/>
+          <p:cNvPr id="14" name="TextBox 13"/>
           <p:cNvSpPr txBox="1"/>
           <p:nvPr/>
         </p:nvSpPr>
@@ -11859,7 +10693,7 @@
       </p:sp>
       <p:sp>
         <p:nvSpPr>
-          <p:cNvPr id="16" name="TextBox 15"/>
+          <p:cNvPr id="15" name="TextBox 14"/>
           <p:cNvSpPr txBox="1"/>
           <p:nvPr/>
         </p:nvSpPr>
@@ -11903,7 +10737,7 @@
       </p:sp>
       <p:sp>
         <p:nvSpPr>
-          <p:cNvPr id="17" name="TextBox 16"/>
+          <p:cNvPr id="16" name="TextBox 15"/>
           <p:cNvSpPr txBox="1"/>
           <p:nvPr/>
         </p:nvSpPr>
@@ -11947,7 +10781,7 @@
       </p:sp>
       <p:sp>
         <p:nvSpPr>
-          <p:cNvPr id="18" name="TextBox 17"/>
+          <p:cNvPr id="17" name="TextBox 16"/>
           <p:cNvSpPr txBox="1"/>
           <p:nvPr/>
         </p:nvSpPr>
@@ -12103,44 +10937,9 @@
           </a:fontRef>
         </p:style>
       </p:cxnSp>
-      <p:sp>
-        <p:nvSpPr>
-          <p:cNvPr id="5" name="TextBox 4"/>
-          <p:cNvSpPr txBox="1"/>
-          <p:nvPr/>
-        </p:nvSpPr>
-        <p:spPr>
-          <a:xfrm>
-            <a:off x="777240" y="1261872"/>
-            <a:ext cx="10607040" cy="310896"/>
-          </a:xfrm>
-          <a:prstGeom prst="rect">
-            <a:avLst/>
-          </a:prstGeom>
-          <a:noFill/>
-        </p:spPr>
-        <p:txBody>
-          <a:bodyPr wrap="square" lIns="45720" rIns="45720" tIns="18288" bIns="18288" anchor="t">
-            <a:spAutoFit/>
-          </a:bodyPr>
-          <a:lstStyle/>
-          <a:p>
-            <a:pPr algn="l"/>
-            <a:r>
-              <a:rPr sz="1700" b="0" i="1">
-                <a:solidFill>
-                  <a:srgbClr val="6B6B6B"/>
-                </a:solidFill>
-                <a:latin typeface="Century Schoolbook"/>
-              </a:rPr>
-              <a:t>Boards up on three.</a:t>
-            </a:r>
-          </a:p>
-        </p:txBody>
-      </p:sp>
       <p:cxnSp>
         <p:nvCxnSpPr>
-          <p:cNvPr id="6" name="Connector 5"/>
+          <p:cNvPr id="5" name="Connector 4"/>
           <p:cNvCxnSpPr/>
           <p:nvPr/>
         </p:nvCxnSpPr>
@@ -12175,7 +10974,7 @@
       </p:cxnSp>
       <p:sp>
         <p:nvSpPr>
-          <p:cNvPr id="7" name="TextBox 6"/>
+          <p:cNvPr id="6" name="TextBox 5"/>
           <p:cNvSpPr txBox="1"/>
           <p:nvPr/>
         </p:nvSpPr>
@@ -12210,7 +11009,7 @@
       </p:sp>
       <p:sp>
         <p:nvSpPr>
-          <p:cNvPr id="8" name="TextBox 7"/>
+          <p:cNvPr id="7" name="TextBox 6"/>
           <p:cNvSpPr txBox="1"/>
           <p:nvPr/>
         </p:nvSpPr>
@@ -12245,7 +11044,7 @@
       </p:sp>
       <p:sp>
         <p:nvSpPr>
-          <p:cNvPr id="9" name="TextBox 8"/>
+          <p:cNvPr id="8" name="TextBox 7"/>
           <p:cNvSpPr txBox="1"/>
           <p:nvPr/>
         </p:nvSpPr>
@@ -12280,7 +11079,7 @@
       </p:sp>
       <p:pic>
         <p:nvPicPr>
-          <p:cNvPr id="10" name="Picture 9" descr="9dfa88f60f7695f6.png"/>
+          <p:cNvPr id="9" name="Picture 8" descr="9dfa88f60f7695f6.png"/>
           <p:cNvPicPr>
             <a:picLocks noChangeAspect="1"/>
           </p:cNvPicPr>
@@ -12304,7 +11103,7 @@
       </p:pic>
       <p:sp>
         <p:nvSpPr>
-          <p:cNvPr id="11" name="TextBox 10"/>
+          <p:cNvPr id="10" name="TextBox 9"/>
           <p:cNvSpPr txBox="1"/>
           <p:nvPr/>
         </p:nvSpPr>
@@ -12339,7 +11138,7 @@
       </p:sp>
       <p:pic>
         <p:nvPicPr>
-          <p:cNvPr id="12" name="Picture 11" descr="441501d81b57e020.png"/>
+          <p:cNvPr id="11" name="Picture 10" descr="441501d81b57e020.png"/>
           <p:cNvPicPr>
             <a:picLocks noChangeAspect="1"/>
           </p:cNvPicPr>
@@ -12363,7 +11162,7 @@
       </p:pic>
       <p:sp>
         <p:nvSpPr>
-          <p:cNvPr id="13" name="TextBox 12"/>
+          <p:cNvPr id="12" name="TextBox 11"/>
           <p:cNvSpPr txBox="1"/>
           <p:nvPr/>
         </p:nvSpPr>
@@ -12398,7 +11197,7 @@
       </p:sp>
       <p:sp>
         <p:nvSpPr>
-          <p:cNvPr id="14" name="TextBox 13"/>
+          <p:cNvPr id="13" name="TextBox 12"/>
           <p:cNvSpPr txBox="1"/>
           <p:nvPr/>
         </p:nvSpPr>
@@ -12427,41 +11226,6 @@
                 <a:latin typeface="Century Schoolbook"/>
               </a:rPr>
               <a:t>Answer it.</a:t>
-            </a:r>
-          </a:p>
-        </p:txBody>
-      </p:sp>
-      <p:sp>
-        <p:nvSpPr>
-          <p:cNvPr id="15" name="TextBox 14"/>
-          <p:cNvSpPr txBox="1"/>
-          <p:nvPr/>
-        </p:nvSpPr>
-        <p:spPr>
-          <a:xfrm>
-            <a:off x="777240" y="4828032"/>
-            <a:ext cx="10607040" cy="365760"/>
-          </a:xfrm>
-          <a:prstGeom prst="rect">
-            <a:avLst/>
-          </a:prstGeom>
-          <a:noFill/>
-        </p:spPr>
-        <p:txBody>
-          <a:bodyPr wrap="square" lIns="45720" rIns="45720" tIns="18288" bIns="18288" anchor="t">
-            <a:spAutoFit/>
-          </a:bodyPr>
-          <a:lstStyle/>
-          <a:p>
-            <a:pPr algn="ctr"/>
-            <a:r>
-              <a:rPr sz="1900" b="0" i="1">
-                <a:solidFill>
-                  <a:srgbClr val="6B6B6B"/>
-                </a:solidFill>
-                <a:latin typeface="Century Schoolbook"/>
-              </a:rPr>
-              <a:t>Coefficients, then powers, then multiply.</a:t>
             </a:r>
           </a:p>
         </p:txBody>
@@ -12589,44 +11353,9 @@
           </a:fontRef>
         </p:style>
       </p:cxnSp>
-      <p:sp>
-        <p:nvSpPr>
-          <p:cNvPr id="5" name="TextBox 4"/>
-          <p:cNvSpPr txBox="1"/>
-          <p:nvPr/>
-        </p:nvSpPr>
-        <p:spPr>
-          <a:xfrm>
-            <a:off x="777240" y="1261872"/>
-            <a:ext cx="10607040" cy="310896"/>
-          </a:xfrm>
-          <a:prstGeom prst="rect">
-            <a:avLst/>
-          </a:prstGeom>
-          <a:noFill/>
-        </p:spPr>
-        <p:txBody>
-          <a:bodyPr wrap="square" lIns="45720" rIns="45720" tIns="18288" bIns="18288" anchor="t">
-            <a:spAutoFit/>
-          </a:bodyPr>
-          <a:lstStyle/>
-          <a:p>
-            <a:pPr algn="l"/>
-            <a:r>
-              <a:rPr sz="1700" b="0" i="1">
-                <a:solidFill>
-                  <a:srgbClr val="6B6B6B"/>
-                </a:solidFill>
-                <a:latin typeface="Century Schoolbook"/>
-              </a:rPr>
-              <a:t>Answer.</a:t>
-            </a:r>
-          </a:p>
-        </p:txBody>
-      </p:sp>
       <p:cxnSp>
         <p:nvCxnSpPr>
-          <p:cNvPr id="6" name="Connector 5"/>
+          <p:cNvPr id="5" name="Connector 4"/>
           <p:cNvCxnSpPr/>
           <p:nvPr/>
         </p:nvCxnSpPr>
@@ -12661,7 +11390,7 @@
       </p:cxnSp>
       <p:sp>
         <p:nvSpPr>
-          <p:cNvPr id="7" name="TextBox 6"/>
+          <p:cNvPr id="6" name="TextBox 5"/>
           <p:cNvSpPr txBox="1"/>
           <p:nvPr/>
         </p:nvSpPr>
@@ -12696,7 +11425,7 @@
       </p:sp>
       <p:sp>
         <p:nvSpPr>
-          <p:cNvPr id="8" name="TextBox 7"/>
+          <p:cNvPr id="7" name="TextBox 6"/>
           <p:cNvSpPr txBox="1"/>
           <p:nvPr/>
         </p:nvSpPr>
@@ -12731,7 +11460,7 @@
       </p:sp>
       <p:sp>
         <p:nvSpPr>
-          <p:cNvPr id="9" name="TextBox 8"/>
+          <p:cNvPr id="8" name="TextBox 7"/>
           <p:cNvSpPr txBox="1"/>
           <p:nvPr/>
         </p:nvSpPr>
@@ -12766,7 +11495,7 @@
       </p:sp>
       <p:pic>
         <p:nvPicPr>
-          <p:cNvPr id="10" name="Picture 9" descr="f4de1fd42bbb25b4.png"/>
+          <p:cNvPr id="9" name="Picture 8" descr="f4de1fd42bbb25b4.png"/>
           <p:cNvPicPr>
             <a:picLocks noChangeAspect="1"/>
           </p:cNvPicPr>
@@ -12790,7 +11519,7 @@
       </p:pic>
       <p:sp>
         <p:nvSpPr>
-          <p:cNvPr id="11" name="TextBox 10"/>
+          <p:cNvPr id="10" name="TextBox 9"/>
           <p:cNvSpPr txBox="1"/>
           <p:nvPr/>
         </p:nvSpPr>
@@ -12825,7 +11554,7 @@
       </p:sp>
       <p:pic>
         <p:nvPicPr>
-          <p:cNvPr id="12" name="Picture 11" descr="f8ac844b4918206d.png"/>
+          <p:cNvPr id="11" name="Picture 10" descr="f8ac844b4918206d.png"/>
           <p:cNvPicPr>
             <a:picLocks noChangeAspect="1"/>
           </p:cNvPicPr>
@@ -12849,7 +11578,7 @@
       </p:pic>
       <p:sp>
         <p:nvSpPr>
-          <p:cNvPr id="13" name="TextBox 12"/>
+          <p:cNvPr id="12" name="TextBox 11"/>
           <p:cNvSpPr txBox="1"/>
           <p:nvPr/>
         </p:nvSpPr>
@@ -12884,51 +11613,7 @@
       </p:sp>
       <p:sp>
         <p:nvSpPr>
-          <p:cNvPr id="14" name="TextBox 13"/>
-          <p:cNvSpPr txBox="1"/>
-          <p:nvPr/>
-        </p:nvSpPr>
-        <p:spPr>
-          <a:xfrm>
-            <a:off x="1828800" y="2834639"/>
-            <a:ext cx="8503920" cy="548640"/>
-          </a:xfrm>
-          <a:prstGeom prst="rect">
-            <a:avLst/>
-          </a:prstGeom>
-          <a:noFill/>
-        </p:spPr>
-        <p:txBody>
-          <a:bodyPr wrap="square" lIns="45720" rIns="45720" tIns="18288" bIns="18288" anchor="t">
-            <a:spAutoFit/>
-          </a:bodyPr>
-          <a:lstStyle/>
-          <a:p>
-            <a:pPr algn="ctr"/>
-            <a:r>
-              <a:rPr sz="2400" b="0" i="0">
-                <a:solidFill>
-                  <a:srgbClr val="6B6B6B"/>
-                </a:solidFill>
-                <a:latin typeface="Century Schoolbook"/>
-              </a:rPr>
-              <a:t>4 × 10</a:t>
-            </a:r>
-            <a:r>
-              <a:rPr sz="2400" b="0" i="0" baseline="30000">
-                <a:solidFill>
-                  <a:srgbClr val="6B6B6B"/>
-                </a:solidFill>
-                <a:latin typeface="Century Schoolbook"/>
-              </a:rPr>
-              <a:t>2</a:t>
-            </a:r>
-          </a:p>
-        </p:txBody>
-      </p:sp>
-      <p:sp>
-        <p:nvSpPr>
-          <p:cNvPr id="15" name="TextBox 14"/>
+          <p:cNvPr id="13" name="TextBox 12"/>
           <p:cNvSpPr txBox="1"/>
           <p:nvPr/>
         </p:nvSpPr>
@@ -13084,44 +11769,9 @@
           </a:fontRef>
         </p:style>
       </p:cxnSp>
-      <p:sp>
-        <p:nvSpPr>
-          <p:cNvPr id="5" name="TextBox 4"/>
-          <p:cNvSpPr txBox="1"/>
-          <p:nvPr/>
-        </p:nvSpPr>
-        <p:spPr>
-          <a:xfrm>
-            <a:off x="777240" y="1261872"/>
-            <a:ext cx="10607040" cy="310896"/>
-          </a:xfrm>
-          <a:prstGeom prst="rect">
-            <a:avLst/>
-          </a:prstGeom>
-          <a:noFill/>
-        </p:spPr>
-        <p:txBody>
-          <a:bodyPr wrap="square" lIns="45720" rIns="45720" tIns="18288" bIns="18288" anchor="t">
-            <a:spAutoFit/>
-          </a:bodyPr>
-          <a:lstStyle/>
-          <a:p>
-            <a:pPr algn="l"/>
-            <a:r>
-              <a:rPr sz="1700" b="0" i="1">
-                <a:solidFill>
-                  <a:srgbClr val="6B6B6B"/>
-                </a:solidFill>
-                <a:latin typeface="Century Schoolbook"/>
-              </a:rPr>
-              <a:t>Boards up on three.</a:t>
-            </a:r>
-          </a:p>
-        </p:txBody>
-      </p:sp>
       <p:cxnSp>
         <p:nvCxnSpPr>
-          <p:cNvPr id="6" name="Connector 5"/>
+          <p:cNvPr id="5" name="Connector 4"/>
           <p:cNvCxnSpPr/>
           <p:nvPr/>
         </p:nvCxnSpPr>
@@ -13156,7 +11806,7 @@
       </p:cxnSp>
       <p:sp>
         <p:nvSpPr>
-          <p:cNvPr id="7" name="TextBox 6"/>
+          <p:cNvPr id="6" name="TextBox 5"/>
           <p:cNvSpPr txBox="1"/>
           <p:nvPr/>
         </p:nvSpPr>
@@ -13191,7 +11841,7 @@
       </p:sp>
       <p:sp>
         <p:nvSpPr>
-          <p:cNvPr id="8" name="TextBox 7"/>
+          <p:cNvPr id="7" name="TextBox 6"/>
           <p:cNvSpPr txBox="1"/>
           <p:nvPr/>
         </p:nvSpPr>
@@ -13226,7 +11876,7 @@
       </p:sp>
       <p:sp>
         <p:nvSpPr>
-          <p:cNvPr id="9" name="TextBox 8"/>
+          <p:cNvPr id="8" name="TextBox 7"/>
           <p:cNvSpPr txBox="1"/>
           <p:nvPr/>
         </p:nvSpPr>
@@ -13261,7 +11911,7 @@
       </p:sp>
       <p:sp>
         <p:nvSpPr>
-          <p:cNvPr id="10" name="TextBox 9"/>
+          <p:cNvPr id="9" name="TextBox 8"/>
           <p:cNvSpPr txBox="1"/>
           <p:nvPr/>
         </p:nvSpPr>
@@ -13296,7 +11946,7 @@
       </p:sp>
       <p:sp>
         <p:nvSpPr>
-          <p:cNvPr id="11" name="TextBox 10"/>
+          <p:cNvPr id="10" name="TextBox 9"/>
           <p:cNvSpPr txBox="1"/>
           <p:nvPr/>
         </p:nvSpPr>
@@ -13325,41 +11975,6 @@
                 <a:latin typeface="Century Schoolbook"/>
               </a:rPr>
               <a:t>Answer it.</a:t>
-            </a:r>
-          </a:p>
-        </p:txBody>
-      </p:sp>
-      <p:sp>
-        <p:nvSpPr>
-          <p:cNvPr id="12" name="TextBox 11"/>
-          <p:cNvSpPr txBox="1"/>
-          <p:nvPr/>
-        </p:nvSpPr>
-        <p:spPr>
-          <a:xfrm>
-            <a:off x="777240" y="4828032"/>
-            <a:ext cx="10607040" cy="365760"/>
-          </a:xfrm>
-          <a:prstGeom prst="rect">
-            <a:avLst/>
-          </a:prstGeom>
-          <a:noFill/>
-        </p:spPr>
-        <p:txBody>
-          <a:bodyPr wrap="square" lIns="45720" rIns="45720" tIns="18288" bIns="18288" anchor="t">
-            <a:spAutoFit/>
-          </a:bodyPr>
-          <a:lstStyle/>
-          <a:p>
-            <a:pPr algn="ctr"/>
-            <a:r>
-              <a:rPr sz="1900" b="0" i="1">
-                <a:solidFill>
-                  <a:srgbClr val="6B6B6B"/>
-                </a:solidFill>
-                <a:latin typeface="Century Schoolbook"/>
-              </a:rPr>
-              <a:t>E is not an error.</a:t>
             </a:r>
           </a:p>
         </p:txBody>
@@ -13487,44 +12102,9 @@
           </a:fontRef>
         </p:style>
       </p:cxnSp>
-      <p:sp>
-        <p:nvSpPr>
-          <p:cNvPr id="5" name="TextBox 4"/>
-          <p:cNvSpPr txBox="1"/>
-          <p:nvPr/>
-        </p:nvSpPr>
-        <p:spPr>
-          <a:xfrm>
-            <a:off x="777240" y="1261872"/>
-            <a:ext cx="10607040" cy="310896"/>
-          </a:xfrm>
-          <a:prstGeom prst="rect">
-            <a:avLst/>
-          </a:prstGeom>
-          <a:noFill/>
-        </p:spPr>
-        <p:txBody>
-          <a:bodyPr wrap="square" lIns="45720" rIns="45720" tIns="18288" bIns="18288" anchor="t">
-            <a:spAutoFit/>
-          </a:bodyPr>
-          <a:lstStyle/>
-          <a:p>
-            <a:pPr algn="l"/>
-            <a:r>
-              <a:rPr sz="1700" b="0" i="1">
-                <a:solidFill>
-                  <a:srgbClr val="6B6B6B"/>
-                </a:solidFill>
-                <a:latin typeface="Century Schoolbook"/>
-              </a:rPr>
-              <a:t>Answers.</a:t>
-            </a:r>
-          </a:p>
-        </p:txBody>
-      </p:sp>
       <p:cxnSp>
         <p:nvCxnSpPr>
-          <p:cNvPr id="6" name="Connector 5"/>
+          <p:cNvPr id="5" name="Connector 4"/>
           <p:cNvCxnSpPr/>
           <p:nvPr/>
         </p:nvCxnSpPr>
@@ -13559,7 +12139,7 @@
       </p:cxnSp>
       <p:sp>
         <p:nvSpPr>
-          <p:cNvPr id="7" name="TextBox 6"/>
+          <p:cNvPr id="6" name="TextBox 5"/>
           <p:cNvSpPr txBox="1"/>
           <p:nvPr/>
         </p:nvSpPr>
@@ -13594,7 +12174,7 @@
       </p:sp>
       <p:sp>
         <p:nvSpPr>
-          <p:cNvPr id="8" name="TextBox 7"/>
+          <p:cNvPr id="7" name="TextBox 6"/>
           <p:cNvSpPr txBox="1"/>
           <p:nvPr/>
         </p:nvSpPr>
@@ -13629,13 +12209,13 @@
       </p:sp>
       <p:sp>
         <p:nvSpPr>
-          <p:cNvPr id="9" name="TextBox 8"/>
-          <p:cNvSpPr txBox="1"/>
-          <p:nvPr/>
-        </p:nvSpPr>
-        <p:spPr>
-          <a:xfrm>
-            <a:off x="1874519" y="1760220"/>
+          <p:cNvPr id="8" name="TextBox 7"/>
+          <p:cNvSpPr txBox="1"/>
+          <p:nvPr/>
+        </p:nvSpPr>
+        <p:spPr>
+          <a:xfrm>
+            <a:off x="1874519" y="1440180"/>
             <a:ext cx="5670993" cy="457200"/>
           </a:xfrm>
           <a:prstGeom prst="rect">
@@ -13664,7 +12244,7 @@
       </p:sp>
       <p:pic>
         <p:nvPicPr>
-          <p:cNvPr id="10" name="Picture 9" descr="1f7555b99367de55.png"/>
+          <p:cNvPr id="9" name="Picture 8" descr="1f7555b99367de55.png"/>
           <p:cNvPicPr>
             <a:picLocks noChangeAspect="1"/>
           </p:cNvPicPr>
@@ -13678,7 +12258,7 @@
         </p:blipFill>
         <p:spPr>
           <a:xfrm>
-            <a:off x="7408353" y="1850136"/>
+            <a:off x="7408353" y="1530096"/>
             <a:ext cx="585216" cy="277368"/>
           </a:xfrm>
           <a:prstGeom prst="rect">
@@ -13688,13 +12268,13 @@
       </p:pic>
       <p:sp>
         <p:nvSpPr>
-          <p:cNvPr id="11" name="TextBox 10"/>
-          <p:cNvSpPr txBox="1"/>
-          <p:nvPr/>
-        </p:nvSpPr>
-        <p:spPr>
-          <a:xfrm>
-            <a:off x="8542209" y="1760220"/>
+          <p:cNvPr id="10" name="TextBox 9"/>
+          <p:cNvSpPr txBox="1"/>
+          <p:nvPr/>
+        </p:nvSpPr>
+        <p:spPr>
+          <a:xfrm>
+            <a:off x="8542209" y="1440180"/>
             <a:ext cx="769826" cy="457200"/>
           </a:xfrm>
           <a:prstGeom prst="rect">
@@ -13732,13 +12312,13 @@
       </p:sp>
       <p:sp>
         <p:nvSpPr>
-          <p:cNvPr id="12" name="TextBox 11"/>
-          <p:cNvSpPr txBox="1"/>
-          <p:nvPr/>
-        </p:nvSpPr>
-        <p:spPr>
-          <a:xfrm>
-            <a:off x="1874519" y="2372868"/>
+          <p:cNvPr id="11" name="TextBox 10"/>
+          <p:cNvSpPr txBox="1"/>
+          <p:nvPr/>
+        </p:nvSpPr>
+        <p:spPr>
+          <a:xfrm>
+            <a:off x="1874519" y="2052828"/>
             <a:ext cx="3064939" cy="457200"/>
           </a:xfrm>
           <a:prstGeom prst="rect">
@@ -13767,7 +12347,7 @@
       </p:sp>
       <p:pic>
         <p:nvPicPr>
-          <p:cNvPr id="13" name="Picture 12" descr="1a29715e97268546.png"/>
+          <p:cNvPr id="12" name="Picture 11" descr="1a29715e97268546.png"/>
           <p:cNvPicPr>
             <a:picLocks noChangeAspect="1"/>
           </p:cNvPicPr>
@@ -13781,7 +12361,7 @@
         </p:blipFill>
         <p:spPr>
           <a:xfrm>
-            <a:off x="4802299" y="2433828"/>
+            <a:off x="4802299" y="2113788"/>
             <a:ext cx="774192" cy="335280"/>
           </a:xfrm>
           <a:prstGeom prst="rect">
@@ -13791,13 +12371,13 @@
       </p:pic>
       <p:sp>
         <p:nvSpPr>
-          <p:cNvPr id="14" name="TextBox 13"/>
-          <p:cNvSpPr txBox="1"/>
-          <p:nvPr/>
-        </p:nvSpPr>
-        <p:spPr>
-          <a:xfrm>
-            <a:off x="6125131" y="2372868"/>
+          <p:cNvPr id="13" name="TextBox 12"/>
+          <p:cNvSpPr txBox="1"/>
+          <p:nvPr/>
+        </p:nvSpPr>
+        <p:spPr>
+          <a:xfrm>
+            <a:off x="6125131" y="2052828"/>
             <a:ext cx="2426493" cy="457200"/>
           </a:xfrm>
           <a:prstGeom prst="rect">
@@ -13844,13 +12424,13 @@
       </p:sp>
       <p:sp>
         <p:nvSpPr>
-          <p:cNvPr id="15" name="TextBox 14"/>
-          <p:cNvSpPr txBox="1"/>
-          <p:nvPr/>
-        </p:nvSpPr>
-        <p:spPr>
-          <a:xfrm>
-            <a:off x="1874519" y="2985516"/>
+          <p:cNvPr id="14" name="TextBox 13"/>
+          <p:cNvSpPr txBox="1"/>
+          <p:nvPr/>
+        </p:nvSpPr>
+        <p:spPr>
+          <a:xfrm>
+            <a:off x="1874519" y="2665476"/>
             <a:ext cx="3064939" cy="457200"/>
           </a:xfrm>
           <a:prstGeom prst="rect">
@@ -13879,7 +12459,7 @@
       </p:sp>
       <p:pic>
         <p:nvPicPr>
-          <p:cNvPr id="16" name="Picture 15" descr="dcb33f053a4bb301.png"/>
+          <p:cNvPr id="15" name="Picture 14" descr="dcb33f053a4bb301.png"/>
           <p:cNvPicPr>
             <a:picLocks noChangeAspect="1"/>
           </p:cNvPicPr>
@@ -13893,7 +12473,7 @@
         </p:blipFill>
         <p:spPr>
           <a:xfrm>
-            <a:off x="4802299" y="3009900"/>
+            <a:off x="4802299" y="2689860"/>
             <a:ext cx="853440" cy="408432"/>
           </a:xfrm>
           <a:prstGeom prst="rect">
@@ -13903,13 +12483,13 @@
       </p:pic>
       <p:sp>
         <p:nvSpPr>
-          <p:cNvPr id="17" name="TextBox 16"/>
-          <p:cNvSpPr txBox="1"/>
-          <p:nvPr/>
-        </p:nvSpPr>
-        <p:spPr>
-          <a:xfrm>
-            <a:off x="6204379" y="2985516"/>
+          <p:cNvPr id="16" name="TextBox 15"/>
+          <p:cNvSpPr txBox="1"/>
+          <p:nvPr/>
+        </p:nvSpPr>
+        <p:spPr>
+          <a:xfrm>
+            <a:off x="6204379" y="2665476"/>
             <a:ext cx="565792" cy="457200"/>
           </a:xfrm>
           <a:prstGeom prst="rect">
@@ -13938,13 +12518,13 @@
       </p:sp>
       <p:sp>
         <p:nvSpPr>
-          <p:cNvPr id="18" name="TextBox 17"/>
-          <p:cNvSpPr txBox="1"/>
-          <p:nvPr/>
-        </p:nvSpPr>
-        <p:spPr>
-          <a:xfrm>
-            <a:off x="1874519" y="3598164"/>
+          <p:cNvPr id="17" name="TextBox 16"/>
+          <p:cNvSpPr txBox="1"/>
+          <p:nvPr/>
+        </p:nvSpPr>
+        <p:spPr>
+          <a:xfrm>
+            <a:off x="1874519" y="3278124"/>
             <a:ext cx="5997604" cy="457200"/>
           </a:xfrm>
           <a:prstGeom prst="rect">
@@ -13973,13 +12553,13 @@
       </p:sp>
       <p:sp>
         <p:nvSpPr>
-          <p:cNvPr id="19" name="TextBox 18"/>
-          <p:cNvSpPr txBox="1"/>
-          <p:nvPr/>
-        </p:nvSpPr>
-        <p:spPr>
-          <a:xfrm>
-            <a:off x="8283604" y="3598164"/>
+          <p:cNvPr id="18" name="TextBox 17"/>
+          <p:cNvSpPr txBox="1"/>
+          <p:nvPr/>
+        </p:nvSpPr>
+        <p:spPr>
+          <a:xfrm>
+            <a:off x="8283604" y="3278124"/>
             <a:ext cx="1511761" cy="457200"/>
           </a:xfrm>
           <a:prstGeom prst="rect">
@@ -14129,44 +12709,9 @@
           </a:fontRef>
         </p:style>
       </p:cxnSp>
-      <p:sp>
-        <p:nvSpPr>
-          <p:cNvPr id="5" name="TextBox 4"/>
-          <p:cNvSpPr txBox="1"/>
-          <p:nvPr/>
-        </p:nvSpPr>
-        <p:spPr>
-          <a:xfrm>
-            <a:off x="777240" y="1261872"/>
-            <a:ext cx="10607040" cy="310896"/>
-          </a:xfrm>
-          <a:prstGeom prst="rect">
-            <a:avLst/>
-          </a:prstGeom>
-          <a:noFill/>
-        </p:spPr>
-        <p:txBody>
-          <a:bodyPr wrap="square" lIns="45720" rIns="45720" tIns="18288" bIns="18288" anchor="t">
-            <a:spAutoFit/>
-          </a:bodyPr>
-          <a:lstStyle/>
-          <a:p>
-            <a:pPr algn="l"/>
-            <a:r>
-              <a:rPr sz="1700" b="0" i="1">
-                <a:solidFill>
-                  <a:srgbClr val="6B6B6B"/>
-                </a:solidFill>
-                <a:latin typeface="Century Schoolbook"/>
-              </a:rPr>
-              <a:t>Answer.</a:t>
-            </a:r>
-          </a:p>
-        </p:txBody>
-      </p:sp>
       <p:cxnSp>
         <p:nvCxnSpPr>
-          <p:cNvPr id="6" name="Connector 5"/>
+          <p:cNvPr id="5" name="Connector 4"/>
           <p:cNvCxnSpPr/>
           <p:nvPr/>
         </p:nvCxnSpPr>
@@ -14201,7 +12746,7 @@
       </p:cxnSp>
       <p:sp>
         <p:nvSpPr>
-          <p:cNvPr id="7" name="TextBox 6"/>
+          <p:cNvPr id="6" name="TextBox 5"/>
           <p:cNvSpPr txBox="1"/>
           <p:nvPr/>
         </p:nvSpPr>
@@ -14236,7 +12781,7 @@
       </p:sp>
       <p:sp>
         <p:nvSpPr>
-          <p:cNvPr id="8" name="TextBox 7"/>
+          <p:cNvPr id="7" name="TextBox 6"/>
           <p:cNvSpPr txBox="1"/>
           <p:nvPr/>
         </p:nvSpPr>
@@ -14271,7 +12816,7 @@
       </p:sp>
       <p:sp>
         <p:nvSpPr>
-          <p:cNvPr id="9" name="TextBox 8"/>
+          <p:cNvPr id="8" name="TextBox 7"/>
           <p:cNvSpPr txBox="1"/>
           <p:nvPr/>
         </p:nvSpPr>
@@ -14306,7 +12851,7 @@
       </p:sp>
       <p:sp>
         <p:nvSpPr>
-          <p:cNvPr id="10" name="TextBox 9"/>
+          <p:cNvPr id="9" name="TextBox 8"/>
           <p:cNvSpPr txBox="1"/>
           <p:nvPr/>
         </p:nvSpPr>
@@ -14341,51 +12886,7 @@
       </p:sp>
       <p:sp>
         <p:nvSpPr>
-          <p:cNvPr id="11" name="TextBox 10"/>
-          <p:cNvSpPr txBox="1"/>
-          <p:nvPr/>
-        </p:nvSpPr>
-        <p:spPr>
-          <a:xfrm>
-            <a:off x="1828800" y="3298598"/>
-            <a:ext cx="8503920" cy="548640"/>
-          </a:xfrm>
-          <a:prstGeom prst="rect">
-            <a:avLst/>
-          </a:prstGeom>
-          <a:noFill/>
-        </p:spPr>
-        <p:txBody>
-          <a:bodyPr wrap="square" lIns="45720" rIns="45720" tIns="18288" bIns="18288" anchor="t">
-            <a:spAutoFit/>
-          </a:bodyPr>
-          <a:lstStyle/>
-          <a:p>
-            <a:pPr algn="ctr"/>
-            <a:r>
-              <a:rPr sz="2400" b="0" i="0">
-                <a:solidFill>
-                  <a:srgbClr val="6B6B6B"/>
-                </a:solidFill>
-                <a:latin typeface="Century Schoolbook"/>
-              </a:rPr>
-              <a:t>3.5 × 10</a:t>
-            </a:r>
-            <a:r>
-              <a:rPr sz="2400" b="0" i="0" baseline="30000">
-                <a:solidFill>
-                  <a:srgbClr val="6B6B6B"/>
-                </a:solidFill>
-                <a:latin typeface="Century Schoolbook"/>
-              </a:rPr>
-              <a:t>9</a:t>
-            </a:r>
-          </a:p>
-        </p:txBody>
-      </p:sp>
-      <p:sp>
-        <p:nvSpPr>
-          <p:cNvPr id="12" name="TextBox 11"/>
+          <p:cNvPr id="10" name="TextBox 9"/>
           <p:cNvSpPr txBox="1"/>
           <p:nvPr/>
         </p:nvSpPr>
@@ -14541,44 +13042,9 @@
           </a:fontRef>
         </p:style>
       </p:cxnSp>
-      <p:sp>
-        <p:nvSpPr>
-          <p:cNvPr id="5" name="TextBox 4"/>
-          <p:cNvSpPr txBox="1"/>
-          <p:nvPr/>
-        </p:nvSpPr>
-        <p:spPr>
-          <a:xfrm>
-            <a:off x="777240" y="1261872"/>
-            <a:ext cx="10607040" cy="310896"/>
-          </a:xfrm>
-          <a:prstGeom prst="rect">
-            <a:avLst/>
-          </a:prstGeom>
-          <a:noFill/>
-        </p:spPr>
-        <p:txBody>
-          <a:bodyPr wrap="square" lIns="45720" rIns="45720" tIns="18288" bIns="18288" anchor="t">
-            <a:spAutoFit/>
-          </a:bodyPr>
-          <a:lstStyle/>
-          <a:p>
-            <a:pPr algn="l"/>
-            <a:r>
-              <a:rPr sz="1700" b="0" i="1">
-                <a:solidFill>
-                  <a:srgbClr val="6B6B6B"/>
-                </a:solidFill>
-                <a:latin typeface="Century Schoolbook"/>
-              </a:rPr>
-              <a:t>Take your time. Boards up when you have written it.</a:t>
-            </a:r>
-          </a:p>
-        </p:txBody>
-      </p:sp>
       <p:cxnSp>
         <p:nvCxnSpPr>
-          <p:cNvPr id="6" name="Connector 5"/>
+          <p:cNvPr id="5" name="Connector 4"/>
           <p:cNvCxnSpPr/>
           <p:nvPr/>
         </p:nvCxnSpPr>
@@ -14613,7 +13079,7 @@
       </p:cxnSp>
       <p:sp>
         <p:nvSpPr>
-          <p:cNvPr id="7" name="TextBox 6"/>
+          <p:cNvPr id="6" name="TextBox 5"/>
           <p:cNvSpPr txBox="1"/>
           <p:nvPr/>
         </p:nvSpPr>
@@ -14648,7 +13114,7 @@
       </p:sp>
       <p:sp>
         <p:nvSpPr>
-          <p:cNvPr id="8" name="TextBox 7"/>
+          <p:cNvPr id="7" name="TextBox 6"/>
           <p:cNvSpPr txBox="1"/>
           <p:nvPr/>
         </p:nvSpPr>
@@ -14683,7 +13149,7 @@
       </p:sp>
       <p:sp>
         <p:nvSpPr>
-          <p:cNvPr id="9" name="TextBox 8"/>
+          <p:cNvPr id="8" name="TextBox 7"/>
           <p:cNvSpPr txBox="1"/>
           <p:nvPr/>
         </p:nvSpPr>
@@ -14718,7 +13184,7 @@
       </p:sp>
       <p:pic>
         <p:nvPicPr>
-          <p:cNvPr id="10" name="Picture 9" descr="8eae714437c97eeb.png"/>
+          <p:cNvPr id="9" name="Picture 8" descr="8eae714437c97eeb.png"/>
           <p:cNvPicPr>
             <a:picLocks noChangeAspect="1"/>
           </p:cNvPicPr>
@@ -14742,7 +13208,7 @@
       </p:pic>
       <p:sp>
         <p:nvSpPr>
-          <p:cNvPr id="11" name="TextBox 10"/>
+          <p:cNvPr id="10" name="TextBox 9"/>
           <p:cNvSpPr txBox="1"/>
           <p:nvPr/>
         </p:nvSpPr>
@@ -14777,7 +13243,7 @@
       </p:sp>
       <p:sp>
         <p:nvSpPr>
-          <p:cNvPr id="12" name="TextBox 11"/>
+          <p:cNvPr id="11" name="TextBox 10"/>
           <p:cNvSpPr txBox="1"/>
           <p:nvPr/>
         </p:nvSpPr>
@@ -14812,7 +13278,7 @@
       </p:sp>
       <p:sp>
         <p:nvSpPr>
-          <p:cNvPr id="13" name="TextBox 12"/>
+          <p:cNvPr id="12" name="TextBox 11"/>
           <p:cNvSpPr txBox="1"/>
           <p:nvPr/>
         </p:nvSpPr>
@@ -14841,41 +13307,6 @@
                 <a:latin typeface="Century Schoolbook"/>
               </a:rPr>
               <a:t>Write your answer in sentences.</a:t>
-            </a:r>
-          </a:p>
-        </p:txBody>
-      </p:sp>
-      <p:sp>
-        <p:nvSpPr>
-          <p:cNvPr id="14" name="TextBox 13"/>
-          <p:cNvSpPr txBox="1"/>
-          <p:nvPr/>
-        </p:nvSpPr>
-        <p:spPr>
-          <a:xfrm>
-            <a:off x="777240" y="4828032"/>
-            <a:ext cx="10607040" cy="365760"/>
-          </a:xfrm>
-          <a:prstGeom prst="rect">
-            <a:avLst/>
-          </a:prstGeom>
-          <a:noFill/>
-        </p:spPr>
-        <p:txBody>
-          <a:bodyPr wrap="square" lIns="45720" rIns="45720" tIns="18288" bIns="18288" anchor="t">
-            <a:spAutoFit/>
-          </a:bodyPr>
-          <a:lstStyle/>
-          <a:p>
-            <a:pPr algn="ctr"/>
-            <a:r>
-              <a:rPr sz="1900" b="0" i="1">
-                <a:solidFill>
-                  <a:srgbClr val="6B6B6B"/>
-                </a:solidFill>
-                <a:latin typeface="Century Schoolbook"/>
-              </a:rPr>
-              <a:t>Use the definition.</a:t>
             </a:r>
           </a:p>
         </p:txBody>
@@ -15003,44 +13434,9 @@
           </a:fontRef>
         </p:style>
       </p:cxnSp>
-      <p:sp>
-        <p:nvSpPr>
-          <p:cNvPr id="5" name="TextBox 4"/>
-          <p:cNvSpPr txBox="1"/>
-          <p:nvPr/>
-        </p:nvSpPr>
-        <p:spPr>
-          <a:xfrm>
-            <a:off x="777240" y="1261872"/>
-            <a:ext cx="10607040" cy="310896"/>
-          </a:xfrm>
-          <a:prstGeom prst="rect">
-            <a:avLst/>
-          </a:prstGeom>
-          <a:noFill/>
-        </p:spPr>
-        <p:txBody>
-          <a:bodyPr wrap="square" lIns="45720" rIns="45720" tIns="18288" bIns="18288" anchor="t">
-            <a:spAutoFit/>
-          </a:bodyPr>
-          <a:lstStyle/>
-          <a:p>
-            <a:pPr algn="l"/>
-            <a:r>
-              <a:rPr sz="1700" b="0" i="1">
-                <a:solidFill>
-                  <a:srgbClr val="6B6B6B"/>
-                </a:solidFill>
-                <a:latin typeface="Century Schoolbook"/>
-              </a:rPr>
-              <a:t>Answer.</a:t>
-            </a:r>
-          </a:p>
-        </p:txBody>
-      </p:sp>
       <p:cxnSp>
         <p:nvCxnSpPr>
-          <p:cNvPr id="6" name="Connector 5"/>
+          <p:cNvPr id="5" name="Connector 4"/>
           <p:cNvCxnSpPr/>
           <p:nvPr/>
         </p:nvCxnSpPr>
@@ -15075,7 +13471,7 @@
       </p:cxnSp>
       <p:sp>
         <p:nvSpPr>
-          <p:cNvPr id="7" name="TextBox 6"/>
+          <p:cNvPr id="6" name="TextBox 5"/>
           <p:cNvSpPr txBox="1"/>
           <p:nvPr/>
         </p:nvSpPr>
@@ -15110,7 +13506,7 @@
       </p:sp>
       <p:sp>
         <p:nvSpPr>
-          <p:cNvPr id="8" name="TextBox 7"/>
+          <p:cNvPr id="7" name="TextBox 6"/>
           <p:cNvSpPr txBox="1"/>
           <p:nvPr/>
         </p:nvSpPr>
@@ -15145,7 +13541,7 @@
       </p:sp>
       <p:sp>
         <p:nvSpPr>
-          <p:cNvPr id="9" name="TextBox 8"/>
+          <p:cNvPr id="8" name="TextBox 7"/>
           <p:cNvSpPr txBox="1"/>
           <p:nvPr/>
         </p:nvSpPr>
@@ -15180,7 +13576,7 @@
       </p:sp>
       <p:pic>
         <p:nvPicPr>
-          <p:cNvPr id="10" name="Picture 9" descr="b1be6639231b1d2d.png"/>
+          <p:cNvPr id="9" name="Picture 8" descr="b1be6639231b1d2d.png"/>
           <p:cNvPicPr>
             <a:picLocks noChangeAspect="1"/>
           </p:cNvPicPr>
@@ -15204,7 +13600,7 @@
       </p:pic>
       <p:sp>
         <p:nvSpPr>
-          <p:cNvPr id="11" name="TextBox 10"/>
+          <p:cNvPr id="10" name="TextBox 9"/>
           <p:cNvSpPr txBox="1"/>
           <p:nvPr/>
         </p:nvSpPr>
@@ -15239,7 +13635,7 @@
       </p:sp>
       <p:sp>
         <p:nvSpPr>
-          <p:cNvPr id="12" name="TextBox 11"/>
+          <p:cNvPr id="11" name="TextBox 10"/>
           <p:cNvSpPr txBox="1"/>
           <p:nvPr/>
         </p:nvSpPr>
@@ -15274,42 +13670,7 @@
       </p:sp>
       <p:sp>
         <p:nvSpPr>
-          <p:cNvPr id="13" name="TextBox 12"/>
-          <p:cNvSpPr txBox="1"/>
-          <p:nvPr/>
-        </p:nvSpPr>
-        <p:spPr>
-          <a:xfrm>
-            <a:off x="1828800" y="3355848"/>
-            <a:ext cx="8503920" cy="548640"/>
-          </a:xfrm>
-          <a:prstGeom prst="rect">
-            <a:avLst/>
-          </a:prstGeom>
-          <a:noFill/>
-        </p:spPr>
-        <p:txBody>
-          <a:bodyPr wrap="square" lIns="45720" rIns="45720" tIns="18288" bIns="18288" anchor="t">
-            <a:spAutoFit/>
-          </a:bodyPr>
-          <a:lstStyle/>
-          <a:p>
-            <a:pPr algn="ctr"/>
-            <a:r>
-              <a:rPr sz="2400" b="0" i="0">
-                <a:solidFill>
-                  <a:srgbClr val="6B6B6B"/>
-                </a:solidFill>
-                <a:latin typeface="Century Schoolbook"/>
-              </a:rPr>
-              <a:t>equal, yes — scientific notation, no</a:t>
-            </a:r>
-          </a:p>
-        </p:txBody>
-      </p:sp>
-      <p:sp>
-        <p:nvSpPr>
-          <p:cNvPr id="14" name="TextBox 13"/>
+          <p:cNvPr id="12" name="TextBox 11"/>
           <p:cNvSpPr txBox="1"/>
           <p:nvPr/>
         </p:nvSpPr>
@@ -15483,44 +13844,9 @@
           </a:fontRef>
         </p:style>
       </p:cxnSp>
-      <p:sp>
-        <p:nvSpPr>
-          <p:cNvPr id="5" name="TextBox 4"/>
-          <p:cNvSpPr txBox="1"/>
-          <p:nvPr/>
-        </p:nvSpPr>
-        <p:spPr>
-          <a:xfrm>
-            <a:off x="777240" y="1261872"/>
-            <a:ext cx="10607040" cy="310896"/>
-          </a:xfrm>
-          <a:prstGeom prst="rect">
-            <a:avLst/>
-          </a:prstGeom>
-          <a:noFill/>
-        </p:spPr>
-        <p:txBody>
-          <a:bodyPr wrap="square" lIns="45720" rIns="45720" tIns="18288" bIns="18288" anchor="t">
-            <a:spAutoFit/>
-          </a:bodyPr>
-          <a:lstStyle/>
-          <a:p>
-            <a:pPr algn="l"/>
-            <a:r>
-              <a:rPr sz="1700" b="0" i="1">
-                <a:solidFill>
-                  <a:srgbClr val="6B6B6B"/>
-                </a:solidFill>
-                <a:latin typeface="Century Schoolbook"/>
-              </a:rPr>
-              <a:t>Six questions. On your own, in silence.</a:t>
-            </a:r>
-          </a:p>
-        </p:txBody>
-      </p:sp>
       <p:cxnSp>
         <p:nvCxnSpPr>
-          <p:cNvPr id="6" name="Connector 5"/>
+          <p:cNvPr id="5" name="Connector 4"/>
           <p:cNvCxnSpPr/>
           <p:nvPr/>
         </p:nvCxnSpPr>
@@ -15555,7 +13881,7 @@
       </p:cxnSp>
       <p:sp>
         <p:nvSpPr>
-          <p:cNvPr id="7" name="TextBox 6"/>
+          <p:cNvPr id="6" name="TextBox 5"/>
           <p:cNvSpPr txBox="1"/>
           <p:nvPr/>
         </p:nvSpPr>
@@ -15590,7 +13916,7 @@
       </p:sp>
       <p:sp>
         <p:nvSpPr>
-          <p:cNvPr id="8" name="TextBox 7"/>
+          <p:cNvPr id="7" name="TextBox 6"/>
           <p:cNvSpPr txBox="1"/>
           <p:nvPr/>
         </p:nvSpPr>
@@ -15625,7 +13951,7 @@
       </p:sp>
       <p:sp>
         <p:nvSpPr>
-          <p:cNvPr id="9" name="TextBox 8"/>
+          <p:cNvPr id="8" name="TextBox 7"/>
           <p:cNvSpPr txBox="1"/>
           <p:nvPr/>
         </p:nvSpPr>
@@ -15660,7 +13986,7 @@
       </p:sp>
       <p:sp>
         <p:nvSpPr>
-          <p:cNvPr id="10" name="TextBox 9"/>
+          <p:cNvPr id="9" name="TextBox 8"/>
           <p:cNvSpPr txBox="1"/>
           <p:nvPr/>
         </p:nvSpPr>
@@ -15695,7 +14021,7 @@
       </p:sp>
       <p:sp>
         <p:nvSpPr>
-          <p:cNvPr id="11" name="TextBox 10"/>
+          <p:cNvPr id="10" name="TextBox 9"/>
           <p:cNvSpPr txBox="1"/>
           <p:nvPr/>
         </p:nvSpPr>
@@ -15730,7 +14056,7 @@
       </p:sp>
       <p:sp>
         <p:nvSpPr>
-          <p:cNvPr id="12" name="TextBox 11"/>
+          <p:cNvPr id="11" name="TextBox 10"/>
           <p:cNvSpPr txBox="1"/>
           <p:nvPr/>
         </p:nvSpPr>
@@ -15765,7 +14091,7 @@
       </p:sp>
       <p:sp>
         <p:nvSpPr>
-          <p:cNvPr id="13" name="TextBox 12"/>
+          <p:cNvPr id="12" name="TextBox 11"/>
           <p:cNvSpPr txBox="1"/>
           <p:nvPr/>
         </p:nvSpPr>
@@ -15800,7 +14126,7 @@
       </p:sp>
       <p:sp>
         <p:nvSpPr>
-          <p:cNvPr id="14" name="TextBox 13"/>
+          <p:cNvPr id="13" name="TextBox 12"/>
           <p:cNvSpPr txBox="1"/>
           <p:nvPr/>
         </p:nvSpPr>
@@ -15956,44 +14282,9 @@
           </a:fontRef>
         </p:style>
       </p:cxnSp>
-      <p:sp>
-        <p:nvSpPr>
-          <p:cNvPr id="5" name="TextBox 4"/>
-          <p:cNvSpPr txBox="1"/>
-          <p:nvPr/>
-        </p:nvSpPr>
-        <p:spPr>
-          <a:xfrm>
-            <a:off x="777240" y="1261872"/>
-            <a:ext cx="10607040" cy="310896"/>
-          </a:xfrm>
-          <a:prstGeom prst="rect">
-            <a:avLst/>
-          </a:prstGeom>
-          <a:noFill/>
-        </p:spPr>
-        <p:txBody>
-          <a:bodyPr wrap="square" lIns="45720" rIns="45720" tIns="18288" bIns="18288" anchor="t">
-            <a:spAutoFit/>
-          </a:bodyPr>
-          <a:lstStyle/>
-          <a:p>
-            <a:pPr algn="l"/>
-            <a:r>
-              <a:rPr sz="1700" b="0" i="1">
-                <a:solidFill>
-                  <a:srgbClr val="6B6B6B"/>
-                </a:solidFill>
-                <a:latin typeface="Century Schoolbook"/>
-              </a:rPr>
-              <a:t>Last five minutes.</a:t>
-            </a:r>
-          </a:p>
-        </p:txBody>
-      </p:sp>
       <p:cxnSp>
         <p:nvCxnSpPr>
-          <p:cNvPr id="6" name="Connector 5"/>
+          <p:cNvPr id="5" name="Connector 4"/>
           <p:cNvCxnSpPr/>
           <p:nvPr/>
         </p:nvCxnSpPr>
@@ -16028,7 +14319,7 @@
       </p:cxnSp>
       <p:sp>
         <p:nvSpPr>
-          <p:cNvPr id="7" name="TextBox 6"/>
+          <p:cNvPr id="6" name="TextBox 5"/>
           <p:cNvSpPr txBox="1"/>
           <p:nvPr/>
         </p:nvSpPr>
@@ -16063,7 +14354,7 @@
       </p:sp>
       <p:sp>
         <p:nvSpPr>
-          <p:cNvPr id="8" name="TextBox 7"/>
+          <p:cNvPr id="7" name="TextBox 6"/>
           <p:cNvSpPr txBox="1"/>
           <p:nvPr/>
         </p:nvSpPr>
@@ -16098,7 +14389,7 @@
       </p:sp>
       <p:sp>
         <p:nvSpPr>
-          <p:cNvPr id="9" name="TextBox 8"/>
+          <p:cNvPr id="8" name="TextBox 7"/>
           <p:cNvSpPr txBox="1"/>
           <p:nvPr/>
         </p:nvSpPr>
@@ -16133,7 +14424,7 @@
       </p:sp>
       <p:sp>
         <p:nvSpPr>
-          <p:cNvPr id="10" name="TextBox 9"/>
+          <p:cNvPr id="9" name="TextBox 8"/>
           <p:cNvSpPr txBox="1"/>
           <p:nvPr/>
         </p:nvSpPr>
@@ -16168,7 +14459,7 @@
       </p:sp>
       <p:sp>
         <p:nvSpPr>
-          <p:cNvPr id="11" name="TextBox 10"/>
+          <p:cNvPr id="10" name="TextBox 9"/>
           <p:cNvSpPr txBox="1"/>
           <p:nvPr/>
         </p:nvSpPr>
@@ -16203,7 +14494,7 @@
       </p:sp>
       <p:sp>
         <p:nvSpPr>
-          <p:cNvPr id="12" name="TextBox 11"/>
+          <p:cNvPr id="11" name="TextBox 10"/>
           <p:cNvSpPr txBox="1"/>
           <p:nvPr/>
         </p:nvSpPr>
@@ -16238,7 +14529,7 @@
       </p:sp>
       <p:sp>
         <p:nvSpPr>
-          <p:cNvPr id="13" name="TextBox 12"/>
+          <p:cNvPr id="12" name="TextBox 11"/>
           <p:cNvSpPr txBox="1"/>
           <p:nvPr/>
         </p:nvSpPr>
@@ -16273,7 +14564,7 @@
       </p:sp>
       <p:sp>
         <p:nvSpPr>
-          <p:cNvPr id="14" name="TextBox 13"/>
+          <p:cNvPr id="13" name="TextBox 12"/>
           <p:cNvSpPr txBox="1"/>
           <p:nvPr/>
         </p:nvSpPr>
@@ -16308,7 +14599,7 @@
       </p:sp>
       <p:sp>
         <p:nvSpPr>
-          <p:cNvPr id="15" name="TextBox 14"/>
+          <p:cNvPr id="14" name="TextBox 13"/>
           <p:cNvSpPr txBox="1"/>
           <p:nvPr/>
         </p:nvSpPr>
@@ -16343,7 +14634,7 @@
       </p:sp>
       <p:sp>
         <p:nvSpPr>
-          <p:cNvPr id="16" name="TextBox 15"/>
+          <p:cNvPr id="15" name="TextBox 14"/>
           <p:cNvSpPr txBox="1"/>
           <p:nvPr/>
         </p:nvSpPr>
@@ -16378,7 +14669,7 @@
       </p:sp>
       <p:sp>
         <p:nvSpPr>
-          <p:cNvPr id="17" name="TextBox 16"/>
+          <p:cNvPr id="16" name="TextBox 15"/>
           <p:cNvSpPr txBox="1"/>
           <p:nvPr/>
         </p:nvSpPr>
@@ -16413,7 +14704,7 @@
       </p:sp>
       <p:sp>
         <p:nvSpPr>
-          <p:cNvPr id="18" name="TextBox 17"/>
+          <p:cNvPr id="17" name="TextBox 16"/>
           <p:cNvSpPr txBox="1"/>
           <p:nvPr/>
         </p:nvSpPr>
@@ -16569,44 +14860,9 @@
           </a:fontRef>
         </p:style>
       </p:cxnSp>
-      <p:sp>
-        <p:nvSpPr>
-          <p:cNvPr id="5" name="TextBox 4"/>
-          <p:cNvSpPr txBox="1"/>
-          <p:nvPr/>
-        </p:nvSpPr>
-        <p:spPr>
-          <a:xfrm>
-            <a:off x="777240" y="1261872"/>
-            <a:ext cx="10607040" cy="310896"/>
-          </a:xfrm>
-          <a:prstGeom prst="rect">
-            <a:avLst/>
-          </a:prstGeom>
-          <a:noFill/>
-        </p:spPr>
-        <p:txBody>
-          <a:bodyPr wrap="square" lIns="45720" rIns="45720" tIns="18288" bIns="18288" anchor="t">
-            <a:spAutoFit/>
-          </a:bodyPr>
-          <a:lstStyle/>
-          <a:p>
-            <a:pPr algn="l"/>
-            <a:r>
-              <a:rPr sz="1700" b="0" i="1">
-                <a:solidFill>
-                  <a:srgbClr val="6B6B6B"/>
-                </a:solidFill>
-                <a:latin typeface="Century Schoolbook"/>
-              </a:rPr>
-              <a:t>Copy the table.</a:t>
-            </a:r>
-          </a:p>
-        </p:txBody>
-      </p:sp>
       <p:cxnSp>
         <p:nvCxnSpPr>
-          <p:cNvPr id="6" name="Connector 5"/>
+          <p:cNvPr id="5" name="Connector 4"/>
           <p:cNvCxnSpPr/>
           <p:nvPr/>
         </p:nvCxnSpPr>
@@ -16641,7 +14897,7 @@
       </p:cxnSp>
       <p:sp>
         <p:nvSpPr>
-          <p:cNvPr id="7" name="TextBox 6"/>
+          <p:cNvPr id="6" name="TextBox 5"/>
           <p:cNvSpPr txBox="1"/>
           <p:nvPr/>
         </p:nvSpPr>
@@ -16676,7 +14932,7 @@
       </p:sp>
       <p:sp>
         <p:nvSpPr>
-          <p:cNvPr id="8" name="TextBox 7"/>
+          <p:cNvPr id="7" name="TextBox 6"/>
           <p:cNvSpPr txBox="1"/>
           <p:nvPr/>
         </p:nvSpPr>
@@ -16711,13 +14967,13 @@
       </p:sp>
       <p:sp>
         <p:nvSpPr>
-          <p:cNvPr id="9" name="TextBox 8"/>
-          <p:cNvSpPr txBox="1"/>
-          <p:nvPr/>
-        </p:nvSpPr>
-        <p:spPr>
-          <a:xfrm>
-            <a:off x="777240" y="1737360"/>
+          <p:cNvPr id="8" name="TextBox 7"/>
+          <p:cNvSpPr txBox="1"/>
+          <p:nvPr/>
+        </p:nvSpPr>
+        <p:spPr>
+          <a:xfrm>
+            <a:off x="777240" y="1389888"/>
             <a:ext cx="10607040" cy="402336"/>
           </a:xfrm>
           <a:prstGeom prst="rect">
@@ -16746,13 +15002,13 @@
       </p:sp>
       <p:cxnSp>
         <p:nvCxnSpPr>
-          <p:cNvPr id="10" name="Connector 9"/>
+          <p:cNvPr id="9" name="Connector 8"/>
           <p:cNvCxnSpPr/>
           <p:nvPr/>
         </p:nvCxnSpPr>
         <p:spPr>
           <a:xfrm>
-            <a:off x="777240" y="2176272"/>
+            <a:off x="777240" y="1828800"/>
             <a:ext cx="10607040" cy="0"/>
           </a:xfrm>
           <a:prstGeom prst="line">
@@ -16781,14 +15037,14 @@
       </p:cxnSp>
       <p:graphicFrame>
         <p:nvGraphicFramePr>
-          <p:cNvPr id="11" name="Table 10"/>
+          <p:cNvPr id="10" name="Table 9"/>
           <p:cNvGraphicFramePr>
             <a:graphicFrameLocks noGrp="1"/>
           </p:cNvGraphicFramePr>
           <p:nvPr/>
         </p:nvGraphicFramePr>
         <p:xfrm>
-          <a:off x="1142999" y="2340864"/>
+          <a:off x="1142999" y="1993392"/>
           <a:ext cx="9875520" cy="768096"/>
         </p:xfrm>
         <a:graphic>
@@ -17433,13 +15689,13 @@
       </p:graphicFrame>
       <p:sp>
         <p:nvSpPr>
-          <p:cNvPr id="12" name="TextBox 11"/>
-          <p:cNvSpPr txBox="1"/>
-          <p:nvPr/>
-        </p:nvSpPr>
-        <p:spPr>
-          <a:xfrm>
-            <a:off x="987552" y="3401568"/>
+          <p:cNvPr id="11" name="TextBox 10"/>
+          <p:cNvSpPr txBox="1"/>
+          <p:nvPr/>
+        </p:nvSpPr>
+        <p:spPr>
+          <a:xfrm>
+            <a:off x="987552" y="3054096"/>
             <a:ext cx="10131551" cy="475488"/>
           </a:xfrm>
           <a:prstGeom prst="rect">
@@ -17702,7 +15958,7 @@
         </p:nvSpPr>
         <p:spPr>
           <a:xfrm>
-            <a:off x="777240" y="1737360"/>
+            <a:off x="777240" y="1389888"/>
             <a:ext cx="10607040" cy="402336"/>
           </a:xfrm>
           <a:prstGeom prst="rect">
@@ -17737,7 +15993,7 @@
         </p:nvCxnSpPr>
         <p:spPr>
           <a:xfrm>
-            <a:off x="777240" y="2176272"/>
+            <a:off x="777240" y="1828800"/>
             <a:ext cx="10607040" cy="0"/>
           </a:xfrm>
           <a:prstGeom prst="line">
@@ -17780,7 +16036,7 @@
         </p:blipFill>
         <p:spPr>
           <a:xfrm>
-            <a:off x="4048840" y="2403348"/>
+            <a:off x="4048840" y="2055876"/>
             <a:ext cx="1124712" cy="286512"/>
           </a:xfrm>
           <a:prstGeom prst="rect">
@@ -17796,7 +16052,7 @@
         </p:nvSpPr>
         <p:spPr>
           <a:xfrm>
-            <a:off x="5173552" y="2318004"/>
+            <a:off x="5173552" y="1970532"/>
             <a:ext cx="1524855" cy="457200"/>
           </a:xfrm>
           <a:prstGeom prst="rect">
@@ -17839,7 +16095,7 @@
         </p:blipFill>
         <p:spPr>
           <a:xfrm>
-            <a:off x="6561247" y="2388108"/>
+            <a:off x="6561247" y="2040636"/>
             <a:ext cx="1551432" cy="316992"/>
           </a:xfrm>
           <a:prstGeom prst="rect">
@@ -17863,7 +16119,7 @@
         </p:blipFill>
         <p:spPr>
           <a:xfrm>
-            <a:off x="2168388" y="3031236"/>
+            <a:off x="2168388" y="2683764"/>
             <a:ext cx="3136392" cy="402336"/>
           </a:xfrm>
           <a:prstGeom prst="rect">
@@ -17879,7 +16135,7 @@
         </p:nvSpPr>
         <p:spPr>
           <a:xfrm>
-            <a:off x="5304780" y="3003804"/>
+            <a:off x="5304780" y="2656332"/>
             <a:ext cx="1183151" cy="457200"/>
           </a:xfrm>
           <a:prstGeom prst="rect">
@@ -17922,7 +16178,7 @@
         </p:blipFill>
         <p:spPr>
           <a:xfrm>
-            <a:off x="6350771" y="3037332"/>
+            <a:off x="6350771" y="2689860"/>
             <a:ext cx="3642360" cy="390144"/>
           </a:xfrm>
           <a:prstGeom prst="rect">
@@ -17938,7 +16194,7 @@
         </p:nvSpPr>
         <p:spPr>
           <a:xfrm>
-            <a:off x="987552" y="3776472"/>
+            <a:off x="987552" y="3429000"/>
             <a:ext cx="10131551" cy="950976"/>
           </a:xfrm>
           <a:prstGeom prst="rect">
@@ -17973,7 +16229,7 @@
         </p:nvSpPr>
         <p:spPr>
           <a:xfrm>
-            <a:off x="987552" y="4983480"/>
+            <a:off x="987552" y="4636008"/>
             <a:ext cx="10131551" cy="950976"/>
           </a:xfrm>
           <a:prstGeom prst="rect">
@@ -18254,7 +16510,7 @@
         </p:nvSpPr>
         <p:spPr>
           <a:xfrm>
-            <a:off x="777240" y="1737360"/>
+            <a:off x="777240" y="1389888"/>
             <a:ext cx="10607040" cy="402336"/>
           </a:xfrm>
           <a:prstGeom prst="rect">
@@ -18289,7 +16545,7 @@
         </p:nvCxnSpPr>
         <p:spPr>
           <a:xfrm>
-            <a:off x="777240" y="2176272"/>
+            <a:off x="777240" y="1828800"/>
             <a:ext cx="10607040" cy="0"/>
           </a:xfrm>
           <a:prstGeom prst="line">
@@ -18332,7 +16588,7 @@
         </p:blipFill>
         <p:spPr>
           <a:xfrm>
-            <a:off x="2767320" y="2348484"/>
+            <a:off x="2767320" y="2001012"/>
             <a:ext cx="2103120" cy="810768"/>
           </a:xfrm>
           <a:prstGeom prst="rect">
@@ -18348,7 +16604,7 @@
         </p:nvSpPr>
         <p:spPr>
           <a:xfrm>
-            <a:off x="4870440" y="2525268"/>
+            <a:off x="4870440" y="2177796"/>
             <a:ext cx="1183151" cy="457200"/>
           </a:xfrm>
           <a:prstGeom prst="rect">
@@ -18391,7 +16647,7 @@
         </p:blipFill>
         <p:spPr>
           <a:xfrm>
-            <a:off x="5916431" y="2340864"/>
+            <a:off x="5916431" y="1993392"/>
             <a:ext cx="3477768" cy="826008"/>
           </a:xfrm>
           <a:prstGeom prst="rect">
@@ -18415,7 +16671,7 @@
         </p:blipFill>
         <p:spPr>
           <a:xfrm>
-            <a:off x="4052316" y="3441192"/>
+            <a:off x="4052316" y="3093720"/>
             <a:ext cx="4056888" cy="826008"/>
           </a:xfrm>
           <a:prstGeom prst="rect">
@@ -18431,7 +16687,7 @@
         </p:nvSpPr>
         <p:spPr>
           <a:xfrm>
-            <a:off x="987552" y="4605528"/>
+            <a:off x="987552" y="4258056"/>
             <a:ext cx="10131551" cy="475488"/>
           </a:xfrm>
           <a:prstGeom prst="rect">
@@ -18466,7 +16722,7 @@
         </p:nvSpPr>
         <p:spPr>
           <a:xfrm>
-            <a:off x="987552" y="5337047"/>
+            <a:off x="987552" y="4989576"/>
             <a:ext cx="10131551" cy="475488"/>
           </a:xfrm>
           <a:prstGeom prst="rect">
@@ -18634,44 +16890,9 @@
           </a:fontRef>
         </p:style>
       </p:cxnSp>
-      <p:sp>
-        <p:nvSpPr>
-          <p:cNvPr id="5" name="TextBox 4"/>
-          <p:cNvSpPr txBox="1"/>
-          <p:nvPr/>
-        </p:nvSpPr>
-        <p:spPr>
-          <a:xfrm>
-            <a:off x="777240" y="1261872"/>
-            <a:ext cx="10607040" cy="310896"/>
-          </a:xfrm>
-          <a:prstGeom prst="rect">
-            <a:avLst/>
-          </a:prstGeom>
-          <a:noFill/>
-        </p:spPr>
-        <p:txBody>
-          <a:bodyPr wrap="square" lIns="45720" rIns="45720" tIns="18288" bIns="18288" anchor="t">
-            <a:spAutoFit/>
-          </a:bodyPr>
-          <a:lstStyle/>
-          <a:p>
-            <a:pPr algn="l"/>
-            <a:r>
-              <a:rPr sz="1700" b="0" i="1">
-                <a:solidFill>
-                  <a:srgbClr val="6B6B6B"/>
-                </a:solidFill>
-                <a:latin typeface="Century Schoolbook"/>
-              </a:rPr>
-              <a:t>Standard form to scientific notation.</a:t>
-            </a:r>
-          </a:p>
-        </p:txBody>
-      </p:sp>
       <p:cxnSp>
         <p:nvCxnSpPr>
-          <p:cNvPr id="6" name="Connector 5"/>
+          <p:cNvPr id="5" name="Connector 4"/>
           <p:cNvCxnSpPr/>
           <p:nvPr/>
         </p:nvCxnSpPr>
@@ -18706,7 +16927,7 @@
       </p:cxnSp>
       <p:sp>
         <p:nvSpPr>
-          <p:cNvPr id="7" name="TextBox 6"/>
+          <p:cNvPr id="6" name="TextBox 5"/>
           <p:cNvSpPr txBox="1"/>
           <p:nvPr/>
         </p:nvSpPr>
@@ -18741,7 +16962,7 @@
       </p:sp>
       <p:sp>
         <p:nvSpPr>
-          <p:cNvPr id="8" name="TextBox 7"/>
+          <p:cNvPr id="7" name="TextBox 6"/>
           <p:cNvSpPr txBox="1"/>
           <p:nvPr/>
         </p:nvSpPr>
@@ -18776,48 +16997,48 @@
       </p:sp>
       <p:sp>
         <p:nvSpPr>
+          <p:cNvPr id="8" name="TextBox 7"/>
+          <p:cNvSpPr txBox="1"/>
+          <p:nvPr/>
+        </p:nvSpPr>
+        <p:spPr>
+          <a:xfrm>
+            <a:off x="777240" y="1737360"/>
+            <a:ext cx="10607040" cy="858740"/>
+          </a:xfrm>
+          <a:prstGeom prst="rect">
+            <a:avLst/>
+          </a:prstGeom>
+          <a:noFill/>
+        </p:spPr>
+        <p:txBody>
+          <a:bodyPr wrap="square" lIns="45720" rIns="45720" tIns="18288" bIns="18288" anchor="t">
+            <a:spAutoFit/>
+          </a:bodyPr>
+          <a:lstStyle/>
+          <a:p>
+            <a:pPr algn="ctr"/>
+            <a:r>
+              <a:rPr sz="2400" b="0" i="0">
+                <a:solidFill>
+                  <a:srgbClr val="1A1A1A"/>
+                </a:solidFill>
+                <a:latin typeface="Century Schoolbook"/>
+              </a:rPr>
+              <a:t>In 2018, funding for education in Florida totaled 30,100,000,000 dollars.</a:t>
+            </a:r>
+          </a:p>
+        </p:txBody>
+      </p:sp>
+      <p:sp>
+        <p:nvSpPr>
           <p:cNvPr id="9" name="TextBox 8"/>
           <p:cNvSpPr txBox="1"/>
           <p:nvPr/>
         </p:nvSpPr>
         <p:spPr>
           <a:xfrm>
-            <a:off x="777240" y="2103120"/>
-            <a:ext cx="10607040" cy="858740"/>
-          </a:xfrm>
-          <a:prstGeom prst="rect">
-            <a:avLst/>
-          </a:prstGeom>
-          <a:noFill/>
-        </p:spPr>
-        <p:txBody>
-          <a:bodyPr wrap="square" lIns="45720" rIns="45720" tIns="18288" bIns="18288" anchor="t">
-            <a:spAutoFit/>
-          </a:bodyPr>
-          <a:lstStyle/>
-          <a:p>
-            <a:pPr algn="ctr"/>
-            <a:r>
-              <a:rPr sz="2400" b="0" i="0">
-                <a:solidFill>
-                  <a:srgbClr val="1A1A1A"/>
-                </a:solidFill>
-                <a:latin typeface="Century Schoolbook"/>
-              </a:rPr>
-              <a:t>In 2018, funding for education in Florida totaled 30,100,000,000 dollars.</a:t>
-            </a:r>
-          </a:p>
-        </p:txBody>
-      </p:sp>
-      <p:sp>
-        <p:nvSpPr>
-          <p:cNvPr id="10" name="TextBox 9"/>
-          <p:cNvSpPr txBox="1"/>
-          <p:nvPr/>
-        </p:nvSpPr>
-        <p:spPr>
-          <a:xfrm>
-            <a:off x="777240" y="3071588"/>
+            <a:off x="777240" y="2705828"/>
             <a:ext cx="10607040" cy="429370"/>
           </a:xfrm>
           <a:prstGeom prst="rect">
@@ -18967,44 +17188,9 @@
           </a:fontRef>
         </p:style>
       </p:cxnSp>
-      <p:sp>
-        <p:nvSpPr>
-          <p:cNvPr id="5" name="TextBox 4"/>
-          <p:cNvSpPr txBox="1"/>
-          <p:nvPr/>
-        </p:nvSpPr>
-        <p:spPr>
-          <a:xfrm>
-            <a:off x="777240" y="1261872"/>
-            <a:ext cx="10607040" cy="310896"/>
-          </a:xfrm>
-          <a:prstGeom prst="rect">
-            <a:avLst/>
-          </a:prstGeom>
-          <a:noFill/>
-        </p:spPr>
-        <p:txBody>
-          <a:bodyPr wrap="square" lIns="45720" rIns="45720" tIns="18288" bIns="18288" anchor="t">
-            <a:spAutoFit/>
-          </a:bodyPr>
-          <a:lstStyle/>
-          <a:p>
-            <a:pPr algn="l"/>
-            <a:r>
-              <a:rPr sz="1700" b="0" i="1">
-                <a:solidFill>
-                  <a:srgbClr val="6B6B6B"/>
-                </a:solidFill>
-                <a:latin typeface="Century Schoolbook"/>
-              </a:rPr>
-              <a:t>Worked.</a:t>
-            </a:r>
-          </a:p>
-        </p:txBody>
-      </p:sp>
       <p:cxnSp>
         <p:nvCxnSpPr>
-          <p:cNvPr id="6" name="Connector 5"/>
+          <p:cNvPr id="5" name="Connector 4"/>
           <p:cNvCxnSpPr/>
           <p:nvPr/>
         </p:nvCxnSpPr>
@@ -19039,7 +17225,7 @@
       </p:cxnSp>
       <p:sp>
         <p:nvSpPr>
-          <p:cNvPr id="7" name="TextBox 6"/>
+          <p:cNvPr id="6" name="TextBox 5"/>
           <p:cNvSpPr txBox="1"/>
           <p:nvPr/>
         </p:nvSpPr>
@@ -19074,7 +17260,7 @@
       </p:sp>
       <p:sp>
         <p:nvSpPr>
-          <p:cNvPr id="8" name="TextBox 7"/>
+          <p:cNvPr id="7" name="TextBox 6"/>
           <p:cNvSpPr txBox="1"/>
           <p:nvPr/>
         </p:nvSpPr>
@@ -19109,7 +17295,7 @@
       </p:sp>
       <p:pic>
         <p:nvPicPr>
-          <p:cNvPr id="9" name="Picture 8" descr="c33cd55185211120.png"/>
+          <p:cNvPr id="8" name="Picture 7" descr="c33cd55185211120.png"/>
           <p:cNvPicPr>
             <a:picLocks noChangeAspect="1"/>
           </p:cNvPicPr>
@@ -19131,44 +17317,9 @@
           </a:prstGeom>
         </p:spPr>
       </p:pic>
-      <p:sp>
-        <p:nvSpPr>
-          <p:cNvPr id="10" name="TextBox 9"/>
-          <p:cNvSpPr txBox="1"/>
-          <p:nvPr/>
-        </p:nvSpPr>
-        <p:spPr>
-          <a:xfrm>
-            <a:off x="6989064" y="1891284"/>
-            <a:ext cx="4395215" cy="502920"/>
-          </a:xfrm>
-          <a:prstGeom prst="rect">
-            <a:avLst/>
-          </a:prstGeom>
-          <a:noFill/>
-        </p:spPr>
-        <p:txBody>
-          <a:bodyPr wrap="square" lIns="45720" rIns="45720" tIns="18288" bIns="18288" anchor="ctr">
-            <a:spAutoFit/>
-          </a:bodyPr>
-          <a:lstStyle/>
-          <a:p>
-            <a:pPr algn="l"/>
-            <a:r>
-              <a:rPr sz="2100" b="0" i="1">
-                <a:solidFill>
-                  <a:srgbClr val="6B6B6B"/>
-                </a:solidFill>
-                <a:latin typeface="Century Schoolbook"/>
-              </a:rPr>
-              <a:t>the 3 is in the ten-billions place</a:t>
-            </a:r>
-          </a:p>
-        </p:txBody>
-      </p:sp>
       <p:pic>
         <p:nvPicPr>
-          <p:cNvPr id="11" name="Picture 10" descr="826a198efbf96eef.png"/>
+          <p:cNvPr id="9" name="Picture 8" descr="826a198efbf96eef.png"/>
           <p:cNvPicPr>
             <a:picLocks noChangeAspect="1"/>
           </p:cNvPicPr>
@@ -19192,42 +17343,7 @@
       </p:pic>
       <p:sp>
         <p:nvSpPr>
-          <p:cNvPr id="12" name="TextBox 11"/>
-          <p:cNvSpPr txBox="1"/>
-          <p:nvPr/>
-        </p:nvSpPr>
-        <p:spPr>
-          <a:xfrm>
-            <a:off x="8830056" y="2532887"/>
-            <a:ext cx="2554223" cy="502920"/>
-          </a:xfrm>
-          <a:prstGeom prst="rect">
-            <a:avLst/>
-          </a:prstGeom>
-          <a:noFill/>
-        </p:spPr>
-        <p:txBody>
-          <a:bodyPr wrap="square" lIns="45720" rIns="45720" tIns="18288" bIns="18288" anchor="ctr">
-            <a:spAutoFit/>
-          </a:bodyPr>
-          <a:lstStyle/>
-          <a:p>
-            <a:pPr algn="l"/>
-            <a:r>
-              <a:rPr sz="2100" b="0" i="1">
-                <a:solidFill>
-                  <a:srgbClr val="6B6B6B"/>
-                </a:solidFill>
-                <a:latin typeface="Century Schoolbook"/>
-              </a:rPr>
-              <a:t>check</a:t>
-            </a:r>
-          </a:p>
-        </p:txBody>
-      </p:sp>
-      <p:sp>
-        <p:nvSpPr>
-          <p:cNvPr id="13" name="TextBox 12"/>
+          <p:cNvPr id="10" name="TextBox 9"/>
           <p:cNvSpPr txBox="1"/>
           <p:nvPr/>
         </p:nvSpPr>
@@ -19392,44 +17508,9 @@
           </a:fontRef>
         </p:style>
       </p:cxnSp>
-      <p:sp>
-        <p:nvSpPr>
-          <p:cNvPr id="5" name="TextBox 4"/>
-          <p:cNvSpPr txBox="1"/>
-          <p:nvPr/>
-        </p:nvSpPr>
-        <p:spPr>
-          <a:xfrm>
-            <a:off x="777240" y="1261872"/>
-            <a:ext cx="10607040" cy="310896"/>
-          </a:xfrm>
-          <a:prstGeom prst="rect">
-            <a:avLst/>
-          </a:prstGeom>
-          <a:noFill/>
-        </p:spPr>
-        <p:txBody>
-          <a:bodyPr wrap="square" lIns="45720" rIns="45720" tIns="18288" bIns="18288" anchor="t">
-            <a:spAutoFit/>
-          </a:bodyPr>
-          <a:lstStyle/>
-          <a:p>
-            <a:pPr algn="l"/>
-            <a:r>
-              <a:rPr sz="1700" b="0" i="1">
-                <a:solidFill>
-                  <a:srgbClr val="6B6B6B"/>
-                </a:solidFill>
-                <a:latin typeface="Century Schoolbook"/>
-              </a:rPr>
-              <a:t>Same steps, your numbers. Boards up when done.</a:t>
-            </a:r>
-          </a:p>
-        </p:txBody>
-      </p:sp>
       <p:cxnSp>
         <p:nvCxnSpPr>
-          <p:cNvPr id="6" name="Connector 5"/>
+          <p:cNvPr id="5" name="Connector 4"/>
           <p:cNvCxnSpPr/>
           <p:nvPr/>
         </p:nvCxnSpPr>
@@ -19464,7 +17545,7 @@
       </p:cxnSp>
       <p:sp>
         <p:nvSpPr>
-          <p:cNvPr id="7" name="TextBox 6"/>
+          <p:cNvPr id="6" name="TextBox 5"/>
           <p:cNvSpPr txBox="1"/>
           <p:nvPr/>
         </p:nvSpPr>
@@ -19499,7 +17580,7 @@
       </p:sp>
       <p:sp>
         <p:nvSpPr>
-          <p:cNvPr id="8" name="TextBox 7"/>
+          <p:cNvPr id="7" name="TextBox 6"/>
           <p:cNvSpPr txBox="1"/>
           <p:nvPr/>
         </p:nvSpPr>
@@ -19534,7 +17615,7 @@
       </p:sp>
       <p:sp>
         <p:nvSpPr>
-          <p:cNvPr id="9" name="TextBox 8"/>
+          <p:cNvPr id="8" name="TextBox 7"/>
           <p:cNvSpPr txBox="1"/>
           <p:nvPr/>
         </p:nvSpPr>

--- a/a7/packages/A7 Unit 3 - Exponents and Scientific Notation/Lessons/3.08/A7 3.08 Writing Large Numbers in Scientific Notation - Slides.pptx
+++ b/a7/packages/A7 Unit 3 - Exponents and Scientific Notation/Lessons/3.08/A7 3.08 Writing Large Numbers in Scientific Notation - Slides.pptx
@@ -13957,23 +13957,23 @@
         </p:nvSpPr>
         <p:spPr>
           <a:xfrm>
-            <a:off x="960120" y="2011680"/>
-            <a:ext cx="548640" cy="356616"/>
-          </a:xfrm>
-          <a:prstGeom prst="rect">
-            <a:avLst/>
-          </a:prstGeom>
-          <a:noFill/>
-        </p:spPr>
-        <p:txBody>
-          <a:bodyPr wrap="square" lIns="45720" rIns="45720" tIns="18288" bIns="18288" anchor="t">
+            <a:off x="960120" y="1495043"/>
+            <a:ext cx="548640" cy="457200"/>
+          </a:xfrm>
+          <a:prstGeom prst="rect">
+            <a:avLst/>
+          </a:prstGeom>
+          <a:noFill/>
+        </p:spPr>
+        <p:txBody>
+          <a:bodyPr wrap="square" lIns="45720" rIns="45720" tIns="18288" bIns="18288" anchor="ctr">
             <a:spAutoFit/>
           </a:bodyPr>
           <a:lstStyle/>
           <a:p>
             <a:pPr algn="l"/>
             <a:r>
-              <a:rPr sz="2100" b="1" i="0">
+              <a:rPr sz="2300" b="1" i="0">
                 <a:solidFill>
                   <a:srgbClr val="0B5394"/>
                 </a:solidFill>
@@ -13992,29 +13992,29 @@
         </p:nvSpPr>
         <p:spPr>
           <a:xfrm>
-            <a:off x="1554480" y="2011680"/>
-            <a:ext cx="9829800" cy="411480"/>
-          </a:xfrm>
-          <a:prstGeom prst="rect">
-            <a:avLst/>
-          </a:prstGeom>
-          <a:noFill/>
-        </p:spPr>
-        <p:txBody>
-          <a:bodyPr wrap="square" lIns="45720" rIns="45720" tIns="18288" bIns="18288" anchor="t">
-            <a:spAutoFit/>
+            <a:off x="1554480" y="1495044"/>
+            <a:ext cx="5739460" cy="457200"/>
+          </a:xfrm>
+          <a:prstGeom prst="rect">
+            <a:avLst/>
+          </a:prstGeom>
+          <a:noFill/>
+        </p:spPr>
+        <p:txBody>
+          <a:bodyPr wrap="none" lIns="45720" rIns="45720" tIns="18288" bIns="18288" anchor="ctr">
+            <a:noAutofit/>
           </a:bodyPr>
           <a:lstStyle/>
           <a:p>
             <a:pPr algn="l"/>
             <a:r>
-              <a:rPr sz="2100" b="0" i="0">
+              <a:rPr sz="2300" b="0" i="0">
                 <a:solidFill>
                   <a:srgbClr val="1A1A1A"/>
                 </a:solidFill>
                 <a:latin typeface="Century Schoolbook"/>
               </a:rPr>
-              <a:t>Six questions. Work down the page.</a:t>
+              <a:t>Write  8,200,000  in scientific notation.</a:t>
             </a:r>
           </a:p>
         </p:txBody>
@@ -14027,23 +14027,23 @@
         </p:nvSpPr>
         <p:spPr>
           <a:xfrm>
-            <a:off x="960120" y="2551176"/>
-            <a:ext cx="548640" cy="356616"/>
-          </a:xfrm>
-          <a:prstGeom prst="rect">
-            <a:avLst/>
-          </a:prstGeom>
-          <a:noFill/>
-        </p:spPr>
-        <p:txBody>
-          <a:bodyPr wrap="square" lIns="45720" rIns="45720" tIns="18288" bIns="18288" anchor="t">
+            <a:off x="960120" y="2089403"/>
+            <a:ext cx="548640" cy="457200"/>
+          </a:xfrm>
+          <a:prstGeom prst="rect">
+            <a:avLst/>
+          </a:prstGeom>
+          <a:noFill/>
+        </p:spPr>
+        <p:txBody>
+          <a:bodyPr wrap="square" lIns="45720" rIns="45720" tIns="18288" bIns="18288" anchor="ctr">
             <a:spAutoFit/>
           </a:bodyPr>
           <a:lstStyle/>
           <a:p>
             <a:pPr algn="l"/>
             <a:r>
-              <a:rPr sz="2100" b="1" i="0">
+              <a:rPr sz="2300" b="1" i="0">
                 <a:solidFill>
                   <a:srgbClr val="0B5394"/>
                 </a:solidFill>
@@ -14062,58 +14062,117 @@
         </p:nvSpPr>
         <p:spPr>
           <a:xfrm>
-            <a:off x="1554480" y="2551176"/>
-            <a:ext cx="9829800" cy="411480"/>
-          </a:xfrm>
-          <a:prstGeom prst="rect">
-            <a:avLst/>
-          </a:prstGeom>
-          <a:noFill/>
-        </p:spPr>
-        <p:txBody>
-          <a:bodyPr wrap="square" lIns="45720" rIns="45720" tIns="18288" bIns="18288" anchor="t">
-            <a:spAutoFit/>
+            <a:off x="1554480" y="2089403"/>
+            <a:ext cx="1184045" cy="457200"/>
+          </a:xfrm>
+          <a:prstGeom prst="rect">
+            <a:avLst/>
+          </a:prstGeom>
+          <a:noFill/>
+        </p:spPr>
+        <p:txBody>
+          <a:bodyPr wrap="none" lIns="45720" rIns="45720" tIns="18288" bIns="18288" anchor="ctr">
+            <a:noAutofit/>
           </a:bodyPr>
           <a:lstStyle/>
           <a:p>
             <a:pPr algn="l"/>
             <a:r>
-              <a:rPr sz="2100" b="0" i="0">
+              <a:rPr sz="2300" b="0" i="0">
                 <a:solidFill>
                   <a:srgbClr val="1A1A1A"/>
                 </a:solidFill>
                 <a:latin typeface="Century Schoolbook"/>
               </a:rPr>
-              <a:t>Show the step that does the work, not just the answer.</a:t>
-            </a:r>
-          </a:p>
-        </p:txBody>
-      </p:sp>
-      <p:sp>
-        <p:nvSpPr>
-          <p:cNvPr id="12" name="TextBox 11"/>
-          <p:cNvSpPr txBox="1"/>
-          <p:nvPr/>
-        </p:nvSpPr>
-        <p:spPr>
-          <a:xfrm>
-            <a:off x="960120" y="3090672"/>
-            <a:ext cx="548640" cy="356616"/>
-          </a:xfrm>
-          <a:prstGeom prst="rect">
-            <a:avLst/>
-          </a:prstGeom>
-          <a:noFill/>
-        </p:spPr>
-        <p:txBody>
-          <a:bodyPr wrap="square" lIns="45720" rIns="45720" tIns="18288" bIns="18288" anchor="t">
-            <a:spAutoFit/>
+              <a:t>Write  </a:t>
+            </a:r>
+          </a:p>
+        </p:txBody>
+      </p:sp>
+      <p:pic>
+        <p:nvPicPr>
+          <p:cNvPr id="12" name="Picture 11" descr="484364d373954d6e.png"/>
+          <p:cNvPicPr>
+            <a:picLocks noChangeAspect="1"/>
+          </p:cNvPicPr>
+          <p:nvPr/>
+        </p:nvPicPr>
+        <p:blipFill>
+          <a:blip r:embed="rId2"/>
+          <a:stretch>
+            <a:fillRect/>
+          </a:stretch>
+        </p:blipFill>
+        <p:spPr>
+          <a:xfrm>
+            <a:off x="2601365" y="2176271"/>
+            <a:ext cx="1149096" cy="283464"/>
+          </a:xfrm>
+          <a:prstGeom prst="rect">
+            <a:avLst/>
+          </a:prstGeom>
+        </p:spPr>
+      </p:pic>
+      <p:sp>
+        <p:nvSpPr>
+          <p:cNvPr id="13" name="TextBox 12"/>
+          <p:cNvSpPr txBox="1"/>
+          <p:nvPr/>
+        </p:nvSpPr>
+        <p:spPr>
+          <a:xfrm>
+            <a:off x="3750461" y="2089403"/>
+            <a:ext cx="2885253" cy="457200"/>
+          </a:xfrm>
+          <a:prstGeom prst="rect">
+            <a:avLst/>
+          </a:prstGeom>
+          <a:noFill/>
+        </p:spPr>
+        <p:txBody>
+          <a:bodyPr wrap="none" lIns="45720" rIns="45720" tIns="18288" bIns="18288" anchor="ctr">
+            <a:noAutofit/>
           </a:bodyPr>
           <a:lstStyle/>
           <a:p>
             <a:pPr algn="l"/>
             <a:r>
-              <a:rPr sz="2100" b="1" i="0">
+              <a:rPr sz="2300" b="0" i="0">
+                <a:solidFill>
+                  <a:srgbClr val="1A1A1A"/>
+                </a:solidFill>
+                <a:latin typeface="Century Schoolbook"/>
+              </a:rPr>
+              <a:t>  in standard form.</a:t>
+            </a:r>
+          </a:p>
+        </p:txBody>
+      </p:sp>
+      <p:sp>
+        <p:nvSpPr>
+          <p:cNvPr id="14" name="TextBox 13"/>
+          <p:cNvSpPr txBox="1"/>
+          <p:nvPr/>
+        </p:nvSpPr>
+        <p:spPr>
+          <a:xfrm>
+            <a:off x="960120" y="2683763"/>
+            <a:ext cx="548640" cy="457200"/>
+          </a:xfrm>
+          <a:prstGeom prst="rect">
+            <a:avLst/>
+          </a:prstGeom>
+          <a:noFill/>
+        </p:spPr>
+        <p:txBody>
+          <a:bodyPr wrap="square" lIns="45720" rIns="45720" tIns="18288" bIns="18288" anchor="ctr">
+            <a:spAutoFit/>
+          </a:bodyPr>
+          <a:lstStyle/>
+          <a:p>
+            <a:pPr algn="l"/>
+            <a:r>
+              <a:rPr sz="2300" b="1" i="0">
                 <a:solidFill>
                   <a:srgbClr val="0B5394"/>
                 </a:solidFill>
@@ -14126,35 +14185,481 @@
       </p:sp>
       <p:sp>
         <p:nvSpPr>
-          <p:cNvPr id="13" name="TextBox 12"/>
-          <p:cNvSpPr txBox="1"/>
-          <p:nvPr/>
-        </p:nvSpPr>
-        <p:spPr>
-          <a:xfrm>
-            <a:off x="1554480" y="3090672"/>
-            <a:ext cx="9829800" cy="411480"/>
-          </a:xfrm>
-          <a:prstGeom prst="rect">
-            <a:avLst/>
-          </a:prstGeom>
-          <a:noFill/>
-        </p:spPr>
-        <p:txBody>
-          <a:bodyPr wrap="square" lIns="45720" rIns="45720" tIns="18288" bIns="18288" anchor="t">
-            <a:spAutoFit/>
+          <p:cNvPr id="15" name="TextBox 14"/>
+          <p:cNvSpPr txBox="1"/>
+          <p:nvPr/>
+        </p:nvSpPr>
+        <p:spPr>
+          <a:xfrm>
+            <a:off x="1554480" y="2683763"/>
+            <a:ext cx="6083793" cy="457200"/>
+          </a:xfrm>
+          <a:prstGeom prst="rect">
+            <a:avLst/>
+          </a:prstGeom>
+          <a:noFill/>
+        </p:spPr>
+        <p:txBody>
+          <a:bodyPr wrap="none" lIns="45720" rIns="45720" tIns="18288" bIns="18288" anchor="ctr">
+            <a:noAutofit/>
           </a:bodyPr>
           <a:lstStyle/>
           <a:p>
             <a:pPr algn="l"/>
             <a:r>
-              <a:rPr sz="2100" b="0" i="0">
+              <a:rPr sz="2300" b="0" i="0">
                 <a:solidFill>
                   <a:srgbClr val="1A1A1A"/>
                 </a:solidFill>
                 <a:latin typeface="Century Schoolbook"/>
               </a:rPr>
-              <a:t>Silence until the six minutes are up.</a:t>
+              <a:t>Write  915,000,000  in scientific notation.</a:t>
+            </a:r>
+          </a:p>
+        </p:txBody>
+      </p:sp>
+      <p:sp>
+        <p:nvSpPr>
+          <p:cNvPr id="16" name="TextBox 15"/>
+          <p:cNvSpPr txBox="1"/>
+          <p:nvPr/>
+        </p:nvSpPr>
+        <p:spPr>
+          <a:xfrm>
+            <a:off x="960120" y="3278123"/>
+            <a:ext cx="548640" cy="457200"/>
+          </a:xfrm>
+          <a:prstGeom prst="rect">
+            <a:avLst/>
+          </a:prstGeom>
+          <a:noFill/>
+        </p:spPr>
+        <p:txBody>
+          <a:bodyPr wrap="square" lIns="45720" rIns="45720" tIns="18288" bIns="18288" anchor="ctr">
+            <a:spAutoFit/>
+          </a:bodyPr>
+          <a:lstStyle/>
+          <a:p>
+            <a:pPr algn="l"/>
+            <a:r>
+              <a:rPr sz="2300" b="1" i="0">
+                <a:solidFill>
+                  <a:srgbClr val="0B5394"/>
+                </a:solidFill>
+                <a:latin typeface="Century Schoolbook"/>
+              </a:rPr>
+              <a:t>4.</a:t>
+            </a:r>
+          </a:p>
+        </p:txBody>
+      </p:sp>
+      <p:sp>
+        <p:nvSpPr>
+          <p:cNvPr id="17" name="TextBox 16"/>
+          <p:cNvSpPr txBox="1"/>
+          <p:nvPr/>
+        </p:nvSpPr>
+        <p:spPr>
+          <a:xfrm>
+            <a:off x="1554480" y="3278123"/>
+            <a:ext cx="2825147" cy="457200"/>
+          </a:xfrm>
+          <a:prstGeom prst="rect">
+            <a:avLst/>
+          </a:prstGeom>
+          <a:noFill/>
+        </p:spPr>
+        <p:txBody>
+          <a:bodyPr wrap="none" lIns="45720" rIns="45720" tIns="18288" bIns="18288" anchor="ctr">
+            <a:noAutofit/>
+          </a:bodyPr>
+          <a:lstStyle/>
+          <a:p>
+            <a:pPr algn="l"/>
+            <a:r>
+              <a:rPr sz="2300" b="0" i="0">
+                <a:solidFill>
+                  <a:srgbClr val="1A1A1A"/>
+                </a:solidFill>
+                <a:latin typeface="Century Schoolbook"/>
+              </a:rPr>
+              <a:t>Which is greater,  </a:t>
+            </a:r>
+          </a:p>
+        </p:txBody>
+      </p:sp>
+      <p:pic>
+        <p:nvPicPr>
+          <p:cNvPr id="18" name="Picture 17" descr="aa6198a3eb54a717.png"/>
+          <p:cNvPicPr>
+            <a:picLocks noChangeAspect="1"/>
+          </p:cNvPicPr>
+          <p:nvPr/>
+        </p:nvPicPr>
+        <p:blipFill>
+          <a:blip r:embed="rId3"/>
+          <a:stretch>
+            <a:fillRect/>
+          </a:stretch>
+        </p:blipFill>
+        <p:spPr>
+          <a:xfrm>
+            <a:off x="4242467" y="3366515"/>
+            <a:ext cx="1155192" cy="280416"/>
+          </a:xfrm>
+          <a:prstGeom prst="rect">
+            <a:avLst/>
+          </a:prstGeom>
+        </p:spPr>
+      </p:pic>
+      <p:sp>
+        <p:nvSpPr>
+          <p:cNvPr id="19" name="TextBox 18"/>
+          <p:cNvSpPr txBox="1"/>
+          <p:nvPr/>
+        </p:nvSpPr>
+        <p:spPr>
+          <a:xfrm>
+            <a:off x="5397659" y="3278123"/>
+            <a:ext cx="846917" cy="457200"/>
+          </a:xfrm>
+          <a:prstGeom prst="rect">
+            <a:avLst/>
+          </a:prstGeom>
+          <a:noFill/>
+        </p:spPr>
+        <p:txBody>
+          <a:bodyPr wrap="none" lIns="45720" rIns="45720" tIns="18288" bIns="18288" anchor="ctr">
+            <a:noAutofit/>
+          </a:bodyPr>
+          <a:lstStyle/>
+          <a:p>
+            <a:pPr algn="l"/>
+            <a:r>
+              <a:rPr sz="2300" b="0" i="0">
+                <a:solidFill>
+                  <a:srgbClr val="1A1A1A"/>
+                </a:solidFill>
+                <a:latin typeface="Century Schoolbook"/>
+              </a:rPr>
+              <a:t>  or  </a:t>
+            </a:r>
+          </a:p>
+        </p:txBody>
+      </p:sp>
+      <p:pic>
+        <p:nvPicPr>
+          <p:cNvPr id="20" name="Picture 19" descr="36d95168835a2749.png"/>
+          <p:cNvPicPr>
+            <a:picLocks noChangeAspect="1"/>
+          </p:cNvPicPr>
+          <p:nvPr/>
+        </p:nvPicPr>
+        <p:blipFill>
+          <a:blip r:embed="rId4"/>
+          <a:stretch>
+            <a:fillRect/>
+          </a:stretch>
+        </p:blipFill>
+        <p:spPr>
+          <a:xfrm>
+            <a:off x="6107417" y="3364991"/>
+            <a:ext cx="1155192" cy="283464"/>
+          </a:xfrm>
+          <a:prstGeom prst="rect">
+            <a:avLst/>
+          </a:prstGeom>
+        </p:spPr>
+      </p:pic>
+      <p:sp>
+        <p:nvSpPr>
+          <p:cNvPr id="21" name="TextBox 20"/>
+          <p:cNvSpPr txBox="1"/>
+          <p:nvPr/>
+        </p:nvSpPr>
+        <p:spPr>
+          <a:xfrm>
+            <a:off x="7262609" y="3278123"/>
+            <a:ext cx="433854" cy="457200"/>
+          </a:xfrm>
+          <a:prstGeom prst="rect">
+            <a:avLst/>
+          </a:prstGeom>
+          <a:noFill/>
+        </p:spPr>
+        <p:txBody>
+          <a:bodyPr wrap="none" lIns="45720" rIns="45720" tIns="18288" bIns="18288" anchor="ctr">
+            <a:noAutofit/>
+          </a:bodyPr>
+          <a:lstStyle/>
+          <a:p>
+            <a:pPr algn="l"/>
+            <a:r>
+              <a:rPr sz="2300" b="0" i="0">
+                <a:solidFill>
+                  <a:srgbClr val="1A1A1A"/>
+                </a:solidFill>
+                <a:latin typeface="Century Schoolbook"/>
+              </a:rPr>
+              <a:t> ?</a:t>
+            </a:r>
+          </a:p>
+        </p:txBody>
+      </p:sp>
+      <p:sp>
+        <p:nvSpPr>
+          <p:cNvPr id="22" name="TextBox 21"/>
+          <p:cNvSpPr txBox="1"/>
+          <p:nvPr/>
+        </p:nvSpPr>
+        <p:spPr>
+          <a:xfrm>
+            <a:off x="960120" y="3872483"/>
+            <a:ext cx="548640" cy="457200"/>
+          </a:xfrm>
+          <a:prstGeom prst="rect">
+            <a:avLst/>
+          </a:prstGeom>
+          <a:noFill/>
+        </p:spPr>
+        <p:txBody>
+          <a:bodyPr wrap="square" lIns="45720" rIns="45720" tIns="18288" bIns="18288" anchor="ctr">
+            <a:spAutoFit/>
+          </a:bodyPr>
+          <a:lstStyle/>
+          <a:p>
+            <a:pPr algn="l"/>
+            <a:r>
+              <a:rPr sz="2300" b="1" i="0">
+                <a:solidFill>
+                  <a:srgbClr val="0B5394"/>
+                </a:solidFill>
+                <a:latin typeface="Century Schoolbook"/>
+              </a:rPr>
+              <a:t>5.</a:t>
+            </a:r>
+          </a:p>
+        </p:txBody>
+      </p:sp>
+      <p:sp>
+        <p:nvSpPr>
+          <p:cNvPr id="23" name="TextBox 22"/>
+          <p:cNvSpPr txBox="1"/>
+          <p:nvPr/>
+        </p:nvSpPr>
+        <p:spPr>
+          <a:xfrm>
+            <a:off x="1554480" y="3872483"/>
+            <a:ext cx="4056605" cy="457200"/>
+          </a:xfrm>
+          <a:prstGeom prst="rect">
+            <a:avLst/>
+          </a:prstGeom>
+          <a:noFill/>
+        </p:spPr>
+        <p:txBody>
+          <a:bodyPr wrap="none" lIns="45720" rIns="45720" tIns="18288" bIns="18288" anchor="ctr">
+            <a:noAutofit/>
+          </a:bodyPr>
+          <a:lstStyle/>
+          <a:p>
+            <a:pPr algn="l"/>
+            <a:r>
+              <a:rPr sz="2300" b="0" i="0">
+                <a:solidFill>
+                  <a:srgbClr val="1A1A1A"/>
+                </a:solidFill>
+                <a:latin typeface="Century Schoolbook"/>
+              </a:rPr>
+              <a:t>How many times larger is  </a:t>
+            </a:r>
+          </a:p>
+        </p:txBody>
+      </p:sp>
+      <p:pic>
+        <p:nvPicPr>
+          <p:cNvPr id="24" name="Picture 23" descr="7587dd48b320b23b.png"/>
+          <p:cNvPicPr>
+            <a:picLocks noChangeAspect="1"/>
+          </p:cNvPicPr>
+          <p:nvPr/>
+        </p:nvPicPr>
+        <p:blipFill>
+          <a:blip r:embed="rId5"/>
+          <a:stretch>
+            <a:fillRect/>
+          </a:stretch>
+        </p:blipFill>
+        <p:spPr>
+          <a:xfrm>
+            <a:off x="5473925" y="3960875"/>
+            <a:ext cx="899160" cy="280416"/>
+          </a:xfrm>
+          <a:prstGeom prst="rect">
+            <a:avLst/>
+          </a:prstGeom>
+        </p:spPr>
+      </p:pic>
+      <p:sp>
+        <p:nvSpPr>
+          <p:cNvPr id="25" name="TextBox 24"/>
+          <p:cNvSpPr txBox="1"/>
+          <p:nvPr/>
+        </p:nvSpPr>
+        <p:spPr>
+          <a:xfrm>
+            <a:off x="6373085" y="3872483"/>
+            <a:ext cx="1224116" cy="457200"/>
+          </a:xfrm>
+          <a:prstGeom prst="rect">
+            <a:avLst/>
+          </a:prstGeom>
+          <a:noFill/>
+        </p:spPr>
+        <p:txBody>
+          <a:bodyPr wrap="none" lIns="45720" rIns="45720" tIns="18288" bIns="18288" anchor="ctr">
+            <a:noAutofit/>
+          </a:bodyPr>
+          <a:lstStyle/>
+          <a:p>
+            <a:pPr algn="l"/>
+            <a:r>
+              <a:rPr sz="2300" b="0" i="0">
+                <a:solidFill>
+                  <a:srgbClr val="1A1A1A"/>
+                </a:solidFill>
+                <a:latin typeface="Century Schoolbook"/>
+              </a:rPr>
+              <a:t>  than  </a:t>
+            </a:r>
+          </a:p>
+        </p:txBody>
+      </p:sp>
+      <p:pic>
+        <p:nvPicPr>
+          <p:cNvPr id="26" name="Picture 25" descr="745c0d39ba628067.png"/>
+          <p:cNvPicPr>
+            <a:picLocks noChangeAspect="1"/>
+          </p:cNvPicPr>
+          <p:nvPr/>
+        </p:nvPicPr>
+        <p:blipFill>
+          <a:blip r:embed="rId6"/>
+          <a:stretch>
+            <a:fillRect/>
+          </a:stretch>
+        </p:blipFill>
+        <p:spPr>
+          <a:xfrm>
+            <a:off x="7460041" y="3957828"/>
+            <a:ext cx="902208" cy="286512"/>
+          </a:xfrm>
+          <a:prstGeom prst="rect">
+            <a:avLst/>
+          </a:prstGeom>
+        </p:spPr>
+      </p:pic>
+      <p:sp>
+        <p:nvSpPr>
+          <p:cNvPr id="27" name="TextBox 26"/>
+          <p:cNvSpPr txBox="1"/>
+          <p:nvPr/>
+        </p:nvSpPr>
+        <p:spPr>
+          <a:xfrm>
+            <a:off x="8362249" y="3872483"/>
+            <a:ext cx="433854" cy="457200"/>
+          </a:xfrm>
+          <a:prstGeom prst="rect">
+            <a:avLst/>
+          </a:prstGeom>
+          <a:noFill/>
+        </p:spPr>
+        <p:txBody>
+          <a:bodyPr wrap="none" lIns="45720" rIns="45720" tIns="18288" bIns="18288" anchor="ctr">
+            <a:noAutofit/>
+          </a:bodyPr>
+          <a:lstStyle/>
+          <a:p>
+            <a:pPr algn="l"/>
+            <a:r>
+              <a:rPr sz="2300" b="0" i="0">
+                <a:solidFill>
+                  <a:srgbClr val="1A1A1A"/>
+                </a:solidFill>
+                <a:latin typeface="Century Schoolbook"/>
+              </a:rPr>
+              <a:t> ?</a:t>
+            </a:r>
+          </a:p>
+        </p:txBody>
+      </p:sp>
+      <p:sp>
+        <p:nvSpPr>
+          <p:cNvPr id="28" name="TextBox 27"/>
+          <p:cNvSpPr txBox="1"/>
+          <p:nvPr/>
+        </p:nvSpPr>
+        <p:spPr>
+          <a:xfrm>
+            <a:off x="960120" y="4466844"/>
+            <a:ext cx="548640" cy="457200"/>
+          </a:xfrm>
+          <a:prstGeom prst="rect">
+            <a:avLst/>
+          </a:prstGeom>
+          <a:noFill/>
+        </p:spPr>
+        <p:txBody>
+          <a:bodyPr wrap="square" lIns="45720" rIns="45720" tIns="18288" bIns="18288" anchor="ctr">
+            <a:spAutoFit/>
+          </a:bodyPr>
+          <a:lstStyle/>
+          <a:p>
+            <a:pPr algn="l"/>
+            <a:r>
+              <a:rPr sz="2300" b="1" i="0">
+                <a:solidFill>
+                  <a:srgbClr val="0B5394"/>
+                </a:solidFill>
+                <a:latin typeface="Century Schoolbook"/>
+              </a:rPr>
+              <a:t>6.</a:t>
+            </a:r>
+          </a:p>
+        </p:txBody>
+      </p:sp>
+      <p:sp>
+        <p:nvSpPr>
+          <p:cNvPr id="29" name="TextBox 28"/>
+          <p:cNvSpPr txBox="1"/>
+          <p:nvPr/>
+        </p:nvSpPr>
+        <p:spPr>
+          <a:xfrm>
+            <a:off x="1554480" y="4466844"/>
+            <a:ext cx="9898955" cy="457200"/>
+          </a:xfrm>
+          <a:prstGeom prst="rect">
+            <a:avLst/>
+          </a:prstGeom>
+          <a:noFill/>
+        </p:spPr>
+        <p:txBody>
+          <a:bodyPr wrap="none" lIns="45720" rIns="45720" tIns="18288" bIns="18288" anchor="ctr">
+            <a:noAutofit/>
+          </a:bodyPr>
+          <a:lstStyle/>
+          <a:p>
+            <a:pPr algn="l"/>
+            <a:r>
+              <a:rPr sz="2300" b="0" i="0">
+                <a:solidFill>
+                  <a:srgbClr val="1A1A1A"/>
+                </a:solidFill>
+                <a:latin typeface="Century Schoolbook"/>
+              </a:rPr>
+              <a:t>A computer displays a number as  2.6E7.  Write it in standard form.</a:t>
             </a:r>
           </a:p>
         </p:txBody>

--- a/a7/packages/A7 Unit 3 - Exponents and Scientific Notation/Lessons/3.08/A7 3.08 Writing Large Numbers in Scientific Notation - Slides.pptx
+++ b/a7/packages/A7 Unit 3 - Exponents and Scientific Notation/Lessons/3.08/A7 3.08 Writing Large Numbers in Scientific Notation - Slides.pptx
@@ -3145,11 +3145,11 @@
           <a:p>
             <a:pPr algn="ctr"/>
             <a:r>
-              <a:rPr sz="1500" b="0" i="0">
+              <a:rPr sz="1420" b="0" i="0">
                 <a:solidFill>
                   <a:srgbClr val="6B6B6B"/>
                 </a:solidFill>
-                <a:latin typeface="Century Schoolbook"/>
+                <a:latin typeface="Lexend"/>
               </a:rPr>
               <a:t>GRADE 7 ACCELERATED  ·  UNIT 3  ·  LESSON 8</a:t>
             </a:r>
@@ -3180,11 +3180,11 @@
           <a:p>
             <a:pPr algn="ctr"/>
             <a:r>
-              <a:rPr sz="3400" b="1" i="0">
+              <a:rPr sz="3229" b="1" i="0">
                 <a:solidFill>
                   <a:srgbClr val="1A1A1A"/>
                 </a:solidFill>
-                <a:latin typeface="Century Schoolbook"/>
+                <a:latin typeface="Lexend"/>
               </a:rPr>
               <a:t>Writing Large Numbers in Scientific Notation</a:t>
             </a:r>
@@ -3285,11 +3285,11 @@
           <a:p>
             <a:pPr algn="ctr"/>
             <a:r>
-              <a:rPr sz="1600" b="1" i="0">
+              <a:rPr sz="1520" b="1" i="0">
                 <a:solidFill>
                   <a:srgbClr val="1A1A1A"/>
                 </a:solidFill>
-                <a:latin typeface="Century Schoolbook"/>
+                <a:latin typeface="Lexend"/>
               </a:rPr>
               <a:t>MA.8.NSO.1.4</a:t>
             </a:r>
@@ -3320,11 +3320,11 @@
           <a:p>
             <a:pPr algn="ctr"/>
             <a:r>
-              <a:rPr sz="1900" b="0" i="1">
+              <a:rPr sz="1810" b="0" i="0">
                 <a:solidFill>
                   <a:srgbClr val="1A1A1A"/>
                 </a:solidFill>
-                <a:latin typeface="Century Schoolbook"/>
+                <a:latin typeface="Lexend"/>
               </a:rPr>
               <a:t>I can write a large number in scientific notation, read one back into standard form, and find how many times larger one number is than another.</a:t>
             </a:r>
@@ -3390,11 +3390,11 @@
           <a:p>
             <a:pPr algn="l"/>
             <a:r>
-              <a:rPr sz="1100" b="0" i="1">
+              <a:rPr sz="1040" b="0" i="0">
                 <a:solidFill>
                   <a:srgbClr val="6B6B6B"/>
                 </a:solidFill>
-                <a:latin typeface="Century Schoolbook"/>
+                <a:latin typeface="Lexend"/>
               </a:rPr>
               <a:t>Grade 7 Accelerated · Unit 3 · Lesson 8 — Writing Large Numbers in Scientific Notation</a:t>
             </a:r>
@@ -3425,11 +3425,11 @@
           <a:p>
             <a:pPr algn="r"/>
             <a:r>
-              <a:rPr sz="1100" b="0" i="0">
+              <a:rPr sz="1040" b="0" i="0">
                 <a:solidFill>
                   <a:srgbClr val="6B6B6B"/>
                 </a:solidFill>
-                <a:latin typeface="Century Schoolbook"/>
+                <a:latin typeface="Lexend"/>
               </a:rPr>
               <a:t>1</a:t>
             </a:r>
@@ -3478,11 +3478,11 @@
           <a:p>
             <a:pPr algn="l"/>
             <a:r>
-              <a:rPr sz="3600" b="1" i="0">
+              <a:rPr sz="3420" b="1" i="0">
                 <a:solidFill>
                   <a:srgbClr val="1A1A1A"/>
                 </a:solidFill>
-                <a:latin typeface="Century Schoolbook"/>
+                <a:latin typeface="Lexend"/>
               </a:rPr>
               <a:t>Your Turn</a:t>
             </a:r>
@@ -3618,11 +3618,11 @@
           <a:p>
             <a:pPr algn="l"/>
             <a:r>
-              <a:rPr sz="1100" b="0" i="1">
+              <a:rPr sz="1040" b="0" i="0">
                 <a:solidFill>
                   <a:srgbClr val="6B6B6B"/>
                 </a:solidFill>
-                <a:latin typeface="Century Schoolbook"/>
+                <a:latin typeface="Lexend"/>
               </a:rPr>
               <a:t>Grade 7 Accelerated · Unit 3 · Lesson 8 — Writing Large Numbers in Scientific Notation</a:t>
             </a:r>
@@ -3653,11 +3653,11 @@
           <a:p>
             <a:pPr algn="r"/>
             <a:r>
-              <a:rPr sz="1100" b="0" i="0">
+              <a:rPr sz="1040" b="0" i="0">
                 <a:solidFill>
                   <a:srgbClr val="6B6B6B"/>
                 </a:solidFill>
-                <a:latin typeface="Century Schoolbook"/>
+                <a:latin typeface="Lexend"/>
               </a:rPr>
               <a:t>10</a:t>
             </a:r>
@@ -3672,7 +3672,7 @@
         </p:nvSpPr>
         <p:spPr>
           <a:xfrm>
-            <a:off x="777240" y="2194560"/>
+            <a:off x="777240" y="1600200"/>
             <a:ext cx="10607040" cy="858740"/>
           </a:xfrm>
           <a:prstGeom prst="rect">
@@ -3688,11 +3688,11 @@
           <a:p>
             <a:pPr algn="ctr"/>
             <a:r>
-              <a:rPr sz="2400" b="0" i="0">
+              <a:rPr sz="2280" b="0" i="0">
                 <a:solidFill>
                   <a:srgbClr val="1A1A1A"/>
                 </a:solidFill>
-                <a:latin typeface="Century Schoolbook"/>
+                <a:latin typeface="Lexend"/>
               </a:rPr>
               <a:t>A painting sold for 110,500,000 dollars.  Write this value in scientific notation.</a:t>
             </a:r>
@@ -3702,6 +3702,65 @@
       <p:sp>
         <p:nvSpPr>
           <p:cNvPr id="9" name="TextBox 8"/>
+          <p:cNvSpPr txBox="1"/>
+          <p:nvPr/>
+        </p:nvSpPr>
+        <p:spPr>
+          <a:xfrm>
+            <a:off x="2973649" y="2618960"/>
+            <a:ext cx="6351381" cy="457200"/>
+          </a:xfrm>
+          <a:prstGeom prst="rect">
+            <a:avLst/>
+          </a:prstGeom>
+          <a:noFill/>
+        </p:spPr>
+        <p:txBody>
+          <a:bodyPr wrap="none" lIns="45720" rIns="45720" tIns="18288" bIns="18288" anchor="ctr">
+            <a:noAutofit/>
+          </a:bodyPr>
+          <a:lstStyle/>
+          <a:p>
+            <a:pPr algn="l"/>
+            <a:r>
+              <a:rPr sz="2750" b="0" i="0">
+                <a:solidFill>
+                  <a:srgbClr val="1A1A1A"/>
+                </a:solidFill>
+                <a:latin typeface="Lexend"/>
+              </a:rPr>
+              <a:t>Move the point 8 places left:  1.105</a:t>
+            </a:r>
+          </a:p>
+        </p:txBody>
+      </p:sp>
+      <p:pic>
+        <p:nvPicPr>
+          <p:cNvPr id="10" name="Picture 9" descr="036eb30c5b345b03.png"/>
+          <p:cNvPicPr>
+            <a:picLocks noChangeAspect="1"/>
+          </p:cNvPicPr>
+          <p:nvPr/>
+        </p:nvPicPr>
+        <p:blipFill>
+          <a:blip r:embed="rId2"/>
+          <a:stretch>
+            <a:fillRect/>
+          </a:stretch>
+        </p:blipFill>
+        <p:spPr>
+          <a:xfrm>
+            <a:off x="3028513" y="3204176"/>
+            <a:ext cx="3971544" cy="365760"/>
+          </a:xfrm>
+          <a:prstGeom prst="rect">
+            <a:avLst/>
+          </a:prstGeom>
+        </p:spPr>
+      </p:pic>
+      <p:sp>
+        <p:nvSpPr>
+          <p:cNvPr id="11" name="TextBox 10"/>
           <p:cNvSpPr txBox="1"/>
           <p:nvPr/>
         </p:nvSpPr>
@@ -3723,20 +3782,20 @@
           <a:p>
             <a:pPr algn="ctr"/>
             <a:r>
-              <a:rPr sz="3200" b="1" i="0">
+              <a:rPr sz="3040" b="1" i="0">
                 <a:solidFill>
                   <a:srgbClr val="9E1B32"/>
                 </a:solidFill>
-                <a:latin typeface="Century Schoolbook"/>
+                <a:latin typeface="Lexend"/>
               </a:rPr>
               <a:t>Answer:   1.105 × 10</a:t>
             </a:r>
             <a:r>
-              <a:rPr sz="3200" b="1" i="0" baseline="30000">
+              <a:rPr sz="3040" b="1" i="0" baseline="30000">
                 <a:solidFill>
                   <a:srgbClr val="9E1B32"/>
                 </a:solidFill>
-                <a:latin typeface="Century Schoolbook"/>
+                <a:latin typeface="Lexend"/>
               </a:rPr>
               <a:t>8</a:t>
             </a:r>
@@ -3785,11 +3844,11 @@
           <a:p>
             <a:pPr algn="l"/>
             <a:r>
-              <a:rPr sz="3600" b="1" i="0">
+              <a:rPr sz="3420" b="1" i="0">
                 <a:solidFill>
                   <a:srgbClr val="1A1A1A"/>
                 </a:solidFill>
-                <a:latin typeface="Century Schoolbook"/>
+                <a:latin typeface="Lexend"/>
               </a:rPr>
               <a:t>Example 2</a:t>
             </a:r>
@@ -3925,11 +3984,11 @@
           <a:p>
             <a:pPr algn="l"/>
             <a:r>
-              <a:rPr sz="1100" b="0" i="1">
+              <a:rPr sz="1040" b="0" i="0">
                 <a:solidFill>
                   <a:srgbClr val="6B6B6B"/>
                 </a:solidFill>
-                <a:latin typeface="Century Schoolbook"/>
+                <a:latin typeface="Lexend"/>
               </a:rPr>
               <a:t>Grade 7 Accelerated · Unit 3 · Lesson 8 — Writing Large Numbers in Scientific Notation</a:t>
             </a:r>
@@ -3960,11 +4019,11 @@
           <a:p>
             <a:pPr algn="r"/>
             <a:r>
-              <a:rPr sz="1100" b="0" i="0">
+              <a:rPr sz="1040" b="0" i="0">
                 <a:solidFill>
                   <a:srgbClr val="6B6B6B"/>
                 </a:solidFill>
-                <a:latin typeface="Century Schoolbook"/>
+                <a:latin typeface="Lexend"/>
               </a:rPr>
               <a:t>11</a:t>
             </a:r>
@@ -3979,8 +4038,8 @@
         </p:nvSpPr>
         <p:spPr>
           <a:xfrm>
-            <a:off x="1688167" y="2080260"/>
-            <a:ext cx="4558064" cy="457200"/>
+            <a:off x="1739206" y="2080260"/>
+            <a:ext cx="4488298" cy="457200"/>
           </a:xfrm>
           <a:prstGeom prst="rect">
             <a:avLst/>
@@ -3995,11 +4054,11 @@
           <a:p>
             <a:pPr algn="l"/>
             <a:r>
-              <a:rPr sz="2600" b="0" i="0">
+              <a:rPr sz="2470" b="0" i="0">
                 <a:solidFill>
                   <a:srgbClr val="1A1A1A"/>
                 </a:solidFill>
-                <a:latin typeface="Century Schoolbook"/>
+                <a:latin typeface="Lexend"/>
               </a:rPr>
               <a:t>How many times larger is  </a:t>
             </a:r>
@@ -4008,7 +4067,7 @@
       </p:sp>
       <p:pic>
         <p:nvPicPr>
-          <p:cNvPr id="9" name="Picture 8" descr="4dc6640317f68a2b.png"/>
+          <p:cNvPr id="9" name="Picture 8" descr="e6569deac08d6ce0.png"/>
           <p:cNvPicPr>
             <a:picLocks noChangeAspect="1"/>
           </p:cNvPicPr>
@@ -4022,8 +4081,8 @@
         </p:blipFill>
         <p:spPr>
           <a:xfrm>
-            <a:off x="6109072" y="2133599"/>
-            <a:ext cx="1405128" cy="350520"/>
+            <a:off x="6090345" y="2139696"/>
+            <a:ext cx="1386840" cy="338328"/>
           </a:xfrm>
           <a:prstGeom prst="rect">
             <a:avLst/>
@@ -4038,8 +4097,8 @@
         </p:nvSpPr>
         <p:spPr>
           <a:xfrm>
-            <a:off x="7514200" y="2080260"/>
-            <a:ext cx="1356212" cy="457200"/>
+            <a:off x="7477185" y="2080260"/>
+            <a:ext cx="1316601" cy="457200"/>
           </a:xfrm>
           <a:prstGeom prst="rect">
             <a:avLst/>
@@ -4054,11 +4113,11 @@
           <a:p>
             <a:pPr algn="l"/>
             <a:r>
-              <a:rPr sz="2600" b="0" i="0">
+              <a:rPr sz="2470" b="0" i="0">
                 <a:solidFill>
                   <a:srgbClr val="1A1A1A"/>
                 </a:solidFill>
-                <a:latin typeface="Century Schoolbook"/>
+                <a:latin typeface="Lexend"/>
               </a:rPr>
               <a:t>  than  </a:t>
             </a:r>
@@ -4067,7 +4126,7 @@
       </p:sp>
       <p:pic>
         <p:nvPicPr>
-          <p:cNvPr id="11" name="Picture 10" descr="a7f651d263392d9b.png"/>
+          <p:cNvPr id="11" name="Picture 10" descr="416dd2cfada87c64.png"/>
           <p:cNvPicPr>
             <a:picLocks noChangeAspect="1"/>
           </p:cNvPicPr>
@@ -4081,8 +4140,8 @@
         </p:blipFill>
         <p:spPr>
           <a:xfrm>
-            <a:off x="8733252" y="2136648"/>
-            <a:ext cx="1414272" cy="344424"/>
+            <a:off x="8656627" y="2139696"/>
+            <a:ext cx="1429512" cy="338328"/>
           </a:xfrm>
           <a:prstGeom prst="rect">
             <a:avLst/>
@@ -4097,8 +4156,8 @@
         </p:nvSpPr>
         <p:spPr>
           <a:xfrm>
-            <a:off x="10147524" y="2080260"/>
-            <a:ext cx="462987" cy="457200"/>
+            <a:off x="10086139" y="2080260"/>
+            <a:ext cx="473333" cy="457200"/>
           </a:xfrm>
           <a:prstGeom prst="rect">
             <a:avLst/>
@@ -4113,11 +4172,11 @@
           <a:p>
             <a:pPr algn="l"/>
             <a:r>
-              <a:rPr sz="2600" b="0" i="0">
+              <a:rPr sz="2470" b="0" i="0">
                 <a:solidFill>
                   <a:srgbClr val="1A1A1A"/>
                 </a:solidFill>
-                <a:latin typeface="Century Schoolbook"/>
+                <a:latin typeface="Lexend"/>
               </a:rPr>
               <a:t> ?</a:t>
             </a:r>
@@ -4166,11 +4225,11 @@
           <a:p>
             <a:pPr algn="l"/>
             <a:r>
-              <a:rPr sz="3600" b="1" i="0">
+              <a:rPr sz="3420" b="1" i="0">
                 <a:solidFill>
                   <a:srgbClr val="1A1A1A"/>
                 </a:solidFill>
-                <a:latin typeface="Century Schoolbook"/>
+                <a:latin typeface="Lexend"/>
               </a:rPr>
               <a:t>Example 2</a:t>
             </a:r>
@@ -4306,11 +4365,11 @@
           <a:p>
             <a:pPr algn="l"/>
             <a:r>
-              <a:rPr sz="1100" b="0" i="1">
+              <a:rPr sz="1040" b="0" i="0">
                 <a:solidFill>
                   <a:srgbClr val="6B6B6B"/>
                 </a:solidFill>
-                <a:latin typeface="Century Schoolbook"/>
+                <a:latin typeface="Lexend"/>
               </a:rPr>
               <a:t>Grade 7 Accelerated · Unit 3 · Lesson 8 — Writing Large Numbers in Scientific Notation</a:t>
             </a:r>
@@ -4341,11 +4400,11 @@
           <a:p>
             <a:pPr algn="r"/>
             <a:r>
-              <a:rPr sz="1100" b="0" i="0">
+              <a:rPr sz="1040" b="0" i="0">
                 <a:solidFill>
                   <a:srgbClr val="6B6B6B"/>
                 </a:solidFill>
-                <a:latin typeface="Century Schoolbook"/>
+                <a:latin typeface="Lexend"/>
               </a:rPr>
               <a:t>12</a:t>
             </a:r>
@@ -4354,7 +4413,7 @@
       </p:sp>
       <p:pic>
         <p:nvPicPr>
-          <p:cNvPr id="8" name="Picture 7" descr="ea7fbd33ef479ef5.png"/>
+          <p:cNvPr id="8" name="Picture 7" descr="9fc71f71d11df77c.png"/>
           <p:cNvPicPr>
             <a:picLocks noChangeAspect="1"/>
           </p:cNvPicPr>
@@ -4369,7 +4428,7 @@
         <p:spPr>
           <a:xfrm>
             <a:off x="1828800" y="1920240"/>
-            <a:ext cx="1438656" cy="691896"/>
+            <a:ext cx="1438656" cy="673608"/>
           </a:xfrm>
           <a:prstGeom prst="rect">
             <a:avLst/>
@@ -4378,7 +4437,7 @@
       </p:pic>
       <p:pic>
         <p:nvPicPr>
-          <p:cNvPr id="9" name="Picture 8" descr="ecf3b7ddda2003c9.png"/>
+          <p:cNvPr id="9" name="Picture 8" descr="8ba743c589001141.png"/>
           <p:cNvPicPr>
             <a:picLocks noChangeAspect="1"/>
           </p:cNvPicPr>
@@ -4392,8 +4451,8 @@
         </p:blipFill>
         <p:spPr>
           <a:xfrm>
-            <a:off x="1828800" y="2886456"/>
-            <a:ext cx="2386584" cy="807720"/>
+            <a:off x="1828800" y="2868168"/>
+            <a:ext cx="2359152" cy="795528"/>
           </a:xfrm>
           <a:prstGeom prst="rect">
             <a:avLst/>
@@ -4402,7 +4461,7 @@
       </p:pic>
       <p:pic>
         <p:nvPicPr>
-          <p:cNvPr id="10" name="Picture 9" descr="8a1e664f4b411659.png"/>
+          <p:cNvPr id="10" name="Picture 9" descr="9c7006607715b989.png"/>
           <p:cNvPicPr>
             <a:picLocks noChangeAspect="1"/>
           </p:cNvPicPr>
@@ -4416,8 +4475,8 @@
         </p:blipFill>
         <p:spPr>
           <a:xfrm>
-            <a:off x="1828800" y="3968496"/>
-            <a:ext cx="2026920" cy="289560"/>
+            <a:off x="1828800" y="3938016"/>
+            <a:ext cx="1975104" cy="277368"/>
           </a:xfrm>
           <a:prstGeom prst="rect">
             <a:avLst/>
@@ -4432,7 +4491,7 @@
         </p:nvSpPr>
         <p:spPr>
           <a:xfrm>
-            <a:off x="777240" y="4715256"/>
+            <a:off x="777240" y="4672584"/>
             <a:ext cx="10607040" cy="548640"/>
           </a:xfrm>
           <a:prstGeom prst="rect">
@@ -4448,11 +4507,11 @@
           <a:p>
             <a:pPr algn="ctr"/>
             <a:r>
-              <a:rPr sz="3200" b="1" i="0">
+              <a:rPr sz="3040" b="1" i="0">
                 <a:solidFill>
                   <a:srgbClr val="9E1B32"/>
                 </a:solidFill>
-                <a:latin typeface="Century Schoolbook"/>
+                <a:latin typeface="Lexend"/>
               </a:rPr>
               <a:t>Answer:   15 times larger</a:t>
             </a:r>
@@ -4501,11 +4560,11 @@
           <a:p>
             <a:pPr algn="l"/>
             <a:r>
-              <a:rPr sz="3600" b="1" i="0">
+              <a:rPr sz="3420" b="1" i="0">
                 <a:solidFill>
                   <a:srgbClr val="1A1A1A"/>
                 </a:solidFill>
-                <a:latin typeface="Century Schoolbook"/>
+                <a:latin typeface="Lexend"/>
               </a:rPr>
               <a:t>Your Turn</a:t>
             </a:r>
@@ -4641,11 +4700,11 @@
           <a:p>
             <a:pPr algn="l"/>
             <a:r>
-              <a:rPr sz="1100" b="0" i="1">
+              <a:rPr sz="1040" b="0" i="0">
                 <a:solidFill>
                   <a:srgbClr val="6B6B6B"/>
                 </a:solidFill>
-                <a:latin typeface="Century Schoolbook"/>
+                <a:latin typeface="Lexend"/>
               </a:rPr>
               <a:t>Grade 7 Accelerated · Unit 3 · Lesson 8 — Writing Large Numbers in Scientific Notation</a:t>
             </a:r>
@@ -4676,11 +4735,11 @@
           <a:p>
             <a:pPr algn="r"/>
             <a:r>
-              <a:rPr sz="1100" b="0" i="0">
+              <a:rPr sz="1040" b="0" i="0">
                 <a:solidFill>
                   <a:srgbClr val="6B6B6B"/>
                 </a:solidFill>
-                <a:latin typeface="Century Schoolbook"/>
+                <a:latin typeface="Lexend"/>
               </a:rPr>
               <a:t>13</a:t>
             </a:r>
@@ -4695,8 +4754,8 @@
         </p:nvSpPr>
         <p:spPr>
           <a:xfrm>
-            <a:off x="3304952" y="2185415"/>
-            <a:ext cx="3923983" cy="457200"/>
+            <a:off x="3334324" y="1581912"/>
+            <a:ext cx="3865239" cy="457200"/>
           </a:xfrm>
           <a:prstGeom prst="rect">
             <a:avLst/>
@@ -4711,11 +4770,11 @@
           <a:p>
             <a:pPr algn="l"/>
             <a:r>
-              <a:rPr sz="2600" b="0" i="0">
+              <a:rPr sz="2470" b="0" i="0">
                 <a:solidFill>
                   <a:srgbClr val="1A1A1A"/>
                 </a:solidFill>
-                <a:latin typeface="Century Schoolbook"/>
+                <a:latin typeface="Lexend"/>
               </a:rPr>
               <a:t>Everglades alligators:  </a:t>
             </a:r>
@@ -4724,7 +4783,7 @@
       </p:sp>
       <p:pic>
         <p:nvPicPr>
-          <p:cNvPr id="9" name="Picture 8" descr="b3b23388699e71f0.png"/>
+          <p:cNvPr id="9" name="Picture 8" descr="3084bf1d1a28c69f.png"/>
           <p:cNvPicPr>
             <a:picLocks noChangeAspect="1"/>
           </p:cNvPicPr>
@@ -4738,8 +4797,8 @@
         </p:blipFill>
         <p:spPr>
           <a:xfrm>
-            <a:off x="7091775" y="2194560"/>
-            <a:ext cx="1764792" cy="438912"/>
+            <a:off x="7062403" y="1600200"/>
+            <a:ext cx="1764792" cy="420624"/>
           </a:xfrm>
           <a:prstGeom prst="rect">
             <a:avLst/>
@@ -4754,8 +4813,8 @@
         </p:nvSpPr>
         <p:spPr>
           <a:xfrm>
-            <a:off x="3624165" y="2945892"/>
-            <a:ext cx="3316037" cy="457200"/>
+            <a:off x="3683926" y="2325624"/>
+            <a:ext cx="3217851" cy="457200"/>
           </a:xfrm>
           <a:prstGeom prst="rect">
             <a:avLst/>
@@ -4770,11 +4829,11 @@
           <a:p>
             <a:pPr algn="l"/>
             <a:r>
-              <a:rPr sz="2600" b="0" i="0">
+              <a:rPr sz="2470" b="0" i="0">
                 <a:solidFill>
                   <a:srgbClr val="1A1A1A"/>
                 </a:solidFill>
-                <a:latin typeface="Century Schoolbook"/>
+                <a:latin typeface="Lexend"/>
               </a:rPr>
               <a:t>Florida alligators:  </a:t>
             </a:r>
@@ -4783,7 +4842,7 @@
       </p:sp>
       <p:pic>
         <p:nvPicPr>
-          <p:cNvPr id="11" name="Picture 10" descr="33ace73c84f9ae31.png"/>
+          <p:cNvPr id="11" name="Picture 10" descr="8f2aa491890c8b0a.png"/>
           <p:cNvPicPr>
             <a:picLocks noChangeAspect="1"/>
           </p:cNvPicPr>
@@ -4797,8 +4856,8 @@
         </p:blipFill>
         <p:spPr>
           <a:xfrm>
-            <a:off x="6803042" y="2953512"/>
-            <a:ext cx="1734312" cy="441960"/>
+            <a:off x="6764617" y="2340864"/>
+            <a:ext cx="1712976" cy="426720"/>
           </a:xfrm>
           <a:prstGeom prst="rect">
             <a:avLst/>
@@ -4813,7 +4872,7 @@
         </p:nvSpPr>
         <p:spPr>
           <a:xfrm>
-            <a:off x="777240" y="3715512"/>
+            <a:off x="777240" y="3087624"/>
             <a:ext cx="10607040" cy="429370"/>
           </a:xfrm>
           <a:prstGeom prst="rect">
@@ -4829,11 +4888,11 @@
           <a:p>
             <a:pPr algn="ctr"/>
             <a:r>
-              <a:rPr sz="2400" b="0" i="0">
+              <a:rPr sz="2280" b="0" i="0">
                 <a:solidFill>
                   <a:srgbClr val="1A1A1A"/>
                 </a:solidFill>
-                <a:latin typeface="Century Schoolbook"/>
+                <a:latin typeface="Lexend"/>
               </a:rPr>
               <a:t>About how many times larger is the Florida number?</a:t>
             </a:r>
@@ -4882,11 +4941,11 @@
           <a:p>
             <a:pPr algn="l"/>
             <a:r>
-              <a:rPr sz="3600" b="1" i="0">
+              <a:rPr sz="3420" b="1" i="0">
                 <a:solidFill>
                   <a:srgbClr val="1A1A1A"/>
                 </a:solidFill>
-                <a:latin typeface="Century Schoolbook"/>
+                <a:latin typeface="Lexend"/>
               </a:rPr>
               <a:t>Your Turn</a:t>
             </a:r>
@@ -5022,11 +5081,11 @@
           <a:p>
             <a:pPr algn="l"/>
             <a:r>
-              <a:rPr sz="1100" b="0" i="1">
+              <a:rPr sz="1040" b="0" i="0">
                 <a:solidFill>
                   <a:srgbClr val="6B6B6B"/>
                 </a:solidFill>
-                <a:latin typeface="Century Schoolbook"/>
+                <a:latin typeface="Lexend"/>
               </a:rPr>
               <a:t>Grade 7 Accelerated · Unit 3 · Lesson 8 — Writing Large Numbers in Scientific Notation</a:t>
             </a:r>
@@ -5057,11 +5116,11 @@
           <a:p>
             <a:pPr algn="r"/>
             <a:r>
-              <a:rPr sz="1100" b="0" i="0">
+              <a:rPr sz="1040" b="0" i="0">
                 <a:solidFill>
                   <a:srgbClr val="6B6B6B"/>
                 </a:solidFill>
-                <a:latin typeface="Century Schoolbook"/>
+                <a:latin typeface="Lexend"/>
               </a:rPr>
               <a:t>14</a:t>
             </a:r>
@@ -5076,8 +5135,8 @@
         </p:nvSpPr>
         <p:spPr>
           <a:xfrm>
-            <a:off x="3304952" y="2186940"/>
-            <a:ext cx="3923983" cy="457200"/>
+            <a:off x="3332800" y="1581912"/>
+            <a:ext cx="3865239" cy="457200"/>
           </a:xfrm>
           <a:prstGeom prst="rect">
             <a:avLst/>
@@ -5092,11 +5151,11 @@
           <a:p>
             <a:pPr algn="l"/>
             <a:r>
-              <a:rPr sz="2600" b="0" i="0">
+              <a:rPr sz="2470" b="0" i="0">
                 <a:solidFill>
                   <a:srgbClr val="1A1A1A"/>
                 </a:solidFill>
-                <a:latin typeface="Century Schoolbook"/>
+                <a:latin typeface="Lexend"/>
               </a:rPr>
               <a:t>Everglades alligators:  </a:t>
             </a:r>
@@ -5105,7 +5164,7 @@
       </p:sp>
       <p:pic>
         <p:nvPicPr>
-          <p:cNvPr id="9" name="Picture 8" descr="9213e17c268194f6.png"/>
+          <p:cNvPr id="9" name="Picture 8" descr="cdc1cc7791403f11.png"/>
           <p:cNvPicPr>
             <a:picLocks noChangeAspect="1"/>
           </p:cNvPicPr>
@@ -5119,8 +5178,8 @@
         </p:blipFill>
         <p:spPr>
           <a:xfrm>
-            <a:off x="7091775" y="2194560"/>
-            <a:ext cx="1764792" cy="441960"/>
+            <a:off x="7060879" y="1600200"/>
+            <a:ext cx="1767840" cy="420624"/>
           </a:xfrm>
           <a:prstGeom prst="rect">
             <a:avLst/>
@@ -5135,8 +5194,8 @@
         </p:nvSpPr>
         <p:spPr>
           <a:xfrm>
-            <a:off x="3624165" y="2948940"/>
-            <a:ext cx="3316037" cy="457200"/>
+            <a:off x="3685450" y="2325624"/>
+            <a:ext cx="3217851" cy="457200"/>
           </a:xfrm>
           <a:prstGeom prst="rect">
             <a:avLst/>
@@ -5151,11 +5210,11 @@
           <a:p>
             <a:pPr algn="l"/>
             <a:r>
-              <a:rPr sz="2600" b="0" i="0">
+              <a:rPr sz="2470" b="0" i="0">
                 <a:solidFill>
                   <a:srgbClr val="1A1A1A"/>
                 </a:solidFill>
-                <a:latin typeface="Century Schoolbook"/>
+                <a:latin typeface="Lexend"/>
               </a:rPr>
               <a:t>Florida alligators:  </a:t>
             </a:r>
@@ -5164,7 +5223,7 @@
       </p:sp>
       <p:pic>
         <p:nvPicPr>
-          <p:cNvPr id="11" name="Picture 10" descr="c0aa154a2b895b46.png"/>
+          <p:cNvPr id="11" name="Picture 10" descr="97a43bfe3668a389.png"/>
           <p:cNvPicPr>
             <a:picLocks noChangeAspect="1"/>
           </p:cNvPicPr>
@@ -5178,8 +5237,8 @@
         </p:blipFill>
         <p:spPr>
           <a:xfrm>
-            <a:off x="6803042" y="2956560"/>
-            <a:ext cx="1734312" cy="441960"/>
+            <a:off x="6766141" y="2340864"/>
+            <a:ext cx="1709928" cy="426720"/>
           </a:xfrm>
           <a:prstGeom prst="rect">
             <a:avLst/>
@@ -5194,7 +5253,7 @@
         </p:nvSpPr>
         <p:spPr>
           <a:xfrm>
-            <a:off x="777240" y="3718560"/>
+            <a:off x="777240" y="3087624"/>
             <a:ext cx="10607040" cy="429370"/>
           </a:xfrm>
           <a:prstGeom prst="rect">
@@ -5210,11 +5269,11 @@
           <a:p>
             <a:pPr algn="ctr"/>
             <a:r>
-              <a:rPr sz="2400" b="0" i="0">
+              <a:rPr sz="2280" b="0" i="0">
                 <a:solidFill>
                   <a:srgbClr val="1A1A1A"/>
                 </a:solidFill>
-                <a:latin typeface="Century Schoolbook"/>
+                <a:latin typeface="Lexend"/>
               </a:rPr>
               <a:t>About how many times larger is the Florida number?</a:t>
             </a:r>
@@ -5229,7 +5288,149 @@
         </p:nvSpPr>
         <p:spPr>
           <a:xfrm>
-            <a:off x="777240" y="4572000"/>
+            <a:off x="3498343" y="3677014"/>
+            <a:ext cx="3415280" cy="457200"/>
+          </a:xfrm>
+          <a:prstGeom prst="rect">
+            <a:avLst/>
+          </a:prstGeom>
+          <a:noFill/>
+        </p:spPr>
+        <p:txBody>
+          <a:bodyPr wrap="none" lIns="45720" rIns="45720" tIns="18288" bIns="18288" anchor="ctr">
+            <a:noAutofit/>
+          </a:bodyPr>
+          <a:lstStyle/>
+          <a:p>
+            <a:pPr algn="l"/>
+            <a:r>
+              <a:rPr sz="2330" b="0" i="0">
+                <a:solidFill>
+                  <a:srgbClr val="1A1A1A"/>
+                </a:solidFill>
+                <a:latin typeface="Lexend"/>
+              </a:rPr>
+              <a:t>Divide the numbers:  </a:t>
+            </a:r>
+          </a:p>
+        </p:txBody>
+      </p:sp>
+      <p:pic>
+        <p:nvPicPr>
+          <p:cNvPr id="14" name="Picture 13" descr="065d4ec2ea76adf4.png"/>
+          <p:cNvPicPr>
+            <a:picLocks noChangeAspect="1"/>
+          </p:cNvPicPr>
+          <p:nvPr/>
+        </p:nvPicPr>
+        <p:blipFill>
+          <a:blip r:embed="rId4"/>
+          <a:stretch>
+            <a:fillRect/>
+          </a:stretch>
+        </p:blipFill>
+        <p:spPr>
+          <a:xfrm>
+            <a:off x="6776464" y="3798934"/>
+            <a:ext cx="1892807" cy="213360"/>
+          </a:xfrm>
+          <a:prstGeom prst="rect">
+            <a:avLst/>
+          </a:prstGeom>
+        </p:spPr>
+      </p:pic>
+      <p:sp>
+        <p:nvSpPr>
+          <p:cNvPr id="15" name="TextBox 14"/>
+          <p:cNvSpPr txBox="1"/>
+          <p:nvPr/>
+        </p:nvSpPr>
+        <p:spPr>
+          <a:xfrm>
+            <a:off x="3498343" y="4179934"/>
+            <a:ext cx="3183431" cy="457200"/>
+          </a:xfrm>
+          <a:prstGeom prst="rect">
+            <a:avLst/>
+          </a:prstGeom>
+          <a:noFill/>
+        </p:spPr>
+        <p:txBody>
+          <a:bodyPr wrap="none" lIns="45720" rIns="45720" tIns="18288" bIns="18288" anchor="ctr">
+            <a:noAutofit/>
+          </a:bodyPr>
+          <a:lstStyle/>
+          <a:p>
+            <a:pPr algn="l"/>
+            <a:r>
+              <a:rPr sz="2330" b="0" i="0">
+                <a:solidFill>
+                  <a:srgbClr val="1A1A1A"/>
+                </a:solidFill>
+                <a:latin typeface="Lexend"/>
+              </a:rPr>
+              <a:t>Divide the powers:  </a:t>
+            </a:r>
+          </a:p>
+        </p:txBody>
+      </p:sp>
+      <p:pic>
+        <p:nvPicPr>
+          <p:cNvPr id="16" name="Picture 15" descr="88fcdaa08f344db7.png"/>
+          <p:cNvPicPr>
+            <a:picLocks noChangeAspect="1"/>
+          </p:cNvPicPr>
+          <p:nvPr/>
+        </p:nvPicPr>
+        <p:blipFill>
+          <a:blip r:embed="rId5"/>
+          <a:stretch>
+            <a:fillRect/>
+          </a:stretch>
+        </p:blipFill>
+        <p:spPr>
+          <a:xfrm>
+            <a:off x="6544615" y="4277470"/>
+            <a:ext cx="1871472" cy="262128"/>
+          </a:xfrm>
+          <a:prstGeom prst="rect">
+            <a:avLst/>
+          </a:prstGeom>
+        </p:spPr>
+      </p:pic>
+      <p:pic>
+        <p:nvPicPr>
+          <p:cNvPr id="17" name="Picture 16" descr="6133d72459d9528a.png"/>
+          <p:cNvPicPr>
+            <a:picLocks noChangeAspect="1"/>
+          </p:cNvPicPr>
+          <p:nvPr/>
+        </p:nvPicPr>
+        <p:blipFill>
+          <a:blip r:embed="rId6"/>
+          <a:stretch>
+            <a:fillRect/>
+          </a:stretch>
+        </p:blipFill>
+        <p:spPr>
+          <a:xfrm>
+            <a:off x="3553207" y="4780390"/>
+            <a:ext cx="1911095" cy="262128"/>
+          </a:xfrm>
+          <a:prstGeom prst="rect">
+            <a:avLst/>
+          </a:prstGeom>
+        </p:spPr>
+      </p:pic>
+      <p:sp>
+        <p:nvSpPr>
+          <p:cNvPr id="18" name="TextBox 17"/>
+          <p:cNvSpPr txBox="1"/>
+          <p:nvPr/>
+        </p:nvSpPr>
+        <p:spPr>
+          <a:xfrm>
+            <a:off x="777240" y="5254354"/>
             <a:ext cx="10607040" cy="548640"/>
           </a:xfrm>
           <a:prstGeom prst="rect">
@@ -5245,11 +5446,11 @@
           <a:p>
             <a:pPr algn="ctr"/>
             <a:r>
-              <a:rPr sz="3200" b="1" i="0">
+              <a:rPr sz="3040" b="1" i="0">
                 <a:solidFill>
                   <a:srgbClr val="9E1B32"/>
                 </a:solidFill>
-                <a:latin typeface="Century Schoolbook"/>
+                <a:latin typeface="Lexend"/>
               </a:rPr>
               <a:t>Answer:   about 7.5 times larger</a:t>
             </a:r>
@@ -5298,11 +5499,11 @@
           <a:p>
             <a:pPr algn="l"/>
             <a:r>
-              <a:rPr sz="3400" b="1" i="0">
+              <a:rPr sz="3229" b="1" i="0">
                 <a:solidFill>
                   <a:srgbClr val="1A1A1A"/>
                 </a:solidFill>
-                <a:latin typeface="Century Schoolbook"/>
+                <a:latin typeface="Lexend"/>
               </a:rPr>
               <a:t>Whiteboards   ·   Question 1 of 9</a:t>
             </a:r>
@@ -5438,11 +5639,11 @@
           <a:p>
             <a:pPr algn="l"/>
             <a:r>
-              <a:rPr sz="1100" b="0" i="1">
+              <a:rPr sz="1040" b="0" i="0">
                 <a:solidFill>
                   <a:srgbClr val="6B6B6B"/>
                 </a:solidFill>
-                <a:latin typeface="Century Schoolbook"/>
+                <a:latin typeface="Lexend"/>
               </a:rPr>
               <a:t>Grade 7 Accelerated · Unit 3 · Lesson 8 — Writing Large Numbers in Scientific Notation</a:t>
             </a:r>
@@ -5473,11 +5674,11 @@
           <a:p>
             <a:pPr algn="r"/>
             <a:r>
-              <a:rPr sz="1100" b="0" i="0">
+              <a:rPr sz="1040" b="0" i="0">
                 <a:solidFill>
                   <a:srgbClr val="6B6B6B"/>
                 </a:solidFill>
-                <a:latin typeface="Century Schoolbook"/>
+                <a:latin typeface="Lexend"/>
               </a:rPr>
               <a:t>15</a:t>
             </a:r>
@@ -5508,11 +5709,11 @@
           <a:p>
             <a:pPr algn="ctr"/>
             <a:r>
-              <a:rPr sz="2600" b="0" i="0">
+              <a:rPr sz="2470" b="0" i="0">
                 <a:solidFill>
                   <a:srgbClr val="1A1A1A"/>
                 </a:solidFill>
-                <a:latin typeface="Century Schoolbook"/>
+                <a:latin typeface="Lexend"/>
               </a:rPr>
               <a:t>Write  4,000,000  in scientific notation.</a:t>
             </a:r>
@@ -5543,11 +5744,11 @@
           <a:p>
             <a:pPr algn="ctr"/>
             <a:r>
-              <a:rPr sz="2600" b="1" i="0">
+              <a:rPr sz="2470" b="1" i="0">
                 <a:solidFill>
                   <a:srgbClr val="1A1A1A"/>
                 </a:solidFill>
-                <a:latin typeface="Century Schoolbook"/>
+                <a:latin typeface="Lexend"/>
               </a:rPr>
               <a:t>Answer it.</a:t>
             </a:r>
@@ -5596,11 +5797,11 @@
           <a:p>
             <a:pPr algn="l"/>
             <a:r>
-              <a:rPr sz="3400" b="1" i="0">
+              <a:rPr sz="3229" b="1" i="0">
                 <a:solidFill>
                   <a:srgbClr val="1A1A1A"/>
                 </a:solidFill>
-                <a:latin typeface="Century Schoolbook"/>
+                <a:latin typeface="Lexend"/>
               </a:rPr>
               <a:t>Whiteboards   ·   Question 1 of 9</a:t>
             </a:r>
@@ -5736,11 +5937,11 @@
           <a:p>
             <a:pPr algn="l"/>
             <a:r>
-              <a:rPr sz="1100" b="0" i="1">
+              <a:rPr sz="1040" b="0" i="0">
                 <a:solidFill>
                   <a:srgbClr val="6B6B6B"/>
                 </a:solidFill>
-                <a:latin typeface="Century Schoolbook"/>
+                <a:latin typeface="Lexend"/>
               </a:rPr>
               <a:t>Grade 7 Accelerated · Unit 3 · Lesson 8 — Writing Large Numbers in Scientific Notation</a:t>
             </a:r>
@@ -5771,11 +5972,11 @@
           <a:p>
             <a:pPr algn="r"/>
             <a:r>
-              <a:rPr sz="1100" b="0" i="0">
+              <a:rPr sz="1040" b="0" i="0">
                 <a:solidFill>
                   <a:srgbClr val="6B6B6B"/>
                 </a:solidFill>
-                <a:latin typeface="Century Schoolbook"/>
+                <a:latin typeface="Lexend"/>
               </a:rPr>
               <a:t>16</a:t>
             </a:r>
@@ -5806,11 +6007,11 @@
           <a:p>
             <a:pPr algn="ctr"/>
             <a:r>
-              <a:rPr sz="2600" b="0" i="0">
+              <a:rPr sz="2470" b="0" i="0">
                 <a:solidFill>
                   <a:srgbClr val="1A1A1A"/>
                 </a:solidFill>
-                <a:latin typeface="Century Schoolbook"/>
+                <a:latin typeface="Lexend"/>
               </a:rPr>
               <a:t>Write  4,000,000  in scientific notation.</a:t>
             </a:r>
@@ -5820,6 +6021,89 @@
       <p:sp>
         <p:nvSpPr>
           <p:cNvPr id="9" name="TextBox 8"/>
+          <p:cNvSpPr txBox="1"/>
+          <p:nvPr/>
+        </p:nvSpPr>
+        <p:spPr>
+          <a:xfrm>
+            <a:off x="2160795" y="2728291"/>
+            <a:ext cx="5526497" cy="457200"/>
+          </a:xfrm>
+          <a:prstGeom prst="rect">
+            <a:avLst/>
+          </a:prstGeom>
+          <a:noFill/>
+        </p:spPr>
+        <p:txBody>
+          <a:bodyPr wrap="none" lIns="45720" rIns="45720" tIns="18288" bIns="18288" anchor="ctr">
+            <a:noAutofit/>
+          </a:bodyPr>
+          <a:lstStyle/>
+          <a:p>
+            <a:pPr algn="l"/>
+            <a:r>
+              <a:rPr sz="2750" b="0" i="0">
+                <a:solidFill>
+                  <a:srgbClr val="1A1A1A"/>
+                </a:solidFill>
+                <a:latin typeface="Lexend"/>
+              </a:rPr>
+              <a:t>The 4 is in the millions place:  </a:t>
+            </a:r>
+          </a:p>
+        </p:txBody>
+      </p:sp>
+      <p:pic>
+        <p:nvPicPr>
+          <p:cNvPr id="10" name="Picture 9" descr="2fbe08c1a41f3638.png"/>
+          <p:cNvPicPr>
+            <a:picLocks noChangeAspect="1"/>
+          </p:cNvPicPr>
+          <p:nvPr/>
+        </p:nvPicPr>
+        <p:blipFill>
+          <a:blip r:embed="rId2"/>
+          <a:stretch>
+            <a:fillRect/>
+          </a:stretch>
+        </p:blipFill>
+        <p:spPr>
+          <a:xfrm>
+            <a:off x="7550132" y="2772487"/>
+            <a:ext cx="2450592" cy="368808"/>
+          </a:xfrm>
+          <a:prstGeom prst="rect">
+            <a:avLst/>
+          </a:prstGeom>
+        </p:spPr>
+      </p:pic>
+      <p:pic>
+        <p:nvPicPr>
+          <p:cNvPr id="11" name="Picture 10" descr="05b1e2b22daef4a1.png"/>
+          <p:cNvPicPr>
+            <a:picLocks noChangeAspect="1"/>
+          </p:cNvPicPr>
+          <p:nvPr/>
+        </p:nvPicPr>
+        <p:blipFill>
+          <a:blip r:embed="rId3"/>
+          <a:stretch>
+            <a:fillRect/>
+          </a:stretch>
+        </p:blipFill>
+        <p:spPr>
+          <a:xfrm>
+            <a:off x="2215659" y="3311983"/>
+            <a:ext cx="3032760" cy="368808"/>
+          </a:xfrm>
+          <a:prstGeom prst="rect">
+            <a:avLst/>
+          </a:prstGeom>
+        </p:spPr>
+      </p:pic>
+      <p:sp>
+        <p:nvSpPr>
+          <p:cNvPr id="12" name="TextBox 11"/>
           <p:cNvSpPr txBox="1"/>
           <p:nvPr/>
         </p:nvSpPr>
@@ -5841,20 +6125,20 @@
           <a:p>
             <a:pPr algn="ctr"/>
             <a:r>
-              <a:rPr sz="3200" b="1" i="0">
+              <a:rPr sz="3040" b="1" i="0">
                 <a:solidFill>
                   <a:srgbClr val="9E1B32"/>
                 </a:solidFill>
-                <a:latin typeface="Century Schoolbook"/>
+                <a:latin typeface="Lexend"/>
               </a:rPr>
               <a:t>Answer:   4 × 10</a:t>
             </a:r>
             <a:r>
-              <a:rPr sz="3200" b="1" i="0" baseline="30000">
+              <a:rPr sz="3040" b="1" i="0" baseline="30000">
                 <a:solidFill>
                   <a:srgbClr val="9E1B32"/>
                 </a:solidFill>
-                <a:latin typeface="Century Schoolbook"/>
+                <a:latin typeface="Lexend"/>
               </a:rPr>
               <a:t>6</a:t>
             </a:r>
@@ -5903,11 +6187,11 @@
           <a:p>
             <a:pPr algn="l"/>
             <a:r>
-              <a:rPr sz="3400" b="1" i="0">
+              <a:rPr sz="3229" b="1" i="0">
                 <a:solidFill>
                   <a:srgbClr val="1A1A1A"/>
                 </a:solidFill>
-                <a:latin typeface="Century Schoolbook"/>
+                <a:latin typeface="Lexend"/>
               </a:rPr>
               <a:t>Whiteboards   ·   Question 2 of 9</a:t>
             </a:r>
@@ -6043,11 +6327,11 @@
           <a:p>
             <a:pPr algn="l"/>
             <a:r>
-              <a:rPr sz="1100" b="0" i="1">
+              <a:rPr sz="1040" b="0" i="0">
                 <a:solidFill>
                   <a:srgbClr val="6B6B6B"/>
                 </a:solidFill>
-                <a:latin typeface="Century Schoolbook"/>
+                <a:latin typeface="Lexend"/>
               </a:rPr>
               <a:t>Grade 7 Accelerated · Unit 3 · Lesson 8 — Writing Large Numbers in Scientific Notation</a:t>
             </a:r>
@@ -6078,11 +6362,11 @@
           <a:p>
             <a:pPr algn="r"/>
             <a:r>
-              <a:rPr sz="1100" b="0" i="0">
+              <a:rPr sz="1040" b="0" i="0">
                 <a:solidFill>
                   <a:srgbClr val="6B6B6B"/>
                 </a:solidFill>
-                <a:latin typeface="Century Schoolbook"/>
+                <a:latin typeface="Lexend"/>
               </a:rPr>
               <a:t>17</a:t>
             </a:r>
@@ -6097,8 +6381,8 @@
         </p:nvSpPr>
         <p:spPr>
           <a:xfrm>
-            <a:off x="3230641" y="2171700"/>
-            <a:ext cx="1311040" cy="457200"/>
+            <a:off x="3293365" y="2171700"/>
+            <a:ext cx="1273988" cy="457200"/>
           </a:xfrm>
           <a:prstGeom prst="rect">
             <a:avLst/>
@@ -6113,11 +6397,11 @@
           <a:p>
             <a:pPr algn="l"/>
             <a:r>
-              <a:rPr sz="2600" b="0" i="0">
+              <a:rPr sz="2470" b="0" i="0">
                 <a:solidFill>
                   <a:srgbClr val="1A1A1A"/>
                 </a:solidFill>
-                <a:latin typeface="Century Schoolbook"/>
+                <a:latin typeface="Lexend"/>
               </a:rPr>
               <a:t>Write  </a:t>
             </a:r>
@@ -6126,7 +6410,7 @@
       </p:sp>
       <p:pic>
         <p:nvPicPr>
-          <p:cNvPr id="9" name="Picture 8" descr="5f1494d210188d7e.png"/>
+          <p:cNvPr id="9" name="Picture 8" descr="23296af58026d09c.png"/>
           <p:cNvPicPr>
             <a:picLocks noChangeAspect="1"/>
           </p:cNvPicPr>
@@ -6140,8 +6424,8 @@
         </p:blipFill>
         <p:spPr>
           <a:xfrm>
-            <a:off x="4404522" y="2225040"/>
-            <a:ext cx="1429512" cy="350520"/>
+            <a:off x="4430193" y="2232660"/>
+            <a:ext cx="1405128" cy="335280"/>
           </a:xfrm>
           <a:prstGeom prst="rect">
             <a:avLst/>
@@ -6156,8 +6440,8 @@
         </p:nvSpPr>
         <p:spPr>
           <a:xfrm>
-            <a:off x="5834034" y="2171700"/>
-            <a:ext cx="3234003" cy="457200"/>
+            <a:off x="5835321" y="2171700"/>
+            <a:ext cx="3169993" cy="457200"/>
           </a:xfrm>
           <a:prstGeom prst="rect">
             <a:avLst/>
@@ -6172,11 +6456,11 @@
           <a:p>
             <a:pPr algn="l"/>
             <a:r>
-              <a:rPr sz="2600" b="0" i="0">
+              <a:rPr sz="2470" b="0" i="0">
                 <a:solidFill>
                   <a:srgbClr val="1A1A1A"/>
                 </a:solidFill>
-                <a:latin typeface="Century Schoolbook"/>
+                <a:latin typeface="Lexend"/>
               </a:rPr>
               <a:t>  in standard form.</a:t>
             </a:r>
@@ -6207,11 +6491,11 @@
           <a:p>
             <a:pPr algn="ctr"/>
             <a:r>
-              <a:rPr sz="2600" b="1" i="0">
+              <a:rPr sz="2470" b="1" i="0">
                 <a:solidFill>
                   <a:srgbClr val="1A1A1A"/>
                 </a:solidFill>
-                <a:latin typeface="Century Schoolbook"/>
+                <a:latin typeface="Lexend"/>
               </a:rPr>
               <a:t>Answer it.</a:t>
             </a:r>
@@ -6260,11 +6544,11 @@
           <a:p>
             <a:pPr algn="l"/>
             <a:r>
-              <a:rPr sz="3400" b="1" i="0">
+              <a:rPr sz="3229" b="1" i="0">
                 <a:solidFill>
                   <a:srgbClr val="1A1A1A"/>
                 </a:solidFill>
-                <a:latin typeface="Century Schoolbook"/>
+                <a:latin typeface="Lexend"/>
               </a:rPr>
               <a:t>Whiteboards   ·   Question 2 of 9</a:t>
             </a:r>
@@ -6400,11 +6684,11 @@
           <a:p>
             <a:pPr algn="l"/>
             <a:r>
-              <a:rPr sz="1100" b="0" i="1">
+              <a:rPr sz="1040" b="0" i="0">
                 <a:solidFill>
                   <a:srgbClr val="6B6B6B"/>
                 </a:solidFill>
-                <a:latin typeface="Century Schoolbook"/>
+                <a:latin typeface="Lexend"/>
               </a:rPr>
               <a:t>Grade 7 Accelerated · Unit 3 · Lesson 8 — Writing Large Numbers in Scientific Notation</a:t>
             </a:r>
@@ -6435,11 +6719,11 @@
           <a:p>
             <a:pPr algn="r"/>
             <a:r>
-              <a:rPr sz="1100" b="0" i="0">
+              <a:rPr sz="1040" b="0" i="0">
                 <a:solidFill>
                   <a:srgbClr val="6B6B6B"/>
                 </a:solidFill>
-                <a:latin typeface="Century Schoolbook"/>
+                <a:latin typeface="Lexend"/>
               </a:rPr>
               <a:t>18</a:t>
             </a:r>
@@ -6454,8 +6738,8 @@
         </p:nvSpPr>
         <p:spPr>
           <a:xfrm>
-            <a:off x="3232165" y="2080260"/>
-            <a:ext cx="1311040" cy="457200"/>
+            <a:off x="3293365" y="2080260"/>
+            <a:ext cx="1273988" cy="457200"/>
           </a:xfrm>
           <a:prstGeom prst="rect">
             <a:avLst/>
@@ -6470,11 +6754,11 @@
           <a:p>
             <a:pPr algn="l"/>
             <a:r>
-              <a:rPr sz="2600" b="0" i="0">
+              <a:rPr sz="2470" b="0" i="0">
                 <a:solidFill>
                   <a:srgbClr val="1A1A1A"/>
                 </a:solidFill>
-                <a:latin typeface="Century Schoolbook"/>
+                <a:latin typeface="Lexend"/>
               </a:rPr>
               <a:t>Write  </a:t>
             </a:r>
@@ -6483,7 +6767,7 @@
       </p:sp>
       <p:pic>
         <p:nvPicPr>
-          <p:cNvPr id="9" name="Picture 8" descr="52d884c0ec37c95a.png"/>
+          <p:cNvPr id="9" name="Picture 8" descr="e49d7c02aeaf030d.png"/>
           <p:cNvPicPr>
             <a:picLocks noChangeAspect="1"/>
           </p:cNvPicPr>
@@ -6497,8 +6781,8 @@
         </p:blipFill>
         <p:spPr>
           <a:xfrm>
-            <a:off x="4406046" y="2132076"/>
-            <a:ext cx="1426464" cy="353568"/>
+            <a:off x="4430193" y="2139696"/>
+            <a:ext cx="1405128" cy="338328"/>
           </a:xfrm>
           <a:prstGeom prst="rect">
             <a:avLst/>
@@ -6513,8 +6797,8 @@
         </p:nvSpPr>
         <p:spPr>
           <a:xfrm>
-            <a:off x="5832510" y="2080260"/>
-            <a:ext cx="3234003" cy="457200"/>
+            <a:off x="5835321" y="2080260"/>
+            <a:ext cx="3169993" cy="457200"/>
           </a:xfrm>
           <a:prstGeom prst="rect">
             <a:avLst/>
@@ -6529,20 +6813,68 @@
           <a:p>
             <a:pPr algn="l"/>
             <a:r>
-              <a:rPr sz="2600" b="0" i="0">
+              <a:rPr sz="2470" b="0" i="0">
                 <a:solidFill>
                   <a:srgbClr val="1A1A1A"/>
                 </a:solidFill>
-                <a:latin typeface="Century Schoolbook"/>
+                <a:latin typeface="Lexend"/>
               </a:rPr>
               <a:t>  in standard form.</a:t>
             </a:r>
           </a:p>
         </p:txBody>
       </p:sp>
-      <p:sp>
-        <p:nvSpPr>
-          <p:cNvPr id="11" name="TextBox 10"/>
+      <p:pic>
+        <p:nvPicPr>
+          <p:cNvPr id="11" name="Picture 10" descr="f2fdf0be925309c8.png"/>
+          <p:cNvPicPr>
+            <a:picLocks noChangeAspect="1"/>
+          </p:cNvPicPr>
+          <p:nvPr/>
+        </p:nvPicPr>
+        <p:blipFill>
+          <a:blip r:embed="rId3"/>
+          <a:stretch>
+            <a:fillRect/>
+          </a:stretch>
+        </p:blipFill>
+        <p:spPr>
+          <a:xfrm>
+            <a:off x="4495799" y="2884932"/>
+            <a:ext cx="1950720" cy="365760"/>
+          </a:xfrm>
+          <a:prstGeom prst="rect">
+            <a:avLst/>
+          </a:prstGeom>
+        </p:spPr>
+      </p:pic>
+      <p:pic>
+        <p:nvPicPr>
+          <p:cNvPr id="12" name="Picture 11" descr="134110467fe4e6f0.png"/>
+          <p:cNvPicPr>
+            <a:picLocks noChangeAspect="1"/>
+          </p:cNvPicPr>
+          <p:nvPr/>
+        </p:nvPicPr>
+        <p:blipFill>
+          <a:blip r:embed="rId4"/>
+          <a:stretch>
+            <a:fillRect/>
+          </a:stretch>
+        </p:blipFill>
+        <p:spPr>
+          <a:xfrm>
+            <a:off x="4495799" y="3450335"/>
+            <a:ext cx="3279648" cy="313944"/>
+          </a:xfrm>
+          <a:prstGeom prst="rect">
+            <a:avLst/>
+          </a:prstGeom>
+        </p:spPr>
+      </p:pic>
+      <p:sp>
+        <p:nvSpPr>
+          <p:cNvPr id="13" name="TextBox 12"/>
           <p:cNvSpPr txBox="1"/>
           <p:nvPr/>
         </p:nvSpPr>
@@ -6564,11 +6896,11 @@
           <a:p>
             <a:pPr algn="ctr"/>
             <a:r>
-              <a:rPr sz="3200" b="1" i="0">
+              <a:rPr sz="3040" b="1" i="0">
                 <a:solidFill>
                   <a:srgbClr val="9E1B32"/>
                 </a:solidFill>
-                <a:latin typeface="Century Schoolbook"/>
+                <a:latin typeface="Lexend"/>
               </a:rPr>
               <a:t>Answer:   72,000</a:t>
             </a:r>
@@ -6617,11 +6949,11 @@
           <a:p>
             <a:pPr algn="l"/>
             <a:r>
-              <a:rPr sz="3400" b="1" i="0">
+              <a:rPr sz="3229" b="1" i="0">
                 <a:solidFill>
                   <a:srgbClr val="1A1A1A"/>
                 </a:solidFill>
-                <a:latin typeface="Century Schoolbook"/>
+                <a:latin typeface="Lexend"/>
               </a:rPr>
               <a:t>Whiteboards   ·   Question 3 of 9</a:t>
             </a:r>
@@ -6757,11 +7089,11 @@
           <a:p>
             <a:pPr algn="l"/>
             <a:r>
-              <a:rPr sz="1100" b="0" i="1">
+              <a:rPr sz="1040" b="0" i="0">
                 <a:solidFill>
                   <a:srgbClr val="6B6B6B"/>
                 </a:solidFill>
-                <a:latin typeface="Century Schoolbook"/>
+                <a:latin typeface="Lexend"/>
               </a:rPr>
               <a:t>Grade 7 Accelerated · Unit 3 · Lesson 8 — Writing Large Numbers in Scientific Notation</a:t>
             </a:r>
@@ -6792,11 +7124,11 @@
           <a:p>
             <a:pPr algn="r"/>
             <a:r>
-              <a:rPr sz="1100" b="0" i="0">
+              <a:rPr sz="1040" b="0" i="0">
                 <a:solidFill>
                   <a:srgbClr val="6B6B6B"/>
                 </a:solidFill>
-                <a:latin typeface="Century Schoolbook"/>
+                <a:latin typeface="Lexend"/>
               </a:rPr>
               <a:t>19</a:t>
             </a:r>
@@ -6827,11 +7159,11 @@
           <a:p>
             <a:pPr algn="l"/>
             <a:r>
-              <a:rPr sz="2400" b="0" i="0">
+              <a:rPr sz="2280" b="0" i="0">
                 <a:solidFill>
                   <a:srgbClr val="1A1A1A"/>
                 </a:solidFill>
-                <a:latin typeface="Century Schoolbook"/>
+                <a:latin typeface="Lexend"/>
               </a:rPr>
               <a:t>A stadium's renovation used  356,000  bolts.</a:t>
             </a:r>
@@ -6862,11 +7194,11 @@
           <a:p>
             <a:pPr algn="l"/>
             <a:r>
-              <a:rPr sz="2400" b="0" i="0">
+              <a:rPr sz="2280" b="0" i="0">
                 <a:solidFill>
                   <a:srgbClr val="1A1A1A"/>
                 </a:solidFill>
-                <a:latin typeface="Century Schoolbook"/>
+                <a:latin typeface="Lexend"/>
               </a:rPr>
               <a:t>The stadium seats 71,000 people.</a:t>
             </a:r>
@@ -6897,11 +7229,11 @@
           <a:p>
             <a:pPr algn="l"/>
             <a:r>
-              <a:rPr sz="2400" b="1" i="0">
+              <a:rPr sz="2280" b="1" i="0">
                 <a:solidFill>
                   <a:srgbClr val="1A1A1A"/>
                 </a:solidFill>
-                <a:latin typeface="Century Schoolbook"/>
+                <a:latin typeface="Lexend"/>
               </a:rPr>
               <a:t>Write the number of bolts in scientific notation.</a:t>
             </a:r>
@@ -6932,11 +7264,11 @@
           <a:p>
             <a:pPr algn="ctr"/>
             <a:r>
-              <a:rPr sz="2600" b="1" i="0">
+              <a:rPr sz="2470" b="1" i="0">
                 <a:solidFill>
                   <a:srgbClr val="1A1A1A"/>
                 </a:solidFill>
-                <a:latin typeface="Century Schoolbook"/>
+                <a:latin typeface="Lexend"/>
               </a:rPr>
               <a:t>Answer it.</a:t>
             </a:r>
@@ -6985,11 +7317,11 @@
           <a:p>
             <a:pPr algn="l"/>
             <a:r>
-              <a:rPr sz="3600" b="1" i="0">
+              <a:rPr sz="3420" b="1" i="0">
                 <a:solidFill>
                   <a:srgbClr val="1A1A1A"/>
                 </a:solidFill>
-                <a:latin typeface="Century Schoolbook"/>
+                <a:latin typeface="Lexend"/>
               </a:rPr>
               <a:t>Warm-Up</a:t>
             </a:r>
@@ -7125,11 +7457,11 @@
           <a:p>
             <a:pPr algn="l"/>
             <a:r>
-              <a:rPr sz="1100" b="0" i="1">
+              <a:rPr sz="1040" b="0" i="0">
                 <a:solidFill>
                   <a:srgbClr val="6B6B6B"/>
                 </a:solidFill>
-                <a:latin typeface="Century Schoolbook"/>
+                <a:latin typeface="Lexend"/>
               </a:rPr>
               <a:t>Grade 7 Accelerated · Unit 3 · Lesson 8 — Writing Large Numbers in Scientific Notation</a:t>
             </a:r>
@@ -7160,11 +7492,11 @@
           <a:p>
             <a:pPr algn="r"/>
             <a:r>
-              <a:rPr sz="1100" b="0" i="0">
+              <a:rPr sz="1040" b="0" i="0">
                 <a:solidFill>
                   <a:srgbClr val="6B6B6B"/>
                 </a:solidFill>
-                <a:latin typeface="Century Schoolbook"/>
+                <a:latin typeface="Lexend"/>
               </a:rPr>
               <a:t>2</a:t>
             </a:r>
@@ -7180,7 +7512,7 @@
         <p:spPr>
           <a:xfrm>
             <a:off x="1874519" y="1440180"/>
-            <a:ext cx="5670993" cy="457200"/>
+            <a:ext cx="5570409" cy="457200"/>
           </a:xfrm>
           <a:prstGeom prst="rect">
             <a:avLst/>
@@ -7195,11 +7527,11 @@
           <a:p>
             <a:pPr algn="l"/>
             <a:r>
-              <a:rPr sz="2300" b="0" i="0">
+              <a:rPr sz="2180" b="0" i="0">
                 <a:solidFill>
                   <a:srgbClr val="1A1A1A"/>
                 </a:solidFill>
-                <a:latin typeface="Century Schoolbook"/>
+                <a:latin typeface="Lexend"/>
               </a:rPr>
               <a:t>1.   Rewrite with a positive exponent:  </a:t>
             </a:r>
@@ -7208,7 +7540,7 @@
       </p:sp>
       <p:pic>
         <p:nvPicPr>
-          <p:cNvPr id="9" name="Picture 8" descr="1f7555b99367de55.png"/>
+          <p:cNvPr id="9" name="Picture 8" descr="46ce777176e30484.png"/>
           <p:cNvPicPr>
             <a:picLocks noChangeAspect="1"/>
           </p:cNvPicPr>
@@ -7222,8 +7554,8 @@
         </p:blipFill>
         <p:spPr>
           <a:xfrm>
-            <a:off x="7408353" y="1530096"/>
-            <a:ext cx="585216" cy="277368"/>
+            <a:off x="7307769" y="1534668"/>
+            <a:ext cx="609600" cy="268224"/>
           </a:xfrm>
           <a:prstGeom prst="rect">
             <a:avLst/>
@@ -7239,7 +7571,7 @@
         <p:spPr>
           <a:xfrm>
             <a:off x="1874519" y="2052828"/>
-            <a:ext cx="3064939" cy="457200"/>
+            <a:ext cx="2935946" cy="457200"/>
           </a:xfrm>
           <a:prstGeom prst="rect">
             <a:avLst/>
@@ -7254,11 +7586,11 @@
           <a:p>
             <a:pPr algn="l"/>
             <a:r>
-              <a:rPr sz="2300" b="0" i="0">
+              <a:rPr sz="2180" b="0" i="0">
                 <a:solidFill>
                   <a:srgbClr val="1A1A1A"/>
                 </a:solidFill>
-                <a:latin typeface="Century Schoolbook"/>
+                <a:latin typeface="Lexend"/>
               </a:rPr>
               <a:t>2.   Find the value:  </a:t>
             </a:r>
@@ -7267,7 +7599,7 @@
       </p:sp>
       <p:pic>
         <p:nvPicPr>
-          <p:cNvPr id="11" name="Picture 10" descr="1a29715e97268546.png"/>
+          <p:cNvPr id="11" name="Picture 10" descr="0f58603634600083.png"/>
           <p:cNvPicPr>
             <a:picLocks noChangeAspect="1"/>
           </p:cNvPicPr>
@@ -7281,8 +7613,8 @@
         </p:blipFill>
         <p:spPr>
           <a:xfrm>
-            <a:off x="4802299" y="2113788"/>
-            <a:ext cx="774192" cy="335280"/>
+            <a:off x="4673306" y="2113788"/>
+            <a:ext cx="807720" cy="335280"/>
           </a:xfrm>
           <a:prstGeom prst="rect">
             <a:avLst/>
@@ -7298,7 +7630,7 @@
         <p:spPr>
           <a:xfrm>
             <a:off x="1874519" y="2665476"/>
-            <a:ext cx="3064939" cy="457200"/>
+            <a:ext cx="2930351" cy="457200"/>
           </a:xfrm>
           <a:prstGeom prst="rect">
             <a:avLst/>
@@ -7313,11 +7645,11 @@
           <a:p>
             <a:pPr algn="l"/>
             <a:r>
-              <a:rPr sz="2300" b="0" i="0">
+              <a:rPr sz="2180" b="0" i="0">
                 <a:solidFill>
                   <a:srgbClr val="1A1A1A"/>
                 </a:solidFill>
-                <a:latin typeface="Century Schoolbook"/>
+                <a:latin typeface="Lexend"/>
               </a:rPr>
               <a:t>3.   Find the value:  </a:t>
             </a:r>
@@ -7326,7 +7658,7 @@
       </p:sp>
       <p:pic>
         <p:nvPicPr>
-          <p:cNvPr id="13" name="Picture 12" descr="dcb33f053a4bb301.png"/>
+          <p:cNvPr id="13" name="Picture 12" descr="e90d31abd6081371.png"/>
           <p:cNvPicPr>
             <a:picLocks noChangeAspect="1"/>
           </p:cNvPicPr>
@@ -7340,8 +7672,8 @@
         </p:blipFill>
         <p:spPr>
           <a:xfrm>
-            <a:off x="4802299" y="2689860"/>
-            <a:ext cx="853440" cy="408432"/>
+            <a:off x="4667711" y="2699004"/>
+            <a:ext cx="826008" cy="390144"/>
           </a:xfrm>
           <a:prstGeom prst="rect">
             <a:avLst/>
@@ -7357,7 +7689,7 @@
         <p:spPr>
           <a:xfrm>
             <a:off x="1874519" y="3278124"/>
-            <a:ext cx="5997604" cy="457200"/>
+            <a:ext cx="5946133" cy="457200"/>
           </a:xfrm>
           <a:prstGeom prst="rect">
             <a:avLst/>
@@ -7372,11 +7704,11 @@
           <a:p>
             <a:pPr algn="l"/>
             <a:r>
-              <a:rPr sz="2300" b="0" i="0">
+              <a:rPr sz="2180" b="0" i="0">
                 <a:solidFill>
                   <a:srgbClr val="1A1A1A"/>
                 </a:solidFill>
-                <a:latin typeface="Century Schoolbook"/>
+                <a:latin typeface="Lexend"/>
               </a:rPr>
               <a:t>4.   In 4,500,000, which place is the 4 in?</a:t>
             </a:r>
@@ -7425,11 +7757,11 @@
           <a:p>
             <a:pPr algn="l"/>
             <a:r>
-              <a:rPr sz="3400" b="1" i="0">
+              <a:rPr sz="3229" b="1" i="0">
                 <a:solidFill>
                   <a:srgbClr val="1A1A1A"/>
                 </a:solidFill>
-                <a:latin typeface="Century Schoolbook"/>
+                <a:latin typeface="Lexend"/>
               </a:rPr>
               <a:t>Whiteboards   ·   Question 3 of 9</a:t>
             </a:r>
@@ -7565,11 +7897,11 @@
           <a:p>
             <a:pPr algn="l"/>
             <a:r>
-              <a:rPr sz="1100" b="0" i="1">
+              <a:rPr sz="1040" b="0" i="0">
                 <a:solidFill>
                   <a:srgbClr val="6B6B6B"/>
                 </a:solidFill>
-                <a:latin typeface="Century Schoolbook"/>
+                <a:latin typeface="Lexend"/>
               </a:rPr>
               <a:t>Grade 7 Accelerated · Unit 3 · Lesson 8 — Writing Large Numbers in Scientific Notation</a:t>
             </a:r>
@@ -7600,11 +7932,11 @@
           <a:p>
             <a:pPr algn="r"/>
             <a:r>
-              <a:rPr sz="1100" b="0" i="0">
+              <a:rPr sz="1040" b="0" i="0">
                 <a:solidFill>
                   <a:srgbClr val="6B6B6B"/>
                 </a:solidFill>
-                <a:latin typeface="Century Schoolbook"/>
+                <a:latin typeface="Lexend"/>
               </a:rPr>
               <a:t>20</a:t>
             </a:r>
@@ -7635,11 +7967,11 @@
           <a:p>
             <a:pPr algn="l"/>
             <a:r>
-              <a:rPr sz="2400" b="0" i="0">
+              <a:rPr sz="2280" b="0" i="0">
                 <a:solidFill>
                   <a:srgbClr val="1A1A1A"/>
                 </a:solidFill>
-                <a:latin typeface="Century Schoolbook"/>
+                <a:latin typeface="Lexend"/>
               </a:rPr>
               <a:t>A stadium's renovation used  356,000  bolts.</a:t>
             </a:r>
@@ -7670,11 +8002,11 @@
           <a:p>
             <a:pPr algn="l"/>
             <a:r>
-              <a:rPr sz="2400" b="0" i="0">
+              <a:rPr sz="2280" b="0" i="0">
                 <a:solidFill>
                   <a:srgbClr val="1A1A1A"/>
                 </a:solidFill>
-                <a:latin typeface="Century Schoolbook"/>
+                <a:latin typeface="Lexend"/>
               </a:rPr>
               <a:t>The stadium seats 71,000 people.</a:t>
             </a:r>
@@ -7705,11 +8037,11 @@
           <a:p>
             <a:pPr algn="l"/>
             <a:r>
-              <a:rPr sz="2400" b="1" i="0">
+              <a:rPr sz="2280" b="1" i="0">
                 <a:solidFill>
                   <a:srgbClr val="1A1A1A"/>
                 </a:solidFill>
-                <a:latin typeface="Century Schoolbook"/>
+                <a:latin typeface="Lexend"/>
               </a:rPr>
               <a:t>Write the number of bolts in scientific notation.</a:t>
             </a:r>
@@ -7724,7 +8056,66 @@
         </p:nvSpPr>
         <p:spPr>
           <a:xfrm>
-            <a:off x="777240" y="4663440"/>
+            <a:off x="3072288" y="3587827"/>
+            <a:ext cx="6154103" cy="457200"/>
+          </a:xfrm>
+          <a:prstGeom prst="rect">
+            <a:avLst/>
+          </a:prstGeom>
+          <a:noFill/>
+        </p:spPr>
+        <p:txBody>
+          <a:bodyPr wrap="none" lIns="45720" rIns="45720" tIns="18288" bIns="18288" anchor="ctr">
+            <a:noAutofit/>
+          </a:bodyPr>
+          <a:lstStyle/>
+          <a:p>
+            <a:pPr algn="l"/>
+            <a:r>
+              <a:rPr sz="2750" b="0" i="0">
+                <a:solidFill>
+                  <a:srgbClr val="1A1A1A"/>
+                </a:solidFill>
+                <a:latin typeface="Lexend"/>
+              </a:rPr>
+              <a:t>Move the point 5 places left:  3.56</a:t>
+            </a:r>
+          </a:p>
+        </p:txBody>
+      </p:sp>
+      <p:pic>
+        <p:nvPicPr>
+          <p:cNvPr id="12" name="Picture 11" descr="ab46d03e7278ada5.png"/>
+          <p:cNvPicPr>
+            <a:picLocks noChangeAspect="1"/>
+          </p:cNvPicPr>
+          <p:nvPr/>
+        </p:nvPicPr>
+        <p:blipFill>
+          <a:blip r:embed="rId2"/>
+          <a:stretch>
+            <a:fillRect/>
+          </a:stretch>
+        </p:blipFill>
+        <p:spPr>
+          <a:xfrm>
+            <a:off x="3127152" y="4173043"/>
+            <a:ext cx="3112008" cy="365760"/>
+          </a:xfrm>
+          <a:prstGeom prst="rect">
+            <a:avLst/>
+          </a:prstGeom>
+        </p:spPr>
+      </p:pic>
+      <p:sp>
+        <p:nvSpPr>
+          <p:cNvPr id="13" name="TextBox 12"/>
+          <p:cNvSpPr txBox="1"/>
+          <p:nvPr/>
+        </p:nvSpPr>
+        <p:spPr>
+          <a:xfrm>
+            <a:off x="777240" y="4698823"/>
             <a:ext cx="10607040" cy="548640"/>
           </a:xfrm>
           <a:prstGeom prst="rect">
@@ -7740,20 +8131,20 @@
           <a:p>
             <a:pPr algn="ctr"/>
             <a:r>
-              <a:rPr sz="3200" b="1" i="0">
+              <a:rPr sz="3040" b="1" i="0">
                 <a:solidFill>
                   <a:srgbClr val="9E1B32"/>
                 </a:solidFill>
-                <a:latin typeface="Century Schoolbook"/>
+                <a:latin typeface="Lexend"/>
               </a:rPr>
               <a:t>Answer:   3.56 × 10</a:t>
             </a:r>
             <a:r>
-              <a:rPr sz="3200" b="1" i="0" baseline="30000">
+              <a:rPr sz="3040" b="1" i="0" baseline="30000">
                 <a:solidFill>
                   <a:srgbClr val="9E1B32"/>
                 </a:solidFill>
-                <a:latin typeface="Century Schoolbook"/>
+                <a:latin typeface="Lexend"/>
               </a:rPr>
               <a:t>5</a:t>
             </a:r>
@@ -7802,11 +8193,11 @@
           <a:p>
             <a:pPr algn="l"/>
             <a:r>
-              <a:rPr sz="3400" b="1" i="0">
+              <a:rPr sz="3229" b="1" i="0">
                 <a:solidFill>
                   <a:srgbClr val="1A1A1A"/>
                 </a:solidFill>
-                <a:latin typeface="Century Schoolbook"/>
+                <a:latin typeface="Lexend"/>
               </a:rPr>
               <a:t>Whiteboards   ·   Question 4 of 9</a:t>
             </a:r>
@@ -7942,11 +8333,11 @@
           <a:p>
             <a:pPr algn="l"/>
             <a:r>
-              <a:rPr sz="1100" b="0" i="1">
+              <a:rPr sz="1040" b="0" i="0">
                 <a:solidFill>
                   <a:srgbClr val="6B6B6B"/>
                 </a:solidFill>
-                <a:latin typeface="Century Schoolbook"/>
+                <a:latin typeface="Lexend"/>
               </a:rPr>
               <a:t>Grade 7 Accelerated · Unit 3 · Lesson 8 — Writing Large Numbers in Scientific Notation</a:t>
             </a:r>
@@ -7977,11 +8368,11 @@
           <a:p>
             <a:pPr algn="r"/>
             <a:r>
-              <a:rPr sz="1100" b="0" i="0">
+              <a:rPr sz="1040" b="0" i="0">
                 <a:solidFill>
                   <a:srgbClr val="6B6B6B"/>
                 </a:solidFill>
-                <a:latin typeface="Century Schoolbook"/>
+                <a:latin typeface="Lexend"/>
               </a:rPr>
               <a:t>21</a:t>
             </a:r>
@@ -7996,8 +8387,8 @@
         </p:nvSpPr>
         <p:spPr>
           <a:xfrm>
-            <a:off x="2606496" y="2171700"/>
-            <a:ext cx="3166062" cy="457200"/>
+            <a:off x="2657065" y="2171700"/>
+            <a:ext cx="3099754" cy="457200"/>
           </a:xfrm>
           <a:prstGeom prst="rect">
             <a:avLst/>
@@ -8012,11 +8403,11 @@
           <a:p>
             <a:pPr algn="l"/>
             <a:r>
-              <a:rPr sz="2600" b="0" i="0">
+              <a:rPr sz="2470" b="0" i="0">
                 <a:solidFill>
                   <a:srgbClr val="1A1A1A"/>
                 </a:solidFill>
-                <a:latin typeface="Century Schoolbook"/>
+                <a:latin typeface="Lexend"/>
               </a:rPr>
               <a:t>Which is greater,  </a:t>
             </a:r>
@@ -8025,7 +8416,7 @@
       </p:sp>
       <p:pic>
         <p:nvPicPr>
-          <p:cNvPr id="9" name="Picture 8" descr="1ab45d017fce8a10.png"/>
+          <p:cNvPr id="9" name="Picture 8" descr="43cb3ae958f537e7.png"/>
           <p:cNvPicPr>
             <a:picLocks noChangeAspect="1"/>
           </p:cNvPicPr>
@@ -8039,8 +8430,8 @@
         </p:blipFill>
         <p:spPr>
           <a:xfrm>
-            <a:off x="5635398" y="2223516"/>
-            <a:ext cx="1411224" cy="353568"/>
+            <a:off x="5619659" y="2232660"/>
+            <a:ext cx="1405128" cy="335280"/>
           </a:xfrm>
           <a:prstGeom prst="rect">
             <a:avLst/>
@@ -8055,8 +8446,8 @@
         </p:nvSpPr>
         <p:spPr>
           <a:xfrm>
-            <a:off x="7046622" y="2171700"/>
-            <a:ext cx="929845" cy="457200"/>
+            <a:off x="7024787" y="2171700"/>
+            <a:ext cx="921244" cy="457200"/>
           </a:xfrm>
           <a:prstGeom prst="rect">
             <a:avLst/>
@@ -8071,11 +8462,11 @@
           <a:p>
             <a:pPr algn="l"/>
             <a:r>
-              <a:rPr sz="2600" b="0" i="0">
+              <a:rPr sz="2470" b="0" i="0">
                 <a:solidFill>
                   <a:srgbClr val="1A1A1A"/>
                 </a:solidFill>
-                <a:latin typeface="Century Schoolbook"/>
+                <a:latin typeface="Lexend"/>
               </a:rPr>
               <a:t>  or  </a:t>
             </a:r>
@@ -8084,7 +8475,7 @@
       </p:sp>
       <p:pic>
         <p:nvPicPr>
-          <p:cNvPr id="11" name="Picture 10" descr="d99a9851995ad560.png"/>
+          <p:cNvPr id="11" name="Picture 10" descr="92daabb7e870f735.png"/>
           <p:cNvPicPr>
             <a:picLocks noChangeAspect="1"/>
           </p:cNvPicPr>
@@ -8098,8 +8489,8 @@
         </p:blipFill>
         <p:spPr>
           <a:xfrm>
-            <a:off x="7839308" y="2223516"/>
-            <a:ext cx="1389888" cy="353568"/>
+            <a:off x="7808872" y="2231136"/>
+            <a:ext cx="1359408" cy="338328"/>
           </a:xfrm>
           <a:prstGeom prst="rect">
             <a:avLst/>
@@ -8114,8 +8505,8 @@
         </p:nvSpPr>
         <p:spPr>
           <a:xfrm>
-            <a:off x="9229196" y="2171700"/>
-            <a:ext cx="462987" cy="457200"/>
+            <a:off x="9168280" y="2171700"/>
+            <a:ext cx="473333" cy="457200"/>
           </a:xfrm>
           <a:prstGeom prst="rect">
             <a:avLst/>
@@ -8130,11 +8521,11 @@
           <a:p>
             <a:pPr algn="l"/>
             <a:r>
-              <a:rPr sz="2600" b="0" i="0">
+              <a:rPr sz="2470" b="0" i="0">
                 <a:solidFill>
                   <a:srgbClr val="1A1A1A"/>
                 </a:solidFill>
-                <a:latin typeface="Century Schoolbook"/>
+                <a:latin typeface="Lexend"/>
               </a:rPr>
               <a:t> ?</a:t>
             </a:r>
@@ -8165,11 +8556,11 @@
           <a:p>
             <a:pPr algn="ctr"/>
             <a:r>
-              <a:rPr sz="2600" b="1" i="0">
+              <a:rPr sz="2470" b="1" i="0">
                 <a:solidFill>
                   <a:srgbClr val="1A1A1A"/>
                 </a:solidFill>
-                <a:latin typeface="Century Schoolbook"/>
+                <a:latin typeface="Lexend"/>
               </a:rPr>
               <a:t>Answer it.</a:t>
             </a:r>
@@ -8218,11 +8609,11 @@
           <a:p>
             <a:pPr algn="l"/>
             <a:r>
-              <a:rPr sz="3400" b="1" i="0">
+              <a:rPr sz="3229" b="1" i="0">
                 <a:solidFill>
                   <a:srgbClr val="1A1A1A"/>
                 </a:solidFill>
-                <a:latin typeface="Century Schoolbook"/>
+                <a:latin typeface="Lexend"/>
               </a:rPr>
               <a:t>Whiteboards   ·   Question 4 of 9</a:t>
             </a:r>
@@ -8358,11 +8749,11 @@
           <a:p>
             <a:pPr algn="l"/>
             <a:r>
-              <a:rPr sz="1100" b="0" i="1">
+              <a:rPr sz="1040" b="0" i="0">
                 <a:solidFill>
                   <a:srgbClr val="6B6B6B"/>
                 </a:solidFill>
-                <a:latin typeface="Century Schoolbook"/>
+                <a:latin typeface="Lexend"/>
               </a:rPr>
               <a:t>Grade 7 Accelerated · Unit 3 · Lesson 8 — Writing Large Numbers in Scientific Notation</a:t>
             </a:r>
@@ -8393,11 +8784,11 @@
           <a:p>
             <a:pPr algn="r"/>
             <a:r>
-              <a:rPr sz="1100" b="0" i="0">
+              <a:rPr sz="1040" b="0" i="0">
                 <a:solidFill>
                   <a:srgbClr val="6B6B6B"/>
                 </a:solidFill>
-                <a:latin typeface="Century Schoolbook"/>
+                <a:latin typeface="Lexend"/>
               </a:rPr>
               <a:t>22</a:t>
             </a:r>
@@ -8412,8 +8803,8 @@
         </p:nvSpPr>
         <p:spPr>
           <a:xfrm>
-            <a:off x="2606496" y="2080260"/>
-            <a:ext cx="3166062" cy="457200"/>
+            <a:off x="2657065" y="2080260"/>
+            <a:ext cx="3099754" cy="457200"/>
           </a:xfrm>
           <a:prstGeom prst="rect">
             <a:avLst/>
@@ -8428,11 +8819,11 @@
           <a:p>
             <a:pPr algn="l"/>
             <a:r>
-              <a:rPr sz="2600" b="0" i="0">
+              <a:rPr sz="2470" b="0" i="0">
                 <a:solidFill>
                   <a:srgbClr val="1A1A1A"/>
                 </a:solidFill>
-                <a:latin typeface="Century Schoolbook"/>
+                <a:latin typeface="Lexend"/>
               </a:rPr>
               <a:t>Which is greater,  </a:t>
             </a:r>
@@ -8441,7 +8832,7 @@
       </p:sp>
       <p:pic>
         <p:nvPicPr>
-          <p:cNvPr id="9" name="Picture 8" descr="78380355eb5e9104.png"/>
+          <p:cNvPr id="9" name="Picture 8" descr="1feacfcb0f3ecc7f.png"/>
           <p:cNvPicPr>
             <a:picLocks noChangeAspect="1"/>
           </p:cNvPicPr>
@@ -8455,8 +8846,8 @@
         </p:blipFill>
         <p:spPr>
           <a:xfrm>
-            <a:off x="5635398" y="2132076"/>
-            <a:ext cx="1414272" cy="353568"/>
+            <a:off x="5619659" y="2141219"/>
+            <a:ext cx="1405128" cy="335280"/>
           </a:xfrm>
           <a:prstGeom prst="rect">
             <a:avLst/>
@@ -8471,8 +8862,8 @@
         </p:nvSpPr>
         <p:spPr>
           <a:xfrm>
-            <a:off x="7049670" y="2080260"/>
-            <a:ext cx="929845" cy="457200"/>
+            <a:off x="7024787" y="2080260"/>
+            <a:ext cx="921244" cy="457200"/>
           </a:xfrm>
           <a:prstGeom prst="rect">
             <a:avLst/>
@@ -8487,11 +8878,11 @@
           <a:p>
             <a:pPr algn="l"/>
             <a:r>
-              <a:rPr sz="2600" b="0" i="0">
+              <a:rPr sz="2470" b="0" i="0">
                 <a:solidFill>
                   <a:srgbClr val="1A1A1A"/>
                 </a:solidFill>
-                <a:latin typeface="Century Schoolbook"/>
+                <a:latin typeface="Lexend"/>
               </a:rPr>
               <a:t>  or  </a:t>
             </a:r>
@@ -8500,7 +8891,7 @@
       </p:sp>
       <p:pic>
         <p:nvPicPr>
-          <p:cNvPr id="11" name="Picture 10" descr="7abd88142838d7cb.png"/>
+          <p:cNvPr id="11" name="Picture 10" descr="73bd38815e7d3f7e.png"/>
           <p:cNvPicPr>
             <a:picLocks noChangeAspect="1"/>
           </p:cNvPicPr>
@@ -8514,8 +8905,8 @@
         </p:blipFill>
         <p:spPr>
           <a:xfrm>
-            <a:off x="7842356" y="2132076"/>
-            <a:ext cx="1386840" cy="353568"/>
+            <a:off x="7808872" y="2138171"/>
+            <a:ext cx="1359408" cy="341376"/>
           </a:xfrm>
           <a:prstGeom prst="rect">
             <a:avLst/>
@@ -8530,8 +8921,8 @@
         </p:nvSpPr>
         <p:spPr>
           <a:xfrm>
-            <a:off x="9229196" y="2080260"/>
-            <a:ext cx="462987" cy="457200"/>
+            <a:off x="9168280" y="2080260"/>
+            <a:ext cx="473333" cy="457200"/>
           </a:xfrm>
           <a:prstGeom prst="rect">
             <a:avLst/>
@@ -8546,20 +8937,68 @@
           <a:p>
             <a:pPr algn="l"/>
             <a:r>
-              <a:rPr sz="2600" b="0" i="0">
+              <a:rPr sz="2470" b="0" i="0">
                 <a:solidFill>
                   <a:srgbClr val="1A1A1A"/>
                 </a:solidFill>
-                <a:latin typeface="Century Schoolbook"/>
+                <a:latin typeface="Lexend"/>
               </a:rPr>
               <a:t> ?</a:t>
             </a:r>
           </a:p>
         </p:txBody>
       </p:sp>
-      <p:sp>
-        <p:nvSpPr>
-          <p:cNvPr id="13" name="TextBox 12"/>
+      <p:pic>
+        <p:nvPicPr>
+          <p:cNvPr id="13" name="Picture 12" descr="172e9537a453d6ca.png"/>
+          <p:cNvPicPr>
+            <a:picLocks noChangeAspect="1"/>
+          </p:cNvPicPr>
+          <p:nvPr/>
+        </p:nvPicPr>
+        <p:blipFill>
+          <a:blip r:embed="rId4"/>
+          <a:stretch>
+            <a:fillRect/>
+          </a:stretch>
+        </p:blipFill>
+        <p:spPr>
+          <a:xfrm>
+            <a:off x="4546091" y="2884932"/>
+            <a:ext cx="2944368" cy="365760"/>
+          </a:xfrm>
+          <a:prstGeom prst="rect">
+            <a:avLst/>
+          </a:prstGeom>
+        </p:spPr>
+      </p:pic>
+      <p:pic>
+        <p:nvPicPr>
+          <p:cNvPr id="14" name="Picture 13" descr="5bf6050deecf9ad4.png"/>
+          <p:cNvPicPr>
+            <a:picLocks noChangeAspect="1"/>
+          </p:cNvPicPr>
+          <p:nvPr/>
+        </p:nvPicPr>
+        <p:blipFill>
+          <a:blip r:embed="rId5"/>
+          <a:stretch>
+            <a:fillRect/>
+          </a:stretch>
+        </p:blipFill>
+        <p:spPr>
+          <a:xfrm>
+            <a:off x="4546091" y="3422904"/>
+            <a:ext cx="3179064" cy="368808"/>
+          </a:xfrm>
+          <a:prstGeom prst="rect">
+            <a:avLst/>
+          </a:prstGeom>
+        </p:spPr>
+      </p:pic>
+      <p:sp>
+        <p:nvSpPr>
+          <p:cNvPr id="15" name="TextBox 14"/>
           <p:cNvSpPr txBox="1"/>
           <p:nvPr/>
         </p:nvSpPr>
@@ -8581,20 +9020,20 @@
           <a:p>
             <a:pPr algn="ctr"/>
             <a:r>
-              <a:rPr sz="3200" b="1" i="0">
+              <a:rPr sz="3040" b="1" i="0">
                 <a:solidFill>
                   <a:srgbClr val="9E1B32"/>
                 </a:solidFill>
-                <a:latin typeface="Century Schoolbook"/>
+                <a:latin typeface="Lexend"/>
               </a:rPr>
               <a:t>Answer:   1.2 × 10</a:t>
             </a:r>
             <a:r>
-              <a:rPr sz="3200" b="1" i="0" baseline="30000">
+              <a:rPr sz="3040" b="1" i="0" baseline="30000">
                 <a:solidFill>
                   <a:srgbClr val="9E1B32"/>
                 </a:solidFill>
-                <a:latin typeface="Century Schoolbook"/>
+                <a:latin typeface="Lexend"/>
               </a:rPr>
               <a:t>6</a:t>
             </a:r>
@@ -8643,11 +9082,11 @@
           <a:p>
             <a:pPr algn="l"/>
             <a:r>
-              <a:rPr sz="3400" b="1" i="0">
+              <a:rPr sz="3229" b="1" i="0">
                 <a:solidFill>
                   <a:srgbClr val="1A1A1A"/>
                 </a:solidFill>
-                <a:latin typeface="Century Schoolbook"/>
+                <a:latin typeface="Lexend"/>
               </a:rPr>
               <a:t>Whiteboards   ·   Question 5 of 9</a:t>
             </a:r>
@@ -8783,11 +9222,11 @@
           <a:p>
             <a:pPr algn="l"/>
             <a:r>
-              <a:rPr sz="1100" b="0" i="1">
+              <a:rPr sz="1040" b="0" i="0">
                 <a:solidFill>
                   <a:srgbClr val="6B6B6B"/>
                 </a:solidFill>
-                <a:latin typeface="Century Schoolbook"/>
+                <a:latin typeface="Lexend"/>
               </a:rPr>
               <a:t>Grade 7 Accelerated · Unit 3 · Lesson 8 — Writing Large Numbers in Scientific Notation</a:t>
             </a:r>
@@ -8818,11 +9257,11 @@
           <a:p>
             <a:pPr algn="r"/>
             <a:r>
-              <a:rPr sz="1100" b="0" i="0">
+              <a:rPr sz="1040" b="0" i="0">
                 <a:solidFill>
                   <a:srgbClr val="6B6B6B"/>
                 </a:solidFill>
-                <a:latin typeface="Century Schoolbook"/>
+                <a:latin typeface="Lexend"/>
               </a:rPr>
               <a:t>23</a:t>
             </a:r>
@@ -8853,11 +9292,11 @@
           <a:p>
             <a:pPr algn="ctr"/>
             <a:r>
-              <a:rPr sz="2600" b="0" i="0">
+              <a:rPr sz="2470" b="0" i="0">
                 <a:solidFill>
                   <a:srgbClr val="1A1A1A"/>
                 </a:solidFill>
-                <a:latin typeface="Century Schoolbook"/>
+                <a:latin typeface="Lexend"/>
               </a:rPr>
               <a:t>Which is  52,000,000  written in scientific notation?</a:t>
             </a:r>
@@ -8888,29 +9327,29 @@
           <a:p>
             <a:pPr algn="l"/>
             <a:r>
-              <a:rPr sz="2400" b="1" i="0">
+              <a:rPr sz="2280" b="1" i="0">
                 <a:solidFill>
                   <a:srgbClr val="1A1A1A"/>
                 </a:solidFill>
-                <a:latin typeface="Century Schoolbook"/>
+                <a:latin typeface="Lexend"/>
               </a:rPr>
               <a:t>A.   </a:t>
             </a:r>
             <a:r>
-              <a:rPr sz="2400" b="0" i="0">
+              <a:rPr sz="2280" b="0" i="0">
                 <a:solidFill>
                   <a:srgbClr val="1A1A1A"/>
                 </a:solidFill>
-                <a:latin typeface="Century Schoolbook"/>
+                <a:latin typeface="Lexend"/>
               </a:rPr>
               <a:t>5.2 × 10</a:t>
             </a:r>
             <a:r>
-              <a:rPr sz="2400" b="0" i="0" baseline="30000">
+              <a:rPr sz="2280" b="0" i="0" baseline="30000">
                 <a:solidFill>
                   <a:srgbClr val="1A1A1A"/>
                 </a:solidFill>
-                <a:latin typeface="Century Schoolbook"/>
+                <a:latin typeface="Lexend"/>
               </a:rPr>
               <a:t>8</a:t>
             </a:r>
@@ -8941,29 +9380,29 @@
           <a:p>
             <a:pPr algn="l"/>
             <a:r>
-              <a:rPr sz="2400" b="1" i="0">
+              <a:rPr sz="2280" b="1" i="0">
                 <a:solidFill>
                   <a:srgbClr val="1A1A1A"/>
                 </a:solidFill>
-                <a:latin typeface="Century Schoolbook"/>
+                <a:latin typeface="Lexend"/>
               </a:rPr>
               <a:t>B.   </a:t>
             </a:r>
             <a:r>
-              <a:rPr sz="2400" b="0" i="0">
+              <a:rPr sz="2280" b="0" i="0">
                 <a:solidFill>
                   <a:srgbClr val="1A1A1A"/>
                 </a:solidFill>
-                <a:latin typeface="Century Schoolbook"/>
+                <a:latin typeface="Lexend"/>
               </a:rPr>
               <a:t>5.2 × 10</a:t>
             </a:r>
             <a:r>
-              <a:rPr sz="2400" b="0" i="0" baseline="30000">
+              <a:rPr sz="2280" b="0" i="0" baseline="30000">
                 <a:solidFill>
                   <a:srgbClr val="1A1A1A"/>
                 </a:solidFill>
-                <a:latin typeface="Century Schoolbook"/>
+                <a:latin typeface="Lexend"/>
               </a:rPr>
               <a:t>7</a:t>
             </a:r>
@@ -8994,29 +9433,29 @@
           <a:p>
             <a:pPr algn="l"/>
             <a:r>
-              <a:rPr sz="2400" b="1" i="0">
+              <a:rPr sz="2280" b="1" i="0">
                 <a:solidFill>
                   <a:srgbClr val="1A1A1A"/>
                 </a:solidFill>
-                <a:latin typeface="Century Schoolbook"/>
+                <a:latin typeface="Lexend"/>
               </a:rPr>
               <a:t>C.   </a:t>
             </a:r>
             <a:r>
-              <a:rPr sz="2400" b="0" i="0">
+              <a:rPr sz="2280" b="0" i="0">
                 <a:solidFill>
                   <a:srgbClr val="1A1A1A"/>
                 </a:solidFill>
-                <a:latin typeface="Century Schoolbook"/>
+                <a:latin typeface="Lexend"/>
               </a:rPr>
               <a:t>52 × 10</a:t>
             </a:r>
             <a:r>
-              <a:rPr sz="2400" b="0" i="0" baseline="30000">
+              <a:rPr sz="2280" b="0" i="0" baseline="30000">
                 <a:solidFill>
                   <a:srgbClr val="1A1A1A"/>
                 </a:solidFill>
-                <a:latin typeface="Century Schoolbook"/>
+                <a:latin typeface="Lexend"/>
               </a:rPr>
               <a:t>6</a:t>
             </a:r>
@@ -9047,29 +9486,29 @@
           <a:p>
             <a:pPr algn="l"/>
             <a:r>
-              <a:rPr sz="2400" b="1" i="0">
+              <a:rPr sz="2280" b="1" i="0">
                 <a:solidFill>
                   <a:srgbClr val="1A1A1A"/>
                 </a:solidFill>
-                <a:latin typeface="Century Schoolbook"/>
+                <a:latin typeface="Lexend"/>
               </a:rPr>
               <a:t>D.   </a:t>
             </a:r>
             <a:r>
-              <a:rPr sz="2400" b="0" i="0">
+              <a:rPr sz="2280" b="0" i="0">
                 <a:solidFill>
                   <a:srgbClr val="1A1A1A"/>
                 </a:solidFill>
-                <a:latin typeface="Century Schoolbook"/>
+                <a:latin typeface="Lexend"/>
               </a:rPr>
               <a:t>5.2 × 10</a:t>
             </a:r>
             <a:r>
-              <a:rPr sz="2400" b="0" i="0" baseline="30000">
+              <a:rPr sz="2280" b="0" i="0" baseline="30000">
                 <a:solidFill>
                   <a:srgbClr val="1A1A1A"/>
                 </a:solidFill>
-                <a:latin typeface="Century Schoolbook"/>
+                <a:latin typeface="Lexend"/>
               </a:rPr>
               <a:t>6</a:t>
             </a:r>
@@ -9100,11 +9539,11 @@
           <a:p>
             <a:pPr algn="ctr"/>
             <a:r>
-              <a:rPr sz="2600" b="1" i="0">
+              <a:rPr sz="2470" b="1" i="0">
                 <a:solidFill>
                   <a:srgbClr val="1A1A1A"/>
                 </a:solidFill>
-                <a:latin typeface="Century Schoolbook"/>
+                <a:latin typeface="Lexend"/>
               </a:rPr>
               <a:t>Answer it.</a:t>
             </a:r>
@@ -9153,11 +9592,11 @@
           <a:p>
             <a:pPr algn="l"/>
             <a:r>
-              <a:rPr sz="3400" b="1" i="0">
+              <a:rPr sz="3229" b="1" i="0">
                 <a:solidFill>
                   <a:srgbClr val="1A1A1A"/>
                 </a:solidFill>
-                <a:latin typeface="Century Schoolbook"/>
+                <a:latin typeface="Lexend"/>
               </a:rPr>
               <a:t>Whiteboards   ·   Question 5 of 9</a:t>
             </a:r>
@@ -9293,11 +9732,11 @@
           <a:p>
             <a:pPr algn="l"/>
             <a:r>
-              <a:rPr sz="1100" b="0" i="1">
+              <a:rPr sz="1040" b="0" i="0">
                 <a:solidFill>
                   <a:srgbClr val="6B6B6B"/>
                 </a:solidFill>
-                <a:latin typeface="Century Schoolbook"/>
+                <a:latin typeface="Lexend"/>
               </a:rPr>
               <a:t>Grade 7 Accelerated · Unit 3 · Lesson 8 — Writing Large Numbers in Scientific Notation</a:t>
             </a:r>
@@ -9328,11 +9767,11 @@
           <a:p>
             <a:pPr algn="r"/>
             <a:r>
-              <a:rPr sz="1100" b="0" i="0">
+              <a:rPr sz="1040" b="0" i="0">
                 <a:solidFill>
                   <a:srgbClr val="6B6B6B"/>
                 </a:solidFill>
-                <a:latin typeface="Century Schoolbook"/>
+                <a:latin typeface="Lexend"/>
               </a:rPr>
               <a:t>24</a:t>
             </a:r>
@@ -9363,11 +9802,11 @@
           <a:p>
             <a:pPr algn="ctr"/>
             <a:r>
-              <a:rPr sz="2600" b="0" i="0">
+              <a:rPr sz="2470" b="0" i="0">
                 <a:solidFill>
                   <a:srgbClr val="1A1A1A"/>
                 </a:solidFill>
-                <a:latin typeface="Century Schoolbook"/>
+                <a:latin typeface="Lexend"/>
               </a:rPr>
               <a:t>Which is  52,000,000  written in scientific notation?</a:t>
             </a:r>
@@ -9382,8 +9821,67 @@
         </p:nvSpPr>
         <p:spPr>
           <a:xfrm>
-            <a:off x="1874519" y="2769439"/>
-            <a:ext cx="4572000" cy="548640"/>
+            <a:off x="3176872" y="2728291"/>
+            <a:ext cx="5944934" cy="457200"/>
+          </a:xfrm>
+          <a:prstGeom prst="rect">
+            <a:avLst/>
+          </a:prstGeom>
+          <a:noFill/>
+        </p:spPr>
+        <p:txBody>
+          <a:bodyPr wrap="none" lIns="45720" rIns="45720" tIns="18288" bIns="18288" anchor="ctr">
+            <a:noAutofit/>
+          </a:bodyPr>
+          <a:lstStyle/>
+          <a:p>
+            <a:pPr algn="l"/>
+            <a:r>
+              <a:rPr sz="2750" b="0" i="0">
+                <a:solidFill>
+                  <a:srgbClr val="1A1A1A"/>
+                </a:solidFill>
+                <a:latin typeface="Lexend"/>
+              </a:rPr>
+              <a:t>Move the point 7 places left:  5.2</a:t>
+            </a:r>
+          </a:p>
+        </p:txBody>
+      </p:sp>
+      <p:pic>
+        <p:nvPicPr>
+          <p:cNvPr id="10" name="Picture 9" descr="faf48c280b171a9e.png"/>
+          <p:cNvPicPr>
+            <a:picLocks noChangeAspect="1"/>
+          </p:cNvPicPr>
+          <p:nvPr/>
+        </p:nvPicPr>
+        <p:blipFill>
+          <a:blip r:embed="rId2"/>
+          <a:stretch>
+            <a:fillRect/>
+          </a:stretch>
+        </p:blipFill>
+        <p:spPr>
+          <a:xfrm>
+            <a:off x="3231736" y="3313507"/>
+            <a:ext cx="3453384" cy="365760"/>
+          </a:xfrm>
+          <a:prstGeom prst="rect">
+            <a:avLst/>
+          </a:prstGeom>
+        </p:spPr>
+      </p:pic>
+      <p:sp>
+        <p:nvSpPr>
+          <p:cNvPr id="11" name="TextBox 10"/>
+          <p:cNvSpPr txBox="1"/>
+          <p:nvPr/>
+        </p:nvSpPr>
+        <p:spPr>
+          <a:xfrm>
+            <a:off x="777240" y="4663440"/>
+            <a:ext cx="10607040" cy="548640"/>
           </a:xfrm>
           <a:prstGeom prst="rect">
             <a:avLst/>
@@ -9396,234 +9894,22 @@
           </a:bodyPr>
           <a:lstStyle/>
           <a:p>
-            <a:pPr algn="l"/>
-            <a:r>
-              <a:rPr sz="2400" b="1" i="0">
-                <a:solidFill>
-                  <a:srgbClr val="1A1A1A"/>
-                </a:solidFill>
-                <a:latin typeface="Century Schoolbook"/>
-              </a:rPr>
-              <a:t>A.   </a:t>
-            </a:r>
-            <a:r>
-              <a:rPr sz="2400" b="0" i="0">
-                <a:solidFill>
-                  <a:srgbClr val="1A1A1A"/>
-                </a:solidFill>
-                <a:latin typeface="Century Schoolbook"/>
-              </a:rPr>
-              <a:t>5.2 × 10</a:t>
-            </a:r>
-            <a:r>
-              <a:rPr sz="2400" b="0" i="0" baseline="30000">
-                <a:solidFill>
-                  <a:srgbClr val="1A1A1A"/>
-                </a:solidFill>
-                <a:latin typeface="Century Schoolbook"/>
-              </a:rPr>
-              <a:t>8</a:t>
-            </a:r>
-          </a:p>
-        </p:txBody>
-      </p:sp>
-      <p:sp>
-        <p:nvSpPr>
-          <p:cNvPr id="10" name="TextBox 9"/>
-          <p:cNvSpPr txBox="1"/>
-          <p:nvPr/>
-        </p:nvSpPr>
-        <p:spPr>
-          <a:xfrm>
-            <a:off x="6629400" y="2769439"/>
-            <a:ext cx="4572000" cy="548640"/>
-          </a:xfrm>
-          <a:prstGeom prst="rect">
-            <a:avLst/>
-          </a:prstGeom>
-          <a:noFill/>
-        </p:spPr>
-        <p:txBody>
-          <a:bodyPr wrap="square" lIns="45720" rIns="45720" tIns="18288" bIns="18288" anchor="t">
-            <a:spAutoFit/>
-          </a:bodyPr>
-          <a:lstStyle/>
-          <a:p>
-            <a:pPr algn="l"/>
-            <a:r>
-              <a:rPr sz="2400" b="1" i="0">
+            <a:pPr algn="ctr"/>
+            <a:r>
+              <a:rPr sz="3040" b="1" i="0">
                 <a:solidFill>
                   <a:srgbClr val="9E1B32"/>
                 </a:solidFill>
-                <a:latin typeface="Century Schoolbook"/>
-              </a:rPr>
-              <a:t>B.   </a:t>
-            </a:r>
-            <a:r>
-              <a:rPr sz="2400" b="1" i="0">
+                <a:latin typeface="Lexend"/>
+              </a:rPr>
+              <a:t>Answer:   B — 5.2 × 10</a:t>
+            </a:r>
+            <a:r>
+              <a:rPr sz="3040" b="1" i="0" baseline="30000">
                 <a:solidFill>
                   <a:srgbClr val="9E1B32"/>
                 </a:solidFill>
-                <a:latin typeface="Century Schoolbook"/>
-              </a:rPr>
-              <a:t>5.2 × 10</a:t>
-            </a:r>
-            <a:r>
-              <a:rPr sz="2400" b="1" i="0" baseline="30000">
-                <a:solidFill>
-                  <a:srgbClr val="9E1B32"/>
-                </a:solidFill>
-                <a:latin typeface="Century Schoolbook"/>
-              </a:rPr>
-              <a:t>7</a:t>
-            </a:r>
-          </a:p>
-        </p:txBody>
-      </p:sp>
-      <p:sp>
-        <p:nvSpPr>
-          <p:cNvPr id="11" name="TextBox 10"/>
-          <p:cNvSpPr txBox="1"/>
-          <p:nvPr/>
-        </p:nvSpPr>
-        <p:spPr>
-          <a:xfrm>
-            <a:off x="1874519" y="3455239"/>
-            <a:ext cx="4572000" cy="548640"/>
-          </a:xfrm>
-          <a:prstGeom prst="rect">
-            <a:avLst/>
-          </a:prstGeom>
-          <a:noFill/>
-        </p:spPr>
-        <p:txBody>
-          <a:bodyPr wrap="square" lIns="45720" rIns="45720" tIns="18288" bIns="18288" anchor="t">
-            <a:spAutoFit/>
-          </a:bodyPr>
-          <a:lstStyle/>
-          <a:p>
-            <a:pPr algn="l"/>
-            <a:r>
-              <a:rPr sz="2400" b="1" i="0">
-                <a:solidFill>
-                  <a:srgbClr val="1A1A1A"/>
-                </a:solidFill>
-                <a:latin typeface="Century Schoolbook"/>
-              </a:rPr>
-              <a:t>C.   </a:t>
-            </a:r>
-            <a:r>
-              <a:rPr sz="2400" b="0" i="0">
-                <a:solidFill>
-                  <a:srgbClr val="1A1A1A"/>
-                </a:solidFill>
-                <a:latin typeface="Century Schoolbook"/>
-              </a:rPr>
-              <a:t>52 × 10</a:t>
-            </a:r>
-            <a:r>
-              <a:rPr sz="2400" b="0" i="0" baseline="30000">
-                <a:solidFill>
-                  <a:srgbClr val="1A1A1A"/>
-                </a:solidFill>
-                <a:latin typeface="Century Schoolbook"/>
-              </a:rPr>
-              <a:t>6</a:t>
-            </a:r>
-          </a:p>
-        </p:txBody>
-      </p:sp>
-      <p:sp>
-        <p:nvSpPr>
-          <p:cNvPr id="12" name="TextBox 11"/>
-          <p:cNvSpPr txBox="1"/>
-          <p:nvPr/>
-        </p:nvSpPr>
-        <p:spPr>
-          <a:xfrm>
-            <a:off x="6629400" y="3455239"/>
-            <a:ext cx="4572000" cy="548640"/>
-          </a:xfrm>
-          <a:prstGeom prst="rect">
-            <a:avLst/>
-          </a:prstGeom>
-          <a:noFill/>
-        </p:spPr>
-        <p:txBody>
-          <a:bodyPr wrap="square" lIns="45720" rIns="45720" tIns="18288" bIns="18288" anchor="t">
-            <a:spAutoFit/>
-          </a:bodyPr>
-          <a:lstStyle/>
-          <a:p>
-            <a:pPr algn="l"/>
-            <a:r>
-              <a:rPr sz="2400" b="1" i="0">
-                <a:solidFill>
-                  <a:srgbClr val="1A1A1A"/>
-                </a:solidFill>
-                <a:latin typeface="Century Schoolbook"/>
-              </a:rPr>
-              <a:t>D.   </a:t>
-            </a:r>
-            <a:r>
-              <a:rPr sz="2400" b="0" i="0">
-                <a:solidFill>
-                  <a:srgbClr val="1A1A1A"/>
-                </a:solidFill>
-                <a:latin typeface="Century Schoolbook"/>
-              </a:rPr>
-              <a:t>5.2 × 10</a:t>
-            </a:r>
-            <a:r>
-              <a:rPr sz="2400" b="0" i="0" baseline="30000">
-                <a:solidFill>
-                  <a:srgbClr val="1A1A1A"/>
-                </a:solidFill>
-                <a:latin typeface="Century Schoolbook"/>
-              </a:rPr>
-              <a:t>6</a:t>
-            </a:r>
-          </a:p>
-        </p:txBody>
-      </p:sp>
-      <p:sp>
-        <p:nvSpPr>
-          <p:cNvPr id="13" name="TextBox 12"/>
-          <p:cNvSpPr txBox="1"/>
-          <p:nvPr/>
-        </p:nvSpPr>
-        <p:spPr>
-          <a:xfrm>
-            <a:off x="777240" y="4663440"/>
-            <a:ext cx="10607040" cy="548640"/>
-          </a:xfrm>
-          <a:prstGeom prst="rect">
-            <a:avLst/>
-          </a:prstGeom>
-          <a:noFill/>
-        </p:spPr>
-        <p:txBody>
-          <a:bodyPr wrap="square" lIns="45720" rIns="45720" tIns="18288" bIns="18288" anchor="t">
-            <a:spAutoFit/>
-          </a:bodyPr>
-          <a:lstStyle/>
-          <a:p>
-            <a:pPr algn="ctr"/>
-            <a:r>
-              <a:rPr sz="3200" b="1" i="0">
-                <a:solidFill>
-                  <a:srgbClr val="9E1B32"/>
-                </a:solidFill>
-                <a:latin typeface="Century Schoolbook"/>
-              </a:rPr>
-              <a:t>Answer:   B — 5.2 × 10</a:t>
-            </a:r>
-            <a:r>
-              <a:rPr sz="3200" b="1" i="0" baseline="30000">
-                <a:solidFill>
-                  <a:srgbClr val="9E1B32"/>
-                </a:solidFill>
-                <a:latin typeface="Century Schoolbook"/>
+                <a:latin typeface="Lexend"/>
               </a:rPr>
               <a:t>7</a:t>
             </a:r>
@@ -9672,11 +9958,11 @@
           <a:p>
             <a:pPr algn="l"/>
             <a:r>
-              <a:rPr sz="3400" b="1" i="0">
+              <a:rPr sz="3229" b="1" i="0">
                 <a:solidFill>
                   <a:srgbClr val="1A1A1A"/>
                 </a:solidFill>
-                <a:latin typeface="Century Schoolbook"/>
+                <a:latin typeface="Lexend"/>
               </a:rPr>
               <a:t>Whiteboards   ·   Question 6 of 9</a:t>
             </a:r>
@@ -9812,11 +10098,11 @@
           <a:p>
             <a:pPr algn="l"/>
             <a:r>
-              <a:rPr sz="1100" b="0" i="1">
+              <a:rPr sz="1040" b="0" i="0">
                 <a:solidFill>
                   <a:srgbClr val="6B6B6B"/>
                 </a:solidFill>
-                <a:latin typeface="Century Schoolbook"/>
+                <a:latin typeface="Lexend"/>
               </a:rPr>
               <a:t>Grade 7 Accelerated · Unit 3 · Lesson 8 — Writing Large Numbers in Scientific Notation</a:t>
             </a:r>
@@ -9847,11 +10133,11 @@
           <a:p>
             <a:pPr algn="r"/>
             <a:r>
-              <a:rPr sz="1100" b="0" i="0">
+              <a:rPr sz="1040" b="0" i="0">
                 <a:solidFill>
                   <a:srgbClr val="6B6B6B"/>
                 </a:solidFill>
-                <a:latin typeface="Century Schoolbook"/>
+                <a:latin typeface="Lexend"/>
               </a:rPr>
               <a:t>25</a:t>
             </a:r>
@@ -9866,8 +10152,8 @@
         </p:nvSpPr>
         <p:spPr>
           <a:xfrm>
-            <a:off x="1989919" y="2171700"/>
-            <a:ext cx="4558064" cy="457200"/>
+            <a:off x="2050102" y="2171700"/>
+            <a:ext cx="4488298" cy="457200"/>
           </a:xfrm>
           <a:prstGeom prst="rect">
             <a:avLst/>
@@ -9882,11 +10168,11 @@
           <a:p>
             <a:pPr algn="l"/>
             <a:r>
-              <a:rPr sz="2600" b="0" i="0">
+              <a:rPr sz="2470" b="0" i="0">
                 <a:solidFill>
                   <a:srgbClr val="1A1A1A"/>
                 </a:solidFill>
-                <a:latin typeface="Century Schoolbook"/>
+                <a:latin typeface="Lexend"/>
               </a:rPr>
               <a:t>How many times larger is  </a:t>
             </a:r>
@@ -9895,7 +10181,7 @@
       </p:sp>
       <p:pic>
         <p:nvPicPr>
-          <p:cNvPr id="9" name="Picture 8" descr="cb3383a0ac48947d.png"/>
+          <p:cNvPr id="9" name="Picture 8" descr="f3f7fb3f9c4eb88c.png"/>
           <p:cNvPicPr>
             <a:picLocks noChangeAspect="1"/>
           </p:cNvPicPr>
@@ -9909,8 +10195,8 @@
         </p:blipFill>
         <p:spPr>
           <a:xfrm>
-            <a:off x="6410824" y="2225040"/>
-            <a:ext cx="1109472" cy="350520"/>
+            <a:off x="6401241" y="2231136"/>
+            <a:ext cx="1100328" cy="338328"/>
           </a:xfrm>
           <a:prstGeom prst="rect">
             <a:avLst/>
@@ -9925,8 +10211,8 @@
         </p:nvSpPr>
         <p:spPr>
           <a:xfrm>
-            <a:off x="7520296" y="2171700"/>
-            <a:ext cx="1356212" cy="457200"/>
+            <a:off x="7501569" y="2171700"/>
+            <a:ext cx="1316601" cy="457200"/>
           </a:xfrm>
           <a:prstGeom prst="rect">
             <a:avLst/>
@@ -9941,11 +10227,11 @@
           <a:p>
             <a:pPr algn="l"/>
             <a:r>
-              <a:rPr sz="2600" b="0" i="0">
+              <a:rPr sz="2470" b="0" i="0">
                 <a:solidFill>
                   <a:srgbClr val="1A1A1A"/>
                 </a:solidFill>
-                <a:latin typeface="Century Schoolbook"/>
+                <a:latin typeface="Lexend"/>
               </a:rPr>
               <a:t>  than  </a:t>
             </a:r>
@@ -9954,7 +10240,7 @@
       </p:sp>
       <p:pic>
         <p:nvPicPr>
-          <p:cNvPr id="11" name="Picture 10" descr="136c380adf2acf38.png"/>
+          <p:cNvPr id="11" name="Picture 10" descr="24010bd5a04baa29.png"/>
           <p:cNvPicPr>
             <a:picLocks noChangeAspect="1"/>
           </p:cNvPicPr>
@@ -9968,8 +10254,8 @@
         </p:blipFill>
         <p:spPr>
           <a:xfrm>
-            <a:off x="8739348" y="2223516"/>
-            <a:ext cx="1106424" cy="353568"/>
+            <a:off x="8681011" y="2232660"/>
+            <a:ext cx="1094232" cy="335280"/>
           </a:xfrm>
           <a:prstGeom prst="rect">
             <a:avLst/>
@@ -9984,8 +10270,8 @@
         </p:nvSpPr>
         <p:spPr>
           <a:xfrm>
-            <a:off x="9845772" y="2171700"/>
-            <a:ext cx="462987" cy="457200"/>
+            <a:off x="9775243" y="2171700"/>
+            <a:ext cx="473333" cy="457200"/>
           </a:xfrm>
           <a:prstGeom prst="rect">
             <a:avLst/>
@@ -10000,11 +10286,11 @@
           <a:p>
             <a:pPr algn="l"/>
             <a:r>
-              <a:rPr sz="2600" b="0" i="0">
+              <a:rPr sz="2470" b="0" i="0">
                 <a:solidFill>
                   <a:srgbClr val="1A1A1A"/>
                 </a:solidFill>
-                <a:latin typeface="Century Schoolbook"/>
+                <a:latin typeface="Lexend"/>
               </a:rPr>
               <a:t> ?</a:t>
             </a:r>
@@ -10035,20 +10321,20 @@
           <a:p>
             <a:pPr algn="l"/>
             <a:r>
-              <a:rPr sz="2400" b="1" i="0">
+              <a:rPr sz="2280" b="1" i="0">
                 <a:solidFill>
                   <a:srgbClr val="1A1A1A"/>
                 </a:solidFill>
-                <a:latin typeface="Century Schoolbook"/>
+                <a:latin typeface="Lexend"/>
               </a:rPr>
               <a:t>A.   </a:t>
             </a:r>
             <a:r>
-              <a:rPr sz="2400" b="0" i="0">
+              <a:rPr sz="2280" b="0" i="0">
                 <a:solidFill>
                   <a:srgbClr val="1A1A1A"/>
                 </a:solidFill>
-                <a:latin typeface="Century Schoolbook"/>
+                <a:latin typeface="Lexend"/>
               </a:rPr>
               <a:t>1.6</a:t>
             </a:r>
@@ -10079,20 +10365,20 @@
           <a:p>
             <a:pPr algn="l"/>
             <a:r>
-              <a:rPr sz="2400" b="1" i="0">
+              <a:rPr sz="2280" b="1" i="0">
                 <a:solidFill>
                   <a:srgbClr val="1A1A1A"/>
                 </a:solidFill>
-                <a:latin typeface="Century Schoolbook"/>
+                <a:latin typeface="Lexend"/>
               </a:rPr>
               <a:t>B.   </a:t>
             </a:r>
             <a:r>
-              <a:rPr sz="2400" b="0" i="0">
+              <a:rPr sz="2280" b="0" i="0">
                 <a:solidFill>
                   <a:srgbClr val="1A1A1A"/>
                 </a:solidFill>
-                <a:latin typeface="Century Schoolbook"/>
+                <a:latin typeface="Lexend"/>
               </a:rPr>
               <a:t>3</a:t>
             </a:r>
@@ -10123,20 +10409,20 @@
           <a:p>
             <a:pPr algn="l"/>
             <a:r>
-              <a:rPr sz="2400" b="1" i="0">
+              <a:rPr sz="2280" b="1" i="0">
                 <a:solidFill>
                   <a:srgbClr val="1A1A1A"/>
                 </a:solidFill>
-                <a:latin typeface="Century Schoolbook"/>
+                <a:latin typeface="Lexend"/>
               </a:rPr>
               <a:t>C.   </a:t>
             </a:r>
             <a:r>
-              <a:rPr sz="2400" b="0" i="0">
+              <a:rPr sz="2280" b="0" i="0">
                 <a:solidFill>
                   <a:srgbClr val="1A1A1A"/>
                 </a:solidFill>
-                <a:latin typeface="Century Schoolbook"/>
+                <a:latin typeface="Lexend"/>
               </a:rPr>
               <a:t>1,000</a:t>
             </a:r>
@@ -10167,20 +10453,20 @@
           <a:p>
             <a:pPr algn="l"/>
             <a:r>
-              <a:rPr sz="2400" b="1" i="0">
+              <a:rPr sz="2280" b="1" i="0">
                 <a:solidFill>
                   <a:srgbClr val="1A1A1A"/>
                 </a:solidFill>
-                <a:latin typeface="Century Schoolbook"/>
+                <a:latin typeface="Lexend"/>
               </a:rPr>
               <a:t>D.   </a:t>
             </a:r>
             <a:r>
-              <a:rPr sz="2400" b="0" i="0">
+              <a:rPr sz="2280" b="0" i="0">
                 <a:solidFill>
                   <a:srgbClr val="1A1A1A"/>
                 </a:solidFill>
-                <a:latin typeface="Century Schoolbook"/>
+                <a:latin typeface="Lexend"/>
               </a:rPr>
               <a:t>300</a:t>
             </a:r>
@@ -10211,11 +10497,11 @@
           <a:p>
             <a:pPr algn="ctr"/>
             <a:r>
-              <a:rPr sz="2600" b="1" i="0">
+              <a:rPr sz="2470" b="1" i="0">
                 <a:solidFill>
                   <a:srgbClr val="1A1A1A"/>
                 </a:solidFill>
-                <a:latin typeface="Century Schoolbook"/>
+                <a:latin typeface="Lexend"/>
               </a:rPr>
               <a:t>Answer it.</a:t>
             </a:r>
@@ -10264,11 +10550,11 @@
           <a:p>
             <a:pPr algn="l"/>
             <a:r>
-              <a:rPr sz="3400" b="1" i="0">
+              <a:rPr sz="3229" b="1" i="0">
                 <a:solidFill>
                   <a:srgbClr val="1A1A1A"/>
                 </a:solidFill>
-                <a:latin typeface="Century Schoolbook"/>
+                <a:latin typeface="Lexend"/>
               </a:rPr>
               <a:t>Whiteboards   ·   Question 6 of 9</a:t>
             </a:r>
@@ -10404,11 +10690,11 @@
           <a:p>
             <a:pPr algn="l"/>
             <a:r>
-              <a:rPr sz="1100" b="0" i="1">
+              <a:rPr sz="1040" b="0" i="0">
                 <a:solidFill>
                   <a:srgbClr val="6B6B6B"/>
                 </a:solidFill>
-                <a:latin typeface="Century Schoolbook"/>
+                <a:latin typeface="Lexend"/>
               </a:rPr>
               <a:t>Grade 7 Accelerated · Unit 3 · Lesson 8 — Writing Large Numbers in Scientific Notation</a:t>
             </a:r>
@@ -10439,11 +10725,11 @@
           <a:p>
             <a:pPr algn="r"/>
             <a:r>
-              <a:rPr sz="1100" b="0" i="0">
+              <a:rPr sz="1040" b="0" i="0">
                 <a:solidFill>
                   <a:srgbClr val="6B6B6B"/>
                 </a:solidFill>
-                <a:latin typeface="Century Schoolbook"/>
+                <a:latin typeface="Lexend"/>
               </a:rPr>
               <a:t>26</a:t>
             </a:r>
@@ -10458,8 +10744,8 @@
         </p:nvSpPr>
         <p:spPr>
           <a:xfrm>
-            <a:off x="1988395" y="2080260"/>
-            <a:ext cx="4558064" cy="457200"/>
+            <a:off x="2045530" y="2080260"/>
+            <a:ext cx="4488298" cy="457200"/>
           </a:xfrm>
           <a:prstGeom prst="rect">
             <a:avLst/>
@@ -10474,11 +10760,11 @@
           <a:p>
             <a:pPr algn="l"/>
             <a:r>
-              <a:rPr sz="2600" b="0" i="0">
+              <a:rPr sz="2470" b="0" i="0">
                 <a:solidFill>
                   <a:srgbClr val="1A1A1A"/>
                 </a:solidFill>
-                <a:latin typeface="Century Schoolbook"/>
+                <a:latin typeface="Lexend"/>
               </a:rPr>
               <a:t>How many times larger is  </a:t>
             </a:r>
@@ -10487,7 +10773,7 @@
       </p:sp>
       <p:pic>
         <p:nvPicPr>
-          <p:cNvPr id="9" name="Picture 8" descr="f5c1556a2a400797.png"/>
+          <p:cNvPr id="9" name="Picture 8" descr="f55ab61039019919.png"/>
           <p:cNvPicPr>
             <a:picLocks noChangeAspect="1"/>
           </p:cNvPicPr>
@@ -10501,8 +10787,8 @@
         </p:blipFill>
         <p:spPr>
           <a:xfrm>
-            <a:off x="6409300" y="2133599"/>
-            <a:ext cx="1109472" cy="350520"/>
+            <a:off x="6396669" y="2139696"/>
+            <a:ext cx="1106424" cy="338328"/>
           </a:xfrm>
           <a:prstGeom prst="rect">
             <a:avLst/>
@@ -10517,8 +10803,8 @@
         </p:nvSpPr>
         <p:spPr>
           <a:xfrm>
-            <a:off x="7518772" y="2080260"/>
-            <a:ext cx="1356212" cy="457200"/>
+            <a:off x="7503093" y="2080260"/>
+            <a:ext cx="1316601" cy="457200"/>
           </a:xfrm>
           <a:prstGeom prst="rect">
             <a:avLst/>
@@ -10533,11 +10819,11 @@
           <a:p>
             <a:pPr algn="l"/>
             <a:r>
-              <a:rPr sz="2600" b="0" i="0">
+              <a:rPr sz="2470" b="0" i="0">
                 <a:solidFill>
                   <a:srgbClr val="1A1A1A"/>
                 </a:solidFill>
-                <a:latin typeface="Century Schoolbook"/>
+                <a:latin typeface="Lexend"/>
               </a:rPr>
               <a:t>  than  </a:t>
             </a:r>
@@ -10546,7 +10832,7 @@
       </p:sp>
       <p:pic>
         <p:nvPicPr>
-          <p:cNvPr id="11" name="Picture 10" descr="e6a3bddbc4c7da8d.png"/>
+          <p:cNvPr id="11" name="Picture 10" descr="48b21e1c13d68e6f.png"/>
           <p:cNvPicPr>
             <a:picLocks noChangeAspect="1"/>
           </p:cNvPicPr>
@@ -10560,8 +10846,8 @@
         </p:blipFill>
         <p:spPr>
           <a:xfrm>
-            <a:off x="8737824" y="2132076"/>
-            <a:ext cx="1109472" cy="353568"/>
+            <a:off x="8682535" y="2141219"/>
+            <a:ext cx="1097280" cy="335280"/>
           </a:xfrm>
           <a:prstGeom prst="rect">
             <a:avLst/>
@@ -10576,8 +10862,8 @@
         </p:nvSpPr>
         <p:spPr>
           <a:xfrm>
-            <a:off x="9847296" y="2080260"/>
-            <a:ext cx="462987" cy="457200"/>
+            <a:off x="9779815" y="2080260"/>
+            <a:ext cx="473333" cy="457200"/>
           </a:xfrm>
           <a:prstGeom prst="rect">
             <a:avLst/>
@@ -10592,27 +10878,75 @@
           <a:p>
             <a:pPr algn="l"/>
             <a:r>
-              <a:rPr sz="2600" b="0" i="0">
+              <a:rPr sz="2470" b="0" i="0">
                 <a:solidFill>
                   <a:srgbClr val="1A1A1A"/>
                 </a:solidFill>
-                <a:latin typeface="Century Schoolbook"/>
+                <a:latin typeface="Lexend"/>
               </a:rPr>
               <a:t> ?</a:t>
             </a:r>
           </a:p>
         </p:txBody>
       </p:sp>
-      <p:sp>
-        <p:nvSpPr>
-          <p:cNvPr id="13" name="TextBox 12"/>
-          <p:cNvSpPr txBox="1"/>
-          <p:nvPr/>
-        </p:nvSpPr>
-        <p:spPr>
-          <a:xfrm>
-            <a:off x="1874519" y="2880360"/>
-            <a:ext cx="4572000" cy="548640"/>
+      <p:pic>
+        <p:nvPicPr>
+          <p:cNvPr id="13" name="Picture 12" descr="eb9f83f40dace9fe.png"/>
+          <p:cNvPicPr>
+            <a:picLocks noChangeAspect="1"/>
+          </p:cNvPicPr>
+          <p:nvPr/>
+        </p:nvPicPr>
+        <p:blipFill>
+          <a:blip r:embed="rId4"/>
+          <a:stretch>
+            <a:fillRect/>
+          </a:stretch>
+        </p:blipFill>
+        <p:spPr>
+          <a:xfrm>
+            <a:off x="3784091" y="2941320"/>
+            <a:ext cx="1197864" cy="252984"/>
+          </a:xfrm>
+          <a:prstGeom prst="rect">
+            <a:avLst/>
+          </a:prstGeom>
+        </p:spPr>
+      </p:pic>
+      <p:pic>
+        <p:nvPicPr>
+          <p:cNvPr id="14" name="Picture 13" descr="b4e216bfcb8fd2eb.png"/>
+          <p:cNvPicPr>
+            <a:picLocks noChangeAspect="1"/>
+          </p:cNvPicPr>
+          <p:nvPr/>
+        </p:nvPicPr>
+        <p:blipFill>
+          <a:blip r:embed="rId5"/>
+          <a:stretch>
+            <a:fillRect/>
+          </a:stretch>
+        </p:blipFill>
+        <p:spPr>
+          <a:xfrm>
+            <a:off x="3784091" y="3424427"/>
+            <a:ext cx="4700016" cy="365760"/>
+          </a:xfrm>
+          <a:prstGeom prst="rect">
+            <a:avLst/>
+          </a:prstGeom>
+        </p:spPr>
+      </p:pic>
+      <p:sp>
+        <p:nvSpPr>
+          <p:cNvPr id="15" name="TextBox 14"/>
+          <p:cNvSpPr txBox="1"/>
+          <p:nvPr/>
+        </p:nvSpPr>
+        <p:spPr>
+          <a:xfrm>
+            <a:off x="777240" y="4663440"/>
+            <a:ext cx="10607040" cy="548640"/>
           </a:xfrm>
           <a:prstGeom prst="rect">
             <a:avLst/>
@@ -10625,189 +10959,13 @@
           </a:bodyPr>
           <a:lstStyle/>
           <a:p>
-            <a:pPr algn="l"/>
-            <a:r>
-              <a:rPr sz="2400" b="1" i="0">
-                <a:solidFill>
-                  <a:srgbClr val="1A1A1A"/>
-                </a:solidFill>
-                <a:latin typeface="Century Schoolbook"/>
-              </a:rPr>
-              <a:t>A.   </a:t>
-            </a:r>
-            <a:r>
-              <a:rPr sz="2400" b="0" i="0">
-                <a:solidFill>
-                  <a:srgbClr val="1A1A1A"/>
-                </a:solidFill>
-                <a:latin typeface="Century Schoolbook"/>
-              </a:rPr>
-              <a:t>1.6</a:t>
-            </a:r>
-          </a:p>
-        </p:txBody>
-      </p:sp>
-      <p:sp>
-        <p:nvSpPr>
-          <p:cNvPr id="14" name="TextBox 13"/>
-          <p:cNvSpPr txBox="1"/>
-          <p:nvPr/>
-        </p:nvSpPr>
-        <p:spPr>
-          <a:xfrm>
-            <a:off x="6629400" y="2880360"/>
-            <a:ext cx="4572000" cy="548640"/>
-          </a:xfrm>
-          <a:prstGeom prst="rect">
-            <a:avLst/>
-          </a:prstGeom>
-          <a:noFill/>
-        </p:spPr>
-        <p:txBody>
-          <a:bodyPr wrap="square" lIns="45720" rIns="45720" tIns="18288" bIns="18288" anchor="t">
-            <a:spAutoFit/>
-          </a:bodyPr>
-          <a:lstStyle/>
-          <a:p>
-            <a:pPr algn="l"/>
-            <a:r>
-              <a:rPr sz="2400" b="1" i="0">
-                <a:solidFill>
-                  <a:srgbClr val="1A1A1A"/>
-                </a:solidFill>
-                <a:latin typeface="Century Schoolbook"/>
-              </a:rPr>
-              <a:t>B.   </a:t>
-            </a:r>
-            <a:r>
-              <a:rPr sz="2400" b="0" i="0">
-                <a:solidFill>
-                  <a:srgbClr val="1A1A1A"/>
-                </a:solidFill>
-                <a:latin typeface="Century Schoolbook"/>
-              </a:rPr>
-              <a:t>3</a:t>
-            </a:r>
-          </a:p>
-        </p:txBody>
-      </p:sp>
-      <p:sp>
-        <p:nvSpPr>
-          <p:cNvPr id="15" name="TextBox 14"/>
-          <p:cNvSpPr txBox="1"/>
-          <p:nvPr/>
-        </p:nvSpPr>
-        <p:spPr>
-          <a:xfrm>
-            <a:off x="1874519" y="3566160"/>
-            <a:ext cx="4572000" cy="548640"/>
-          </a:xfrm>
-          <a:prstGeom prst="rect">
-            <a:avLst/>
-          </a:prstGeom>
-          <a:noFill/>
-        </p:spPr>
-        <p:txBody>
-          <a:bodyPr wrap="square" lIns="45720" rIns="45720" tIns="18288" bIns="18288" anchor="t">
-            <a:spAutoFit/>
-          </a:bodyPr>
-          <a:lstStyle/>
-          <a:p>
-            <a:pPr algn="l"/>
-            <a:r>
-              <a:rPr sz="2400" b="1" i="0">
+            <a:pPr algn="ctr"/>
+            <a:r>
+              <a:rPr sz="3040" b="1" i="0">
                 <a:solidFill>
                   <a:srgbClr val="9E1B32"/>
                 </a:solidFill>
-                <a:latin typeface="Century Schoolbook"/>
-              </a:rPr>
-              <a:t>C.   </a:t>
-            </a:r>
-            <a:r>
-              <a:rPr sz="2400" b="1" i="0">
-                <a:solidFill>
-                  <a:srgbClr val="9E1B32"/>
-                </a:solidFill>
-                <a:latin typeface="Century Schoolbook"/>
-              </a:rPr>
-              <a:t>1,000</a:t>
-            </a:r>
-          </a:p>
-        </p:txBody>
-      </p:sp>
-      <p:sp>
-        <p:nvSpPr>
-          <p:cNvPr id="16" name="TextBox 15"/>
-          <p:cNvSpPr txBox="1"/>
-          <p:nvPr/>
-        </p:nvSpPr>
-        <p:spPr>
-          <a:xfrm>
-            <a:off x="6629400" y="3566160"/>
-            <a:ext cx="4572000" cy="548640"/>
-          </a:xfrm>
-          <a:prstGeom prst="rect">
-            <a:avLst/>
-          </a:prstGeom>
-          <a:noFill/>
-        </p:spPr>
-        <p:txBody>
-          <a:bodyPr wrap="square" lIns="45720" rIns="45720" tIns="18288" bIns="18288" anchor="t">
-            <a:spAutoFit/>
-          </a:bodyPr>
-          <a:lstStyle/>
-          <a:p>
-            <a:pPr algn="l"/>
-            <a:r>
-              <a:rPr sz="2400" b="1" i="0">
-                <a:solidFill>
-                  <a:srgbClr val="1A1A1A"/>
-                </a:solidFill>
-                <a:latin typeface="Century Schoolbook"/>
-              </a:rPr>
-              <a:t>D.   </a:t>
-            </a:r>
-            <a:r>
-              <a:rPr sz="2400" b="0" i="0">
-                <a:solidFill>
-                  <a:srgbClr val="1A1A1A"/>
-                </a:solidFill>
-                <a:latin typeface="Century Schoolbook"/>
-              </a:rPr>
-              <a:t>300</a:t>
-            </a:r>
-          </a:p>
-        </p:txBody>
-      </p:sp>
-      <p:sp>
-        <p:nvSpPr>
-          <p:cNvPr id="17" name="TextBox 16"/>
-          <p:cNvSpPr txBox="1"/>
-          <p:nvPr/>
-        </p:nvSpPr>
-        <p:spPr>
-          <a:xfrm>
-            <a:off x="777240" y="4663440"/>
-            <a:ext cx="10607040" cy="548640"/>
-          </a:xfrm>
-          <a:prstGeom prst="rect">
-            <a:avLst/>
-          </a:prstGeom>
-          <a:noFill/>
-        </p:spPr>
-        <p:txBody>
-          <a:bodyPr wrap="square" lIns="45720" rIns="45720" tIns="18288" bIns="18288" anchor="t">
-            <a:spAutoFit/>
-          </a:bodyPr>
-          <a:lstStyle/>
-          <a:p>
-            <a:pPr algn="ctr"/>
-            <a:r>
-              <a:rPr sz="3200" b="1" i="0">
-                <a:solidFill>
-                  <a:srgbClr val="9E1B32"/>
-                </a:solidFill>
-                <a:latin typeface="Century Schoolbook"/>
+                <a:latin typeface="Lexend"/>
               </a:rPr>
               <a:t>Answer:   C — 1,000</a:t>
             </a:r>
@@ -10856,11 +11014,11 @@
           <a:p>
             <a:pPr algn="l"/>
             <a:r>
-              <a:rPr sz="3400" b="1" i="0">
+              <a:rPr sz="3229" b="1" i="0">
                 <a:solidFill>
                   <a:srgbClr val="1A1A1A"/>
                 </a:solidFill>
-                <a:latin typeface="Century Schoolbook"/>
+                <a:latin typeface="Lexend"/>
               </a:rPr>
               <a:t>Whiteboards   ·   Question 7 of 9</a:t>
             </a:r>
@@ -10996,11 +11154,11 @@
           <a:p>
             <a:pPr algn="l"/>
             <a:r>
-              <a:rPr sz="1100" b="0" i="1">
+              <a:rPr sz="1040" b="0" i="0">
                 <a:solidFill>
                   <a:srgbClr val="6B6B6B"/>
                 </a:solidFill>
-                <a:latin typeface="Century Schoolbook"/>
+                <a:latin typeface="Lexend"/>
               </a:rPr>
               <a:t>Grade 7 Accelerated · Unit 3 · Lesson 8 — Writing Large Numbers in Scientific Notation</a:t>
             </a:r>
@@ -11031,11 +11189,11 @@
           <a:p>
             <a:pPr algn="r"/>
             <a:r>
-              <a:rPr sz="1100" b="0" i="0">
+              <a:rPr sz="1040" b="0" i="0">
                 <a:solidFill>
                   <a:srgbClr val="6B6B6B"/>
                 </a:solidFill>
-                <a:latin typeface="Century Schoolbook"/>
+                <a:latin typeface="Lexend"/>
               </a:rPr>
               <a:t>27</a:t>
             </a:r>
@@ -11050,8 +11208,8 @@
         </p:nvSpPr>
         <p:spPr>
           <a:xfrm>
-            <a:off x="1679023" y="2171700"/>
-            <a:ext cx="4558064" cy="457200"/>
+            <a:off x="1736158" y="2171700"/>
+            <a:ext cx="4488298" cy="457200"/>
           </a:xfrm>
           <a:prstGeom prst="rect">
             <a:avLst/>
@@ -11066,11 +11224,11 @@
           <a:p>
             <a:pPr algn="l"/>
             <a:r>
-              <a:rPr sz="2600" b="0" i="0">
+              <a:rPr sz="2470" b="0" i="0">
                 <a:solidFill>
                   <a:srgbClr val="1A1A1A"/>
                 </a:solidFill>
-                <a:latin typeface="Century Schoolbook"/>
+                <a:latin typeface="Lexend"/>
               </a:rPr>
               <a:t>How many times larger is  </a:t>
             </a:r>
@@ -11079,7 +11237,7 @@
       </p:sp>
       <p:pic>
         <p:nvPicPr>
-          <p:cNvPr id="9" name="Picture 8" descr="9dfa88f60f7695f6.png"/>
+          <p:cNvPr id="9" name="Picture 8" descr="a21c12e381007adf.png"/>
           <p:cNvPicPr>
             <a:picLocks noChangeAspect="1"/>
           </p:cNvPicPr>
@@ -11093,8 +11251,8 @@
         </p:blipFill>
         <p:spPr>
           <a:xfrm>
-            <a:off x="6099928" y="2223516"/>
-            <a:ext cx="1411224" cy="353568"/>
+            <a:off x="6087297" y="2231136"/>
+            <a:ext cx="1432560" cy="338328"/>
           </a:xfrm>
           <a:prstGeom prst="rect">
             <a:avLst/>
@@ -11109,8 +11267,8 @@
         </p:nvSpPr>
         <p:spPr>
           <a:xfrm>
-            <a:off x="7511152" y="2171700"/>
-            <a:ext cx="1356212" cy="457200"/>
+            <a:off x="7519857" y="2171700"/>
+            <a:ext cx="1316601" cy="457200"/>
           </a:xfrm>
           <a:prstGeom prst="rect">
             <a:avLst/>
@@ -11125,11 +11283,11 @@
           <a:p>
             <a:pPr algn="l"/>
             <a:r>
-              <a:rPr sz="2600" b="0" i="0">
+              <a:rPr sz="2470" b="0" i="0">
                 <a:solidFill>
                   <a:srgbClr val="1A1A1A"/>
                 </a:solidFill>
-                <a:latin typeface="Century Schoolbook"/>
+                <a:latin typeface="Lexend"/>
               </a:rPr>
               <a:t>  than  </a:t>
             </a:r>
@@ -11138,7 +11296,7 @@
       </p:sp>
       <p:pic>
         <p:nvPicPr>
-          <p:cNvPr id="11" name="Picture 10" descr="441501d81b57e020.png"/>
+          <p:cNvPr id="11" name="Picture 10" descr="aaaf2b9082714bc7.png"/>
           <p:cNvPicPr>
             <a:picLocks noChangeAspect="1"/>
           </p:cNvPicPr>
@@ -11152,8 +11310,8 @@
         </p:blipFill>
         <p:spPr>
           <a:xfrm>
-            <a:off x="8730204" y="2225040"/>
-            <a:ext cx="1426464" cy="350520"/>
+            <a:off x="8699299" y="2232660"/>
+            <a:ext cx="1389888" cy="335280"/>
           </a:xfrm>
           <a:prstGeom prst="rect">
             <a:avLst/>
@@ -11168,8 +11326,8 @@
         </p:nvSpPr>
         <p:spPr>
           <a:xfrm>
-            <a:off x="10156668" y="2171700"/>
-            <a:ext cx="462987" cy="457200"/>
+            <a:off x="10089187" y="2171700"/>
+            <a:ext cx="473333" cy="457200"/>
           </a:xfrm>
           <a:prstGeom prst="rect">
             <a:avLst/>
@@ -11184,11 +11342,11 @@
           <a:p>
             <a:pPr algn="l"/>
             <a:r>
-              <a:rPr sz="2600" b="0" i="0">
+              <a:rPr sz="2470" b="0" i="0">
                 <a:solidFill>
                   <a:srgbClr val="1A1A1A"/>
                 </a:solidFill>
-                <a:latin typeface="Century Schoolbook"/>
+                <a:latin typeface="Lexend"/>
               </a:rPr>
               <a:t> ?</a:t>
             </a:r>
@@ -11219,11 +11377,11 @@
           <a:p>
             <a:pPr algn="ctr"/>
             <a:r>
-              <a:rPr sz="2600" b="1" i="0">
+              <a:rPr sz="2470" b="1" i="0">
                 <a:solidFill>
                   <a:srgbClr val="1A1A1A"/>
                 </a:solidFill>
-                <a:latin typeface="Century Schoolbook"/>
+                <a:latin typeface="Lexend"/>
               </a:rPr>
               <a:t>Answer it.</a:t>
             </a:r>
@@ -11272,11 +11430,11 @@
           <a:p>
             <a:pPr algn="l"/>
             <a:r>
-              <a:rPr sz="3400" b="1" i="0">
+              <a:rPr sz="3229" b="1" i="0">
                 <a:solidFill>
                   <a:srgbClr val="1A1A1A"/>
                 </a:solidFill>
-                <a:latin typeface="Century Schoolbook"/>
+                <a:latin typeface="Lexend"/>
               </a:rPr>
               <a:t>Whiteboards   ·   Question 7 of 9</a:t>
             </a:r>
@@ -11412,11 +11570,11 @@
           <a:p>
             <a:pPr algn="l"/>
             <a:r>
-              <a:rPr sz="1100" b="0" i="1">
+              <a:rPr sz="1040" b="0" i="0">
                 <a:solidFill>
                   <a:srgbClr val="6B6B6B"/>
                 </a:solidFill>
-                <a:latin typeface="Century Schoolbook"/>
+                <a:latin typeface="Lexend"/>
               </a:rPr>
               <a:t>Grade 7 Accelerated · Unit 3 · Lesson 8 — Writing Large Numbers in Scientific Notation</a:t>
             </a:r>
@@ -11447,11 +11605,11 @@
           <a:p>
             <a:pPr algn="r"/>
             <a:r>
-              <a:rPr sz="1100" b="0" i="0">
+              <a:rPr sz="1040" b="0" i="0">
                 <a:solidFill>
                   <a:srgbClr val="6B6B6B"/>
                 </a:solidFill>
-                <a:latin typeface="Century Schoolbook"/>
+                <a:latin typeface="Lexend"/>
               </a:rPr>
               <a:t>28</a:t>
             </a:r>
@@ -11466,8 +11624,8 @@
         </p:nvSpPr>
         <p:spPr>
           <a:xfrm>
-            <a:off x="1682071" y="2080260"/>
-            <a:ext cx="4558064" cy="457200"/>
+            <a:off x="1733110" y="2080260"/>
+            <a:ext cx="4488298" cy="457200"/>
           </a:xfrm>
           <a:prstGeom prst="rect">
             <a:avLst/>
@@ -11482,11 +11640,11 @@
           <a:p>
             <a:pPr algn="l"/>
             <a:r>
-              <a:rPr sz="2600" b="0" i="0">
+              <a:rPr sz="2470" b="0" i="0">
                 <a:solidFill>
                   <a:srgbClr val="1A1A1A"/>
                 </a:solidFill>
-                <a:latin typeface="Century Schoolbook"/>
+                <a:latin typeface="Lexend"/>
               </a:rPr>
               <a:t>How many times larger is  </a:t>
             </a:r>
@@ -11495,7 +11653,7 @@
       </p:sp>
       <p:pic>
         <p:nvPicPr>
-          <p:cNvPr id="9" name="Picture 8" descr="f4de1fd42bbb25b4.png"/>
+          <p:cNvPr id="9" name="Picture 8" descr="6927284ac777f284.png"/>
           <p:cNvPicPr>
             <a:picLocks noChangeAspect="1"/>
           </p:cNvPicPr>
@@ -11509,8 +11667,8 @@
         </p:blipFill>
         <p:spPr>
           <a:xfrm>
-            <a:off x="6102976" y="2132076"/>
-            <a:ext cx="1408176" cy="353568"/>
+            <a:off x="6084249" y="2138171"/>
+            <a:ext cx="1432560" cy="341376"/>
           </a:xfrm>
           <a:prstGeom prst="rect">
             <a:avLst/>
@@ -11525,8 +11683,8 @@
         </p:nvSpPr>
         <p:spPr>
           <a:xfrm>
-            <a:off x="7511152" y="2080260"/>
-            <a:ext cx="1356212" cy="457200"/>
+            <a:off x="7516809" y="2080260"/>
+            <a:ext cx="1316601" cy="457200"/>
           </a:xfrm>
           <a:prstGeom prst="rect">
             <a:avLst/>
@@ -11541,11 +11699,11 @@
           <a:p>
             <a:pPr algn="l"/>
             <a:r>
-              <a:rPr sz="2600" b="0" i="0">
+              <a:rPr sz="2470" b="0" i="0">
                 <a:solidFill>
                   <a:srgbClr val="1A1A1A"/>
                 </a:solidFill>
-                <a:latin typeface="Century Schoolbook"/>
+                <a:latin typeface="Lexend"/>
               </a:rPr>
               <a:t>  than  </a:t>
             </a:r>
@@ -11554,7 +11712,7 @@
       </p:sp>
       <p:pic>
         <p:nvPicPr>
-          <p:cNvPr id="11" name="Picture 10" descr="f8ac844b4918206d.png"/>
+          <p:cNvPr id="11" name="Picture 10" descr="0e66f4ec969ea39a.png"/>
           <p:cNvPicPr>
             <a:picLocks noChangeAspect="1"/>
           </p:cNvPicPr>
@@ -11568,8 +11726,8 @@
         </p:blipFill>
         <p:spPr>
           <a:xfrm>
-            <a:off x="8730204" y="2132076"/>
-            <a:ext cx="1423416" cy="353568"/>
+            <a:off x="8696251" y="2139696"/>
+            <a:ext cx="1395984" cy="338328"/>
           </a:xfrm>
           <a:prstGeom prst="rect">
             <a:avLst/>
@@ -11584,8 +11742,8 @@
         </p:nvSpPr>
         <p:spPr>
           <a:xfrm>
-            <a:off x="10153620" y="2080260"/>
-            <a:ext cx="462987" cy="457200"/>
+            <a:off x="10092235" y="2080260"/>
+            <a:ext cx="473333" cy="457200"/>
           </a:xfrm>
           <a:prstGeom prst="rect">
             <a:avLst/>
@@ -11600,11 +11758,11 @@
           <a:p>
             <a:pPr algn="l"/>
             <a:r>
-              <a:rPr sz="2600" b="0" i="0">
+              <a:rPr sz="2470" b="0" i="0">
                 <a:solidFill>
                   <a:srgbClr val="1A1A1A"/>
                 </a:solidFill>
-                <a:latin typeface="Century Schoolbook"/>
+                <a:latin typeface="Lexend"/>
               </a:rPr>
               <a:t> ?</a:t>
             </a:r>
@@ -11614,6 +11772,148 @@
       <p:sp>
         <p:nvSpPr>
           <p:cNvPr id="13" name="TextBox 12"/>
+          <p:cNvSpPr txBox="1"/>
+          <p:nvPr/>
+        </p:nvSpPr>
+        <p:spPr>
+          <a:xfrm>
+            <a:off x="3611220" y="2839212"/>
+            <a:ext cx="3415280" cy="457200"/>
+          </a:xfrm>
+          <a:prstGeom prst="rect">
+            <a:avLst/>
+          </a:prstGeom>
+          <a:noFill/>
+        </p:spPr>
+        <p:txBody>
+          <a:bodyPr wrap="none" lIns="45720" rIns="45720" tIns="18288" bIns="18288" anchor="ctr">
+            <a:noAutofit/>
+          </a:bodyPr>
+          <a:lstStyle/>
+          <a:p>
+            <a:pPr algn="l"/>
+            <a:r>
+              <a:rPr sz="2330" b="0" i="0">
+                <a:solidFill>
+                  <a:srgbClr val="1A1A1A"/>
+                </a:solidFill>
+                <a:latin typeface="Lexend"/>
+              </a:rPr>
+              <a:t>Divide the numbers:  </a:t>
+            </a:r>
+          </a:p>
+        </p:txBody>
+      </p:sp>
+      <p:pic>
+        <p:nvPicPr>
+          <p:cNvPr id="14" name="Picture 13" descr="024eebcb36c872bc.png"/>
+          <p:cNvPicPr>
+            <a:picLocks noChangeAspect="1"/>
+          </p:cNvPicPr>
+          <p:nvPr/>
+        </p:nvPicPr>
+        <p:blipFill>
+          <a:blip r:embed="rId4"/>
+          <a:stretch>
+            <a:fillRect/>
+          </a:stretch>
+        </p:blipFill>
+        <p:spPr>
+          <a:xfrm>
+            <a:off x="6889340" y="2961132"/>
+            <a:ext cx="1520952" cy="213360"/>
+          </a:xfrm>
+          <a:prstGeom prst="rect">
+            <a:avLst/>
+          </a:prstGeom>
+        </p:spPr>
+      </p:pic>
+      <p:sp>
+        <p:nvSpPr>
+          <p:cNvPr id="15" name="TextBox 14"/>
+          <p:cNvSpPr txBox="1"/>
+          <p:nvPr/>
+        </p:nvSpPr>
+        <p:spPr>
+          <a:xfrm>
+            <a:off x="3611220" y="3342132"/>
+            <a:ext cx="3183431" cy="457200"/>
+          </a:xfrm>
+          <a:prstGeom prst="rect">
+            <a:avLst/>
+          </a:prstGeom>
+          <a:noFill/>
+        </p:spPr>
+        <p:txBody>
+          <a:bodyPr wrap="none" lIns="45720" rIns="45720" tIns="18288" bIns="18288" anchor="ctr">
+            <a:noAutofit/>
+          </a:bodyPr>
+          <a:lstStyle/>
+          <a:p>
+            <a:pPr algn="l"/>
+            <a:r>
+              <a:rPr sz="2330" b="0" i="0">
+                <a:solidFill>
+                  <a:srgbClr val="1A1A1A"/>
+                </a:solidFill>
+                <a:latin typeface="Lexend"/>
+              </a:rPr>
+              <a:t>Divide the powers:  </a:t>
+            </a:r>
+          </a:p>
+        </p:txBody>
+      </p:sp>
+      <p:pic>
+        <p:nvPicPr>
+          <p:cNvPr id="16" name="Picture 15" descr="b4e1be01d60942dd.png"/>
+          <p:cNvPicPr>
+            <a:picLocks noChangeAspect="1"/>
+          </p:cNvPicPr>
+          <p:nvPr/>
+        </p:nvPicPr>
+        <p:blipFill>
+          <a:blip r:embed="rId5"/>
+          <a:stretch>
+            <a:fillRect/>
+          </a:stretch>
+        </p:blipFill>
+        <p:spPr>
+          <a:xfrm>
+            <a:off x="6657491" y="3439667"/>
+            <a:ext cx="1895856" cy="262128"/>
+          </a:xfrm>
+          <a:prstGeom prst="rect">
+            <a:avLst/>
+          </a:prstGeom>
+        </p:spPr>
+      </p:pic>
+      <p:pic>
+        <p:nvPicPr>
+          <p:cNvPr id="17" name="Picture 16" descr="41bbac836a9b2537.png"/>
+          <p:cNvPicPr>
+            <a:picLocks noChangeAspect="1"/>
+          </p:cNvPicPr>
+          <p:nvPr/>
+        </p:nvPicPr>
+        <p:blipFill>
+          <a:blip r:embed="rId6"/>
+          <a:stretch>
+            <a:fillRect/>
+          </a:stretch>
+        </p:blipFill>
+        <p:spPr>
+          <a:xfrm>
+            <a:off x="3666084" y="3942588"/>
+            <a:ext cx="1685544" cy="262128"/>
+          </a:xfrm>
+          <a:prstGeom prst="rect">
+            <a:avLst/>
+          </a:prstGeom>
+        </p:spPr>
+      </p:pic>
+      <p:sp>
+        <p:nvSpPr>
+          <p:cNvPr id="18" name="TextBox 17"/>
           <p:cNvSpPr txBox="1"/>
           <p:nvPr/>
         </p:nvSpPr>
@@ -11635,11 +11935,11 @@
           <a:p>
             <a:pPr algn="ctr"/>
             <a:r>
-              <a:rPr sz="3200" b="1" i="0">
+              <a:rPr sz="3040" b="1" i="0">
                 <a:solidFill>
                   <a:srgbClr val="9E1B32"/>
                 </a:solidFill>
-                <a:latin typeface="Century Schoolbook"/>
+                <a:latin typeface="Lexend"/>
               </a:rPr>
               <a:t>Answer:   400</a:t>
             </a:r>
@@ -11688,11 +11988,11 @@
           <a:p>
             <a:pPr algn="l"/>
             <a:r>
-              <a:rPr sz="3400" b="1" i="0">
+              <a:rPr sz="3229" b="1" i="0">
                 <a:solidFill>
                   <a:srgbClr val="1A1A1A"/>
                 </a:solidFill>
-                <a:latin typeface="Century Schoolbook"/>
+                <a:latin typeface="Lexend"/>
               </a:rPr>
               <a:t>Whiteboards   ·   Question 8 of 9</a:t>
             </a:r>
@@ -11828,11 +12128,11 @@
           <a:p>
             <a:pPr algn="l"/>
             <a:r>
-              <a:rPr sz="1100" b="0" i="1">
+              <a:rPr sz="1040" b="0" i="0">
                 <a:solidFill>
                   <a:srgbClr val="6B6B6B"/>
                 </a:solidFill>
-                <a:latin typeface="Century Schoolbook"/>
+                <a:latin typeface="Lexend"/>
               </a:rPr>
               <a:t>Grade 7 Accelerated · Unit 3 · Lesson 8 — Writing Large Numbers in Scientific Notation</a:t>
             </a:r>
@@ -11863,11 +12163,11 @@
           <a:p>
             <a:pPr algn="r"/>
             <a:r>
-              <a:rPr sz="1100" b="0" i="0">
+              <a:rPr sz="1040" b="0" i="0">
                 <a:solidFill>
                   <a:srgbClr val="6B6B6B"/>
                 </a:solidFill>
-                <a:latin typeface="Century Schoolbook"/>
+                <a:latin typeface="Lexend"/>
               </a:rPr>
               <a:t>29</a:t>
             </a:r>
@@ -11898,11 +12198,11 @@
           <a:p>
             <a:pPr algn="ctr"/>
             <a:r>
-              <a:rPr sz="2600" b="0" i="0">
+              <a:rPr sz="2470" b="0" i="0">
                 <a:solidFill>
                   <a:srgbClr val="1A1A1A"/>
                 </a:solidFill>
-                <a:latin typeface="Century Schoolbook"/>
+                <a:latin typeface="Lexend"/>
               </a:rPr>
               <a:t>A computer displays a number as  3.5E9.</a:t>
             </a:r>
@@ -11933,11 +12233,11 @@
           <a:p>
             <a:pPr algn="ctr"/>
             <a:r>
-              <a:rPr sz="2600" b="0" i="0">
+              <a:rPr sz="2470" b="0" i="0">
                 <a:solidFill>
                   <a:srgbClr val="1A1A1A"/>
                 </a:solidFill>
-                <a:latin typeface="Century Schoolbook"/>
+                <a:latin typeface="Lexend"/>
               </a:rPr>
               <a:t>Write the number in standard form.</a:t>
             </a:r>
@@ -11968,11 +12268,11 @@
           <a:p>
             <a:pPr algn="ctr"/>
             <a:r>
-              <a:rPr sz="2600" b="1" i="0">
+              <a:rPr sz="2470" b="1" i="0">
                 <a:solidFill>
                   <a:srgbClr val="1A1A1A"/>
                 </a:solidFill>
-                <a:latin typeface="Century Schoolbook"/>
+                <a:latin typeface="Lexend"/>
               </a:rPr>
               <a:t>Answer it.</a:t>
             </a:r>
@@ -12021,11 +12321,11 @@
           <a:p>
             <a:pPr algn="l"/>
             <a:r>
-              <a:rPr sz="3600" b="1" i="0">
+              <a:rPr sz="3420" b="1" i="0">
                 <a:solidFill>
                   <a:srgbClr val="1A1A1A"/>
                 </a:solidFill>
-                <a:latin typeface="Century Schoolbook"/>
+                <a:latin typeface="Lexend"/>
               </a:rPr>
               <a:t>Warm-Up</a:t>
             </a:r>
@@ -12161,11 +12461,11 @@
           <a:p>
             <a:pPr algn="l"/>
             <a:r>
-              <a:rPr sz="1100" b="0" i="1">
+              <a:rPr sz="1040" b="0" i="0">
                 <a:solidFill>
                   <a:srgbClr val="6B6B6B"/>
                 </a:solidFill>
-                <a:latin typeface="Century Schoolbook"/>
+                <a:latin typeface="Lexend"/>
               </a:rPr>
               <a:t>Grade 7 Accelerated · Unit 3 · Lesson 8 — Writing Large Numbers in Scientific Notation</a:t>
             </a:r>
@@ -12196,11 +12496,11 @@
           <a:p>
             <a:pPr algn="r"/>
             <a:r>
-              <a:rPr sz="1100" b="0" i="0">
+              <a:rPr sz="1040" b="0" i="0">
                 <a:solidFill>
                   <a:srgbClr val="6B6B6B"/>
                 </a:solidFill>
-                <a:latin typeface="Century Schoolbook"/>
+                <a:latin typeface="Lexend"/>
               </a:rPr>
               <a:t>3</a:t>
             </a:r>
@@ -12216,7 +12516,7 @@
         <p:spPr>
           <a:xfrm>
             <a:off x="1874519" y="1440180"/>
-            <a:ext cx="5670993" cy="457200"/>
+            <a:ext cx="5570409" cy="457200"/>
           </a:xfrm>
           <a:prstGeom prst="rect">
             <a:avLst/>
@@ -12231,11 +12531,11 @@
           <a:p>
             <a:pPr algn="l"/>
             <a:r>
-              <a:rPr sz="2300" b="0" i="0">
+              <a:rPr sz="2180" b="0" i="0">
                 <a:solidFill>
                   <a:srgbClr val="1A1A1A"/>
                 </a:solidFill>
-                <a:latin typeface="Century Schoolbook"/>
+                <a:latin typeface="Lexend"/>
               </a:rPr>
               <a:t>1.   Rewrite with a positive exponent:  </a:t>
             </a:r>
@@ -12244,7 +12544,7 @@
       </p:sp>
       <p:pic>
         <p:nvPicPr>
-          <p:cNvPr id="9" name="Picture 8" descr="1f7555b99367de55.png"/>
+          <p:cNvPr id="9" name="Picture 8" descr="46ce777176e30484.png"/>
           <p:cNvPicPr>
             <a:picLocks noChangeAspect="1"/>
           </p:cNvPicPr>
@@ -12258,8 +12558,8 @@
         </p:blipFill>
         <p:spPr>
           <a:xfrm>
-            <a:off x="7408353" y="1530096"/>
-            <a:ext cx="585216" cy="277368"/>
+            <a:off x="7307769" y="1534668"/>
+            <a:ext cx="609600" cy="268224"/>
           </a:xfrm>
           <a:prstGeom prst="rect">
             <a:avLst/>
@@ -12274,8 +12574,8 @@
         </p:nvSpPr>
         <p:spPr>
           <a:xfrm>
-            <a:off x="8542209" y="1440180"/>
-            <a:ext cx="769826" cy="457200"/>
+            <a:off x="8466009" y="1440180"/>
+            <a:ext cx="861247" cy="457200"/>
           </a:xfrm>
           <a:prstGeom prst="rect">
             <a:avLst/>
@@ -12290,20 +12590,20 @@
           <a:p>
             <a:pPr algn="l"/>
             <a:r>
-              <a:rPr sz="2300" b="1" i="0">
+              <a:rPr sz="2180" b="1" i="0">
                 <a:solidFill>
                   <a:srgbClr val="9E1B32"/>
                 </a:solidFill>
-                <a:latin typeface="Century Schoolbook"/>
+                <a:latin typeface="Lexend"/>
               </a:rPr>
               <a:t>4/x</a:t>
             </a:r>
             <a:r>
-              <a:rPr sz="2300" b="1" i="0" baseline="30000">
+              <a:rPr sz="2180" b="1" i="0" baseline="30000">
                 <a:solidFill>
                   <a:srgbClr val="9E1B32"/>
                 </a:solidFill>
-                <a:latin typeface="Century Schoolbook"/>
+                <a:latin typeface="Lexend"/>
               </a:rPr>
               <a:t>3</a:t>
             </a:r>
@@ -12319,7 +12619,7 @@
         <p:spPr>
           <a:xfrm>
             <a:off x="1874519" y="2052828"/>
-            <a:ext cx="3064939" cy="457200"/>
+            <a:ext cx="2935946" cy="457200"/>
           </a:xfrm>
           <a:prstGeom prst="rect">
             <a:avLst/>
@@ -12334,11 +12634,11 @@
           <a:p>
             <a:pPr algn="l"/>
             <a:r>
-              <a:rPr sz="2300" b="0" i="0">
+              <a:rPr sz="2180" b="0" i="0">
                 <a:solidFill>
                   <a:srgbClr val="1A1A1A"/>
                 </a:solidFill>
-                <a:latin typeface="Century Schoolbook"/>
+                <a:latin typeface="Lexend"/>
               </a:rPr>
               <a:t>2.   Find the value:  </a:t>
             </a:r>
@@ -12347,7 +12647,7 @@
       </p:sp>
       <p:pic>
         <p:nvPicPr>
-          <p:cNvPr id="12" name="Picture 11" descr="1a29715e97268546.png"/>
+          <p:cNvPr id="12" name="Picture 11" descr="0f58603634600083.png"/>
           <p:cNvPicPr>
             <a:picLocks noChangeAspect="1"/>
           </p:cNvPicPr>
@@ -12361,8 +12661,8 @@
         </p:blipFill>
         <p:spPr>
           <a:xfrm>
-            <a:off x="4802299" y="2113788"/>
-            <a:ext cx="774192" cy="335280"/>
+            <a:off x="4673306" y="2113788"/>
+            <a:ext cx="807720" cy="335280"/>
           </a:xfrm>
           <a:prstGeom prst="rect">
             <a:avLst/>
@@ -12377,8 +12677,8 @@
         </p:nvSpPr>
         <p:spPr>
           <a:xfrm>
-            <a:off x="6125131" y="2052828"/>
-            <a:ext cx="2426493" cy="457200"/>
+            <a:off x="6029666" y="2052828"/>
+            <a:ext cx="2581254" cy="457200"/>
           </a:xfrm>
           <a:prstGeom prst="rect">
             <a:avLst/>
@@ -12393,29 +12693,29 @@
           <a:p>
             <a:pPr algn="l"/>
             <a:r>
-              <a:rPr sz="2300" b="1" i="0">
+              <a:rPr sz="2180" b="1" i="0">
                 <a:solidFill>
                   <a:srgbClr val="9E1B32"/>
                 </a:solidFill>
-                <a:latin typeface="Century Schoolbook"/>
+                <a:latin typeface="Lexend"/>
               </a:rPr>
               <a:t>10</a:t>
             </a:r>
             <a:r>
-              <a:rPr sz="2300" b="1" i="0" baseline="30000">
+              <a:rPr sz="2180" b="1" i="0" baseline="30000">
                 <a:solidFill>
                   <a:srgbClr val="9E1B32"/>
                 </a:solidFill>
-                <a:latin typeface="Century Schoolbook"/>
+                <a:latin typeface="Lexend"/>
               </a:rPr>
               <a:t>6</a:t>
             </a:r>
             <a:r>
-              <a:rPr sz="2300" b="1" i="0">
+              <a:rPr sz="2180" b="1" i="0">
                 <a:solidFill>
                   <a:srgbClr val="9E1B32"/>
                 </a:solidFill>
-                <a:latin typeface="Century Schoolbook"/>
+                <a:latin typeface="Lexend"/>
               </a:rPr>
               <a:t> = 1,000,000</a:t>
             </a:r>
@@ -12431,7 +12731,7 @@
         <p:spPr>
           <a:xfrm>
             <a:off x="1874519" y="2665476"/>
-            <a:ext cx="3064939" cy="457200"/>
+            <a:ext cx="2930351" cy="457200"/>
           </a:xfrm>
           <a:prstGeom prst="rect">
             <a:avLst/>
@@ -12446,11 +12746,11 @@
           <a:p>
             <a:pPr algn="l"/>
             <a:r>
-              <a:rPr sz="2300" b="0" i="0">
+              <a:rPr sz="2180" b="0" i="0">
                 <a:solidFill>
                   <a:srgbClr val="1A1A1A"/>
                 </a:solidFill>
-                <a:latin typeface="Century Schoolbook"/>
+                <a:latin typeface="Lexend"/>
               </a:rPr>
               <a:t>3.   Find the value:  </a:t>
             </a:r>
@@ -12459,7 +12759,7 @@
       </p:sp>
       <p:pic>
         <p:nvPicPr>
-          <p:cNvPr id="15" name="Picture 14" descr="dcb33f053a4bb301.png"/>
+          <p:cNvPr id="15" name="Picture 14" descr="e90d31abd6081371.png"/>
           <p:cNvPicPr>
             <a:picLocks noChangeAspect="1"/>
           </p:cNvPicPr>
@@ -12473,8 +12773,8 @@
         </p:blipFill>
         <p:spPr>
           <a:xfrm>
-            <a:off x="4802299" y="2689860"/>
-            <a:ext cx="853440" cy="408432"/>
+            <a:off x="4667711" y="2699004"/>
+            <a:ext cx="826008" cy="390144"/>
           </a:xfrm>
           <a:prstGeom prst="rect">
             <a:avLst/>
@@ -12489,8 +12789,8 @@
         </p:nvSpPr>
         <p:spPr>
           <a:xfrm>
-            <a:off x="6204379" y="2665476"/>
-            <a:ext cx="565792" cy="457200"/>
+            <a:off x="6042359" y="2665476"/>
+            <a:ext cx="540325" cy="457200"/>
           </a:xfrm>
           <a:prstGeom prst="rect">
             <a:avLst/>
@@ -12505,11 +12805,11 @@
           <a:p>
             <a:pPr algn="l"/>
             <a:r>
-              <a:rPr sz="2300" b="1" i="0">
+              <a:rPr sz="2180" b="1" i="0">
                 <a:solidFill>
                   <a:srgbClr val="9E1B32"/>
                 </a:solidFill>
-                <a:latin typeface="Century Schoolbook"/>
+                <a:latin typeface="Lexend"/>
               </a:rPr>
               <a:t>11</a:t>
             </a:r>
@@ -12525,7 +12825,7 @@
         <p:spPr>
           <a:xfrm>
             <a:off x="1874519" y="3278124"/>
-            <a:ext cx="5997604" cy="457200"/>
+            <a:ext cx="5946133" cy="457200"/>
           </a:xfrm>
           <a:prstGeom prst="rect">
             <a:avLst/>
@@ -12540,11 +12840,11 @@
           <a:p>
             <a:pPr algn="l"/>
             <a:r>
-              <a:rPr sz="2300" b="0" i="0">
+              <a:rPr sz="2180" b="0" i="0">
                 <a:solidFill>
                   <a:srgbClr val="1A1A1A"/>
                 </a:solidFill>
-                <a:latin typeface="Century Schoolbook"/>
+                <a:latin typeface="Lexend"/>
               </a:rPr>
               <a:t>4.   In 4,500,000, which place is the 4 in?</a:t>
             </a:r>
@@ -12559,8 +12859,8 @@
         </p:nvSpPr>
         <p:spPr>
           <a:xfrm>
-            <a:off x="8283604" y="3278124"/>
-            <a:ext cx="1511761" cy="457200"/>
+            <a:off x="8232133" y="3278124"/>
+            <a:ext cx="1380696" cy="457200"/>
           </a:xfrm>
           <a:prstGeom prst="rect">
             <a:avLst/>
@@ -12575,11 +12875,11 @@
           <a:p>
             <a:pPr algn="l"/>
             <a:r>
-              <a:rPr sz="2300" b="1" i="0">
+              <a:rPr sz="2180" b="1" i="0">
                 <a:solidFill>
                   <a:srgbClr val="9E1B32"/>
                 </a:solidFill>
-                <a:latin typeface="Century Schoolbook"/>
+                <a:latin typeface="Lexend"/>
               </a:rPr>
               <a:t>millions</a:t>
             </a:r>
@@ -12628,11 +12928,11 @@
           <a:p>
             <a:pPr algn="l"/>
             <a:r>
-              <a:rPr sz="3400" b="1" i="0">
+              <a:rPr sz="3229" b="1" i="0">
                 <a:solidFill>
                   <a:srgbClr val="1A1A1A"/>
                 </a:solidFill>
-                <a:latin typeface="Century Schoolbook"/>
+                <a:latin typeface="Lexend"/>
               </a:rPr>
               <a:t>Whiteboards   ·   Question 8 of 9</a:t>
             </a:r>
@@ -12768,11 +13068,11 @@
           <a:p>
             <a:pPr algn="l"/>
             <a:r>
-              <a:rPr sz="1100" b="0" i="1">
+              <a:rPr sz="1040" b="0" i="0">
                 <a:solidFill>
                   <a:srgbClr val="6B6B6B"/>
                 </a:solidFill>
-                <a:latin typeface="Century Schoolbook"/>
+                <a:latin typeface="Lexend"/>
               </a:rPr>
               <a:t>Grade 7 Accelerated · Unit 3 · Lesson 8 — Writing Large Numbers in Scientific Notation</a:t>
             </a:r>
@@ -12803,11 +13103,11 @@
           <a:p>
             <a:pPr algn="r"/>
             <a:r>
-              <a:rPr sz="1100" b="0" i="0">
+              <a:rPr sz="1040" b="0" i="0">
                 <a:solidFill>
                   <a:srgbClr val="6B6B6B"/>
                 </a:solidFill>
-                <a:latin typeface="Century Schoolbook"/>
+                <a:latin typeface="Lexend"/>
               </a:rPr>
               <a:t>30</a:t>
             </a:r>
@@ -12838,11 +13138,11 @@
           <a:p>
             <a:pPr algn="ctr"/>
             <a:r>
-              <a:rPr sz="2600" b="0" i="0">
+              <a:rPr sz="2470" b="0" i="0">
                 <a:solidFill>
                   <a:srgbClr val="1A1A1A"/>
                 </a:solidFill>
-                <a:latin typeface="Century Schoolbook"/>
+                <a:latin typeface="Lexend"/>
               </a:rPr>
               <a:t>A computer displays a number as  3.5E9.</a:t>
             </a:r>
@@ -12873,11 +13173,11 @@
           <a:p>
             <a:pPr algn="ctr"/>
             <a:r>
-              <a:rPr sz="2600" b="0" i="0">
+              <a:rPr sz="2470" b="0" i="0">
                 <a:solidFill>
                   <a:srgbClr val="1A1A1A"/>
                 </a:solidFill>
-                <a:latin typeface="Century Schoolbook"/>
+                <a:latin typeface="Lexend"/>
               </a:rPr>
               <a:t>Write the number in standard form.</a:t>
             </a:r>
@@ -12887,6 +13187,89 @@
       <p:sp>
         <p:nvSpPr>
           <p:cNvPr id="10" name="TextBox 9"/>
+          <p:cNvSpPr txBox="1"/>
+          <p:nvPr/>
+        </p:nvSpPr>
+        <p:spPr>
+          <a:xfrm>
+            <a:off x="4099560" y="3303170"/>
+            <a:ext cx="2637355" cy="457200"/>
+          </a:xfrm>
+          <a:prstGeom prst="rect">
+            <a:avLst/>
+          </a:prstGeom>
+          <a:noFill/>
+        </p:spPr>
+        <p:txBody>
+          <a:bodyPr wrap="none" lIns="45720" rIns="45720" tIns="18288" bIns="18288" anchor="ctr">
+            <a:noAutofit/>
+          </a:bodyPr>
+          <a:lstStyle/>
+          <a:p>
+            <a:pPr algn="l"/>
+            <a:r>
+              <a:rPr sz="2750" b="0" i="0">
+                <a:solidFill>
+                  <a:srgbClr val="1A1A1A"/>
+                </a:solidFill>
+                <a:latin typeface="Lexend"/>
+              </a:rPr>
+              <a:t>3.5E9 means  </a:t>
+            </a:r>
+          </a:p>
+        </p:txBody>
+      </p:sp>
+      <p:pic>
+        <p:nvPicPr>
+          <p:cNvPr id="11" name="Picture 10" descr="b45fb8c7dbcd17f7.png"/>
+          <p:cNvPicPr>
+            <a:picLocks noChangeAspect="1"/>
+          </p:cNvPicPr>
+          <p:nvPr/>
+        </p:nvPicPr>
+        <p:blipFill>
+          <a:blip r:embed="rId2"/>
+          <a:stretch>
+            <a:fillRect/>
+          </a:stretch>
+        </p:blipFill>
+        <p:spPr>
+          <a:xfrm>
+            <a:off x="6599755" y="3376322"/>
+            <a:ext cx="1274064" cy="310896"/>
+          </a:xfrm>
+          <a:prstGeom prst="rect">
+            <a:avLst/>
+          </a:prstGeom>
+        </p:spPr>
+      </p:pic>
+      <p:pic>
+        <p:nvPicPr>
+          <p:cNvPr id="12" name="Picture 11" descr="5ff869fd9c2b8196.png"/>
+          <p:cNvPicPr>
+            <a:picLocks noChangeAspect="1"/>
+          </p:cNvPicPr>
+          <p:nvPr/>
+        </p:nvPicPr>
+        <p:blipFill>
+          <a:blip r:embed="rId3"/>
+          <a:stretch>
+            <a:fillRect/>
+          </a:stretch>
+        </p:blipFill>
+        <p:spPr>
+          <a:xfrm>
+            <a:off x="4154423" y="3885338"/>
+            <a:ext cx="3965448" cy="371856"/>
+          </a:xfrm>
+          <a:prstGeom prst="rect">
+            <a:avLst/>
+          </a:prstGeom>
+        </p:spPr>
+      </p:pic>
+      <p:sp>
+        <p:nvSpPr>
+          <p:cNvPr id="13" name="TextBox 12"/>
           <p:cNvSpPr txBox="1"/>
           <p:nvPr/>
         </p:nvSpPr>
@@ -12908,11 +13291,11 @@
           <a:p>
             <a:pPr algn="ctr"/>
             <a:r>
-              <a:rPr sz="3200" b="1" i="0">
+              <a:rPr sz="3040" b="1" i="0">
                 <a:solidFill>
                   <a:srgbClr val="9E1B32"/>
                 </a:solidFill>
-                <a:latin typeface="Century Schoolbook"/>
+                <a:latin typeface="Lexend"/>
               </a:rPr>
               <a:t>Answer:   3,500,000,000</a:t>
             </a:r>
@@ -12961,11 +13344,11 @@
           <a:p>
             <a:pPr algn="l"/>
             <a:r>
-              <a:rPr sz="3400" b="1" i="0">
+              <a:rPr sz="3229" b="1" i="0">
                 <a:solidFill>
                   <a:srgbClr val="1A1A1A"/>
                 </a:solidFill>
-                <a:latin typeface="Century Schoolbook"/>
+                <a:latin typeface="Lexend"/>
               </a:rPr>
               <a:t>Whiteboards   ·   Question 9 of 9</a:t>
             </a:r>
@@ -13101,11 +13484,11 @@
           <a:p>
             <a:pPr algn="l"/>
             <a:r>
-              <a:rPr sz="1100" b="0" i="1">
+              <a:rPr sz="1040" b="0" i="0">
                 <a:solidFill>
                   <a:srgbClr val="6B6B6B"/>
                 </a:solidFill>
-                <a:latin typeface="Century Schoolbook"/>
+                <a:latin typeface="Lexend"/>
               </a:rPr>
               <a:t>Grade 7 Accelerated · Unit 3 · Lesson 8 — Writing Large Numbers in Scientific Notation</a:t>
             </a:r>
@@ -13136,11 +13519,11 @@
           <a:p>
             <a:pPr algn="r"/>
             <a:r>
-              <a:rPr sz="1100" b="0" i="0">
+              <a:rPr sz="1040" b="0" i="0">
                 <a:solidFill>
                   <a:srgbClr val="6B6B6B"/>
                 </a:solidFill>
-                <a:latin typeface="Century Schoolbook"/>
+                <a:latin typeface="Lexend"/>
               </a:rPr>
               <a:t>31</a:t>
             </a:r>
@@ -13155,8 +13538,8 @@
         </p:nvSpPr>
         <p:spPr>
           <a:xfrm>
-            <a:off x="2894026" y="2171700"/>
-            <a:ext cx="5029550" cy="457200"/>
+            <a:off x="2944476" y="2171700"/>
+            <a:ext cx="4937908" cy="457200"/>
           </a:xfrm>
           <a:prstGeom prst="rect">
             <a:avLst/>
@@ -13171,11 +13554,11 @@
           <a:p>
             <a:pPr algn="l"/>
             <a:r>
-              <a:rPr sz="2600" b="0" i="0">
+              <a:rPr sz="2470" b="0" i="0">
                 <a:solidFill>
                   <a:srgbClr val="1A1A1A"/>
                 </a:solidFill>
-                <a:latin typeface="Century Schoolbook"/>
+                <a:latin typeface="Lexend"/>
               </a:rPr>
               <a:t>Marcus writes  2,000,000  as  </a:t>
             </a:r>
@@ -13184,7 +13567,7 @@
       </p:sp>
       <p:pic>
         <p:nvPicPr>
-          <p:cNvPr id="9" name="Picture 8" descr="8eae714437c97eeb.png"/>
+          <p:cNvPr id="9" name="Picture 8" descr="1e6b101793739ffd.png"/>
           <p:cNvPicPr>
             <a:picLocks noChangeAspect="1"/>
           </p:cNvPicPr>
@@ -13198,8 +13581,8 @@
         </p:blipFill>
         <p:spPr>
           <a:xfrm>
-            <a:off x="7786417" y="2223516"/>
-            <a:ext cx="1310640" cy="353568"/>
+            <a:off x="7745225" y="2232660"/>
+            <a:ext cx="1322832" cy="335280"/>
           </a:xfrm>
           <a:prstGeom prst="rect">
             <a:avLst/>
@@ -13214,8 +13597,8 @@
         </p:nvSpPr>
         <p:spPr>
           <a:xfrm>
-            <a:off x="9097057" y="2171700"/>
-            <a:ext cx="307595" cy="457200"/>
+            <a:off x="9068057" y="2171700"/>
+            <a:ext cx="286146" cy="457200"/>
           </a:xfrm>
           <a:prstGeom prst="rect">
             <a:avLst/>
@@ -13230,11 +13613,11 @@
           <a:p>
             <a:pPr algn="l"/>
             <a:r>
-              <a:rPr sz="2600" b="0" i="0">
+              <a:rPr sz="2470" b="0" i="0">
                 <a:solidFill>
                   <a:srgbClr val="1A1A1A"/>
                 </a:solidFill>
-                <a:latin typeface="Century Schoolbook"/>
+                <a:latin typeface="Lexend"/>
               </a:rPr>
               <a:t>.</a:t>
             </a:r>
@@ -13265,11 +13648,11 @@
           <a:p>
             <a:pPr algn="ctr"/>
             <a:r>
-              <a:rPr sz="2300" b="0" i="0">
+              <a:rPr sz="2180" b="0" i="0">
                 <a:solidFill>
                   <a:srgbClr val="1A1A1A"/>
                 </a:solidFill>
-                <a:latin typeface="Century Schoolbook"/>
+                <a:latin typeface="Lexend"/>
               </a:rPr>
               <a:t>Is his expression equal to 2,000,000? Is it scientific notation? Explain.</a:t>
             </a:r>
@@ -13300,11 +13683,11 @@
           <a:p>
             <a:pPr algn="ctr"/>
             <a:r>
-              <a:rPr sz="2600" b="1" i="0">
+              <a:rPr sz="2470" b="1" i="0">
                 <a:solidFill>
                   <a:srgbClr val="1A1A1A"/>
                 </a:solidFill>
-                <a:latin typeface="Century Schoolbook"/>
+                <a:latin typeface="Lexend"/>
               </a:rPr>
               <a:t>Write your answer in sentences.</a:t>
             </a:r>
@@ -13353,11 +13736,11 @@
           <a:p>
             <a:pPr algn="l"/>
             <a:r>
-              <a:rPr sz="3400" b="1" i="0">
+              <a:rPr sz="3229" b="1" i="0">
                 <a:solidFill>
                   <a:srgbClr val="1A1A1A"/>
                 </a:solidFill>
-                <a:latin typeface="Century Schoolbook"/>
+                <a:latin typeface="Lexend"/>
               </a:rPr>
               <a:t>Whiteboards   ·   Question 9 of 9</a:t>
             </a:r>
@@ -13493,11 +13876,11 @@
           <a:p>
             <a:pPr algn="l"/>
             <a:r>
-              <a:rPr sz="1100" b="0" i="1">
+              <a:rPr sz="1040" b="0" i="0">
                 <a:solidFill>
                   <a:srgbClr val="6B6B6B"/>
                 </a:solidFill>
-                <a:latin typeface="Century Schoolbook"/>
+                <a:latin typeface="Lexend"/>
               </a:rPr>
               <a:t>Grade 7 Accelerated · Unit 3 · Lesson 8 — Writing Large Numbers in Scientific Notation</a:t>
             </a:r>
@@ -13528,11 +13911,11 @@
           <a:p>
             <a:pPr algn="r"/>
             <a:r>
-              <a:rPr sz="1100" b="0" i="0">
+              <a:rPr sz="1040" b="0" i="0">
                 <a:solidFill>
                   <a:srgbClr val="6B6B6B"/>
                 </a:solidFill>
-                <a:latin typeface="Century Schoolbook"/>
+                <a:latin typeface="Lexend"/>
               </a:rPr>
               <a:t>32</a:t>
             </a:r>
@@ -13547,8 +13930,8 @@
         </p:nvSpPr>
         <p:spPr>
           <a:xfrm>
-            <a:off x="2892502" y="2080260"/>
-            <a:ext cx="5029550" cy="457200"/>
+            <a:off x="2942952" y="2080260"/>
+            <a:ext cx="4937908" cy="457200"/>
           </a:xfrm>
           <a:prstGeom prst="rect">
             <a:avLst/>
@@ -13563,11 +13946,11 @@
           <a:p>
             <a:pPr algn="l"/>
             <a:r>
-              <a:rPr sz="2600" b="0" i="0">
+              <a:rPr sz="2470" b="0" i="0">
                 <a:solidFill>
                   <a:srgbClr val="1A1A1A"/>
                 </a:solidFill>
-                <a:latin typeface="Century Schoolbook"/>
+                <a:latin typeface="Lexend"/>
               </a:rPr>
               <a:t>Marcus writes  2,000,000  as  </a:t>
             </a:r>
@@ -13576,7 +13959,7 @@
       </p:sp>
       <p:pic>
         <p:nvPicPr>
-          <p:cNvPr id="9" name="Picture 8" descr="b1be6639231b1d2d.png"/>
+          <p:cNvPr id="9" name="Picture 8" descr="24bd3819b8f5cef7.png"/>
           <p:cNvPicPr>
             <a:picLocks noChangeAspect="1"/>
           </p:cNvPicPr>
@@ -13590,8 +13973,8 @@
         </p:blipFill>
         <p:spPr>
           <a:xfrm>
-            <a:off x="7784893" y="2132076"/>
-            <a:ext cx="1313688" cy="353568"/>
+            <a:off x="7743701" y="2141219"/>
+            <a:ext cx="1325880" cy="335280"/>
           </a:xfrm>
           <a:prstGeom prst="rect">
             <a:avLst/>
@@ -13606,8 +13989,8 @@
         </p:nvSpPr>
         <p:spPr>
           <a:xfrm>
-            <a:off x="9098581" y="2080260"/>
-            <a:ext cx="307595" cy="457200"/>
+            <a:off x="9069581" y="2080260"/>
+            <a:ext cx="286146" cy="457200"/>
           </a:xfrm>
           <a:prstGeom prst="rect">
             <a:avLst/>
@@ -13622,11 +14005,11 @@
           <a:p>
             <a:pPr algn="l"/>
             <a:r>
-              <a:rPr sz="2600" b="0" i="0">
+              <a:rPr sz="2470" b="0" i="0">
                 <a:solidFill>
                   <a:srgbClr val="1A1A1A"/>
                 </a:solidFill>
-                <a:latin typeface="Century Schoolbook"/>
+                <a:latin typeface="Lexend"/>
               </a:rPr>
               <a:t>.</a:t>
             </a:r>
@@ -13657,26 +14040,144 @@
           <a:p>
             <a:pPr algn="ctr"/>
             <a:r>
-              <a:rPr sz="2300" b="0" i="0">
+              <a:rPr sz="2180" b="0" i="0">
                 <a:solidFill>
                   <a:srgbClr val="1A1A1A"/>
                 </a:solidFill>
-                <a:latin typeface="Century Schoolbook"/>
+                <a:latin typeface="Lexend"/>
               </a:rPr>
               <a:t>Is his expression equal to 2,000,000? Is it scientific notation? Explain.</a:t>
             </a:r>
           </a:p>
         </p:txBody>
       </p:sp>
-      <p:sp>
-        <p:nvSpPr>
-          <p:cNvPr id="12" name="TextBox 11"/>
-          <p:cNvSpPr txBox="1"/>
-          <p:nvPr/>
-        </p:nvSpPr>
-        <p:spPr>
-          <a:xfrm>
-            <a:off x="777240" y="4663440"/>
+      <p:pic>
+        <p:nvPicPr>
+          <p:cNvPr id="12" name="Picture 11" descr="304621095a2a006e.png"/>
+          <p:cNvPicPr>
+            <a:picLocks noChangeAspect="1"/>
+          </p:cNvPicPr>
+          <p:nvPr/>
+        </p:nvPicPr>
+        <p:blipFill>
+          <a:blip r:embed="rId3"/>
+          <a:stretch>
+            <a:fillRect/>
+          </a:stretch>
+        </p:blipFill>
+        <p:spPr>
+          <a:xfrm>
+            <a:off x="1442864" y="3433572"/>
+            <a:ext cx="2697480" cy="310896"/>
+          </a:xfrm>
+          <a:prstGeom prst="rect">
+            <a:avLst/>
+          </a:prstGeom>
+        </p:spPr>
+      </p:pic>
+      <p:sp>
+        <p:nvSpPr>
+          <p:cNvPr id="13" name="TextBox 12"/>
+          <p:cNvSpPr txBox="1"/>
+          <p:nvPr/>
+        </p:nvSpPr>
+        <p:spPr>
+          <a:xfrm>
+            <a:off x="4140344" y="3360420"/>
+            <a:ext cx="2526651" cy="457200"/>
+          </a:xfrm>
+          <a:prstGeom prst="rect">
+            <a:avLst/>
+          </a:prstGeom>
+          <a:noFill/>
+        </p:spPr>
+        <p:txBody>
+          <a:bodyPr wrap="none" lIns="45720" rIns="45720" tIns="18288" bIns="18288" anchor="ctr">
+            <a:noAutofit/>
+          </a:bodyPr>
+          <a:lstStyle/>
+          <a:p>
+            <a:pPr algn="l"/>
+            <a:r>
+              <a:rPr sz="2330" b="0" i="0">
+                <a:solidFill>
+                  <a:srgbClr val="1A1A1A"/>
+                </a:solidFill>
+                <a:latin typeface="Lexend"/>
+              </a:rPr>
+              <a:t>,   so it is equal.</a:t>
+            </a:r>
+          </a:p>
+        </p:txBody>
+      </p:sp>
+      <p:sp>
+        <p:nvSpPr>
+          <p:cNvPr id="14" name="TextBox 13"/>
+          <p:cNvSpPr txBox="1"/>
+          <p:nvPr/>
+        </p:nvSpPr>
+        <p:spPr>
+          <a:xfrm>
+            <a:off x="1388000" y="3863339"/>
+            <a:ext cx="9522679" cy="457200"/>
+          </a:xfrm>
+          <a:prstGeom prst="rect">
+            <a:avLst/>
+          </a:prstGeom>
+          <a:noFill/>
+        </p:spPr>
+        <p:txBody>
+          <a:bodyPr wrap="none" lIns="45720" rIns="45720" tIns="18288" bIns="18288" anchor="ctr">
+            <a:noAutofit/>
+          </a:bodyPr>
+          <a:lstStyle/>
+          <a:p>
+            <a:pPr algn="l"/>
+            <a:r>
+              <a:rPr sz="2330" b="0" i="0">
+                <a:solidFill>
+                  <a:srgbClr val="1A1A1A"/>
+                </a:solidFill>
+                <a:latin typeface="Lexend"/>
+              </a:rPr>
+              <a:t>The first number must be at least 1 and less than 10. 20 is not.</a:t>
+            </a:r>
+          </a:p>
+        </p:txBody>
+      </p:sp>
+      <p:pic>
+        <p:nvPicPr>
+          <p:cNvPr id="15" name="Picture 14" descr="5e939c5ec66d9141.png"/>
+          <p:cNvPicPr>
+            <a:picLocks noChangeAspect="1"/>
+          </p:cNvPicPr>
+          <p:nvPr/>
+        </p:nvPicPr>
+        <p:blipFill>
+          <a:blip r:embed="rId4"/>
+          <a:stretch>
+            <a:fillRect/>
+          </a:stretch>
+        </p:blipFill>
+        <p:spPr>
+          <a:xfrm>
+            <a:off x="1442864" y="4436364"/>
+            <a:ext cx="2514600" cy="316992"/>
+          </a:xfrm>
+          <a:prstGeom prst="rect">
+            <a:avLst/>
+          </a:prstGeom>
+        </p:spPr>
+      </p:pic>
+      <p:sp>
+        <p:nvSpPr>
+          <p:cNvPr id="16" name="TextBox 15"/>
+          <p:cNvSpPr txBox="1"/>
+          <p:nvPr/>
+        </p:nvSpPr>
+        <p:spPr>
+          <a:xfrm>
+            <a:off x="777240" y="4937760"/>
             <a:ext cx="10607040" cy="1072896"/>
           </a:xfrm>
           <a:prstGeom prst="rect">
@@ -13692,29 +14193,29 @@
           <a:p>
             <a:pPr algn="ctr"/>
             <a:r>
-              <a:rPr sz="3200" b="1" i="0">
+              <a:rPr sz="3040" b="1" i="0">
                 <a:solidFill>
                   <a:srgbClr val="9E1B32"/>
                 </a:solidFill>
-                <a:latin typeface="Century Schoolbook"/>
+                <a:latin typeface="Lexend"/>
               </a:rPr>
               <a:t>Answer:   Equal, yes. Scientific notation, no: 20 is not less than 10. 2 × 10</a:t>
             </a:r>
             <a:r>
-              <a:rPr sz="3200" b="1" i="0" baseline="30000">
+              <a:rPr sz="3040" b="1" i="0" baseline="30000">
                 <a:solidFill>
                   <a:srgbClr val="9E1B32"/>
                 </a:solidFill>
-                <a:latin typeface="Century Schoolbook"/>
+                <a:latin typeface="Lexend"/>
               </a:rPr>
               <a:t>6</a:t>
             </a:r>
             <a:r>
-              <a:rPr sz="3200" b="1" i="0">
+              <a:rPr sz="3040" b="1" i="0">
                 <a:solidFill>
                   <a:srgbClr val="9E1B32"/>
                 </a:solidFill>
-                <a:latin typeface="Century Schoolbook"/>
+                <a:latin typeface="Lexend"/>
               </a:rPr>
               <a:t>.</a:t>
             </a:r>
@@ -13763,11 +14264,11 @@
           <a:p>
             <a:pPr algn="l"/>
             <a:r>
-              <a:rPr sz="3600" b="1" i="0">
+              <a:rPr sz="3420" b="1" i="0">
                 <a:solidFill>
                   <a:srgbClr val="1A1A1A"/>
                 </a:solidFill>
-                <a:latin typeface="Century Schoolbook"/>
+                <a:latin typeface="Lexend"/>
               </a:rPr>
               <a:t>Independent Set</a:t>
             </a:r>
@@ -13903,11 +14404,11 @@
           <a:p>
             <a:pPr algn="l"/>
             <a:r>
-              <a:rPr sz="1100" b="0" i="1">
+              <a:rPr sz="1040" b="0" i="0">
                 <a:solidFill>
                   <a:srgbClr val="6B6B6B"/>
                 </a:solidFill>
-                <a:latin typeface="Century Schoolbook"/>
+                <a:latin typeface="Lexend"/>
               </a:rPr>
               <a:t>Grade 7 Accelerated · Unit 3 · Lesson 8 — Writing Large Numbers in Scientific Notation</a:t>
             </a:r>
@@ -13938,11 +14439,11 @@
           <a:p>
             <a:pPr algn="r"/>
             <a:r>
-              <a:rPr sz="1100" b="0" i="0">
+              <a:rPr sz="1040" b="0" i="0">
                 <a:solidFill>
                   <a:srgbClr val="6B6B6B"/>
                 </a:solidFill>
-                <a:latin typeface="Century Schoolbook"/>
+                <a:latin typeface="Lexend"/>
               </a:rPr>
               <a:t>33</a:t>
             </a:r>
@@ -13973,11 +14474,11 @@
           <a:p>
             <a:pPr algn="l"/>
             <a:r>
-              <a:rPr sz="2300" b="1" i="0">
+              <a:rPr sz="2180" b="1" i="0">
                 <a:solidFill>
                   <a:srgbClr val="0B5394"/>
                 </a:solidFill>
-                <a:latin typeface="Century Schoolbook"/>
+                <a:latin typeface="Lexend"/>
               </a:rPr>
               <a:t>1.</a:t>
             </a:r>
@@ -13993,7 +14494,7 @@
         <p:spPr>
           <a:xfrm>
             <a:off x="1554480" y="1495044"/>
-            <a:ext cx="5739460" cy="457200"/>
+            <a:ext cx="5666975" cy="457200"/>
           </a:xfrm>
           <a:prstGeom prst="rect">
             <a:avLst/>
@@ -14008,11 +14509,11 @@
           <a:p>
             <a:pPr algn="l"/>
             <a:r>
-              <a:rPr sz="2300" b="0" i="0">
+              <a:rPr sz="2180" b="0" i="0">
                 <a:solidFill>
                   <a:srgbClr val="1A1A1A"/>
                 </a:solidFill>
-                <a:latin typeface="Century Schoolbook"/>
+                <a:latin typeface="Lexend"/>
               </a:rPr>
               <a:t>Write  8,200,000  in scientific notation.</a:t>
             </a:r>
@@ -14043,11 +14544,11 @@
           <a:p>
             <a:pPr algn="l"/>
             <a:r>
-              <a:rPr sz="2300" b="1" i="0">
+              <a:rPr sz="2180" b="1" i="0">
                 <a:solidFill>
                   <a:srgbClr val="0B5394"/>
                 </a:solidFill>
-                <a:latin typeface="Century Schoolbook"/>
+                <a:latin typeface="Lexend"/>
               </a:rPr>
               <a:t>2.</a:t>
             </a:r>
@@ -14063,7 +14564,7 @@
         <p:spPr>
           <a:xfrm>
             <a:off x="1554480" y="2089403"/>
-            <a:ext cx="1184045" cy="457200"/>
+            <a:ext cx="1151295" cy="457200"/>
           </a:xfrm>
           <a:prstGeom prst="rect">
             <a:avLst/>
@@ -14078,11 +14579,11 @@
           <a:p>
             <a:pPr algn="l"/>
             <a:r>
-              <a:rPr sz="2300" b="0" i="0">
+              <a:rPr sz="2180" b="0" i="0">
                 <a:solidFill>
                   <a:srgbClr val="1A1A1A"/>
                 </a:solidFill>
-                <a:latin typeface="Century Schoolbook"/>
+                <a:latin typeface="Lexend"/>
               </a:rPr>
               <a:t>Write  </a:t>
             </a:r>
@@ -14091,7 +14592,7 @@
       </p:sp>
       <p:pic>
         <p:nvPicPr>
-          <p:cNvPr id="12" name="Picture 11" descr="484364d373954d6e.png"/>
+          <p:cNvPr id="12" name="Picture 11" descr="3e7ab53ed67d416b.png"/>
           <p:cNvPicPr>
             <a:picLocks noChangeAspect="1"/>
           </p:cNvPicPr>
@@ -14105,8 +14606,8 @@
         </p:blipFill>
         <p:spPr>
           <a:xfrm>
-            <a:off x="2601365" y="2176271"/>
-            <a:ext cx="1149096" cy="283464"/>
+            <a:off x="2568615" y="2182367"/>
+            <a:ext cx="1158240" cy="271272"/>
           </a:xfrm>
           <a:prstGeom prst="rect">
             <a:avLst/>
@@ -14121,8 +14622,8 @@
         </p:nvSpPr>
         <p:spPr>
           <a:xfrm>
-            <a:off x="3750461" y="2089403"/>
-            <a:ext cx="2885253" cy="457200"/>
+            <a:off x="3726855" y="2089403"/>
+            <a:ext cx="2828489" cy="457200"/>
           </a:xfrm>
           <a:prstGeom prst="rect">
             <a:avLst/>
@@ -14137,11 +14638,11 @@
           <a:p>
             <a:pPr algn="l"/>
             <a:r>
-              <a:rPr sz="2300" b="0" i="0">
+              <a:rPr sz="2180" b="0" i="0">
                 <a:solidFill>
                   <a:srgbClr val="1A1A1A"/>
                 </a:solidFill>
-                <a:latin typeface="Century Schoolbook"/>
+                <a:latin typeface="Lexend"/>
               </a:rPr>
               <a:t>  in standard form.</a:t>
             </a:r>
@@ -14172,11 +14673,11 @@
           <a:p>
             <a:pPr algn="l"/>
             <a:r>
-              <a:rPr sz="2300" b="1" i="0">
+              <a:rPr sz="2180" b="1" i="0">
                 <a:solidFill>
                   <a:srgbClr val="0B5394"/>
                 </a:solidFill>
-                <a:latin typeface="Century Schoolbook"/>
+                <a:latin typeface="Lexend"/>
               </a:rPr>
               <a:t>3.</a:t>
             </a:r>
@@ -14192,7 +14693,7 @@
         <p:spPr>
           <a:xfrm>
             <a:off x="1554480" y="2683763"/>
-            <a:ext cx="6083793" cy="457200"/>
+            <a:ext cx="5990195" cy="457200"/>
           </a:xfrm>
           <a:prstGeom prst="rect">
             <a:avLst/>
@@ -14207,11 +14708,11 @@
           <a:p>
             <a:pPr algn="l"/>
             <a:r>
-              <a:rPr sz="2300" b="0" i="0">
+              <a:rPr sz="2180" b="0" i="0">
                 <a:solidFill>
                   <a:srgbClr val="1A1A1A"/>
                 </a:solidFill>
-                <a:latin typeface="Century Schoolbook"/>
+                <a:latin typeface="Lexend"/>
               </a:rPr>
               <a:t>Write  915,000,000  in scientific notation.</a:t>
             </a:r>
@@ -14242,11 +14743,11 @@
           <a:p>
             <a:pPr algn="l"/>
             <a:r>
-              <a:rPr sz="2300" b="1" i="0">
+              <a:rPr sz="2180" b="1" i="0">
                 <a:solidFill>
                   <a:srgbClr val="0B5394"/>
                 </a:solidFill>
-                <a:latin typeface="Century Schoolbook"/>
+                <a:latin typeface="Lexend"/>
               </a:rPr>
               <a:t>4.</a:t>
             </a:r>
@@ -14262,7 +14763,7 @@
         <p:spPr>
           <a:xfrm>
             <a:off x="1554480" y="3278123"/>
-            <a:ext cx="2825147" cy="457200"/>
+            <a:ext cx="2766393" cy="457200"/>
           </a:xfrm>
           <a:prstGeom prst="rect">
             <a:avLst/>
@@ -14277,11 +14778,11 @@
           <a:p>
             <a:pPr algn="l"/>
             <a:r>
-              <a:rPr sz="2300" b="0" i="0">
+              <a:rPr sz="2180" b="0" i="0">
                 <a:solidFill>
                   <a:srgbClr val="1A1A1A"/>
                 </a:solidFill>
-                <a:latin typeface="Century Schoolbook"/>
+                <a:latin typeface="Lexend"/>
               </a:rPr>
               <a:t>Which is greater,  </a:t>
             </a:r>
@@ -14290,7 +14791,7 @@
       </p:sp>
       <p:pic>
         <p:nvPicPr>
-          <p:cNvPr id="18" name="Picture 17" descr="aa6198a3eb54a717.png"/>
+          <p:cNvPr id="18" name="Picture 17" descr="f3e3f368d404e0be.png"/>
           <p:cNvPicPr>
             <a:picLocks noChangeAspect="1"/>
           </p:cNvPicPr>
@@ -14304,8 +14805,8 @@
         </p:blipFill>
         <p:spPr>
           <a:xfrm>
-            <a:off x="4242467" y="3366515"/>
-            <a:ext cx="1155192" cy="280416"/>
+            <a:off x="4183713" y="3371087"/>
+            <a:ext cx="1155192" cy="271272"/>
           </a:xfrm>
           <a:prstGeom prst="rect">
             <a:avLst/>
@@ -14320,8 +14821,8 @@
         </p:nvSpPr>
         <p:spPr>
           <a:xfrm>
-            <a:off x="5397659" y="3278123"/>
-            <a:ext cx="846917" cy="457200"/>
+            <a:off x="5338905" y="3278123"/>
+            <a:ext cx="839266" cy="457200"/>
           </a:xfrm>
           <a:prstGeom prst="rect">
             <a:avLst/>
@@ -14336,11 +14837,11 @@
           <a:p>
             <a:pPr algn="l"/>
             <a:r>
-              <a:rPr sz="2300" b="0" i="0">
+              <a:rPr sz="2180" b="0" i="0">
                 <a:solidFill>
                   <a:srgbClr val="1A1A1A"/>
                 </a:solidFill>
-                <a:latin typeface="Century Schoolbook"/>
+                <a:latin typeface="Lexend"/>
               </a:rPr>
               <a:t>  or  </a:t>
             </a:r>
@@ -14349,7 +14850,7 @@
       </p:sp>
       <p:pic>
         <p:nvPicPr>
-          <p:cNvPr id="20" name="Picture 19" descr="36d95168835a2749.png"/>
+          <p:cNvPr id="20" name="Picture 19" descr="bee7f03ef7d07607.png"/>
           <p:cNvPicPr>
             <a:picLocks noChangeAspect="1"/>
           </p:cNvPicPr>
@@ -14363,8 +14864,8 @@
         </p:blipFill>
         <p:spPr>
           <a:xfrm>
-            <a:off x="6107417" y="3364991"/>
-            <a:ext cx="1155192" cy="283464"/>
+            <a:off x="6041011" y="3369563"/>
+            <a:ext cx="1133856" cy="274320"/>
           </a:xfrm>
           <a:prstGeom prst="rect">
             <a:avLst/>
@@ -14379,8 +14880,8 @@
         </p:nvSpPr>
         <p:spPr>
           <a:xfrm>
-            <a:off x="7262609" y="3278123"/>
-            <a:ext cx="433854" cy="457200"/>
+            <a:off x="7174867" y="3278123"/>
+            <a:ext cx="443010" cy="457200"/>
           </a:xfrm>
           <a:prstGeom prst="rect">
             <a:avLst/>
@@ -14395,11 +14896,11 @@
           <a:p>
             <a:pPr algn="l"/>
             <a:r>
-              <a:rPr sz="2300" b="0" i="0">
+              <a:rPr sz="2180" b="0" i="0">
                 <a:solidFill>
                   <a:srgbClr val="1A1A1A"/>
                 </a:solidFill>
-                <a:latin typeface="Century Schoolbook"/>
+                <a:latin typeface="Lexend"/>
               </a:rPr>
               <a:t> ?</a:t>
             </a:r>
@@ -14430,11 +14931,11 @@
           <a:p>
             <a:pPr algn="l"/>
             <a:r>
-              <a:rPr sz="2300" b="1" i="0">
+              <a:rPr sz="2180" b="1" i="0">
                 <a:solidFill>
                   <a:srgbClr val="0B5394"/>
                 </a:solidFill>
-                <a:latin typeface="Century Schoolbook"/>
+                <a:latin typeface="Lexend"/>
               </a:rPr>
               <a:t>5.</a:t>
             </a:r>
@@ -14450,7 +14951,7 @@
         <p:spPr>
           <a:xfrm>
             <a:off x="1554480" y="3872483"/>
-            <a:ext cx="4056605" cy="457200"/>
+            <a:ext cx="3994827" cy="457200"/>
           </a:xfrm>
           <a:prstGeom prst="rect">
             <a:avLst/>
@@ -14465,11 +14966,11 @@
           <a:p>
             <a:pPr algn="l"/>
             <a:r>
-              <a:rPr sz="2300" b="0" i="0">
+              <a:rPr sz="2180" b="0" i="0">
                 <a:solidFill>
                   <a:srgbClr val="1A1A1A"/>
                 </a:solidFill>
-                <a:latin typeface="Century Schoolbook"/>
+                <a:latin typeface="Lexend"/>
               </a:rPr>
               <a:t>How many times larger is  </a:t>
             </a:r>
@@ -14478,7 +14979,7 @@
       </p:sp>
       <p:pic>
         <p:nvPicPr>
-          <p:cNvPr id="24" name="Picture 23" descr="7587dd48b320b23b.png"/>
+          <p:cNvPr id="24" name="Picture 23" descr="17885e04efb3044f.png"/>
           <p:cNvPicPr>
             <a:picLocks noChangeAspect="1"/>
           </p:cNvPicPr>
@@ -14492,8 +14993,8 @@
         </p:blipFill>
         <p:spPr>
           <a:xfrm>
-            <a:off x="5473925" y="3960875"/>
-            <a:ext cx="899160" cy="280416"/>
+            <a:off x="5412147" y="3965447"/>
+            <a:ext cx="893064" cy="271272"/>
           </a:xfrm>
           <a:prstGeom prst="rect">
             <a:avLst/>
@@ -14508,8 +15009,8 @@
         </p:nvSpPr>
         <p:spPr>
           <a:xfrm>
-            <a:off x="6373085" y="3872483"/>
-            <a:ext cx="1224116" cy="457200"/>
+            <a:off x="6305211" y="3872483"/>
+            <a:ext cx="1188962" cy="457200"/>
           </a:xfrm>
           <a:prstGeom prst="rect">
             <a:avLst/>
@@ -14524,11 +15025,11 @@
           <a:p>
             <a:pPr algn="l"/>
             <a:r>
-              <a:rPr sz="2300" b="0" i="0">
+              <a:rPr sz="2180" b="0" i="0">
                 <a:solidFill>
                   <a:srgbClr val="1A1A1A"/>
                 </a:solidFill>
-                <a:latin typeface="Century Schoolbook"/>
+                <a:latin typeface="Lexend"/>
               </a:rPr>
               <a:t>  than  </a:t>
             </a:r>
@@ -14537,7 +15038,7 @@
       </p:sp>
       <p:pic>
         <p:nvPicPr>
-          <p:cNvPr id="26" name="Picture 25" descr="745c0d39ba628067.png"/>
+          <p:cNvPr id="26" name="Picture 25" descr="5fbd47d0e64f50d9.png"/>
           <p:cNvPicPr>
             <a:picLocks noChangeAspect="1"/>
           </p:cNvPicPr>
@@ -14551,8 +15052,8 @@
         </p:blipFill>
         <p:spPr>
           <a:xfrm>
-            <a:off x="7460041" y="3957828"/>
-            <a:ext cx="902208" cy="286512"/>
+            <a:off x="7357013" y="3965447"/>
+            <a:ext cx="902208" cy="271272"/>
           </a:xfrm>
           <a:prstGeom prst="rect">
             <a:avLst/>
@@ -14567,8 +15068,8 @@
         </p:nvSpPr>
         <p:spPr>
           <a:xfrm>
-            <a:off x="8362249" y="3872483"/>
-            <a:ext cx="433854" cy="457200"/>
+            <a:off x="8259221" y="3872483"/>
+            <a:ext cx="443010" cy="457200"/>
           </a:xfrm>
           <a:prstGeom prst="rect">
             <a:avLst/>
@@ -14583,11 +15084,11 @@
           <a:p>
             <a:pPr algn="l"/>
             <a:r>
-              <a:rPr sz="2300" b="0" i="0">
+              <a:rPr sz="2180" b="0" i="0">
                 <a:solidFill>
                   <a:srgbClr val="1A1A1A"/>
                 </a:solidFill>
-                <a:latin typeface="Century Schoolbook"/>
+                <a:latin typeface="Lexend"/>
               </a:rPr>
               <a:t> ?</a:t>
             </a:r>
@@ -14618,11 +15119,11 @@
           <a:p>
             <a:pPr algn="l"/>
             <a:r>
-              <a:rPr sz="2300" b="1" i="0">
+              <a:rPr sz="2180" b="1" i="0">
                 <a:solidFill>
                   <a:srgbClr val="0B5394"/>
                 </a:solidFill>
-                <a:latin typeface="Century Schoolbook"/>
+                <a:latin typeface="Lexend"/>
               </a:rPr>
               <a:t>6.</a:t>
             </a:r>
@@ -14638,7 +15139,7 @@
         <p:spPr>
           <a:xfrm>
             <a:off x="1554480" y="4466844"/>
-            <a:ext cx="9898955" cy="457200"/>
+            <a:ext cx="9667903" cy="457200"/>
           </a:xfrm>
           <a:prstGeom prst="rect">
             <a:avLst/>
@@ -14653,11 +15154,11 @@
           <a:p>
             <a:pPr algn="l"/>
             <a:r>
-              <a:rPr sz="2300" b="0" i="0">
+              <a:rPr sz="2180" b="0" i="0">
                 <a:solidFill>
                   <a:srgbClr val="1A1A1A"/>
                 </a:solidFill>
-                <a:latin typeface="Century Schoolbook"/>
+                <a:latin typeface="Lexend"/>
               </a:rPr>
               <a:t>A computer displays a number as  2.6E7.  Write it in standard form.</a:t>
             </a:r>
@@ -14706,11 +15207,11 @@
           <a:p>
             <a:pPr algn="l"/>
             <a:r>
-              <a:rPr sz="3600" b="1" i="0">
+              <a:rPr sz="3420" b="1" i="0">
                 <a:solidFill>
                   <a:srgbClr val="1A1A1A"/>
                 </a:solidFill>
-                <a:latin typeface="Century Schoolbook"/>
+                <a:latin typeface="Lexend"/>
               </a:rPr>
               <a:t>IXL</a:t>
             </a:r>
@@ -14846,11 +15347,11 @@
           <a:p>
             <a:pPr algn="l"/>
             <a:r>
-              <a:rPr sz="1100" b="0" i="1">
+              <a:rPr sz="1040" b="0" i="0">
                 <a:solidFill>
                   <a:srgbClr val="6B6B6B"/>
                 </a:solidFill>
-                <a:latin typeface="Century Schoolbook"/>
+                <a:latin typeface="Lexend"/>
               </a:rPr>
               <a:t>Grade 7 Accelerated · Unit 3 · Lesson 8 — Writing Large Numbers in Scientific Notation</a:t>
             </a:r>
@@ -14881,11 +15382,11 @@
           <a:p>
             <a:pPr algn="r"/>
             <a:r>
-              <a:rPr sz="1100" b="0" i="0">
+              <a:rPr sz="1040" b="0" i="0">
                 <a:solidFill>
                   <a:srgbClr val="6B6B6B"/>
                 </a:solidFill>
-                <a:latin typeface="Century Schoolbook"/>
+                <a:latin typeface="Lexend"/>
               </a:rPr>
               <a:t>34</a:t>
             </a:r>
@@ -14916,11 +15417,11 @@
           <a:p>
             <a:pPr algn="l"/>
             <a:r>
-              <a:rPr sz="2100" b="1" i="0">
+              <a:rPr sz="1989" b="1" i="0">
                 <a:solidFill>
                   <a:srgbClr val="0B5394"/>
                 </a:solidFill>
-                <a:latin typeface="Century Schoolbook"/>
+                <a:latin typeface="Lexend"/>
               </a:rPr>
               <a:t>1.</a:t>
             </a:r>
@@ -14951,11 +15452,11 @@
           <a:p>
             <a:pPr algn="l"/>
             <a:r>
-              <a:rPr sz="2100" b="0" i="0">
+              <a:rPr sz="1989" b="0" i="0">
                 <a:solidFill>
                   <a:srgbClr val="1A1A1A"/>
                 </a:solidFill>
-                <a:latin typeface="Century Schoolbook"/>
+                <a:latin typeface="Lexend"/>
               </a:rPr>
               <a:t>Open IXL and start today's skills.</a:t>
             </a:r>
@@ -14986,11 +15487,11 @@
           <a:p>
             <a:pPr algn="l"/>
             <a:r>
-              <a:rPr sz="2100" b="1" i="0">
+              <a:rPr sz="1989" b="1" i="0">
                 <a:solidFill>
                   <a:srgbClr val="0B5394"/>
                 </a:solidFill>
-                <a:latin typeface="Century Schoolbook"/>
+                <a:latin typeface="Lexend"/>
               </a:rPr>
               <a:t>2.</a:t>
             </a:r>
@@ -15021,11 +15522,11 @@
           <a:p>
             <a:pPr algn="l"/>
             <a:r>
-              <a:rPr sz="2100" b="0" i="0">
+              <a:rPr sz="1989" b="0" i="0">
                 <a:solidFill>
                   <a:srgbClr val="1A1A1A"/>
                 </a:solidFill>
-                <a:latin typeface="Century Schoolbook"/>
+                <a:latin typeface="Lexend"/>
               </a:rPr>
               <a:t>Work on paper where the question needs work. The answer box does not show it.</a:t>
             </a:r>
@@ -15056,11 +15557,11 @@
           <a:p>
             <a:pPr algn="l"/>
             <a:r>
-              <a:rPr sz="2100" b="1" i="0">
+              <a:rPr sz="1989" b="1" i="0">
                 <a:solidFill>
                   <a:srgbClr val="0B5394"/>
                 </a:solidFill>
-                <a:latin typeface="Century Schoolbook"/>
+                <a:latin typeface="Lexend"/>
               </a:rPr>
               <a:t>3.</a:t>
             </a:r>
@@ -15091,11 +15592,11 @@
           <a:p>
             <a:pPr algn="l"/>
             <a:r>
-              <a:rPr sz="2100" b="0" i="0">
+              <a:rPr sz="1989" b="0" i="0">
                 <a:solidFill>
                   <a:srgbClr val="1A1A1A"/>
                 </a:solidFill>
-                <a:latin typeface="Century Schoolbook"/>
+                <a:latin typeface="Lexend"/>
               </a:rPr>
               <a:t>Every skill listed is required, to a SmartScore of 67. Due at the start of the next class.</a:t>
             </a:r>
@@ -15126,11 +15627,11 @@
           <a:p>
             <a:pPr algn="l"/>
             <a:r>
-              <a:rPr sz="2100" b="1" i="0">
+              <a:rPr sz="1989" b="1" i="0">
                 <a:solidFill>
                   <a:srgbClr val="1A1A1A"/>
                 </a:solidFill>
-                <a:latin typeface="Century Schoolbook"/>
+                <a:latin typeface="Lexend"/>
               </a:rPr>
               <a:t>Today's skills — all required</a:t>
             </a:r>
@@ -15161,11 +15662,11 @@
           <a:p>
             <a:pPr algn="l"/>
             <a:r>
-              <a:rPr sz="1900" b="0" i="0">
+              <a:rPr sz="1810" b="0" i="0">
                 <a:solidFill>
                   <a:srgbClr val="1A1A1A"/>
                 </a:solidFill>
-                <a:latin typeface="Century Schoolbook"/>
+                <a:latin typeface="Lexend"/>
               </a:rPr>
               <a:t>Convert between standard and scientific notation: large numbers — 2AL</a:t>
             </a:r>
@@ -15196,11 +15697,11 @@
           <a:p>
             <a:pPr algn="l"/>
             <a:r>
-              <a:rPr sz="1900" b="0" i="0">
+              <a:rPr sz="1810" b="0" i="0">
                 <a:solidFill>
                   <a:srgbClr val="1A1A1A"/>
                 </a:solidFill>
-                <a:latin typeface="Century Schoolbook"/>
+                <a:latin typeface="Lexend"/>
               </a:rPr>
               <a:t>Compare large numbers — WEZ</a:t>
             </a:r>
@@ -15231,11 +15732,11 @@
           <a:p>
             <a:pPr algn="l"/>
             <a:r>
-              <a:rPr sz="1900" b="0" i="0">
+              <a:rPr sz="1810" b="0" i="0">
                 <a:solidFill>
                   <a:srgbClr val="1A1A1A"/>
                 </a:solidFill>
-                <a:latin typeface="Century Schoolbook"/>
+                <a:latin typeface="Lexend"/>
               </a:rPr>
               <a:t>Powers of ten — LJQ</a:t>
             </a:r>
@@ -15284,11 +15785,11 @@
           <a:p>
             <a:pPr algn="l"/>
             <a:r>
-              <a:rPr sz="3600" b="1" i="0">
+              <a:rPr sz="3420" b="1" i="0">
                 <a:solidFill>
                   <a:srgbClr val="1A1A1A"/>
                 </a:solidFill>
-                <a:latin typeface="Century Schoolbook"/>
+                <a:latin typeface="Lexend"/>
               </a:rPr>
               <a:t>Notes</a:t>
             </a:r>
@@ -15424,11 +15925,11 @@
           <a:p>
             <a:pPr algn="l"/>
             <a:r>
-              <a:rPr sz="1100" b="0" i="1">
+              <a:rPr sz="1040" b="0" i="0">
                 <a:solidFill>
                   <a:srgbClr val="6B6B6B"/>
                 </a:solidFill>
-                <a:latin typeface="Century Schoolbook"/>
+                <a:latin typeface="Lexend"/>
               </a:rPr>
               <a:t>Grade 7 Accelerated · Unit 3 · Lesson 8 — Writing Large Numbers in Scientific Notation</a:t>
             </a:r>
@@ -15459,11 +15960,11 @@
           <a:p>
             <a:pPr algn="r"/>
             <a:r>
-              <a:rPr sz="1100" b="0" i="0">
+              <a:rPr sz="1040" b="0" i="0">
                 <a:solidFill>
                   <a:srgbClr val="6B6B6B"/>
                 </a:solidFill>
-                <a:latin typeface="Century Schoolbook"/>
+                <a:latin typeface="Lexend"/>
               </a:rPr>
               <a:t>4</a:t>
             </a:r>
@@ -15494,11 +15995,11 @@
           <a:p>
             <a:pPr algn="l"/>
             <a:r>
-              <a:rPr sz="2500" b="1" i="0">
+              <a:rPr sz="2380" b="1" i="0">
                 <a:solidFill>
                   <a:srgbClr val="1A1A1A"/>
                 </a:solidFill>
-                <a:latin typeface="Century Schoolbook"/>
+                <a:latin typeface="Lexend"/>
               </a:rPr>
               <a:t>I.  Powers of ten name the places</a:t>
             </a:r>
@@ -15574,20 +16075,20 @@
                     <a:p>
                       <a:pPr algn="ctr"/>
                       <a:r>
-                        <a:rPr sz="1800" b="1">
+                        <a:rPr sz="1710" b="1">
                           <a:solidFill>
                             <a:srgbClr val="1A1A1A"/>
                           </a:solidFill>
-                          <a:latin typeface="Century Schoolbook"/>
+                          <a:latin typeface="Lexend"/>
                         </a:rPr>
                         <a:t>10</a:t>
                       </a:r>
                       <a:r>
-                        <a:rPr sz="1800" b="1" baseline="30000">
+                        <a:rPr sz="1710" b="1" baseline="30000">
                           <a:solidFill>
                             <a:srgbClr val="1A1A1A"/>
                           </a:solidFill>
-                          <a:latin typeface="Century Schoolbook"/>
+                          <a:latin typeface="Lexend"/>
                         </a:rPr>
                         <a:t>1</a:t>
                       </a:r>
@@ -15630,20 +16131,20 @@
                     <a:p>
                       <a:pPr algn="ctr"/>
                       <a:r>
-                        <a:rPr sz="1800" b="1">
+                        <a:rPr sz="1710" b="1">
                           <a:solidFill>
                             <a:srgbClr val="1A1A1A"/>
                           </a:solidFill>
-                          <a:latin typeface="Century Schoolbook"/>
+                          <a:latin typeface="Lexend"/>
                         </a:rPr>
                         <a:t>10</a:t>
                       </a:r>
                       <a:r>
-                        <a:rPr sz="1800" b="1" baseline="30000">
+                        <a:rPr sz="1710" b="1" baseline="30000">
                           <a:solidFill>
                             <a:srgbClr val="1A1A1A"/>
                           </a:solidFill>
-                          <a:latin typeface="Century Schoolbook"/>
+                          <a:latin typeface="Lexend"/>
                         </a:rPr>
                         <a:t>2</a:t>
                       </a:r>
@@ -15686,20 +16187,20 @@
                     <a:p>
                       <a:pPr algn="ctr"/>
                       <a:r>
-                        <a:rPr sz="1800" b="1">
+                        <a:rPr sz="1710" b="1">
                           <a:solidFill>
                             <a:srgbClr val="1A1A1A"/>
                           </a:solidFill>
-                          <a:latin typeface="Century Schoolbook"/>
+                          <a:latin typeface="Lexend"/>
                         </a:rPr>
                         <a:t>10</a:t>
                       </a:r>
                       <a:r>
-                        <a:rPr sz="1800" b="1" baseline="30000">
+                        <a:rPr sz="1710" b="1" baseline="30000">
                           <a:solidFill>
                             <a:srgbClr val="1A1A1A"/>
                           </a:solidFill>
-                          <a:latin typeface="Century Schoolbook"/>
+                          <a:latin typeface="Lexend"/>
                         </a:rPr>
                         <a:t>3</a:t>
                       </a:r>
@@ -15742,20 +16243,20 @@
                     <a:p>
                       <a:pPr algn="ctr"/>
                       <a:r>
-                        <a:rPr sz="1800" b="1">
+                        <a:rPr sz="1710" b="1">
                           <a:solidFill>
                             <a:srgbClr val="1A1A1A"/>
                           </a:solidFill>
-                          <a:latin typeface="Century Schoolbook"/>
+                          <a:latin typeface="Lexend"/>
                         </a:rPr>
                         <a:t>10</a:t>
                       </a:r>
                       <a:r>
-                        <a:rPr sz="1800" b="1" baseline="30000">
+                        <a:rPr sz="1710" b="1" baseline="30000">
                           <a:solidFill>
                             <a:srgbClr val="1A1A1A"/>
                           </a:solidFill>
-                          <a:latin typeface="Century Schoolbook"/>
+                          <a:latin typeface="Lexend"/>
                         </a:rPr>
                         <a:t>4</a:t>
                       </a:r>
@@ -15798,20 +16299,20 @@
                     <a:p>
                       <a:pPr algn="ctr"/>
                       <a:r>
-                        <a:rPr sz="1800" b="1">
+                        <a:rPr sz="1710" b="1">
                           <a:solidFill>
                             <a:srgbClr val="1A1A1A"/>
                           </a:solidFill>
-                          <a:latin typeface="Century Schoolbook"/>
+                          <a:latin typeface="Lexend"/>
                         </a:rPr>
                         <a:t>10</a:t>
                       </a:r>
                       <a:r>
-                        <a:rPr sz="1800" b="1" baseline="30000">
+                        <a:rPr sz="1710" b="1" baseline="30000">
                           <a:solidFill>
                             <a:srgbClr val="1A1A1A"/>
                           </a:solidFill>
-                          <a:latin typeface="Century Schoolbook"/>
+                          <a:latin typeface="Lexend"/>
                         </a:rPr>
                         <a:t>5</a:t>
                       </a:r>
@@ -15854,20 +16355,20 @@
                     <a:p>
                       <a:pPr algn="ctr"/>
                       <a:r>
-                        <a:rPr sz="1800" b="1">
+                        <a:rPr sz="1710" b="1">
                           <a:solidFill>
                             <a:srgbClr val="1A1A1A"/>
                           </a:solidFill>
-                          <a:latin typeface="Century Schoolbook"/>
+                          <a:latin typeface="Lexend"/>
                         </a:rPr>
                         <a:t>10</a:t>
                       </a:r>
                       <a:r>
-                        <a:rPr sz="1800" b="1" baseline="30000">
+                        <a:rPr sz="1710" b="1" baseline="30000">
                           <a:solidFill>
                             <a:srgbClr val="1A1A1A"/>
                           </a:solidFill>
-                          <a:latin typeface="Century Schoolbook"/>
+                          <a:latin typeface="Lexend"/>
                         </a:rPr>
                         <a:t>6</a:t>
                       </a:r>
@@ -15912,11 +16413,11 @@
                     <a:p>
                       <a:pPr algn="ctr"/>
                       <a:r>
-                        <a:rPr sz="1800" b="0">
+                        <a:rPr sz="1710" b="0">
                           <a:solidFill>
                             <a:srgbClr val="1A1A1A"/>
                           </a:solidFill>
-                          <a:latin typeface="Century Schoolbook"/>
+                          <a:latin typeface="Lexend"/>
                         </a:rPr>
                         <a:t>10</a:t>
                       </a:r>
@@ -15959,11 +16460,11 @@
                     <a:p>
                       <a:pPr algn="ctr"/>
                       <a:r>
-                        <a:rPr sz="1800" b="0">
+                        <a:rPr sz="1710" b="0">
                           <a:solidFill>
                             <a:srgbClr val="1A1A1A"/>
                           </a:solidFill>
-                          <a:latin typeface="Century Schoolbook"/>
+                          <a:latin typeface="Lexend"/>
                         </a:rPr>
                         <a:t>100</a:t>
                       </a:r>
@@ -16006,11 +16507,11 @@
                     <a:p>
                       <a:pPr algn="ctr"/>
                       <a:r>
-                        <a:rPr sz="1800" b="0">
+                        <a:rPr sz="1710" b="0">
                           <a:solidFill>
                             <a:srgbClr val="1A1A1A"/>
                           </a:solidFill>
-                          <a:latin typeface="Century Schoolbook"/>
+                          <a:latin typeface="Lexend"/>
                         </a:rPr>
                         <a:t>1,000</a:t>
                       </a:r>
@@ -16053,11 +16554,11 @@
                     <a:p>
                       <a:pPr algn="ctr"/>
                       <a:r>
-                        <a:rPr sz="1800" b="0">
+                        <a:rPr sz="1710" b="0">
                           <a:solidFill>
                             <a:srgbClr val="1A1A1A"/>
                           </a:solidFill>
-                          <a:latin typeface="Century Schoolbook"/>
+                          <a:latin typeface="Lexend"/>
                         </a:rPr>
                         <a:t>10,000</a:t>
                       </a:r>
@@ -16100,11 +16601,11 @@
                     <a:p>
                       <a:pPr algn="ctr"/>
                       <a:r>
-                        <a:rPr sz="1800" b="0">
+                        <a:rPr sz="1710" b="0">
                           <a:solidFill>
                             <a:srgbClr val="1A1A1A"/>
                           </a:solidFill>
-                          <a:latin typeface="Century Schoolbook"/>
+                          <a:latin typeface="Lexend"/>
                         </a:rPr>
                         <a:t>100,000</a:t>
                       </a:r>
@@ -16147,11 +16648,11 @@
                     <a:p>
                       <a:pPr algn="ctr"/>
                       <a:r>
-                        <a:rPr sz="1800" b="0">
+                        <a:rPr sz="1710" b="0">
                           <a:solidFill>
                             <a:srgbClr val="1A1A1A"/>
                           </a:solidFill>
-                          <a:latin typeface="Century Schoolbook"/>
+                          <a:latin typeface="Lexend"/>
                         </a:rPr>
                         <a:t>1,000,000</a:t>
                       </a:r>
@@ -16216,11 +16717,11 @@
           <a:p>
             <a:pPr algn="l"/>
             <a:r>
-              <a:rPr sz="2300" b="1" i="0">
+              <a:rPr sz="2180" b="1" i="0">
                 <a:solidFill>
                   <a:srgbClr val="1A1A1A"/>
                 </a:solidFill>
-                <a:latin typeface="Century Schoolbook"/>
+                <a:latin typeface="Lexend"/>
               </a:rPr>
               <a:t>The exponent counts the zeros — and names the place of the 1.</a:t>
             </a:r>
@@ -16269,11 +16770,11 @@
           <a:p>
             <a:pPr algn="l"/>
             <a:r>
-              <a:rPr sz="3600" b="1" i="0">
+              <a:rPr sz="3420" b="1" i="0">
                 <a:solidFill>
                   <a:srgbClr val="1A1A1A"/>
                 </a:solidFill>
-                <a:latin typeface="Century Schoolbook"/>
+                <a:latin typeface="Lexend"/>
               </a:rPr>
               <a:t>Notes</a:t>
             </a:r>
@@ -16409,11 +16910,11 @@
           <a:p>
             <a:pPr algn="l"/>
             <a:r>
-              <a:rPr sz="1100" b="0" i="1">
+              <a:rPr sz="1040" b="0" i="0">
                 <a:solidFill>
                   <a:srgbClr val="6B6B6B"/>
                 </a:solidFill>
-                <a:latin typeface="Century Schoolbook"/>
+                <a:latin typeface="Lexend"/>
               </a:rPr>
               <a:t>Grade 7 Accelerated · Unit 3 · Lesson 8 — Writing Large Numbers in Scientific Notation</a:t>
             </a:r>
@@ -16444,11 +16945,11 @@
           <a:p>
             <a:pPr algn="r"/>
             <a:r>
-              <a:rPr sz="1100" b="0" i="0">
+              <a:rPr sz="1040" b="0" i="0">
                 <a:solidFill>
                   <a:srgbClr val="6B6B6B"/>
                 </a:solidFill>
-                <a:latin typeface="Century Schoolbook"/>
+                <a:latin typeface="Lexend"/>
               </a:rPr>
               <a:t>5</a:t>
             </a:r>
@@ -16479,11 +16980,11 @@
           <a:p>
             <a:pPr algn="l"/>
             <a:r>
-              <a:rPr sz="2500" b="1" i="0">
+              <a:rPr sz="2380" b="1" i="0">
                 <a:solidFill>
                   <a:srgbClr val="1A1A1A"/>
                 </a:solidFill>
-                <a:latin typeface="Century Schoolbook"/>
+                <a:latin typeface="Lexend"/>
               </a:rPr>
               <a:t>II.  Scientific notation</a:t>
             </a:r>
@@ -16527,7 +17028,7 @@
       </p:cxnSp>
       <p:pic>
         <p:nvPicPr>
-          <p:cNvPr id="10" name="Picture 9" descr="ca362daa5aca8277.png"/>
+          <p:cNvPr id="10" name="Picture 9" descr="c5d2b93ef624f7b2.png"/>
           <p:cNvPicPr>
             <a:picLocks noChangeAspect="1"/>
           </p:cNvPicPr>
@@ -16541,8 +17042,8 @@
         </p:blipFill>
         <p:spPr>
           <a:xfrm>
-            <a:off x="4048840" y="2055876"/>
-            <a:ext cx="1124712" cy="286512"/>
+            <a:off x="4083252" y="2054352"/>
+            <a:ext cx="1133856" cy="289560"/>
           </a:xfrm>
           <a:prstGeom prst="rect">
             <a:avLst/>
@@ -16557,8 +17058,8 @@
         </p:nvSpPr>
         <p:spPr>
           <a:xfrm>
-            <a:off x="5173552" y="1970532"/>
-            <a:ext cx="1524855" cy="457200"/>
+            <a:off x="5217108" y="1970532"/>
+            <a:ext cx="1452983" cy="457200"/>
           </a:xfrm>
           <a:prstGeom prst="rect">
             <a:avLst/>
@@ -16573,11 +17074,11 @@
           <a:p>
             <a:pPr algn="l"/>
             <a:r>
-              <a:rPr sz="2600" b="0" i="0">
+              <a:rPr sz="2470" b="0" i="0">
                 <a:solidFill>
                   <a:srgbClr val="1A1A1A"/>
                 </a:solidFill>
-                <a:latin typeface="Century Schoolbook"/>
+                <a:latin typeface="Lexend"/>
               </a:rPr>
               <a:t>   with   </a:t>
             </a:r>
@@ -16586,7 +17087,7 @@
       </p:sp>
       <p:pic>
         <p:nvPicPr>
-          <p:cNvPr id="12" name="Picture 11" descr="24588923a2e4111e.png"/>
+          <p:cNvPr id="12" name="Picture 11" descr="f3e5877ddc95e30a.png"/>
           <p:cNvPicPr>
             <a:picLocks noChangeAspect="1"/>
           </p:cNvPicPr>
@@ -16600,8 +17101,8 @@
         </p:blipFill>
         <p:spPr>
           <a:xfrm>
-            <a:off x="6561247" y="2040636"/>
-            <a:ext cx="1551432" cy="316992"/>
+            <a:off x="6532931" y="2060448"/>
+            <a:ext cx="1545336" cy="277368"/>
           </a:xfrm>
           <a:prstGeom prst="rect">
             <a:avLst/>
@@ -16610,7 +17111,7 @@
       </p:pic>
       <p:pic>
         <p:nvPicPr>
-          <p:cNvPr id="13" name="Picture 12" descr="8e6cc14ac5e46148.png"/>
+          <p:cNvPr id="13" name="Picture 12" descr="e18c35a42d2be4c5.png"/>
           <p:cNvPicPr>
             <a:picLocks noChangeAspect="1"/>
           </p:cNvPicPr>
@@ -16624,8 +17125,8 @@
         </p:blipFill>
         <p:spPr>
           <a:xfrm>
-            <a:off x="2168388" y="2683764"/>
-            <a:ext cx="3136392" cy="402336"/>
+            <a:off x="2041384" y="2679192"/>
+            <a:ext cx="3282696" cy="411480"/>
           </a:xfrm>
           <a:prstGeom prst="rect">
             <a:avLst/>
@@ -16640,8 +17141,8 @@
         </p:nvSpPr>
         <p:spPr>
           <a:xfrm>
-            <a:off x="5304780" y="2656332"/>
-            <a:ext cx="1183151" cy="457200"/>
+            <a:off x="5324080" y="2656332"/>
+            <a:ext cx="1141503" cy="457200"/>
           </a:xfrm>
           <a:prstGeom prst="rect">
             <a:avLst/>
@@ -16656,11 +17157,11 @@
           <a:p>
             <a:pPr algn="l"/>
             <a:r>
-              <a:rPr sz="2600" b="0" i="0">
+              <a:rPr sz="2470" b="0" i="0">
                 <a:solidFill>
                   <a:srgbClr val="1A1A1A"/>
                 </a:solidFill>
-                <a:latin typeface="Century Schoolbook"/>
+                <a:latin typeface="Lexend"/>
               </a:rPr>
               <a:t>          </a:t>
             </a:r>
@@ -16669,7 +17170,7 @@
       </p:sp>
       <p:pic>
         <p:nvPicPr>
-          <p:cNvPr id="15" name="Picture 14" descr="067fcc93f2b9d5f4.png"/>
+          <p:cNvPr id="15" name="Picture 14" descr="fa83316ec23a8fb9.png"/>
           <p:cNvPicPr>
             <a:picLocks noChangeAspect="1"/>
           </p:cNvPicPr>
@@ -16683,8 +17184,8 @@
         </p:blipFill>
         <p:spPr>
           <a:xfrm>
-            <a:off x="6350771" y="2689860"/>
-            <a:ext cx="3642360" cy="390144"/>
+            <a:off x="6328423" y="2683764"/>
+            <a:ext cx="3791712" cy="402336"/>
           </a:xfrm>
           <a:prstGeom prst="rect">
             <a:avLst/>
@@ -16715,11 +17216,11 @@
           <a:p>
             <a:pPr algn="l"/>
             <a:r>
-              <a:rPr sz="2300" b="1" i="0">
+              <a:rPr sz="2180" b="1" i="0">
                 <a:solidFill>
                   <a:srgbClr val="1A1A1A"/>
                 </a:solidFill>
-                <a:latin typeface="Century Schoolbook"/>
+                <a:latin typeface="Lexend"/>
               </a:rPr>
               <a:t>The coefficient is at least 1 and less than 10: one nonzero digit before the decimal point.</a:t>
             </a:r>
@@ -16750,29 +17251,47 @@
           <a:p>
             <a:pPr algn="l"/>
             <a:r>
-              <a:rPr sz="2300" b="0" i="0">
+              <a:rPr sz="2180" b="0" i="0">
                 <a:solidFill>
                   <a:srgbClr val="1A1A1A"/>
                 </a:solidFill>
-                <a:latin typeface="Century Schoolbook"/>
-              </a:rPr>
-              <a:t>The exponent is how many places the decimal point moves: 26,000,000. → 2.6, seven places, so 10</a:t>
-            </a:r>
-            <a:r>
-              <a:rPr sz="2300" b="0" i="0" baseline="30000">
+                <a:latin typeface="Lexend"/>
+              </a:rPr>
+              <a:t>The exponent is how many places the decimal point moves: 26,000,000. </a:t>
+            </a:r>
+            <a:r>
+              <a:rPr sz="2180" b="0" i="0">
                 <a:solidFill>
                   <a:srgbClr val="1A1A1A"/>
                 </a:solidFill>
-                <a:latin typeface="Century Schoolbook"/>
+                <a:latin typeface="DejaVu Sans"/>
+              </a:rPr>
+              <a:t>→</a:t>
+            </a:r>
+            <a:r>
+              <a:rPr sz="2180" b="0" i="0">
+                <a:solidFill>
+                  <a:srgbClr val="1A1A1A"/>
+                </a:solidFill>
+                <a:latin typeface="Lexend"/>
+              </a:rPr>
+              <a:t> 2.6, seven places, so 10</a:t>
+            </a:r>
+            <a:r>
+              <a:rPr sz="2180" b="0" i="0" baseline="30000">
+                <a:solidFill>
+                  <a:srgbClr val="1A1A1A"/>
+                </a:solidFill>
+                <a:latin typeface="Lexend"/>
               </a:rPr>
               <a:t>7</a:t>
             </a:r>
             <a:r>
-              <a:rPr sz="2300" b="0" i="0">
+              <a:rPr sz="2180" b="0" i="0">
                 <a:solidFill>
                   <a:srgbClr val="1A1A1A"/>
                 </a:solidFill>
-                <a:latin typeface="Century Schoolbook"/>
+                <a:latin typeface="Lexend"/>
               </a:rPr>
               <a:t>.</a:t>
             </a:r>
@@ -16821,11 +17340,11 @@
           <a:p>
             <a:pPr algn="l"/>
             <a:r>
-              <a:rPr sz="3600" b="1" i="0">
+              <a:rPr sz="3420" b="1" i="0">
                 <a:solidFill>
                   <a:srgbClr val="1A1A1A"/>
                 </a:solidFill>
-                <a:latin typeface="Century Schoolbook"/>
+                <a:latin typeface="Lexend"/>
               </a:rPr>
               <a:t>Notes</a:t>
             </a:r>
@@ -16961,11 +17480,11 @@
           <a:p>
             <a:pPr algn="l"/>
             <a:r>
-              <a:rPr sz="1100" b="0" i="1">
+              <a:rPr sz="1040" b="0" i="0">
                 <a:solidFill>
                   <a:srgbClr val="6B6B6B"/>
                 </a:solidFill>
-                <a:latin typeface="Century Schoolbook"/>
+                <a:latin typeface="Lexend"/>
               </a:rPr>
               <a:t>Grade 7 Accelerated · Unit 3 · Lesson 8 — Writing Large Numbers in Scientific Notation</a:t>
             </a:r>
@@ -16996,11 +17515,11 @@
           <a:p>
             <a:pPr algn="r"/>
             <a:r>
-              <a:rPr sz="1100" b="0" i="0">
+              <a:rPr sz="1040" b="0" i="0">
                 <a:solidFill>
                   <a:srgbClr val="6B6B6B"/>
                 </a:solidFill>
-                <a:latin typeface="Century Schoolbook"/>
+                <a:latin typeface="Lexend"/>
               </a:rPr>
               <a:t>6</a:t>
             </a:r>
@@ -17031,11 +17550,11 @@
           <a:p>
             <a:pPr algn="l"/>
             <a:r>
-              <a:rPr sz="2500" b="1" i="0">
+              <a:rPr sz="2380" b="1" i="0">
                 <a:solidFill>
                   <a:srgbClr val="1A1A1A"/>
                 </a:solidFill>
-                <a:latin typeface="Century Schoolbook"/>
+                <a:latin typeface="Lexend"/>
               </a:rPr>
               <a:t>III.  How many times larger?</a:t>
             </a:r>
@@ -17079,7 +17598,7 @@
       </p:cxnSp>
       <p:pic>
         <p:nvPicPr>
-          <p:cNvPr id="10" name="Picture 9" descr="18462689543fb1e1.png"/>
+          <p:cNvPr id="10" name="Picture 9" descr="02171bb0cafdb80b.png"/>
           <p:cNvPicPr>
             <a:picLocks noChangeAspect="1"/>
           </p:cNvPicPr>
@@ -17093,8 +17612,8 @@
         </p:blipFill>
         <p:spPr>
           <a:xfrm>
-            <a:off x="2767320" y="2001012"/>
-            <a:ext cx="2103120" cy="810768"/>
+            <a:off x="2806432" y="1994916"/>
+            <a:ext cx="2069591" cy="792480"/>
           </a:xfrm>
           <a:prstGeom prst="rect">
             <a:avLst/>
@@ -17109,8 +17628,8 @@
         </p:nvSpPr>
         <p:spPr>
           <a:xfrm>
-            <a:off x="4870440" y="2177796"/>
-            <a:ext cx="1183151" cy="457200"/>
+            <a:off x="4876024" y="2162556"/>
+            <a:ext cx="1141503" cy="457200"/>
           </a:xfrm>
           <a:prstGeom prst="rect">
             <a:avLst/>
@@ -17125,11 +17644,11 @@
           <a:p>
             <a:pPr algn="l"/>
             <a:r>
-              <a:rPr sz="2600" b="0" i="0">
+              <a:rPr sz="2470" b="0" i="0">
                 <a:solidFill>
                   <a:srgbClr val="1A1A1A"/>
                 </a:solidFill>
-                <a:latin typeface="Century Schoolbook"/>
+                <a:latin typeface="Lexend"/>
               </a:rPr>
               <a:t>          </a:t>
             </a:r>
@@ -17138,7 +17657,7 @@
       </p:sp>
       <p:pic>
         <p:nvPicPr>
-          <p:cNvPr id="12" name="Picture 11" descr="23b76398c3e7acdd.png"/>
+          <p:cNvPr id="12" name="Picture 11" descr="4ecd045e0e8155a0.png"/>
           <p:cNvPicPr>
             <a:picLocks noChangeAspect="1"/>
           </p:cNvPicPr>
@@ -17152,8 +17671,8 @@
         </p:blipFill>
         <p:spPr>
           <a:xfrm>
-            <a:off x="5916431" y="1993392"/>
-            <a:ext cx="3477768" cy="826008"/>
+            <a:off x="5880367" y="1993392"/>
+            <a:ext cx="3474720" cy="795528"/>
           </a:xfrm>
           <a:prstGeom prst="rect">
             <a:avLst/>
@@ -17162,7 +17681,7 @@
       </p:pic>
       <p:pic>
         <p:nvPicPr>
-          <p:cNvPr id="13" name="Picture 12" descr="a006e1f5dbf8305d.png"/>
+          <p:cNvPr id="13" name="Picture 12" descr="d1693eaff94ed7e8.png"/>
           <p:cNvPicPr>
             <a:picLocks noChangeAspect="1"/>
           </p:cNvPicPr>
@@ -17176,8 +17695,8 @@
         </p:blipFill>
         <p:spPr>
           <a:xfrm>
-            <a:off x="4052316" y="3093720"/>
-            <a:ext cx="4056888" cy="826008"/>
+            <a:off x="4034027" y="3063240"/>
+            <a:ext cx="4093464" cy="798576"/>
           </a:xfrm>
           <a:prstGeom prst="rect">
             <a:avLst/>
@@ -17192,7 +17711,7 @@
         </p:nvSpPr>
         <p:spPr>
           <a:xfrm>
-            <a:off x="987552" y="4258056"/>
+            <a:off x="987552" y="4200144"/>
             <a:ext cx="10131551" cy="475488"/>
           </a:xfrm>
           <a:prstGeom prst="rect">
@@ -17208,11 +17727,11 @@
           <a:p>
             <a:pPr algn="l"/>
             <a:r>
-              <a:rPr sz="2300" b="1" i="0">
+              <a:rPr sz="2180" b="1" i="0">
                 <a:solidFill>
                   <a:srgbClr val="1A1A1A"/>
                 </a:solidFill>
-                <a:latin typeface="Century Schoolbook"/>
+                <a:latin typeface="Lexend"/>
               </a:rPr>
               <a:t>Divide the coefficients. Divide the powers of 10. Multiply the two results.</a:t>
             </a:r>
@@ -17227,7 +17746,7 @@
         </p:nvSpPr>
         <p:spPr>
           <a:xfrm>
-            <a:off x="987552" y="4989576"/>
+            <a:off x="987552" y="4931664"/>
             <a:ext cx="10131551" cy="475488"/>
           </a:xfrm>
           <a:prstGeom prst="rect">
@@ -17243,29 +17762,29 @@
           <a:p>
             <a:pPr algn="l"/>
             <a:r>
-              <a:rPr sz="2300" b="0" i="0">
+              <a:rPr sz="2180" b="0" i="0">
                 <a:solidFill>
                   <a:srgbClr val="1A1A1A"/>
                 </a:solidFill>
-                <a:latin typeface="Century Schoolbook"/>
+                <a:latin typeface="Lexend"/>
               </a:rPr>
               <a:t>On a screen, 8.4E6 means 8.4 × 10</a:t>
             </a:r>
             <a:r>
-              <a:rPr sz="2300" b="0" i="0" baseline="30000">
+              <a:rPr sz="2180" b="0" i="0" baseline="30000">
                 <a:solidFill>
                   <a:srgbClr val="1A1A1A"/>
                 </a:solidFill>
-                <a:latin typeface="Century Schoolbook"/>
+                <a:latin typeface="Lexend"/>
               </a:rPr>
               <a:t>6</a:t>
             </a:r>
             <a:r>
-              <a:rPr sz="2300" b="0" i="0">
+              <a:rPr sz="2180" b="0" i="0">
                 <a:solidFill>
                   <a:srgbClr val="1A1A1A"/>
                 </a:solidFill>
-                <a:latin typeface="Century Schoolbook"/>
+                <a:latin typeface="Lexend"/>
               </a:rPr>
               <a:t>.</a:t>
             </a:r>
@@ -17314,11 +17833,11 @@
           <a:p>
             <a:pPr algn="l"/>
             <a:r>
-              <a:rPr sz="3600" b="1" i="0">
+              <a:rPr sz="3420" b="1" i="0">
                 <a:solidFill>
                   <a:srgbClr val="1A1A1A"/>
                 </a:solidFill>
-                <a:latin typeface="Century Schoolbook"/>
+                <a:latin typeface="Lexend"/>
               </a:rPr>
               <a:t>Example 1</a:t>
             </a:r>
@@ -17454,11 +17973,11 @@
           <a:p>
             <a:pPr algn="l"/>
             <a:r>
-              <a:rPr sz="1100" b="0" i="1">
+              <a:rPr sz="1040" b="0" i="0">
                 <a:solidFill>
                   <a:srgbClr val="6B6B6B"/>
                 </a:solidFill>
-                <a:latin typeface="Century Schoolbook"/>
+                <a:latin typeface="Lexend"/>
               </a:rPr>
               <a:t>Grade 7 Accelerated · Unit 3 · Lesson 8 — Writing Large Numbers in Scientific Notation</a:t>
             </a:r>
@@ -17489,11 +18008,11 @@
           <a:p>
             <a:pPr algn="r"/>
             <a:r>
-              <a:rPr sz="1100" b="0" i="0">
+              <a:rPr sz="1040" b="0" i="0">
                 <a:solidFill>
                   <a:srgbClr val="6B6B6B"/>
                 </a:solidFill>
-                <a:latin typeface="Century Schoolbook"/>
+                <a:latin typeface="Lexend"/>
               </a:rPr>
               <a:t>7</a:t>
             </a:r>
@@ -17524,11 +18043,11 @@
           <a:p>
             <a:pPr algn="ctr"/>
             <a:r>
-              <a:rPr sz="2400" b="0" i="0">
+              <a:rPr sz="2280" b="0" i="0">
                 <a:solidFill>
                   <a:srgbClr val="1A1A1A"/>
                 </a:solidFill>
-                <a:latin typeface="Century Schoolbook"/>
+                <a:latin typeface="Lexend"/>
               </a:rPr>
               <a:t>In 2018, funding for education in Florida totaled 30,100,000,000 dollars.</a:t>
             </a:r>
@@ -17559,11 +18078,11 @@
           <a:p>
             <a:pPr algn="ctr"/>
             <a:r>
-              <a:rPr sz="2400" b="0" i="0">
+              <a:rPr sz="2280" b="0" i="0">
                 <a:solidFill>
                   <a:srgbClr val="1A1A1A"/>
                 </a:solidFill>
-                <a:latin typeface="Century Schoolbook"/>
+                <a:latin typeface="Lexend"/>
               </a:rPr>
               <a:t>Express this value in scientific notation.</a:t>
             </a:r>
@@ -17612,11 +18131,11 @@
           <a:p>
             <a:pPr algn="l"/>
             <a:r>
-              <a:rPr sz="3600" b="1" i="0">
+              <a:rPr sz="3420" b="1" i="0">
                 <a:solidFill>
                   <a:srgbClr val="1A1A1A"/>
                 </a:solidFill>
-                <a:latin typeface="Century Schoolbook"/>
+                <a:latin typeface="Lexend"/>
               </a:rPr>
               <a:t>Example 1</a:t>
             </a:r>
@@ -17752,11 +18271,11 @@
           <a:p>
             <a:pPr algn="l"/>
             <a:r>
-              <a:rPr sz="1100" b="0" i="1">
+              <a:rPr sz="1040" b="0" i="0">
                 <a:solidFill>
                   <a:srgbClr val="6B6B6B"/>
                 </a:solidFill>
-                <a:latin typeface="Century Schoolbook"/>
+                <a:latin typeface="Lexend"/>
               </a:rPr>
               <a:t>Grade 7 Accelerated · Unit 3 · Lesson 8 — Writing Large Numbers in Scientific Notation</a:t>
             </a:r>
@@ -17787,11 +18306,11 @@
           <a:p>
             <a:pPr algn="r"/>
             <a:r>
-              <a:rPr sz="1100" b="0" i="0">
+              <a:rPr sz="1040" b="0" i="0">
                 <a:solidFill>
                   <a:srgbClr val="6B6B6B"/>
                 </a:solidFill>
-                <a:latin typeface="Century Schoolbook"/>
+                <a:latin typeface="Lexend"/>
               </a:rPr>
               <a:t>8</a:t>
             </a:r>
@@ -17800,7 +18319,7 @@
       </p:sp>
       <p:pic>
         <p:nvPicPr>
-          <p:cNvPr id="8" name="Picture 7" descr="c33cd55185211120.png"/>
+          <p:cNvPr id="8" name="Picture 7" descr="602c4ddc3236a1a3.png"/>
           <p:cNvPicPr>
             <a:picLocks noChangeAspect="1"/>
           </p:cNvPicPr>
@@ -17815,7 +18334,7 @@
         <p:spPr>
           <a:xfrm>
             <a:off x="1828800" y="1920240"/>
-            <a:ext cx="4703064" cy="399288"/>
+            <a:ext cx="4937760" cy="408432"/>
           </a:xfrm>
           <a:prstGeom prst="rect">
             <a:avLst/>
@@ -17824,7 +18343,7 @@
       </p:pic>
       <p:pic>
         <p:nvPicPr>
-          <p:cNvPr id="9" name="Picture 8" descr="826a198efbf96eef.png"/>
+          <p:cNvPr id="9" name="Picture 8" descr="d1d3ba89cea32f1a.png"/>
           <p:cNvPicPr>
             <a:picLocks noChangeAspect="1"/>
           </p:cNvPicPr>
@@ -17838,8 +18357,8 @@
         </p:blipFill>
         <p:spPr>
           <a:xfrm>
-            <a:off x="1828800" y="2593848"/>
-            <a:ext cx="6544056" cy="335280"/>
+            <a:off x="1828800" y="2602992"/>
+            <a:ext cx="7050024" cy="347472"/>
           </a:xfrm>
           <a:prstGeom prst="rect">
             <a:avLst/>
@@ -17870,20 +18389,20 @@
           <a:p>
             <a:pPr algn="ctr"/>
             <a:r>
-              <a:rPr sz="3200" b="1" i="0">
+              <a:rPr sz="3040" b="1" i="0">
                 <a:solidFill>
                   <a:srgbClr val="9E1B32"/>
                 </a:solidFill>
-                <a:latin typeface="Century Schoolbook"/>
+                <a:latin typeface="Lexend"/>
               </a:rPr>
               <a:t>Answer:   3.01 × 10</a:t>
             </a:r>
             <a:r>
-              <a:rPr sz="3200" b="1" i="0" baseline="30000">
+              <a:rPr sz="3040" b="1" i="0" baseline="30000">
                 <a:solidFill>
                   <a:srgbClr val="9E1B32"/>
                 </a:solidFill>
-                <a:latin typeface="Century Schoolbook"/>
+                <a:latin typeface="Lexend"/>
               </a:rPr>
               <a:t>10</a:t>
             </a:r>
@@ -17932,11 +18451,11 @@
           <a:p>
             <a:pPr algn="l"/>
             <a:r>
-              <a:rPr sz="3600" b="1" i="0">
+              <a:rPr sz="3420" b="1" i="0">
                 <a:solidFill>
                   <a:srgbClr val="1A1A1A"/>
                 </a:solidFill>
-                <a:latin typeface="Century Schoolbook"/>
+                <a:latin typeface="Lexend"/>
               </a:rPr>
               <a:t>Your Turn</a:t>
             </a:r>
@@ -18072,11 +18591,11 @@
           <a:p>
             <a:pPr algn="l"/>
             <a:r>
-              <a:rPr sz="1100" b="0" i="1">
+              <a:rPr sz="1040" b="0" i="0">
                 <a:solidFill>
                   <a:srgbClr val="6B6B6B"/>
                 </a:solidFill>
-                <a:latin typeface="Century Schoolbook"/>
+                <a:latin typeface="Lexend"/>
               </a:rPr>
               <a:t>Grade 7 Accelerated · Unit 3 · Lesson 8 — Writing Large Numbers in Scientific Notation</a:t>
             </a:r>
@@ -18107,11 +18626,11 @@
           <a:p>
             <a:pPr algn="r"/>
             <a:r>
-              <a:rPr sz="1100" b="0" i="0">
+              <a:rPr sz="1040" b="0" i="0">
                 <a:solidFill>
                   <a:srgbClr val="6B6B6B"/>
                 </a:solidFill>
-                <a:latin typeface="Century Schoolbook"/>
+                <a:latin typeface="Lexend"/>
               </a:rPr>
               <a:t>9</a:t>
             </a:r>
@@ -18126,7 +18645,7 @@
         </p:nvSpPr>
         <p:spPr>
           <a:xfrm>
-            <a:off x="777240" y="2194560"/>
+            <a:off x="777240" y="1600200"/>
             <a:ext cx="10607040" cy="858740"/>
           </a:xfrm>
           <a:prstGeom prst="rect">
@@ -18142,11 +18661,11 @@
           <a:p>
             <a:pPr algn="ctr"/>
             <a:r>
-              <a:rPr sz="2400" b="0" i="0">
+              <a:rPr sz="2280" b="0" i="0">
                 <a:solidFill>
                   <a:srgbClr val="1A1A1A"/>
                 </a:solidFill>
-                <a:latin typeface="Century Schoolbook"/>
+                <a:latin typeface="Lexend"/>
               </a:rPr>
               <a:t>A painting sold for 110,500,000 dollars.  Write this value in scientific notation.</a:t>
             </a:r>

--- a/a7/packages/A7 Unit 3 - Exponents and Scientific Notation/Lessons/3.08/A7 3.08 Writing Large Numbers in Scientific Notation - Slides.pptx
+++ b/a7/packages/A7 Unit 3 - Exponents and Scientific Notation/Lessons/3.08/A7 3.08 Writing Large Numbers in Scientific Notation - Slides.pptx
@@ -17264,7 +17264,7 @@
                 <a:solidFill>
                   <a:srgbClr val="1A1A1A"/>
                 </a:solidFill>
-                <a:latin typeface="DejaVu Sans"/>
+                <a:latin typeface="Arial"/>
               </a:rPr>
               <a:t>→</a:t>
             </a:r>

--- a/a7/packages/A7 Unit 3 - Exponents and Scientific Notation/Lessons/3.08/A7 3.08 Writing Large Numbers in Scientific Notation - Slides.pptx
+++ b/a7/packages/A7 Unit 3 - Exponents and Scientific Notation/Lessons/3.08/A7 3.08 Writing Large Numbers in Scientific Notation - Slides.pptx
@@ -17257,25 +17257,7 @@
                 </a:solidFill>
                 <a:latin typeface="Lexend"/>
               </a:rPr>
-              <a:t>The exponent is how many places the decimal point moves: 26,000,000. </a:t>
-            </a:r>
-            <a:r>
-              <a:rPr sz="2180" b="0" i="0">
-                <a:solidFill>
-                  <a:srgbClr val="1A1A1A"/>
-                </a:solidFill>
-                <a:latin typeface="Arial"/>
-              </a:rPr>
-              <a:t>→</a:t>
-            </a:r>
-            <a:r>
-              <a:rPr sz="2180" b="0" i="0">
-                <a:solidFill>
-                  <a:srgbClr val="1A1A1A"/>
-                </a:solidFill>
-                <a:latin typeface="Lexend"/>
-              </a:rPr>
-              <a:t> 2.6, seven places, so 10</a:t>
+              <a:t>The exponent is how many places the decimal point moves: from 26,000,000. to 2.6 is seven places, so 10</a:t>
             </a:r>
             <a:r>
               <a:rPr sz="2180" b="0" i="0" baseline="30000">

--- a/a7/packages/A7 Unit 3 - Exponents and Scientific Notation/Lessons/3.08/A7 3.08 Writing Large Numbers in Scientific Notation - Slides.pptx
+++ b/a7/packages/A7 Unit 3 - Exponents and Scientific Notation/Lessons/3.08/A7 3.08 Writing Large Numbers in Scientific Notation - Slides.pptx
@@ -11208,7 +11208,7 @@
         </p:nvSpPr>
         <p:spPr>
           <a:xfrm>
-            <a:off x="1736158" y="2171700"/>
+            <a:off x="1765114" y="2171700"/>
             <a:ext cx="4488298" cy="457200"/>
           </a:xfrm>
           <a:prstGeom prst="rect">
@@ -11237,7 +11237,7 @@
       </p:sp>
       <p:pic>
         <p:nvPicPr>
-          <p:cNvPr id="9" name="Picture 8" descr="a21c12e381007adf.png"/>
+          <p:cNvPr id="9" name="Picture 8" descr="ff1a9295d4f9cbc3.png"/>
           <p:cNvPicPr>
             <a:picLocks noChangeAspect="1"/>
           </p:cNvPicPr>
@@ -11251,8 +11251,8 @@
         </p:blipFill>
         <p:spPr>
           <a:xfrm>
-            <a:off x="6087297" y="2231136"/>
-            <a:ext cx="1432560" cy="338328"/>
+            <a:off x="6116253" y="2231136"/>
+            <a:ext cx="1411224" cy="338328"/>
           </a:xfrm>
           <a:prstGeom prst="rect">
             <a:avLst/>
@@ -11267,7 +11267,7 @@
         </p:nvSpPr>
         <p:spPr>
           <a:xfrm>
-            <a:off x="7519857" y="2171700"/>
+            <a:off x="7527477" y="2171700"/>
             <a:ext cx="1316601" cy="457200"/>
           </a:xfrm>
           <a:prstGeom prst="rect">
@@ -11296,7 +11296,7 @@
       </p:sp>
       <p:pic>
         <p:nvPicPr>
-          <p:cNvPr id="11" name="Picture 10" descr="aaaf2b9082714bc7.png"/>
+          <p:cNvPr id="11" name="Picture 10" descr="4a611148313ce00a.png"/>
           <p:cNvPicPr>
             <a:picLocks noChangeAspect="1"/>
           </p:cNvPicPr>
@@ -11310,8 +11310,8 @@
         </p:blipFill>
         <p:spPr>
           <a:xfrm>
-            <a:off x="8699299" y="2232660"/>
-            <a:ext cx="1389888" cy="335280"/>
+            <a:off x="8706919" y="2232660"/>
+            <a:ext cx="1353312" cy="335280"/>
           </a:xfrm>
           <a:prstGeom prst="rect">
             <a:avLst/>
@@ -11326,7 +11326,7 @@
         </p:nvSpPr>
         <p:spPr>
           <a:xfrm>
-            <a:off x="10089187" y="2171700"/>
+            <a:off x="10060231" y="2171700"/>
             <a:ext cx="473333" cy="457200"/>
           </a:xfrm>
           <a:prstGeom prst="rect">
@@ -11624,7 +11624,7 @@
         </p:nvSpPr>
         <p:spPr>
           <a:xfrm>
-            <a:off x="1733110" y="2080260"/>
+            <a:off x="1765114" y="2080260"/>
             <a:ext cx="4488298" cy="457200"/>
           </a:xfrm>
           <a:prstGeom prst="rect">
@@ -11653,7 +11653,7 @@
       </p:sp>
       <p:pic>
         <p:nvPicPr>
-          <p:cNvPr id="9" name="Picture 8" descr="6927284ac777f284.png"/>
+          <p:cNvPr id="9" name="Picture 8" descr="1771eb862b537585.png"/>
           <p:cNvPicPr>
             <a:picLocks noChangeAspect="1"/>
           </p:cNvPicPr>
@@ -11667,8 +11667,8 @@
         </p:blipFill>
         <p:spPr>
           <a:xfrm>
-            <a:off x="6084249" y="2138171"/>
-            <a:ext cx="1432560" cy="341376"/>
+            <a:off x="6116253" y="2138171"/>
+            <a:ext cx="1411224" cy="341376"/>
           </a:xfrm>
           <a:prstGeom prst="rect">
             <a:avLst/>
@@ -11683,7 +11683,7 @@
         </p:nvSpPr>
         <p:spPr>
           <a:xfrm>
-            <a:off x="7516809" y="2080260"/>
+            <a:off x="7527477" y="2080260"/>
             <a:ext cx="1316601" cy="457200"/>
           </a:xfrm>
           <a:prstGeom prst="rect">
@@ -11712,7 +11712,7 @@
       </p:sp>
       <p:pic>
         <p:nvPicPr>
-          <p:cNvPr id="11" name="Picture 10" descr="0e66f4ec969ea39a.png"/>
+          <p:cNvPr id="11" name="Picture 10" descr="ee586f35845cd385.png"/>
           <p:cNvPicPr>
             <a:picLocks noChangeAspect="1"/>
           </p:cNvPicPr>
@@ -11726,8 +11726,8 @@
         </p:blipFill>
         <p:spPr>
           <a:xfrm>
-            <a:off x="8696251" y="2139696"/>
-            <a:ext cx="1395984" cy="338328"/>
+            <a:off x="8706919" y="2141219"/>
+            <a:ext cx="1353312" cy="335280"/>
           </a:xfrm>
           <a:prstGeom prst="rect">
             <a:avLst/>
@@ -11742,7 +11742,7 @@
         </p:nvSpPr>
         <p:spPr>
           <a:xfrm>
-            <a:off x="10092235" y="2080260"/>
+            <a:off x="10060231" y="2080260"/>
             <a:ext cx="473333" cy="457200"/>
           </a:xfrm>
           <a:prstGeom prst="rect">
@@ -11777,7 +11777,7 @@
         </p:nvSpPr>
         <p:spPr>
           <a:xfrm>
-            <a:off x="3611220" y="2839212"/>
+            <a:off x="3609696" y="2839212"/>
             <a:ext cx="3415280" cy="457200"/>
           </a:xfrm>
           <a:prstGeom prst="rect">
@@ -11806,7 +11806,7 @@
       </p:sp>
       <p:pic>
         <p:nvPicPr>
-          <p:cNvPr id="14" name="Picture 13" descr="024eebcb36c872bc.png"/>
+          <p:cNvPr id="14" name="Picture 13" descr="828e2ca31e32a7ca.png"/>
           <p:cNvPicPr>
             <a:picLocks noChangeAspect="1"/>
           </p:cNvPicPr>
@@ -11820,8 +11820,8 @@
         </p:blipFill>
         <p:spPr>
           <a:xfrm>
-            <a:off x="6889340" y="2961132"/>
-            <a:ext cx="1520952" cy="213360"/>
+            <a:off x="6887816" y="2961132"/>
+            <a:ext cx="1484376" cy="213360"/>
           </a:xfrm>
           <a:prstGeom prst="rect">
             <a:avLst/>
@@ -11836,7 +11836,7 @@
         </p:nvSpPr>
         <p:spPr>
           <a:xfrm>
-            <a:off x="3611220" y="3342132"/>
+            <a:off x="3609696" y="3342132"/>
             <a:ext cx="3183431" cy="457200"/>
           </a:xfrm>
           <a:prstGeom prst="rect">
@@ -11865,7 +11865,7 @@
       </p:sp>
       <p:pic>
         <p:nvPicPr>
-          <p:cNvPr id="16" name="Picture 15" descr="b4e1be01d60942dd.png"/>
+          <p:cNvPr id="16" name="Picture 15" descr="e0ebbf9fd4a7131d.png"/>
           <p:cNvPicPr>
             <a:picLocks noChangeAspect="1"/>
           </p:cNvPicPr>
@@ -11879,7 +11879,7 @@
         </p:blipFill>
         <p:spPr>
           <a:xfrm>
-            <a:off x="6657491" y="3439667"/>
+            <a:off x="6655967" y="3439667"/>
             <a:ext cx="1895856" cy="262128"/>
           </a:xfrm>
           <a:prstGeom prst="rect">
@@ -11889,7 +11889,7 @@
       </p:pic>
       <p:pic>
         <p:nvPicPr>
-          <p:cNvPr id="17" name="Picture 16" descr="41bbac836a9b2537.png"/>
+          <p:cNvPr id="17" name="Picture 16" descr="1f2c0dea7d4e84a1.png"/>
           <p:cNvPicPr>
             <a:picLocks noChangeAspect="1"/>
           </p:cNvPicPr>
@@ -11903,8 +11903,8 @@
         </p:blipFill>
         <p:spPr>
           <a:xfrm>
-            <a:off x="3666084" y="3942588"/>
-            <a:ext cx="1685544" cy="262128"/>
+            <a:off x="3664560" y="3918203"/>
+            <a:ext cx="2103120" cy="310896"/>
           </a:xfrm>
           <a:prstGeom prst="rect">
             <a:avLst/>
@@ -11941,7 +11941,7 @@
                 </a:solidFill>
                 <a:latin typeface="Lexend"/>
               </a:rPr>
-              <a:t>Answer:   400</a:t>
+              <a:t>Answer:   50,000</a:t>
             </a:r>
           </a:p>
         </p:txBody>
@@ -13538,8 +13538,8 @@
         </p:nvSpPr>
         <p:spPr>
           <a:xfrm>
-            <a:off x="2944476" y="2171700"/>
-            <a:ext cx="4937908" cy="457200"/>
+            <a:off x="2844538" y="2171700"/>
+            <a:ext cx="5137785" cy="457200"/>
           </a:xfrm>
           <a:prstGeom prst="rect">
             <a:avLst/>
@@ -13560,14 +13560,14 @@
                 </a:solidFill>
                 <a:latin typeface="Lexend"/>
               </a:rPr>
-              <a:t>Marcus writes  2,000,000  as  </a:t>
+              <a:t>Marcus writes  70,000,000  as  </a:t>
             </a:r>
           </a:p>
         </p:txBody>
       </p:sp>
       <p:pic>
         <p:nvPicPr>
-          <p:cNvPr id="9" name="Picture 8" descr="1e6b101793739ffd.png"/>
+          <p:cNvPr id="9" name="Picture 8" descr="53cf5421affa4776.png"/>
           <p:cNvPicPr>
             <a:picLocks noChangeAspect="1"/>
           </p:cNvPicPr>
@@ -13581,8 +13581,8 @@
         </p:blipFill>
         <p:spPr>
           <a:xfrm>
-            <a:off x="7745225" y="2232660"/>
-            <a:ext cx="1322832" cy="335280"/>
+            <a:off x="7845163" y="2231136"/>
+            <a:ext cx="1322832" cy="338328"/>
           </a:xfrm>
           <a:prstGeom prst="rect">
             <a:avLst/>
@@ -13597,7 +13597,7 @@
         </p:nvSpPr>
         <p:spPr>
           <a:xfrm>
-            <a:off x="9068057" y="2171700"/>
+            <a:off x="9167995" y="2171700"/>
             <a:ext cx="286146" cy="457200"/>
           </a:xfrm>
           <a:prstGeom prst="rect">
@@ -13654,7 +13654,7 @@
                 </a:solidFill>
                 <a:latin typeface="Lexend"/>
               </a:rPr>
-              <a:t>Is his expression equal to 2,000,000? Is it scientific notation? Explain.</a:t>
+              <a:t>Is his expression equal to 70,000,000? Is it scientific notation? Explain.</a:t>
             </a:r>
           </a:p>
         </p:txBody>
@@ -13930,8 +13930,8 @@
         </p:nvSpPr>
         <p:spPr>
           <a:xfrm>
-            <a:off x="2942952" y="2080260"/>
-            <a:ext cx="4937908" cy="457200"/>
+            <a:off x="2844538" y="2080260"/>
+            <a:ext cx="5137785" cy="457200"/>
           </a:xfrm>
           <a:prstGeom prst="rect">
             <a:avLst/>
@@ -13952,14 +13952,14 @@
                 </a:solidFill>
                 <a:latin typeface="Lexend"/>
               </a:rPr>
-              <a:t>Marcus writes  2,000,000  as  </a:t>
+              <a:t>Marcus writes  70,000,000  as  </a:t>
             </a:r>
           </a:p>
         </p:txBody>
       </p:sp>
       <p:pic>
         <p:nvPicPr>
-          <p:cNvPr id="9" name="Picture 8" descr="24bd3819b8f5cef7.png"/>
+          <p:cNvPr id="9" name="Picture 8" descr="9e4c84b90592d37b.png"/>
           <p:cNvPicPr>
             <a:picLocks noChangeAspect="1"/>
           </p:cNvPicPr>
@@ -13973,8 +13973,8 @@
         </p:blipFill>
         <p:spPr>
           <a:xfrm>
-            <a:off x="7743701" y="2141219"/>
-            <a:ext cx="1325880" cy="335280"/>
+            <a:off x="7845163" y="2138171"/>
+            <a:ext cx="1322832" cy="341376"/>
           </a:xfrm>
           <a:prstGeom prst="rect">
             <a:avLst/>
@@ -13989,7 +13989,7 @@
         </p:nvSpPr>
         <p:spPr>
           <a:xfrm>
-            <a:off x="9069581" y="2080260"/>
+            <a:off x="9167995" y="2080260"/>
             <a:ext cx="286146" cy="457200"/>
           </a:xfrm>
           <a:prstGeom prst="rect">
@@ -14046,14 +14046,14 @@
                 </a:solidFill>
                 <a:latin typeface="Lexend"/>
               </a:rPr>
-              <a:t>Is his expression equal to 2,000,000? Is it scientific notation? Explain.</a:t>
+              <a:t>Is his expression equal to 70,000,000? Is it scientific notation? Explain.</a:t>
             </a:r>
           </a:p>
         </p:txBody>
       </p:sp>
       <p:pic>
         <p:nvPicPr>
-          <p:cNvPr id="12" name="Picture 11" descr="304621095a2a006e.png"/>
+          <p:cNvPr id="12" name="Picture 11" descr="d769b2a64e8c7309.png"/>
           <p:cNvPicPr>
             <a:picLocks noChangeAspect="1"/>
           </p:cNvPicPr>
@@ -14067,8 +14067,8 @@
         </p:blipFill>
         <p:spPr>
           <a:xfrm>
-            <a:off x="1442864" y="3433572"/>
-            <a:ext cx="2697480" cy="310896"/>
+            <a:off x="1443813" y="3430524"/>
+            <a:ext cx="2868168" cy="316992"/>
           </a:xfrm>
           <a:prstGeom prst="rect">
             <a:avLst/>
@@ -14083,7 +14083,7 @@
         </p:nvSpPr>
         <p:spPr>
           <a:xfrm>
-            <a:off x="4140344" y="3360420"/>
+            <a:off x="4311981" y="3360420"/>
             <a:ext cx="2526651" cy="457200"/>
           </a:xfrm>
           <a:prstGeom prst="rect">
@@ -14118,8 +14118,8 @@
         </p:nvSpPr>
         <p:spPr>
           <a:xfrm>
-            <a:off x="1388000" y="3863339"/>
-            <a:ext cx="9522679" cy="457200"/>
+            <a:off x="1388949" y="3863339"/>
+            <a:ext cx="9520781" cy="457200"/>
           </a:xfrm>
           <a:prstGeom prst="rect">
             <a:avLst/>
@@ -14140,14 +14140,14 @@
                 </a:solidFill>
                 <a:latin typeface="Lexend"/>
               </a:rPr>
-              <a:t>The first number must be at least 1 and less than 10. 20 is not.</a:t>
+              <a:t>The first number must be at least 1 and less than 10. 70 is not.</a:t>
             </a:r>
           </a:p>
         </p:txBody>
       </p:sp>
       <p:pic>
         <p:nvPicPr>
-          <p:cNvPr id="15" name="Picture 14" descr="5e939c5ec66d9141.png"/>
+          <p:cNvPr id="15" name="Picture 14" descr="db40a7b92f09ece4.png"/>
           <p:cNvPicPr>
             <a:picLocks noChangeAspect="1"/>
           </p:cNvPicPr>
@@ -14161,8 +14161,8 @@
         </p:blipFill>
         <p:spPr>
           <a:xfrm>
-            <a:off x="1442864" y="4436364"/>
-            <a:ext cx="2514600" cy="316992"/>
+            <a:off x="1443813" y="4439412"/>
+            <a:ext cx="2685288" cy="310896"/>
           </a:xfrm>
           <a:prstGeom prst="rect">
             <a:avLst/>
@@ -14199,7 +14199,7 @@
                 </a:solidFill>
                 <a:latin typeface="Lexend"/>
               </a:rPr>
-              <a:t>Answer:   Equal, yes. Scientific notation, no: 20 is not less than 10. 2 × 10</a:t>
+              <a:t>Answer:   Equal, yes. Scientific notation, no: 70 is not less than 10. 7 × 10</a:t>
             </a:r>
             <a:r>
               <a:rPr sz="3040" b="1" i="0" baseline="30000">
@@ -14208,7 +14208,7 @@
                 </a:solidFill>
                 <a:latin typeface="Lexend"/>
               </a:rPr>
-              <a:t>6</a:t>
+              <a:t>7</a:t>
             </a:r>
             <a:r>
               <a:rPr sz="3040" b="1" i="0">
@@ -15139,7 +15139,7 @@
         <p:spPr>
           <a:xfrm>
             <a:off x="1554480" y="4466844"/>
-            <a:ext cx="9667903" cy="457200"/>
+            <a:ext cx="9688185" cy="457200"/>
           </a:xfrm>
           <a:prstGeom prst="rect">
             <a:avLst/>
@@ -15160,7 +15160,7 @@
                 </a:solidFill>
                 <a:latin typeface="Lexend"/>
               </a:rPr>
-              <a:t>A computer displays a number as  2.6E7.  Write it in standard form.</a:t>
+              <a:t>A computer displays a number as  7.4E8.  Write it in standard form.</a:t>
             </a:r>
           </a:p>
         </p:txBody>
